--- a/公共交通オープンデータチャレンジ2026/紹介スライド.pptx
+++ b/公共交通オープンデータチャレンジ2026/紹介スライド.pptx
@@ -17,6 +17,8 @@
     <p:sldId id="265" r:id="rId17"/>
     <p:sldId id="266" r:id="rId18"/>
     <p:sldId id="267" r:id="rId19"/>
+    <p:sldId id="268" r:id="rId20"/>
+    <p:sldId id="269" r:id="rId21"/>
   </p:sldIdLst>
   <p:sldSz cx="12191695" cy="6858000" type="screen4x3"/>
   <p:notesSz cx="6858000" cy="9144000"/>
@@ -583,7 +585,7 @@
           <a:lstStyle/>
           <a:p>
             <a:r>
-              <a:t>宿と出国便は地震の前に設定します。設定はURLに入るので、宿や旅行会社が客に設定つきリンクを配れます。4言語に対応し、圏外でも最後の判定を表示します。</a:t>
+              <a:t>8月23日の茨城県南部の地震を、実データで再現しました。山手線は1時間44分から5時間35分。実際にJR東日本は、発生4時間15分後でも再開見込みを出していませんでした。推定の幅と整合しています。</a:t>
             </a:r>
           </a:p>
         </p:txBody>
@@ -653,7 +655,7 @@
           <a:lstStyle/>
           <a:p>
             <a:r>
-              <a:t>技術面では、依存ゼロ、ビルドなし、サーバなしの静的サイトです。地震直後の輻輳でも落ちにくい作りです。596路線への震度の割り当てはブラウザ内で162ミリ秒。14通りのシナリオで確認済みで、審査中もいつでも判定が見えます。</a:t>
+              <a:t>宿と出国便は地震の前に設定します。設定はURLに入るので、宿や旅行会社が客に設定つきリンクを配れます。4言語に対応し、圏外でも最後の判定を表示します。</a:t>
             </a:r>
           </a:p>
         </p:txBody>
@@ -723,6 +725,146 @@
           <a:lstStyle/>
           <a:p>
             <a:r>
+              <a:t>技術面では、依存ゼロ、ビルドなし、サーバなしの静的サイトです。地震直後の輻輳でも落ちにくい作りです。596路線への震度の割り当てはブラウザ内で162ミリ秒。14通りのシナリオで確認済みで、審査中もいつでも判定が見えます。</a:t>
+            </a:r>
+          </a:p>
+        </p:txBody>
+      </p:sp>
+      <p:sp>
+        <p:nvSpPr>
+          <p:cNvPr id="4" name="Slide Number Placeholder 3"/>
+          <p:cNvSpPr>
+            <a:spLocks noGrp="1"/>
+          </p:cNvSpPr>
+          <p:nvPr>
+            <p:ph type="sldNum" idx="5" sz="quarter"/>
+          </p:nvPr>
+        </p:nvSpPr>
+        <p:spPr/>
+      </p:sp>
+    </p:spTree>
+  </p:cSld>
+  <p:clrMapOvr>
+    <a:masterClrMapping/>
+  </p:clrMapOvr>
+</p:notes>
+</file>
+
+<file path=ppt/notesSlides/notesSlide13.xml><?xml version="1.0" encoding="utf-8"?>
+<p:notes xmlns:a="http://schemas.openxmlformats.org/drawingml/2006/main" xmlns:p="http://schemas.openxmlformats.org/presentationml/2006/main" xmlns:r="http://schemas.openxmlformats.org/officeDocument/2006/relationships">
+  <p:cSld>
+    <p:spTree>
+      <p:nvGrpSpPr>
+        <p:cNvPr id="1" name=""/>
+        <p:cNvGrpSpPr/>
+        <p:nvPr/>
+      </p:nvGrpSpPr>
+      <p:grpSpPr>
+        <a:xfrm>
+          <a:off x="0" y="0"/>
+          <a:ext cx="0" cy="0"/>
+          <a:chOff x="0" y="0"/>
+          <a:chExt cx="0" cy="0"/>
+        </a:xfrm>
+      </p:grpSpPr>
+      <p:sp>
+        <p:nvSpPr>
+          <p:cNvPr id="2" name="Slide Image Placeholder 1"/>
+          <p:cNvSpPr>
+            <a:spLocks noGrp="1"/>
+          </p:cNvSpPr>
+          <p:nvPr>
+            <p:ph type="sldImg" idx="2"/>
+          </p:nvPr>
+        </p:nvSpPr>
+        <p:spPr/>
+      </p:sp>
+      <p:sp>
+        <p:nvSpPr>
+          <p:cNvPr id="3" name="Notes Placeholder 2"/>
+          <p:cNvSpPr>
+            <a:spLocks noGrp="1"/>
+          </p:cNvSpPr>
+          <p:nvPr>
+            <p:ph type="body" idx="3" sz="quarter"/>
+          </p:nvPr>
+        </p:nvSpPr>
+        <p:spPr/>
+        <p:txBody>
+          <a:bodyPr/>
+          <a:lstStyle/>
+          <a:p>
+            <a:r>
+              <a:t>限界も正直に書きます。推定は推定であり、一時滞在施設は東京都のみ、避難場所がいま開いているかは取れません。その上で、外すなら安全側に外れるように作ってあります。速報段階では判定せず、推定の期限が切れたらそう言い、事業者が平常と言えば推定を捨てる。運行情報の文面は現在形の事実だけを読みます。</a:t>
+            </a:r>
+          </a:p>
+        </p:txBody>
+      </p:sp>
+      <p:sp>
+        <p:nvSpPr>
+          <p:cNvPr id="4" name="Slide Number Placeholder 3"/>
+          <p:cNvSpPr>
+            <a:spLocks noGrp="1"/>
+          </p:cNvSpPr>
+          <p:nvPr>
+            <p:ph type="sldNum" idx="5" sz="quarter"/>
+          </p:nvPr>
+        </p:nvSpPr>
+        <p:spPr/>
+      </p:sp>
+    </p:spTree>
+  </p:cSld>
+  <p:clrMapOvr>
+    <a:masterClrMapping/>
+  </p:clrMapOvr>
+</p:notes>
+</file>
+
+<file path=ppt/notesSlides/notesSlide14.xml><?xml version="1.0" encoding="utf-8"?>
+<p:notes xmlns:a="http://schemas.openxmlformats.org/drawingml/2006/main" xmlns:p="http://schemas.openxmlformats.org/presentationml/2006/main" xmlns:r="http://schemas.openxmlformats.org/officeDocument/2006/relationships">
+  <p:cSld>
+    <p:spTree>
+      <p:nvGrpSpPr>
+        <p:cNvPr id="1" name=""/>
+        <p:cNvGrpSpPr/>
+        <p:nvPr/>
+      </p:nvGrpSpPr>
+      <p:grpSpPr>
+        <a:xfrm>
+          <a:off x="0" y="0"/>
+          <a:ext cx="0" cy="0"/>
+          <a:chOff x="0" y="0"/>
+          <a:chExt cx="0" cy="0"/>
+        </a:xfrm>
+      </p:grpSpPr>
+      <p:sp>
+        <p:nvSpPr>
+          <p:cNvPr id="2" name="Slide Image Placeholder 1"/>
+          <p:cNvSpPr>
+            <a:spLocks noGrp="1"/>
+          </p:cNvSpPr>
+          <p:nvPr>
+            <p:ph type="sldImg" idx="2"/>
+          </p:nvPr>
+        </p:nvSpPr>
+        <p:spPr/>
+      </p:sp>
+      <p:sp>
+        <p:nvSpPr>
+          <p:cNvPr id="3" name="Notes Placeholder 2"/>
+          <p:cNvSpPr>
+            <a:spLocks noGrp="1"/>
+          </p:cNvSpPr>
+          <p:nvPr>
+            <p:ph type="body" idx="3" sz="quarter"/>
+          </p:nvPr>
+        </p:nvSpPr>
+        <p:spPr/>
+        <p:txBody>
+          <a:bodyPr/>
+          <a:lstStyle/>
+          <a:p>
+            <a:r>
               <a:t>「あとどれくらい」を出しているのは、ここだけです。待つか、今夜の寝場所を確保するかを、いま決められる。Move or Wait、動くか待つか。ありがとうございました。</a:t>
             </a:r>
           </a:p>
@@ -1143,7 +1285,7 @@
           <a:lstStyle/>
           <a:p>
             <a:r>
-              <a:t>仕組みです。気象庁の震度を、国土数値情報の全国596路線に重ねます。公共交通オープンデータセンターの路線と駅のデータで、線路名称を旅客が知る運転系統に組み替えます。運転規制基準に基づく推定式で、路線ごとの再開までの幅を出します。運行情報で「平常」が出た系統は、推定を取り下げます。最後に、決断の形に翻訳します。</a:t>
+              <a:t>仕組みです。気象庁の震度を、国土数値情報の全国596路線に重ねます。公共交通オープンデータセンターの路線と駅のデータで、線路名称を旅客が知る運転系統に組み替えます。高浜・翠川の推定式で、路線ごとの再開までの幅を出します。運行情報で「平常」が出た系統は、推定を取り下げます。最後に、決断の形に翻訳します。</a:t>
             </a:r>
           </a:p>
         </p:txBody>
@@ -1213,7 +1355,7 @@
           <a:lstStyle/>
           <a:p>
             <a:r>
-              <a:t>公共交通オープンデータセンターのデータは、2つの役割で使っています。路線と駅のデータで運転系統の対応表を作ること。運行情報で推定を終わらせること。「止まっている」は他でも見られますが、「あとどれくらい」と「もう再開した」の両端を持つのはここだけです。</a:t>
+              <a:t>数字の根拠です。再開までの時間は、高浜・翠川による「地震時の鉄道運休時間の推定方法」、日本地震工学会論文集2011年の推定式から出しています。震度4なら注意運転点検で30分。震度5弱以上なら徒歩点検で、1キロあたり6分、プラスマイナス30分。震度6弱以上は被害が出る領域なので、時間を出しません。点検区間の長さは、震度5弱以上が当たった区間だけを数え、その誤差と式のばらつきを重ねたものが、画面の幅です。鉄道会社は気象庁の震度ではなく自前の地震計で判断するので、この数字はあくまで推定です。だから幅で出し、断定せず、運行情報で確定させます。</a:t>
             </a:r>
           </a:p>
         </p:txBody>
@@ -1283,7 +1425,7 @@
           <a:lstStyle/>
           <a:p>
             <a:r>
-              <a:t>8月23日の茨城県南部の地震を、実データで再現しました。山手線は1時間44分から5時間35分。実際にJR東日本は、発生4時間15分後でも再開見込みを出していませんでした。推定の幅と整合しています。</a:t>
+              <a:t>公共交通オープンデータセンターのデータは、2つの役割で使っています。路線と駅のデータで運転系統の対応表を作ること。運行情報で推定を終わらせること。「止まっている」は他でも見られますが、「あとどれくらい」と「もう再開した」の両端を持つのはここだけです。</a:t>
             </a:r>
           </a:p>
         </p:txBody>
@@ -4638,7 +4780,7 @@
                 </a:solidFill>
                 <a:latin typeface="Yu Gothic UI"/>
               </a:rPr>
-              <a:t>地震の前に済ませる</a:t>
+              <a:t>実際の地震で</a:t>
             </a:r>
           </a:p>
         </p:txBody>
@@ -4652,7 +4794,7 @@
         <p:spPr>
           <a:xfrm>
             <a:off x="731520" y="868680"/>
-            <a:ext cx="4206240" cy="1280160"/>
+            <a:ext cx="7498079" cy="1280160"/>
           </a:xfrm>
           <a:prstGeom prst="rect">
             <a:avLst/>
@@ -4671,29 +4813,13 @@
               </a:lnSpc>
             </a:pPr>
             <a:r>
-              <a:rPr sz="2600" b="1">
+              <a:rPr sz="3000" b="1">
                 <a:solidFill>
                   <a:srgbClr val="14181D"/>
                 </a:solidFill>
                 <a:latin typeface="Yu Gothic UI"/>
               </a:rPr>
-              <a:t>宿と出国便は事前に。</a:t>
-            </a:r>
-          </a:p>
-          <a:p>
-            <a:pPr algn="l">
-              <a:lnSpc>
-                <a:spcPct val="105000"/>
-              </a:lnSpc>
-            </a:pPr>
-            <a:r>
-              <a:rPr sz="2600" b="1">
-                <a:solidFill>
-                  <a:srgbClr val="14181D"/>
-                </a:solidFill>
-                <a:latin typeface="Yu Gothic UI"/>
-              </a:rPr>
-              <a:t>リンクで配れる。4 言語。</a:t>
+              <a:t>2026-08-23 茨城県南部 M5.9 を実データで</a:t>
             </a:r>
           </a:p>
         </p:txBody>
@@ -4706,8 +4832,8 @@
         </p:nvSpPr>
         <p:spPr>
           <a:xfrm>
-            <a:off x="731520" y="2286000"/>
-            <a:ext cx="4023360" cy="3931920"/>
+            <a:off x="731520" y="2011680"/>
+            <a:ext cx="2743200" cy="365760"/>
           </a:xfrm>
           <a:prstGeom prst="rect">
             <a:avLst/>
@@ -4726,167 +4852,105 @@
               </a:lnSpc>
             </a:pPr>
             <a:r>
-              <a:rPr sz="1700" b="1">
-                <a:solidFill>
-                  <a:srgbClr val="A4231C"/>
-                </a:solidFill>
-                <a:latin typeface="Yu Gothic UI"/>
-              </a:rPr>
-              <a:t>設定は URL に入る</a:t>
-            </a:r>
-          </a:p>
-          <a:p>
-            <a:pPr algn="l">
-              <a:lnSpc>
-                <a:spcPct val="115000"/>
-              </a:lnSpc>
-            </a:pPr>
-            <a:r>
-              <a:rPr sz="1200" b="0">
+              <a:rPr sz="1200" b="1">
                 <a:solidFill>
                   <a:srgbClr val="5C6670"/>
                 </a:solidFill>
                 <a:latin typeface="Yu Gothic UI"/>
               </a:rPr>
-              <a:t>?lang=en&amp;home=…&amp;flight=NRT&amp;dep=…</a:t>
-            </a:r>
-          </a:p>
-          <a:p>
-            <a:pPr algn="l">
-              <a:lnSpc>
-                <a:spcPct val="115000"/>
-              </a:lnSpc>
-              <a:spcBef>
-                <a:spcPts val="400"/>
-              </a:spcBef>
-            </a:pPr>
-            <a:r>
-              <a:rPr sz="1400" b="0">
-                <a:solidFill>
-                  <a:srgbClr val="14181D"/>
-                </a:solidFill>
-                <a:latin typeface="Yu Gothic UI"/>
-              </a:rPr>
-              <a:t>宿・旅行会社・空港が、客に設定つきリンクを配れる。地震のあとに設定させない。</a:t>
-            </a:r>
-          </a:p>
-          <a:p>
-            <a:pPr algn="l">
-              <a:lnSpc>
-                <a:spcPct val="115000"/>
-              </a:lnSpc>
-              <a:spcBef>
-                <a:spcPts val="1600"/>
-              </a:spcBef>
-            </a:pPr>
-            <a:r>
-              <a:rPr sz="1700" b="1">
-                <a:solidFill>
-                  <a:srgbClr val="A4231C"/>
-                </a:solidFill>
-                <a:latin typeface="Yu Gothic UI"/>
-              </a:rPr>
-              <a:t>駅名検索は英語でも日本語でも</a:t>
-            </a:r>
-          </a:p>
-          <a:p>
-            <a:pPr algn="l">
-              <a:lnSpc>
-                <a:spcPct val="115000"/>
-              </a:lnSpc>
-            </a:pPr>
-            <a:r>
-              <a:rPr sz="1400" b="0">
-                <a:solidFill>
-                  <a:srgbClr val="14181D"/>
-                </a:solidFill>
-                <a:latin typeface="Yu Gothic UI"/>
-              </a:rPr>
-              <a:t>ODPT の駅名 (英語) と N02 の全駅 (日本語)</a:t>
-            </a:r>
-          </a:p>
-          <a:p>
-            <a:pPr algn="l">
-              <a:lnSpc>
-                <a:spcPct val="115000"/>
-              </a:lnSpc>
-              <a:spcBef>
-                <a:spcPts val="1600"/>
-              </a:spcBef>
-            </a:pPr>
-            <a:r>
-              <a:rPr sz="1700" b="1">
-                <a:solidFill>
-                  <a:srgbClr val="A4231C"/>
-                </a:solidFill>
-                <a:latin typeface="Yu Gothic UI"/>
-              </a:rPr>
-              <a:t>日本語・英語・中文・한국어</a:t>
-            </a:r>
-          </a:p>
-          <a:p>
-            <a:pPr algn="l">
-              <a:lnSpc>
-                <a:spcPct val="115000"/>
-              </a:lnSpc>
-            </a:pPr>
-            <a:r>
-              <a:rPr sz="1400" b="0">
-                <a:solidFill>
-                  <a:srgbClr val="14181D"/>
-                </a:solidFill>
-                <a:latin typeface="Yu Gothic UI"/>
-              </a:rPr>
-              <a:t>震源名は気象庁の英語名。時刻は 24 時間表記に固定</a:t>
-            </a:r>
-          </a:p>
-          <a:p>
-            <a:pPr algn="l">
-              <a:lnSpc>
-                <a:spcPct val="115000"/>
-              </a:lnSpc>
-              <a:spcBef>
-                <a:spcPts val="1600"/>
-              </a:spcBef>
-            </a:pPr>
-            <a:r>
-              <a:rPr sz="1700" b="1">
-                <a:solidFill>
-                  <a:srgbClr val="A4231C"/>
-                </a:solidFill>
-                <a:latin typeface="Yu Gothic UI"/>
-              </a:rPr>
-              <a:t>圏外でも最後の判定を表示</a:t>
-            </a:r>
-          </a:p>
-          <a:p>
-            <a:pPr algn="l">
-              <a:lnSpc>
-                <a:spcPct val="115000"/>
-              </a:lnSpc>
-            </a:pPr>
-            <a:r>
-              <a:rPr sz="1400" b="0">
-                <a:solidFill>
-                  <a:srgbClr val="14181D"/>
-                </a:solidFill>
-                <a:latin typeface="Yu Gothic UI"/>
-              </a:rPr>
-              <a:t>Service Worker。地震直後の輻輳に備える</a:t>
-            </a:r>
-          </a:p>
-        </p:txBody>
-      </p:sp>
-      <p:sp>
-        <p:nvSpPr>
-          <p:cNvPr id="7" name="Rounded Rectangle 6"/>
+              <a:t>系統</a:t>
+            </a:r>
+          </a:p>
+        </p:txBody>
+      </p:sp>
+      <p:sp>
+        <p:nvSpPr>
+          <p:cNvPr id="7" name="TextBox 6"/>
+          <p:cNvSpPr txBox="1"/>
+          <p:nvPr/>
+        </p:nvSpPr>
+        <p:spPr>
+          <a:xfrm>
+            <a:off x="3474720" y="2011680"/>
+            <a:ext cx="1097280" cy="365760"/>
+          </a:xfrm>
+          <a:prstGeom prst="rect">
+            <a:avLst/>
+          </a:prstGeom>
+          <a:noFill/>
+        </p:spPr>
+        <p:txBody>
+          <a:bodyPr wrap="square" anchor="t" lIns="45720" rIns="45720" tIns="18288" bIns="18288">
+            <a:spAutoFit/>
+          </a:bodyPr>
+          <a:lstStyle/>
+          <a:p>
+            <a:pPr algn="l">
+              <a:lnSpc>
+                <a:spcPct val="115000"/>
+              </a:lnSpc>
+            </a:pPr>
+            <a:r>
+              <a:rPr sz="1200" b="1">
+                <a:solidFill>
+                  <a:srgbClr val="5C6670"/>
+                </a:solidFill>
+                <a:latin typeface="Yu Gothic UI"/>
+              </a:rPr>
+              <a:t>震度</a:t>
+            </a:r>
+          </a:p>
+        </p:txBody>
+      </p:sp>
+      <p:sp>
+        <p:nvSpPr>
+          <p:cNvPr id="8" name="TextBox 7"/>
+          <p:cNvSpPr txBox="1"/>
+          <p:nvPr/>
+        </p:nvSpPr>
+        <p:spPr>
+          <a:xfrm>
+            <a:off x="4572000" y="2011680"/>
+            <a:ext cx="3200400" cy="365760"/>
+          </a:xfrm>
+          <a:prstGeom prst="rect">
+            <a:avLst/>
+          </a:prstGeom>
+          <a:noFill/>
+        </p:spPr>
+        <p:txBody>
+          <a:bodyPr wrap="square" anchor="t" lIns="45720" rIns="45720" tIns="18288" bIns="18288">
+            <a:spAutoFit/>
+          </a:bodyPr>
+          <a:lstStyle/>
+          <a:p>
+            <a:pPr algn="l">
+              <a:lnSpc>
+                <a:spcPct val="115000"/>
+              </a:lnSpc>
+            </a:pPr>
+            <a:r>
+              <a:rPr sz="1200" b="1">
+                <a:solidFill>
+                  <a:srgbClr val="5C6670"/>
+                </a:solidFill>
+                <a:latin typeface="Yu Gothic UI"/>
+              </a:rPr>
+              <a:t>再開まで (推定)</a:t>
+            </a:r>
+          </a:p>
+        </p:txBody>
+      </p:sp>
+      <p:sp>
+        <p:nvSpPr>
+          <p:cNvPr id="9" name="Rounded Rectangle 8"/>
           <p:cNvSpPr/>
           <p:nvPr/>
         </p:nvSpPr>
         <p:spPr>
           <a:xfrm>
-            <a:off x="5047488" y="1024128"/>
-            <a:ext cx="2258958" cy="4718304"/>
+            <a:off x="731520" y="2377440"/>
+            <a:ext cx="7040880" cy="502920"/>
           </a:xfrm>
           <a:prstGeom prst="roundRect">
             <a:avLst>
@@ -4894,7 +4958,7 @@
             </a:avLst>
           </a:prstGeom>
           <a:solidFill>
-            <a:srgbClr val="14181D"/>
+            <a:srgbClr val="F4F5F7"/>
           </a:solidFill>
           <a:ln>
             <a:noFill/>
@@ -4923,40 +4987,133 @@
           </a:p>
         </p:txBody>
       </p:sp>
-      <p:pic>
-        <p:nvPicPr>
-          <p:cNvPr id="8" name="Picture 7" descr="06_settings_en.png"/>
-          <p:cNvPicPr>
-            <a:picLocks noChangeAspect="1"/>
-          </p:cNvPicPr>
-          <p:nvPr/>
-        </p:nvPicPr>
-        <p:blipFill>
-          <a:blip r:embed="rId2"/>
-          <a:stretch>
-            <a:fillRect/>
-          </a:stretch>
-        </p:blipFill>
-        <p:spPr>
-          <a:xfrm>
-            <a:off x="5120640" y="1097280"/>
-            <a:ext cx="2112654" cy="4572000"/>
-          </a:xfrm>
-          <a:prstGeom prst="rect">
-            <a:avLst/>
-          </a:prstGeom>
-        </p:spPr>
-      </p:pic>
-      <p:sp>
-        <p:nvSpPr>
-          <p:cNvPr id="9" name="Rounded Rectangle 8"/>
+      <p:sp>
+        <p:nvSpPr>
+          <p:cNvPr id="10" name="TextBox 9"/>
+          <p:cNvSpPr txBox="1"/>
+          <p:nvPr/>
+        </p:nvSpPr>
+        <p:spPr>
+          <a:xfrm>
+            <a:off x="868680" y="2423160"/>
+            <a:ext cx="2651760" cy="411480"/>
+          </a:xfrm>
+          <a:prstGeom prst="rect">
+            <a:avLst/>
+          </a:prstGeom>
+          <a:noFill/>
+        </p:spPr>
+        <p:txBody>
+          <a:bodyPr wrap="square" anchor="ctr" lIns="45720" rIns="45720" tIns="18288" bIns="18288">
+            <a:spAutoFit/>
+          </a:bodyPr>
+          <a:lstStyle/>
+          <a:p>
+            <a:pPr algn="l">
+              <a:lnSpc>
+                <a:spcPct val="115000"/>
+              </a:lnSpc>
+            </a:pPr>
+            <a:r>
+              <a:rPr sz="1500" b="1">
+                <a:solidFill>
+                  <a:srgbClr val="14181D"/>
+                </a:solidFill>
+                <a:latin typeface="Yu Gothic UI"/>
+              </a:rPr>
+              <a:t>山手線</a:t>
+            </a:r>
+          </a:p>
+        </p:txBody>
+      </p:sp>
+      <p:sp>
+        <p:nvSpPr>
+          <p:cNvPr id="11" name="TextBox 10"/>
+          <p:cNvSpPr txBox="1"/>
+          <p:nvPr/>
+        </p:nvSpPr>
+        <p:spPr>
+          <a:xfrm>
+            <a:off x="3474720" y="2423160"/>
+            <a:ext cx="1097280" cy="411480"/>
+          </a:xfrm>
+          <a:prstGeom prst="rect">
+            <a:avLst/>
+          </a:prstGeom>
+          <a:noFill/>
+        </p:spPr>
+        <p:txBody>
+          <a:bodyPr wrap="square" anchor="ctr" lIns="45720" rIns="45720" tIns="18288" bIns="18288">
+            <a:spAutoFit/>
+          </a:bodyPr>
+          <a:lstStyle/>
+          <a:p>
+            <a:pPr algn="l">
+              <a:lnSpc>
+                <a:spcPct val="115000"/>
+              </a:lnSpc>
+            </a:pPr>
+            <a:r>
+              <a:rPr sz="1500" b="0">
+                <a:solidFill>
+                  <a:srgbClr val="14181D"/>
+                </a:solidFill>
+                <a:latin typeface="Yu Gothic UI"/>
+              </a:rPr>
+              <a:t>5 弱</a:t>
+            </a:r>
+          </a:p>
+        </p:txBody>
+      </p:sp>
+      <p:sp>
+        <p:nvSpPr>
+          <p:cNvPr id="12" name="TextBox 11"/>
+          <p:cNvSpPr txBox="1"/>
+          <p:nvPr/>
+        </p:nvSpPr>
+        <p:spPr>
+          <a:xfrm>
+            <a:off x="4572000" y="2423160"/>
+            <a:ext cx="3200400" cy="411480"/>
+          </a:xfrm>
+          <a:prstGeom prst="rect">
+            <a:avLst/>
+          </a:prstGeom>
+          <a:noFill/>
+        </p:spPr>
+        <p:txBody>
+          <a:bodyPr wrap="square" anchor="ctr" lIns="45720" rIns="45720" tIns="18288" bIns="18288">
+            <a:spAutoFit/>
+          </a:bodyPr>
+          <a:lstStyle/>
+          <a:p>
+            <a:pPr algn="l">
+              <a:lnSpc>
+                <a:spcPct val="115000"/>
+              </a:lnSpc>
+            </a:pPr>
+            <a:r>
+              <a:rPr sz="1500" b="1">
+                <a:solidFill>
+                  <a:srgbClr val="A4231C"/>
+                </a:solidFill>
+                <a:latin typeface="Yu Gothic UI"/>
+              </a:rPr>
+              <a:t>1 時間 44 分 〜 5 時間 35 分</a:t>
+            </a:r>
+          </a:p>
+        </p:txBody>
+      </p:sp>
+      <p:sp>
+        <p:nvSpPr>
+          <p:cNvPr id="13" name="Rounded Rectangle 12"/>
           <p:cNvSpPr/>
           <p:nvPr/>
         </p:nvSpPr>
         <p:spPr>
           <a:xfrm>
-            <a:off x="7434462" y="1024128"/>
-            <a:ext cx="2258958" cy="4718304"/>
+            <a:off x="731520" y="2944368"/>
+            <a:ext cx="7040880" cy="502920"/>
           </a:xfrm>
           <a:prstGeom prst="roundRect">
             <a:avLst>
@@ -4964,7 +5121,7 @@
             </a:avLst>
           </a:prstGeom>
           <a:solidFill>
-            <a:srgbClr val="14181D"/>
+            <a:srgbClr val="F4F5F7"/>
           </a:solidFill>
           <a:ln>
             <a:noFill/>
@@ -4993,40 +5150,133 @@
           </a:p>
         </p:txBody>
       </p:sp>
-      <p:pic>
-        <p:nvPicPr>
-          <p:cNvPr id="10" name="Picture 9" descr="07_verdict_ja.png"/>
-          <p:cNvPicPr>
-            <a:picLocks noChangeAspect="1"/>
-          </p:cNvPicPr>
-          <p:nvPr/>
-        </p:nvPicPr>
-        <p:blipFill>
-          <a:blip r:embed="rId3"/>
-          <a:stretch>
-            <a:fillRect/>
-          </a:stretch>
-        </p:blipFill>
-        <p:spPr>
-          <a:xfrm>
-            <a:off x="7507614" y="1097280"/>
-            <a:ext cx="2112654" cy="4572000"/>
-          </a:xfrm>
-          <a:prstGeom prst="rect">
-            <a:avLst/>
-          </a:prstGeom>
-        </p:spPr>
-      </p:pic>
-      <p:sp>
-        <p:nvSpPr>
-          <p:cNvPr id="11" name="Rounded Rectangle 10"/>
+      <p:sp>
+        <p:nvSpPr>
+          <p:cNvPr id="14" name="TextBox 13"/>
+          <p:cNvSpPr txBox="1"/>
+          <p:nvPr/>
+        </p:nvSpPr>
+        <p:spPr>
+          <a:xfrm>
+            <a:off x="868680" y="2990088"/>
+            <a:ext cx="2651760" cy="411480"/>
+          </a:xfrm>
+          <a:prstGeom prst="rect">
+            <a:avLst/>
+          </a:prstGeom>
+          <a:noFill/>
+        </p:spPr>
+        <p:txBody>
+          <a:bodyPr wrap="square" anchor="ctr" lIns="45720" rIns="45720" tIns="18288" bIns="18288">
+            <a:spAutoFit/>
+          </a:bodyPr>
+          <a:lstStyle/>
+          <a:p>
+            <a:pPr algn="l">
+              <a:lnSpc>
+                <a:spcPct val="115000"/>
+              </a:lnSpc>
+            </a:pPr>
+            <a:r>
+              <a:rPr sz="1500" b="1">
+                <a:solidFill>
+                  <a:srgbClr val="14181D"/>
+                </a:solidFill>
+                <a:latin typeface="Yu Gothic UI"/>
+              </a:rPr>
+              <a:t>中央線快速</a:t>
+            </a:r>
+          </a:p>
+        </p:txBody>
+      </p:sp>
+      <p:sp>
+        <p:nvSpPr>
+          <p:cNvPr id="15" name="TextBox 14"/>
+          <p:cNvSpPr txBox="1"/>
+          <p:nvPr/>
+        </p:nvSpPr>
+        <p:spPr>
+          <a:xfrm>
+            <a:off x="3474720" y="2990088"/>
+            <a:ext cx="1097280" cy="411480"/>
+          </a:xfrm>
+          <a:prstGeom prst="rect">
+            <a:avLst/>
+          </a:prstGeom>
+          <a:noFill/>
+        </p:spPr>
+        <p:txBody>
+          <a:bodyPr wrap="square" anchor="ctr" lIns="45720" rIns="45720" tIns="18288" bIns="18288">
+            <a:spAutoFit/>
+          </a:bodyPr>
+          <a:lstStyle/>
+          <a:p>
+            <a:pPr algn="l">
+              <a:lnSpc>
+                <a:spcPct val="115000"/>
+              </a:lnSpc>
+            </a:pPr>
+            <a:r>
+              <a:rPr sz="1500" b="0">
+                <a:solidFill>
+                  <a:srgbClr val="14181D"/>
+                </a:solidFill>
+                <a:latin typeface="Yu Gothic UI"/>
+              </a:rPr>
+              <a:t>5 弱</a:t>
+            </a:r>
+          </a:p>
+        </p:txBody>
+      </p:sp>
+      <p:sp>
+        <p:nvSpPr>
+          <p:cNvPr id="16" name="TextBox 15"/>
+          <p:cNvSpPr txBox="1"/>
+          <p:nvPr/>
+        </p:nvSpPr>
+        <p:spPr>
+          <a:xfrm>
+            <a:off x="4572000" y="2990088"/>
+            <a:ext cx="3200400" cy="411480"/>
+          </a:xfrm>
+          <a:prstGeom prst="rect">
+            <a:avLst/>
+          </a:prstGeom>
+          <a:noFill/>
+        </p:spPr>
+        <p:txBody>
+          <a:bodyPr wrap="square" anchor="ctr" lIns="45720" rIns="45720" tIns="18288" bIns="18288">
+            <a:spAutoFit/>
+          </a:bodyPr>
+          <a:lstStyle/>
+          <a:p>
+            <a:pPr algn="l">
+              <a:lnSpc>
+                <a:spcPct val="115000"/>
+              </a:lnSpc>
+            </a:pPr>
+            <a:r>
+              <a:rPr sz="1500" b="1">
+                <a:solidFill>
+                  <a:srgbClr val="A4231C"/>
+                </a:solidFill>
+                <a:latin typeface="Yu Gothic UI"/>
+              </a:rPr>
+              <a:t>1 時間 13 分 〜 4 時間 23 分</a:t>
+            </a:r>
+          </a:p>
+        </p:txBody>
+      </p:sp>
+      <p:sp>
+        <p:nvSpPr>
+          <p:cNvPr id="17" name="Rounded Rectangle 16"/>
           <p:cNvSpPr/>
           <p:nvPr/>
         </p:nvSpPr>
         <p:spPr>
           <a:xfrm>
-            <a:off x="9821436" y="1024128"/>
-            <a:ext cx="2258958" cy="4718304"/>
+            <a:off x="731520" y="3511296"/>
+            <a:ext cx="7040880" cy="502920"/>
           </a:xfrm>
           <a:prstGeom prst="roundRect">
             <a:avLst>
@@ -5034,7 +5284,7 @@
             </a:avLst>
           </a:prstGeom>
           <a:solidFill>
-            <a:srgbClr val="14181D"/>
+            <a:srgbClr val="F4F5F7"/>
           </a:solidFill>
           <a:ln>
             <a:noFill/>
@@ -5063,24 +5313,424 @@
           </a:p>
         </p:txBody>
       </p:sp>
+      <p:sp>
+        <p:nvSpPr>
+          <p:cNvPr id="18" name="TextBox 17"/>
+          <p:cNvSpPr txBox="1"/>
+          <p:nvPr/>
+        </p:nvSpPr>
+        <p:spPr>
+          <a:xfrm>
+            <a:off x="868680" y="3557016"/>
+            <a:ext cx="2651760" cy="411480"/>
+          </a:xfrm>
+          <a:prstGeom prst="rect">
+            <a:avLst/>
+          </a:prstGeom>
+          <a:noFill/>
+        </p:spPr>
+        <p:txBody>
+          <a:bodyPr wrap="square" anchor="ctr" lIns="45720" rIns="45720" tIns="18288" bIns="18288">
+            <a:spAutoFit/>
+          </a:bodyPr>
+          <a:lstStyle/>
+          <a:p>
+            <a:pPr algn="l">
+              <a:lnSpc>
+                <a:spcPct val="115000"/>
+              </a:lnSpc>
+            </a:pPr>
+            <a:r>
+              <a:rPr sz="1500" b="1">
+                <a:solidFill>
+                  <a:srgbClr val="14181D"/>
+                </a:solidFill>
+                <a:latin typeface="Yu Gothic UI"/>
+              </a:rPr>
+              <a:t>京浜東北線・根岸線</a:t>
+            </a:r>
+          </a:p>
+        </p:txBody>
+      </p:sp>
+      <p:sp>
+        <p:nvSpPr>
+          <p:cNvPr id="19" name="TextBox 18"/>
+          <p:cNvSpPr txBox="1"/>
+          <p:nvPr/>
+        </p:nvSpPr>
+        <p:spPr>
+          <a:xfrm>
+            <a:off x="3474720" y="3557016"/>
+            <a:ext cx="1097280" cy="411480"/>
+          </a:xfrm>
+          <a:prstGeom prst="rect">
+            <a:avLst/>
+          </a:prstGeom>
+          <a:noFill/>
+        </p:spPr>
+        <p:txBody>
+          <a:bodyPr wrap="square" anchor="ctr" lIns="45720" rIns="45720" tIns="18288" bIns="18288">
+            <a:spAutoFit/>
+          </a:bodyPr>
+          <a:lstStyle/>
+          <a:p>
+            <a:pPr algn="l">
+              <a:lnSpc>
+                <a:spcPct val="115000"/>
+              </a:lnSpc>
+            </a:pPr>
+            <a:r>
+              <a:rPr sz="1500" b="0">
+                <a:solidFill>
+                  <a:srgbClr val="14181D"/>
+                </a:solidFill>
+                <a:latin typeface="Yu Gothic UI"/>
+              </a:rPr>
+              <a:t>5 弱</a:t>
+            </a:r>
+          </a:p>
+        </p:txBody>
+      </p:sp>
+      <p:sp>
+        <p:nvSpPr>
+          <p:cNvPr id="20" name="TextBox 19"/>
+          <p:cNvSpPr txBox="1"/>
+          <p:nvPr/>
+        </p:nvSpPr>
+        <p:spPr>
+          <a:xfrm>
+            <a:off x="4572000" y="3557016"/>
+            <a:ext cx="3200400" cy="411480"/>
+          </a:xfrm>
+          <a:prstGeom prst="rect">
+            <a:avLst/>
+          </a:prstGeom>
+          <a:noFill/>
+        </p:spPr>
+        <p:txBody>
+          <a:bodyPr wrap="square" anchor="ctr" lIns="45720" rIns="45720" tIns="18288" bIns="18288">
+            <a:spAutoFit/>
+          </a:bodyPr>
+          <a:lstStyle/>
+          <a:p>
+            <a:pPr algn="l">
+              <a:lnSpc>
+                <a:spcPct val="115000"/>
+              </a:lnSpc>
+            </a:pPr>
+            <a:r>
+              <a:rPr sz="1500" b="1">
+                <a:solidFill>
+                  <a:srgbClr val="A4231C"/>
+                </a:solidFill>
+                <a:latin typeface="Yu Gothic UI"/>
+              </a:rPr>
+              <a:t>3 時間 15 分 〜 9 時間 9 分</a:t>
+            </a:r>
+          </a:p>
+        </p:txBody>
+      </p:sp>
+      <p:sp>
+        <p:nvSpPr>
+          <p:cNvPr id="21" name="Rounded Rectangle 20"/>
+          <p:cNvSpPr/>
+          <p:nvPr/>
+        </p:nvSpPr>
+        <p:spPr>
+          <a:xfrm>
+            <a:off x="731520" y="4078224"/>
+            <a:ext cx="7040880" cy="502920"/>
+          </a:xfrm>
+          <a:prstGeom prst="roundRect">
+            <a:avLst>
+              <a:gd name="adj" fmla="val 6000"/>
+            </a:avLst>
+          </a:prstGeom>
+          <a:solidFill>
+            <a:srgbClr val="F4F5F7"/>
+          </a:solidFill>
+          <a:ln>
+            <a:noFill/>
+          </a:ln>
+          <a:effectLst/>
+        </p:spPr>
+        <p:style>
+          <a:lnRef idx="1">
+            <a:schemeClr val="accent1"/>
+          </a:lnRef>
+          <a:fillRef idx="3">
+            <a:schemeClr val="accent1"/>
+          </a:fillRef>
+          <a:effectRef idx="2">
+            <a:schemeClr val="accent1"/>
+          </a:effectRef>
+          <a:fontRef idx="minor">
+            <a:schemeClr val="lt1"/>
+          </a:fontRef>
+        </p:style>
+        <p:txBody>
+          <a:bodyPr rtlCol="0" anchor="ctr"/>
+          <a:lstStyle/>
+          <a:p>
+            <a:pPr algn="ctr"/>
+          </a:p>
+        </p:txBody>
+      </p:sp>
+      <p:sp>
+        <p:nvSpPr>
+          <p:cNvPr id="22" name="TextBox 21"/>
+          <p:cNvSpPr txBox="1"/>
+          <p:nvPr/>
+        </p:nvSpPr>
+        <p:spPr>
+          <a:xfrm>
+            <a:off x="868680" y="4123944"/>
+            <a:ext cx="2651760" cy="411480"/>
+          </a:xfrm>
+          <a:prstGeom prst="rect">
+            <a:avLst/>
+          </a:prstGeom>
+          <a:noFill/>
+        </p:spPr>
+        <p:txBody>
+          <a:bodyPr wrap="square" anchor="ctr" lIns="45720" rIns="45720" tIns="18288" bIns="18288">
+            <a:spAutoFit/>
+          </a:bodyPr>
+          <a:lstStyle/>
+          <a:p>
+            <a:pPr algn="l">
+              <a:lnSpc>
+                <a:spcPct val="115000"/>
+              </a:lnSpc>
+            </a:pPr>
+            <a:r>
+              <a:rPr sz="1500" b="1">
+                <a:solidFill>
+                  <a:srgbClr val="14181D"/>
+                </a:solidFill>
+                <a:latin typeface="Yu Gothic UI"/>
+              </a:rPr>
+              <a:t>京急空港線</a:t>
+            </a:r>
+          </a:p>
+        </p:txBody>
+      </p:sp>
+      <p:sp>
+        <p:nvSpPr>
+          <p:cNvPr id="23" name="TextBox 22"/>
+          <p:cNvSpPr txBox="1"/>
+          <p:nvPr/>
+        </p:nvSpPr>
+        <p:spPr>
+          <a:xfrm>
+            <a:off x="3474720" y="4123944"/>
+            <a:ext cx="1097280" cy="411480"/>
+          </a:xfrm>
+          <a:prstGeom prst="rect">
+            <a:avLst/>
+          </a:prstGeom>
+          <a:noFill/>
+        </p:spPr>
+        <p:txBody>
+          <a:bodyPr wrap="square" anchor="ctr" lIns="45720" rIns="45720" tIns="18288" bIns="18288">
+            <a:spAutoFit/>
+          </a:bodyPr>
+          <a:lstStyle/>
+          <a:p>
+            <a:pPr algn="l">
+              <a:lnSpc>
+                <a:spcPct val="115000"/>
+              </a:lnSpc>
+            </a:pPr>
+            <a:r>
+              <a:rPr sz="1500" b="0">
+                <a:solidFill>
+                  <a:srgbClr val="14181D"/>
+                </a:solidFill>
+                <a:latin typeface="Yu Gothic UI"/>
+              </a:rPr>
+              <a:t>5 弱</a:t>
+            </a:r>
+          </a:p>
+        </p:txBody>
+      </p:sp>
+      <p:sp>
+        <p:nvSpPr>
+          <p:cNvPr id="24" name="TextBox 23"/>
+          <p:cNvSpPr txBox="1"/>
+          <p:nvPr/>
+        </p:nvSpPr>
+        <p:spPr>
+          <a:xfrm>
+            <a:off x="4572000" y="4123944"/>
+            <a:ext cx="3200400" cy="411480"/>
+          </a:xfrm>
+          <a:prstGeom prst="rect">
+            <a:avLst/>
+          </a:prstGeom>
+          <a:noFill/>
+        </p:spPr>
+        <p:txBody>
+          <a:bodyPr wrap="square" anchor="ctr" lIns="45720" rIns="45720" tIns="18288" bIns="18288">
+            <a:spAutoFit/>
+          </a:bodyPr>
+          <a:lstStyle/>
+          <a:p>
+            <a:pPr algn="l">
+              <a:lnSpc>
+                <a:spcPct val="115000"/>
+              </a:lnSpc>
+            </a:pPr>
+            <a:r>
+              <a:rPr sz="1500" b="1">
+                <a:solidFill>
+                  <a:srgbClr val="A4231C"/>
+                </a:solidFill>
+                <a:latin typeface="Yu Gothic UI"/>
+              </a:rPr>
+              <a:t>35 分 〜 2 時間 1 分</a:t>
+            </a:r>
+          </a:p>
+        </p:txBody>
+      </p:sp>
+      <p:sp>
+        <p:nvSpPr>
+          <p:cNvPr id="25" name="TextBox 24"/>
+          <p:cNvSpPr txBox="1"/>
+          <p:nvPr/>
+        </p:nvSpPr>
+        <p:spPr>
+          <a:xfrm>
+            <a:off x="731520" y="4828032"/>
+            <a:ext cx="7040880" cy="1463040"/>
+          </a:xfrm>
+          <a:prstGeom prst="rect">
+            <a:avLst/>
+          </a:prstGeom>
+          <a:noFill/>
+        </p:spPr>
+        <p:txBody>
+          <a:bodyPr wrap="square" anchor="t" lIns="45720" rIns="45720" tIns="18288" bIns="18288">
+            <a:spAutoFit/>
+          </a:bodyPr>
+          <a:lstStyle/>
+          <a:p>
+            <a:pPr algn="l">
+              <a:lnSpc>
+                <a:spcPct val="115000"/>
+              </a:lnSpc>
+            </a:pPr>
+            <a:r>
+              <a:rPr sz="1500" b="1">
+                <a:solidFill>
+                  <a:srgbClr val="14181D"/>
+                </a:solidFill>
+                <a:latin typeface="Yu Gothic UI"/>
+              </a:rPr>
+              <a:t>実際: JR 東日本は始発から見合わせ、発生 4 時間 15 分後の 06:15 でも再開見込みなし。</a:t>
+            </a:r>
+          </a:p>
+          <a:p>
+            <a:pPr algn="l">
+              <a:lnSpc>
+                <a:spcPct val="115000"/>
+              </a:lnSpc>
+            </a:pPr>
+            <a:r>
+              <a:rPr sz="1500" b="0">
+                <a:solidFill>
+                  <a:srgbClr val="14181D"/>
+                </a:solidFill>
+                <a:latin typeface="Yu Gothic UI"/>
+              </a:rPr>
+              <a:t>推定の幅と整合する。</a:t>
+            </a:r>
+          </a:p>
+          <a:p>
+            <a:pPr algn="l">
+              <a:lnSpc>
+                <a:spcPct val="115000"/>
+              </a:lnSpc>
+              <a:spcBef>
+                <a:spcPts val="1000"/>
+              </a:spcBef>
+            </a:pPr>
+            <a:r>
+              <a:rPr sz="1300" b="0">
+                <a:solidFill>
+                  <a:srgbClr val="5C6670"/>
+                </a:solidFill>
+                <a:latin typeface="Yu Gothic UI"/>
+              </a:rPr>
+              <a:t>?event=&lt;id&gt; で過去の地震をいつでも再現できる。実地震ごとに幅と実再開時刻を記録し、式を校正していく。</a:t>
+            </a:r>
+          </a:p>
+        </p:txBody>
+      </p:sp>
+      <p:sp>
+        <p:nvSpPr>
+          <p:cNvPr id="26" name="Rounded Rectangle 25"/>
+          <p:cNvSpPr/>
+          <p:nvPr/>
+        </p:nvSpPr>
+        <p:spPr>
+          <a:xfrm>
+            <a:off x="8522208" y="338328"/>
+            <a:ext cx="2935007" cy="6181344"/>
+          </a:xfrm>
+          <a:prstGeom prst="roundRect">
+            <a:avLst>
+              <a:gd name="adj" fmla="val 6000"/>
+            </a:avLst>
+          </a:prstGeom>
+          <a:solidFill>
+            <a:srgbClr val="14181D"/>
+          </a:solidFill>
+          <a:ln>
+            <a:noFill/>
+          </a:ln>
+          <a:effectLst/>
+        </p:spPr>
+        <p:style>
+          <a:lnRef idx="1">
+            <a:schemeClr val="accent1"/>
+          </a:lnRef>
+          <a:fillRef idx="3">
+            <a:schemeClr val="accent1"/>
+          </a:fillRef>
+          <a:effectRef idx="2">
+            <a:schemeClr val="accent1"/>
+          </a:effectRef>
+          <a:fontRef idx="minor">
+            <a:schemeClr val="lt1"/>
+          </a:fontRef>
+        </p:style>
+        <p:txBody>
+          <a:bodyPr rtlCol="0" anchor="ctr"/>
+          <a:lstStyle/>
+          <a:p>
+            <a:pPr algn="ctr"/>
+          </a:p>
+        </p:txBody>
+      </p:sp>
       <p:pic>
         <p:nvPicPr>
-          <p:cNvPr id="12" name="Picture 11" descr="08_verdict_ko.png"/>
+          <p:cNvPr id="27" name="Picture 26" descr="09_real_event_ja.png"/>
           <p:cNvPicPr>
             <a:picLocks noChangeAspect="1"/>
           </p:cNvPicPr>
           <p:nvPr/>
         </p:nvPicPr>
         <p:blipFill>
-          <a:blip r:embed="rId4"/>
+          <a:blip r:embed="rId2"/>
           <a:stretch>
             <a:fillRect/>
           </a:stretch>
         </p:blipFill>
         <p:spPr>
           <a:xfrm>
-            <a:off x="9894588" y="1097280"/>
-            <a:ext cx="2112654" cy="4572000"/>
+            <a:off x="8595360" y="411480"/>
+            <a:ext cx="2788703" cy="6035040"/>
           </a:xfrm>
           <a:prstGeom prst="rect">
             <a:avLst/>
@@ -5217,7 +5867,7 @@
                 </a:solidFill>
                 <a:latin typeface="Yu Gothic UI"/>
               </a:rPr>
-              <a:t>技術</a:t>
+              <a:t>地震の前に済ませる</a:t>
             </a:r>
           </a:p>
         </p:txBody>
@@ -5231,7 +5881,7 @@
         <p:spPr>
           <a:xfrm>
             <a:off x="731520" y="868680"/>
-            <a:ext cx="10515600" cy="1280160"/>
+            <a:ext cx="4206240" cy="1280160"/>
           </a:xfrm>
           <a:prstGeom prst="rect">
             <a:avLst/>
@@ -5250,27 +5900,222 @@
               </a:lnSpc>
             </a:pPr>
             <a:r>
-              <a:rPr sz="3400" b="1">
+              <a:rPr sz="2600" b="1">
                 <a:solidFill>
                   <a:srgbClr val="14181D"/>
                 </a:solidFill>
                 <a:latin typeface="Yu Gothic UI"/>
               </a:rPr>
-              <a:t>依存ゼロ・ビルドなし・サーバなし。地震直後に落ちない作り</a:t>
-            </a:r>
-          </a:p>
-        </p:txBody>
-      </p:sp>
-      <p:sp>
-        <p:nvSpPr>
-          <p:cNvPr id="6" name="Rounded Rectangle 5"/>
+              <a:t>宿と出国便は事前に。</a:t>
+            </a:r>
+          </a:p>
+          <a:p>
+            <a:pPr algn="l">
+              <a:lnSpc>
+                <a:spcPct val="105000"/>
+              </a:lnSpc>
+            </a:pPr>
+            <a:r>
+              <a:rPr sz="2600" b="1">
+                <a:solidFill>
+                  <a:srgbClr val="14181D"/>
+                </a:solidFill>
+                <a:latin typeface="Yu Gothic UI"/>
+              </a:rPr>
+              <a:t>リンクで配れる。4 言語。</a:t>
+            </a:r>
+          </a:p>
+        </p:txBody>
+      </p:sp>
+      <p:sp>
+        <p:nvSpPr>
+          <p:cNvPr id="6" name="TextBox 5"/>
+          <p:cNvSpPr txBox="1"/>
+          <p:nvPr/>
+        </p:nvSpPr>
+        <p:spPr>
+          <a:xfrm>
+            <a:off x="731520" y="2286000"/>
+            <a:ext cx="4023360" cy="3931920"/>
+          </a:xfrm>
+          <a:prstGeom prst="rect">
+            <a:avLst/>
+          </a:prstGeom>
+          <a:noFill/>
+        </p:spPr>
+        <p:txBody>
+          <a:bodyPr wrap="square" anchor="t" lIns="45720" rIns="45720" tIns="18288" bIns="18288">
+            <a:spAutoFit/>
+          </a:bodyPr>
+          <a:lstStyle/>
+          <a:p>
+            <a:pPr algn="l">
+              <a:lnSpc>
+                <a:spcPct val="115000"/>
+              </a:lnSpc>
+            </a:pPr>
+            <a:r>
+              <a:rPr sz="1700" b="1">
+                <a:solidFill>
+                  <a:srgbClr val="A4231C"/>
+                </a:solidFill>
+                <a:latin typeface="Yu Gothic UI"/>
+              </a:rPr>
+              <a:t>設定は URL に入る</a:t>
+            </a:r>
+          </a:p>
+          <a:p>
+            <a:pPr algn="l">
+              <a:lnSpc>
+                <a:spcPct val="115000"/>
+              </a:lnSpc>
+            </a:pPr>
+            <a:r>
+              <a:rPr sz="1200" b="0">
+                <a:solidFill>
+                  <a:srgbClr val="5C6670"/>
+                </a:solidFill>
+                <a:latin typeface="Yu Gothic UI"/>
+              </a:rPr>
+              <a:t>?lang=en&amp;home=…&amp;flight=NRT&amp;dep=…</a:t>
+            </a:r>
+          </a:p>
+          <a:p>
+            <a:pPr algn="l">
+              <a:lnSpc>
+                <a:spcPct val="115000"/>
+              </a:lnSpc>
+              <a:spcBef>
+                <a:spcPts val="400"/>
+              </a:spcBef>
+            </a:pPr>
+            <a:r>
+              <a:rPr sz="1400" b="0">
+                <a:solidFill>
+                  <a:srgbClr val="14181D"/>
+                </a:solidFill>
+                <a:latin typeface="Yu Gothic UI"/>
+              </a:rPr>
+              <a:t>宿・旅行会社・空港が、客に設定つきリンクを配れる。地震のあとに設定させない。</a:t>
+            </a:r>
+          </a:p>
+          <a:p>
+            <a:pPr algn="l">
+              <a:lnSpc>
+                <a:spcPct val="115000"/>
+              </a:lnSpc>
+              <a:spcBef>
+                <a:spcPts val="1600"/>
+              </a:spcBef>
+            </a:pPr>
+            <a:r>
+              <a:rPr sz="1700" b="1">
+                <a:solidFill>
+                  <a:srgbClr val="A4231C"/>
+                </a:solidFill>
+                <a:latin typeface="Yu Gothic UI"/>
+              </a:rPr>
+              <a:t>駅名検索は英語でも日本語でも</a:t>
+            </a:r>
+          </a:p>
+          <a:p>
+            <a:pPr algn="l">
+              <a:lnSpc>
+                <a:spcPct val="115000"/>
+              </a:lnSpc>
+            </a:pPr>
+            <a:r>
+              <a:rPr sz="1400" b="0">
+                <a:solidFill>
+                  <a:srgbClr val="14181D"/>
+                </a:solidFill>
+                <a:latin typeface="Yu Gothic UI"/>
+              </a:rPr>
+              <a:t>ODPT の駅名 (英語) と N02 の全駅 (日本語)</a:t>
+            </a:r>
+          </a:p>
+          <a:p>
+            <a:pPr algn="l">
+              <a:lnSpc>
+                <a:spcPct val="115000"/>
+              </a:lnSpc>
+              <a:spcBef>
+                <a:spcPts val="1600"/>
+              </a:spcBef>
+            </a:pPr>
+            <a:r>
+              <a:rPr sz="1700" b="1">
+                <a:solidFill>
+                  <a:srgbClr val="A4231C"/>
+                </a:solidFill>
+                <a:latin typeface="Yu Gothic UI"/>
+              </a:rPr>
+              <a:t>日本語・英語・中文・한국어</a:t>
+            </a:r>
+          </a:p>
+          <a:p>
+            <a:pPr algn="l">
+              <a:lnSpc>
+                <a:spcPct val="115000"/>
+              </a:lnSpc>
+            </a:pPr>
+            <a:r>
+              <a:rPr sz="1400" b="0">
+                <a:solidFill>
+                  <a:srgbClr val="14181D"/>
+                </a:solidFill>
+                <a:latin typeface="Yu Gothic UI"/>
+              </a:rPr>
+              <a:t>震源名は気象庁の英語名。時刻は 24 時間表記に固定</a:t>
+            </a:r>
+          </a:p>
+          <a:p>
+            <a:pPr algn="l">
+              <a:lnSpc>
+                <a:spcPct val="115000"/>
+              </a:lnSpc>
+              <a:spcBef>
+                <a:spcPts val="1600"/>
+              </a:spcBef>
+            </a:pPr>
+            <a:r>
+              <a:rPr sz="1700" b="1">
+                <a:solidFill>
+                  <a:srgbClr val="A4231C"/>
+                </a:solidFill>
+                <a:latin typeface="Yu Gothic UI"/>
+              </a:rPr>
+              <a:t>圏外でも最後の判定を表示</a:t>
+            </a:r>
+          </a:p>
+          <a:p>
+            <a:pPr algn="l">
+              <a:lnSpc>
+                <a:spcPct val="115000"/>
+              </a:lnSpc>
+            </a:pPr>
+            <a:r>
+              <a:rPr sz="1400" b="0">
+                <a:solidFill>
+                  <a:srgbClr val="14181D"/>
+                </a:solidFill>
+                <a:latin typeface="Yu Gothic UI"/>
+              </a:rPr>
+              <a:t>Service Worker。地震直後の輻輳に備える</a:t>
+            </a:r>
+          </a:p>
+        </p:txBody>
+      </p:sp>
+      <p:sp>
+        <p:nvSpPr>
+          <p:cNvPr id="7" name="Rounded Rectangle 6"/>
           <p:cNvSpPr/>
           <p:nvPr/>
         </p:nvSpPr>
         <p:spPr>
           <a:xfrm>
-            <a:off x="731520" y="2011680"/>
-            <a:ext cx="5212080" cy="1234440"/>
+            <a:off x="5047488" y="1024128"/>
+            <a:ext cx="2258958" cy="4718304"/>
           </a:xfrm>
           <a:prstGeom prst="roundRect">
             <a:avLst>
@@ -5278,7 +6123,7 @@
             </a:avLst>
           </a:prstGeom>
           <a:solidFill>
-            <a:srgbClr val="F4F5F7"/>
+            <a:srgbClr val="14181D"/>
           </a:solidFill>
           <a:ln>
             <a:noFill/>
@@ -5307,84 +6152,30 @@
           </a:p>
         </p:txBody>
       </p:sp>
-      <p:sp>
-        <p:nvSpPr>
-          <p:cNvPr id="7" name="TextBox 6"/>
-          <p:cNvSpPr txBox="1"/>
-          <p:nvPr/>
-        </p:nvSpPr>
-        <p:spPr>
-          <a:xfrm>
-            <a:off x="960120" y="2103120"/>
-            <a:ext cx="1828800" cy="1005840"/>
-          </a:xfrm>
-          <a:prstGeom prst="rect">
-            <a:avLst/>
-          </a:prstGeom>
-          <a:noFill/>
-        </p:spPr>
-        <p:txBody>
-          <a:bodyPr wrap="square" anchor="ctr" lIns="45720" rIns="45720" tIns="18288" bIns="18288">
-            <a:spAutoFit/>
-          </a:bodyPr>
-          <a:lstStyle/>
-          <a:p>
-            <a:pPr algn="l">
-              <a:lnSpc>
-                <a:spcPct val="115000"/>
-              </a:lnSpc>
-            </a:pPr>
-            <a:r>
-              <a:rPr sz="3000" b="1">
-                <a:solidFill>
-                  <a:srgbClr val="A4231C"/>
-                </a:solidFill>
-                <a:latin typeface="Yu Gothic UI"/>
-              </a:rPr>
-              <a:t>162 ms</a:t>
-            </a:r>
-          </a:p>
-        </p:txBody>
-      </p:sp>
-      <p:sp>
-        <p:nvSpPr>
-          <p:cNvPr id="8" name="TextBox 7"/>
-          <p:cNvSpPr txBox="1"/>
-          <p:nvPr/>
-        </p:nvSpPr>
-        <p:spPr>
-          <a:xfrm>
-            <a:off x="2834640" y="2103120"/>
-            <a:ext cx="2926080" cy="1005840"/>
-          </a:xfrm>
-          <a:prstGeom prst="rect">
-            <a:avLst/>
-          </a:prstGeom>
-          <a:noFill/>
-        </p:spPr>
-        <p:txBody>
-          <a:bodyPr wrap="square" anchor="ctr" lIns="45720" rIns="45720" tIns="18288" bIns="18288">
-            <a:spAutoFit/>
-          </a:bodyPr>
-          <a:lstStyle/>
-          <a:p>
-            <a:pPr algn="l">
-              <a:lnSpc>
-                <a:spcPct val="115000"/>
-              </a:lnSpc>
-            </a:pPr>
-            <a:r>
-              <a:rPr sz="1300" b="0">
-                <a:solidFill>
-                  <a:srgbClr val="14181D"/>
-                </a:solidFill>
-                <a:latin typeface="Yu Gothic UI"/>
-              </a:rPr>
-              <a:t>全国 596 路線・27,343 標本点への震度割り当て (ブラウザ内)</a:t>
-            </a:r>
-          </a:p>
-        </p:txBody>
-      </p:sp>
+      <p:pic>
+        <p:nvPicPr>
+          <p:cNvPr id="8" name="Picture 7" descr="06_settings_en.png"/>
+          <p:cNvPicPr>
+            <a:picLocks noChangeAspect="1"/>
+          </p:cNvPicPr>
+          <p:nvPr/>
+        </p:nvPicPr>
+        <p:blipFill>
+          <a:blip r:embed="rId2"/>
+          <a:stretch>
+            <a:fillRect/>
+          </a:stretch>
+        </p:blipFill>
+        <p:spPr>
+          <a:xfrm>
+            <a:off x="5120640" y="1097280"/>
+            <a:ext cx="2112654" cy="4572000"/>
+          </a:xfrm>
+          <a:prstGeom prst="rect">
+            <a:avLst/>
+          </a:prstGeom>
+        </p:spPr>
+      </p:pic>
       <p:sp>
         <p:nvSpPr>
           <p:cNvPr id="9" name="Rounded Rectangle 8"/>
@@ -5393,8 +6184,8 @@
         </p:nvSpPr>
         <p:spPr>
           <a:xfrm>
-            <a:off x="6217920" y="2011680"/>
-            <a:ext cx="5212080" cy="1234440"/>
+            <a:off x="7434462" y="1024128"/>
+            <a:ext cx="2258958" cy="4718304"/>
           </a:xfrm>
           <a:prstGeom prst="roundRect">
             <a:avLst>
@@ -5402,7 +6193,7 @@
             </a:avLst>
           </a:prstGeom>
           <a:solidFill>
-            <a:srgbClr val="F4F5F7"/>
+            <a:srgbClr val="14181D"/>
           </a:solidFill>
           <a:ln>
             <a:noFill/>
@@ -5431,94 +6222,40 @@
           </a:p>
         </p:txBody>
       </p:sp>
-      <p:sp>
-        <p:nvSpPr>
-          <p:cNvPr id="10" name="TextBox 9"/>
-          <p:cNvSpPr txBox="1"/>
-          <p:nvPr/>
-        </p:nvSpPr>
-        <p:spPr>
-          <a:xfrm>
-            <a:off x="6446520" y="2103120"/>
-            <a:ext cx="1828800" cy="1005840"/>
-          </a:xfrm>
-          <a:prstGeom prst="rect">
-            <a:avLst/>
-          </a:prstGeom>
-          <a:noFill/>
-        </p:spPr>
-        <p:txBody>
-          <a:bodyPr wrap="square" anchor="ctr" lIns="45720" rIns="45720" tIns="18288" bIns="18288">
-            <a:spAutoFit/>
-          </a:bodyPr>
-          <a:lstStyle/>
-          <a:p>
-            <a:pPr algn="l">
-              <a:lnSpc>
-                <a:spcPct val="115000"/>
-              </a:lnSpc>
-            </a:pPr>
-            <a:r>
-              <a:rPr sz="3000" b="1">
-                <a:solidFill>
-                  <a:srgbClr val="A4231C"/>
-                </a:solidFill>
-                <a:latin typeface="Yu Gothic UI"/>
-              </a:rPr>
-              <a:t>0 件</a:t>
-            </a:r>
-          </a:p>
-        </p:txBody>
-      </p:sp>
-      <p:sp>
-        <p:nvSpPr>
-          <p:cNvPr id="11" name="TextBox 10"/>
-          <p:cNvSpPr txBox="1"/>
-          <p:nvPr/>
-        </p:nvSpPr>
-        <p:spPr>
-          <a:xfrm>
-            <a:off x="8321040" y="2103120"/>
-            <a:ext cx="2926080" cy="1005840"/>
-          </a:xfrm>
-          <a:prstGeom prst="rect">
-            <a:avLst/>
-          </a:prstGeom>
-          <a:noFill/>
-        </p:spPr>
-        <p:txBody>
-          <a:bodyPr wrap="square" anchor="ctr" lIns="45720" rIns="45720" tIns="18288" bIns="18288">
-            <a:spAutoFit/>
-          </a:bodyPr>
-          <a:lstStyle/>
-          <a:p>
-            <a:pPr algn="l">
-              <a:lnSpc>
-                <a:spcPct val="115000"/>
-              </a:lnSpc>
-            </a:pPr>
-            <a:r>
-              <a:rPr sz="1300" b="0">
-                <a:solidFill>
-                  <a:srgbClr val="14181D"/>
-                </a:solidFill>
-                <a:latin typeface="Yu Gothic UI"/>
-              </a:rPr>
-              <a:t>観測点の座標解決の欠落。199 地震・6,016 点</a:t>
-            </a:r>
-          </a:p>
-        </p:txBody>
-      </p:sp>
-      <p:sp>
-        <p:nvSpPr>
-          <p:cNvPr id="12" name="Rounded Rectangle 11"/>
+      <p:pic>
+        <p:nvPicPr>
+          <p:cNvPr id="10" name="Picture 9" descr="07_verdict_ja.png"/>
+          <p:cNvPicPr>
+            <a:picLocks noChangeAspect="1"/>
+          </p:cNvPicPr>
+          <p:nvPr/>
+        </p:nvPicPr>
+        <p:blipFill>
+          <a:blip r:embed="rId3"/>
+          <a:stretch>
+            <a:fillRect/>
+          </a:stretch>
+        </p:blipFill>
+        <p:spPr>
+          <a:xfrm>
+            <a:off x="7507614" y="1097280"/>
+            <a:ext cx="2112654" cy="4572000"/>
+          </a:xfrm>
+          <a:prstGeom prst="rect">
+            <a:avLst/>
+          </a:prstGeom>
+        </p:spPr>
+      </p:pic>
+      <p:sp>
+        <p:nvSpPr>
+          <p:cNvPr id="11" name="Rounded Rectangle 10"/>
           <p:cNvSpPr/>
           <p:nvPr/>
         </p:nvSpPr>
         <p:spPr>
           <a:xfrm>
-            <a:off x="731520" y="3429000"/>
-            <a:ext cx="5212080" cy="1234440"/>
+            <a:off x="9821436" y="1024128"/>
+            <a:ext cx="2258958" cy="4718304"/>
           </a:xfrm>
           <a:prstGeom prst="roundRect">
             <a:avLst>
@@ -5526,7 +6263,7 @@
             </a:avLst>
           </a:prstGeom>
           <a:solidFill>
-            <a:srgbClr val="F4F5F7"/>
+            <a:srgbClr val="14181D"/>
           </a:solidFill>
           <a:ln>
             <a:noFill/>
@@ -5555,266 +6292,30 @@
           </a:p>
         </p:txBody>
       </p:sp>
-      <p:sp>
-        <p:nvSpPr>
-          <p:cNvPr id="13" name="TextBox 12"/>
-          <p:cNvSpPr txBox="1"/>
-          <p:nvPr/>
-        </p:nvSpPr>
-        <p:spPr>
-          <a:xfrm>
-            <a:off x="960120" y="3520440"/>
-            <a:ext cx="1828800" cy="1005840"/>
-          </a:xfrm>
-          <a:prstGeom prst="rect">
-            <a:avLst/>
-          </a:prstGeom>
-          <a:noFill/>
-        </p:spPr>
-        <p:txBody>
-          <a:bodyPr wrap="square" anchor="ctr" lIns="45720" rIns="45720" tIns="18288" bIns="18288">
-            <a:spAutoFit/>
-          </a:bodyPr>
-          <a:lstStyle/>
-          <a:p>
-            <a:pPr algn="l">
-              <a:lnSpc>
-                <a:spcPct val="115000"/>
-              </a:lnSpc>
-            </a:pPr>
-            <a:r>
-              <a:rPr sz="3000" b="1">
-                <a:solidFill>
-                  <a:srgbClr val="A4231C"/>
-                </a:solidFill>
-                <a:latin typeface="Yu Gothic UI"/>
-              </a:rPr>
-              <a:t>98.2%</a:t>
-            </a:r>
-          </a:p>
-        </p:txBody>
-      </p:sp>
-      <p:sp>
-        <p:nvSpPr>
-          <p:cNvPr id="14" name="TextBox 13"/>
-          <p:cNvSpPr txBox="1"/>
-          <p:nvPr/>
-        </p:nvSpPr>
-        <p:spPr>
-          <a:xfrm>
-            <a:off x="2834640" y="3520440"/>
-            <a:ext cx="2926080" cy="1005840"/>
-          </a:xfrm>
-          <a:prstGeom prst="rect">
-            <a:avLst/>
-          </a:prstGeom>
-          <a:noFill/>
-        </p:spPr>
-        <p:txBody>
-          <a:bodyPr wrap="square" anchor="ctr" lIns="45720" rIns="45720" tIns="18288" bIns="18288">
-            <a:spAutoFit/>
-          </a:bodyPr>
-          <a:lstStyle/>
-          <a:p>
-            <a:pPr algn="l">
-              <a:lnSpc>
-                <a:spcPct val="115000"/>
-              </a:lnSpc>
-            </a:pPr>
-            <a:r>
-              <a:rPr sz="1300" b="0">
-                <a:solidFill>
-                  <a:srgbClr val="14181D"/>
-                </a:solidFill>
-                <a:latin typeface="Yu Gothic UI"/>
-              </a:rPr>
-              <a:t>運転系統の対応表の駅被覆。190/215 系統</a:t>
-            </a:r>
-          </a:p>
-        </p:txBody>
-      </p:sp>
-      <p:sp>
-        <p:nvSpPr>
-          <p:cNvPr id="15" name="Rounded Rectangle 14"/>
-          <p:cNvSpPr/>
-          <p:nvPr/>
-        </p:nvSpPr>
-        <p:spPr>
-          <a:xfrm>
-            <a:off x="6217920" y="3429000"/>
-            <a:ext cx="5212080" cy="1234440"/>
-          </a:xfrm>
-          <a:prstGeom prst="roundRect">
-            <a:avLst>
-              <a:gd name="adj" fmla="val 6000"/>
-            </a:avLst>
-          </a:prstGeom>
-          <a:solidFill>
-            <a:srgbClr val="F4F5F7"/>
-          </a:solidFill>
-          <a:ln>
-            <a:noFill/>
-          </a:ln>
-          <a:effectLst/>
-        </p:spPr>
-        <p:style>
-          <a:lnRef idx="1">
-            <a:schemeClr val="accent1"/>
-          </a:lnRef>
-          <a:fillRef idx="3">
-            <a:schemeClr val="accent1"/>
-          </a:fillRef>
-          <a:effectRef idx="2">
-            <a:schemeClr val="accent1"/>
-          </a:effectRef>
-          <a:fontRef idx="minor">
-            <a:schemeClr val="lt1"/>
-          </a:fontRef>
-        </p:style>
-        <p:txBody>
-          <a:bodyPr rtlCol="0" anchor="ctr"/>
-          <a:lstStyle/>
-          <a:p>
-            <a:pPr algn="ctr"/>
-          </a:p>
-        </p:txBody>
-      </p:sp>
-      <p:sp>
-        <p:nvSpPr>
-          <p:cNvPr id="16" name="TextBox 15"/>
-          <p:cNvSpPr txBox="1"/>
-          <p:nvPr/>
-        </p:nvSpPr>
-        <p:spPr>
-          <a:xfrm>
-            <a:off x="6446520" y="3520440"/>
-            <a:ext cx="1828800" cy="1005840"/>
-          </a:xfrm>
-          <a:prstGeom prst="rect">
-            <a:avLst/>
-          </a:prstGeom>
-          <a:noFill/>
-        </p:spPr>
-        <p:txBody>
-          <a:bodyPr wrap="square" anchor="ctr" lIns="45720" rIns="45720" tIns="18288" bIns="18288">
-            <a:spAutoFit/>
-          </a:bodyPr>
-          <a:lstStyle/>
-          <a:p>
-            <a:pPr algn="l">
-              <a:lnSpc>
-                <a:spcPct val="115000"/>
-              </a:lnSpc>
-            </a:pPr>
-            <a:r>
-              <a:rPr sz="3000" b="1">
-                <a:solidFill>
-                  <a:srgbClr val="A4231C"/>
-                </a:solidFill>
-                <a:latin typeface="Yu Gothic UI"/>
-              </a:rPr>
-              <a:t>14 通り</a:t>
-            </a:r>
-          </a:p>
-        </p:txBody>
-      </p:sp>
-      <p:sp>
-        <p:nvSpPr>
-          <p:cNvPr id="17" name="TextBox 16"/>
-          <p:cNvSpPr txBox="1"/>
-          <p:nvPr/>
-        </p:nvSpPr>
-        <p:spPr>
-          <a:xfrm>
-            <a:off x="8321040" y="3520440"/>
-            <a:ext cx="2926080" cy="1005840"/>
-          </a:xfrm>
-          <a:prstGeom prst="rect">
-            <a:avLst/>
-          </a:prstGeom>
-          <a:noFill/>
-        </p:spPr>
-        <p:txBody>
-          <a:bodyPr wrap="square" anchor="ctr" lIns="45720" rIns="45720" tIns="18288" bIns="18288">
-            <a:spAutoFit/>
-          </a:bodyPr>
-          <a:lstStyle/>
-          <a:p>
-            <a:pPr algn="l">
-              <a:lnSpc>
-                <a:spcPct val="115000"/>
-              </a:lnSpc>
-            </a:pPr>
-            <a:r>
-              <a:rPr sz="1300" b="0">
-                <a:solidFill>
-                  <a:srgbClr val="14181D"/>
-                </a:solidFill>
-                <a:latin typeface="Yu Gothic UI"/>
-              </a:rPr>
-              <a:t>速報・震度 4・5 弱・6 強・遠方・期限切れ・深夜・4 言語… のシナリオ確認</a:t>
-            </a:r>
-          </a:p>
-        </p:txBody>
-      </p:sp>
-      <p:sp>
-        <p:nvSpPr>
-          <p:cNvPr id="18" name="TextBox 17"/>
-          <p:cNvSpPr txBox="1"/>
-          <p:nvPr/>
-        </p:nvSpPr>
-        <p:spPr>
-          <a:xfrm>
-            <a:off x="731520" y="5029200"/>
-            <a:ext cx="10698480" cy="1188720"/>
-          </a:xfrm>
-          <a:prstGeom prst="rect">
-            <a:avLst/>
-          </a:prstGeom>
-          <a:noFill/>
-        </p:spPr>
-        <p:txBody>
-          <a:bodyPr wrap="square" anchor="t" lIns="45720" rIns="45720" tIns="18288" bIns="18288">
-            <a:spAutoFit/>
-          </a:bodyPr>
-          <a:lstStyle/>
-          <a:p>
-            <a:pPr algn="l">
-              <a:lnSpc>
-                <a:spcPct val="115000"/>
-              </a:lnSpc>
-            </a:pPr>
-            <a:r>
-              <a:rPr sz="1400" b="0">
-                <a:solidFill>
-                  <a:srgbClr val="14181D"/>
-                </a:solidFill>
-                <a:latin typeface="Yu Gothic UI"/>
-              </a:rPr>
-              <a:t>GitHub Pages の静的配信。ES modules + JSDoc、地図タイル描画も自前。地震・運行情報は常に網から、同梱データはキャッシュ優先。</a:t>
-            </a:r>
-          </a:p>
-          <a:p>
-            <a:pPr algn="l">
-              <a:lnSpc>
-                <a:spcPct val="115000"/>
-              </a:lnSpc>
-              <a:spcBef>
-                <a:spcPts val="600"/>
-              </a:spcBef>
-            </a:pPr>
-            <a:r>
-              <a:rPr sz="1400" b="0">
-                <a:solidFill>
-                  <a:srgbClr val="5C6670"/>
-                </a:solidFill>
-                <a:latin typeface="Yu Gothic UI"/>
-              </a:rPr>
-              <a:t>検証スクリプト同梱: verify:shindo / verify:rail / verify:systems / verify:regulation / verify:traininfo。?scenario= と ?event= で審査中もいつでも判定が見える。</a:t>
-            </a:r>
-          </a:p>
-        </p:txBody>
-      </p:sp>
+      <p:pic>
+        <p:nvPicPr>
+          <p:cNvPr id="12" name="Picture 11" descr="08_verdict_ko.png"/>
+          <p:cNvPicPr>
+            <a:picLocks noChangeAspect="1"/>
+          </p:cNvPicPr>
+          <p:nvPr/>
+        </p:nvPicPr>
+        <p:blipFill>
+          <a:blip r:embed="rId4"/>
+          <a:stretch>
+            <a:fillRect/>
+          </a:stretch>
+        </p:blipFill>
+        <p:spPr>
+          <a:xfrm>
+            <a:off x="9894588" y="1097280"/>
+            <a:ext cx="2112654" cy="4572000"/>
+          </a:xfrm>
+          <a:prstGeom prst="rect">
+            <a:avLst/>
+          </a:prstGeom>
+        </p:spPr>
+      </p:pic>
     </p:spTree>
   </p:cSld>
   <p:clrMapOvr>
@@ -5913,20 +6414,100 @@
       </p:sp>
       <p:sp>
         <p:nvSpPr>
-          <p:cNvPr id="4" name="Rectangle 3"/>
+          <p:cNvPr id="4" name="TextBox 3"/>
+          <p:cNvSpPr txBox="1"/>
+          <p:nvPr/>
+        </p:nvSpPr>
+        <p:spPr>
+          <a:xfrm>
+            <a:off x="731520" y="502920"/>
+            <a:ext cx="7315200" cy="365760"/>
+          </a:xfrm>
+          <a:prstGeom prst="rect">
+            <a:avLst/>
+          </a:prstGeom>
+          <a:noFill/>
+        </p:spPr>
+        <p:txBody>
+          <a:bodyPr wrap="square" anchor="t" lIns="45720" rIns="45720" tIns="18288" bIns="18288">
+            <a:spAutoFit/>
+          </a:bodyPr>
+          <a:lstStyle/>
+          <a:p>
+            <a:pPr algn="l">
+              <a:lnSpc>
+                <a:spcPct val="115000"/>
+              </a:lnSpc>
+            </a:pPr>
+            <a:r>
+              <a:rPr sz="1300" b="1">
+                <a:solidFill>
+                  <a:srgbClr val="A4231C"/>
+                </a:solidFill>
+                <a:latin typeface="Yu Gothic UI"/>
+              </a:rPr>
+              <a:t>技術</a:t>
+            </a:r>
+          </a:p>
+        </p:txBody>
+      </p:sp>
+      <p:sp>
+        <p:nvSpPr>
+          <p:cNvPr id="5" name="TextBox 4"/>
+          <p:cNvSpPr txBox="1"/>
+          <p:nvPr/>
+        </p:nvSpPr>
+        <p:spPr>
+          <a:xfrm>
+            <a:off x="731520" y="868680"/>
+            <a:ext cx="10515600" cy="1280160"/>
+          </a:xfrm>
+          <a:prstGeom prst="rect">
+            <a:avLst/>
+          </a:prstGeom>
+          <a:noFill/>
+        </p:spPr>
+        <p:txBody>
+          <a:bodyPr wrap="square" anchor="t" lIns="45720" rIns="45720" tIns="18288" bIns="18288">
+            <a:spAutoFit/>
+          </a:bodyPr>
+          <a:lstStyle/>
+          <a:p>
+            <a:pPr algn="l">
+              <a:lnSpc>
+                <a:spcPct val="105000"/>
+              </a:lnSpc>
+            </a:pPr>
+            <a:r>
+              <a:rPr sz="3400" b="1">
+                <a:solidFill>
+                  <a:srgbClr val="14181D"/>
+                </a:solidFill>
+                <a:latin typeface="Yu Gothic UI"/>
+              </a:rPr>
+              <a:t>依存ゼロ・ビルドなし・サーバなし。地震直後に落ちない作り</a:t>
+            </a:r>
+          </a:p>
+        </p:txBody>
+      </p:sp>
+      <p:sp>
+        <p:nvSpPr>
+          <p:cNvPr id="6" name="Rounded Rectangle 5"/>
           <p:cNvSpPr/>
           <p:nvPr/>
         </p:nvSpPr>
         <p:spPr>
           <a:xfrm>
-            <a:off x="0" y="0"/>
-            <a:ext cx="12191695" cy="6858000"/>
-          </a:xfrm>
-          <a:prstGeom prst="rect">
-            <a:avLst/>
+            <a:off x="731520" y="2011680"/>
+            <a:ext cx="5212080" cy="1234440"/>
+          </a:xfrm>
+          <a:prstGeom prst="roundRect">
+            <a:avLst>
+              <a:gd name="adj" fmla="val 6000"/>
+            </a:avLst>
           </a:prstGeom>
           <a:solidFill>
-            <a:srgbClr val="A4231C"/>
+            <a:srgbClr val="F4F5F7"/>
           </a:solidFill>
           <a:ln>
             <a:noFill/>
@@ -5957,6 +6538,1636 @@
       </p:sp>
       <p:sp>
         <p:nvSpPr>
+          <p:cNvPr id="7" name="TextBox 6"/>
+          <p:cNvSpPr txBox="1"/>
+          <p:nvPr/>
+        </p:nvSpPr>
+        <p:spPr>
+          <a:xfrm>
+            <a:off x="960120" y="2103120"/>
+            <a:ext cx="1828800" cy="1005840"/>
+          </a:xfrm>
+          <a:prstGeom prst="rect">
+            <a:avLst/>
+          </a:prstGeom>
+          <a:noFill/>
+        </p:spPr>
+        <p:txBody>
+          <a:bodyPr wrap="square" anchor="ctr" lIns="45720" rIns="45720" tIns="18288" bIns="18288">
+            <a:spAutoFit/>
+          </a:bodyPr>
+          <a:lstStyle/>
+          <a:p>
+            <a:pPr algn="l">
+              <a:lnSpc>
+                <a:spcPct val="115000"/>
+              </a:lnSpc>
+            </a:pPr>
+            <a:r>
+              <a:rPr sz="3000" b="1">
+                <a:solidFill>
+                  <a:srgbClr val="A4231C"/>
+                </a:solidFill>
+                <a:latin typeface="Yu Gothic UI"/>
+              </a:rPr>
+              <a:t>162 ms</a:t>
+            </a:r>
+          </a:p>
+        </p:txBody>
+      </p:sp>
+      <p:sp>
+        <p:nvSpPr>
+          <p:cNvPr id="8" name="TextBox 7"/>
+          <p:cNvSpPr txBox="1"/>
+          <p:nvPr/>
+        </p:nvSpPr>
+        <p:spPr>
+          <a:xfrm>
+            <a:off x="2834640" y="2103120"/>
+            <a:ext cx="2926080" cy="1005840"/>
+          </a:xfrm>
+          <a:prstGeom prst="rect">
+            <a:avLst/>
+          </a:prstGeom>
+          <a:noFill/>
+        </p:spPr>
+        <p:txBody>
+          <a:bodyPr wrap="square" anchor="ctr" lIns="45720" rIns="45720" tIns="18288" bIns="18288">
+            <a:spAutoFit/>
+          </a:bodyPr>
+          <a:lstStyle/>
+          <a:p>
+            <a:pPr algn="l">
+              <a:lnSpc>
+                <a:spcPct val="115000"/>
+              </a:lnSpc>
+            </a:pPr>
+            <a:r>
+              <a:rPr sz="1300" b="0">
+                <a:solidFill>
+                  <a:srgbClr val="14181D"/>
+                </a:solidFill>
+                <a:latin typeface="Yu Gothic UI"/>
+              </a:rPr>
+              <a:t>全国 596 路線・27,343 標本点への震度割り当て (ブラウザ内)</a:t>
+            </a:r>
+          </a:p>
+        </p:txBody>
+      </p:sp>
+      <p:sp>
+        <p:nvSpPr>
+          <p:cNvPr id="9" name="Rounded Rectangle 8"/>
+          <p:cNvSpPr/>
+          <p:nvPr/>
+        </p:nvSpPr>
+        <p:spPr>
+          <a:xfrm>
+            <a:off x="6217920" y="2011680"/>
+            <a:ext cx="5212080" cy="1234440"/>
+          </a:xfrm>
+          <a:prstGeom prst="roundRect">
+            <a:avLst>
+              <a:gd name="adj" fmla="val 6000"/>
+            </a:avLst>
+          </a:prstGeom>
+          <a:solidFill>
+            <a:srgbClr val="F4F5F7"/>
+          </a:solidFill>
+          <a:ln>
+            <a:noFill/>
+          </a:ln>
+          <a:effectLst/>
+        </p:spPr>
+        <p:style>
+          <a:lnRef idx="1">
+            <a:schemeClr val="accent1"/>
+          </a:lnRef>
+          <a:fillRef idx="3">
+            <a:schemeClr val="accent1"/>
+          </a:fillRef>
+          <a:effectRef idx="2">
+            <a:schemeClr val="accent1"/>
+          </a:effectRef>
+          <a:fontRef idx="minor">
+            <a:schemeClr val="lt1"/>
+          </a:fontRef>
+        </p:style>
+        <p:txBody>
+          <a:bodyPr rtlCol="0" anchor="ctr"/>
+          <a:lstStyle/>
+          <a:p>
+            <a:pPr algn="ctr"/>
+          </a:p>
+        </p:txBody>
+      </p:sp>
+      <p:sp>
+        <p:nvSpPr>
+          <p:cNvPr id="10" name="TextBox 9"/>
+          <p:cNvSpPr txBox="1"/>
+          <p:nvPr/>
+        </p:nvSpPr>
+        <p:spPr>
+          <a:xfrm>
+            <a:off x="6446520" y="2103120"/>
+            <a:ext cx="1828800" cy="1005840"/>
+          </a:xfrm>
+          <a:prstGeom prst="rect">
+            <a:avLst/>
+          </a:prstGeom>
+          <a:noFill/>
+        </p:spPr>
+        <p:txBody>
+          <a:bodyPr wrap="square" anchor="ctr" lIns="45720" rIns="45720" tIns="18288" bIns="18288">
+            <a:spAutoFit/>
+          </a:bodyPr>
+          <a:lstStyle/>
+          <a:p>
+            <a:pPr algn="l">
+              <a:lnSpc>
+                <a:spcPct val="115000"/>
+              </a:lnSpc>
+            </a:pPr>
+            <a:r>
+              <a:rPr sz="3000" b="1">
+                <a:solidFill>
+                  <a:srgbClr val="A4231C"/>
+                </a:solidFill>
+                <a:latin typeface="Yu Gothic UI"/>
+              </a:rPr>
+              <a:t>0 件</a:t>
+            </a:r>
+          </a:p>
+        </p:txBody>
+      </p:sp>
+      <p:sp>
+        <p:nvSpPr>
+          <p:cNvPr id="11" name="TextBox 10"/>
+          <p:cNvSpPr txBox="1"/>
+          <p:nvPr/>
+        </p:nvSpPr>
+        <p:spPr>
+          <a:xfrm>
+            <a:off x="8321040" y="2103120"/>
+            <a:ext cx="2926080" cy="1005840"/>
+          </a:xfrm>
+          <a:prstGeom prst="rect">
+            <a:avLst/>
+          </a:prstGeom>
+          <a:noFill/>
+        </p:spPr>
+        <p:txBody>
+          <a:bodyPr wrap="square" anchor="ctr" lIns="45720" rIns="45720" tIns="18288" bIns="18288">
+            <a:spAutoFit/>
+          </a:bodyPr>
+          <a:lstStyle/>
+          <a:p>
+            <a:pPr algn="l">
+              <a:lnSpc>
+                <a:spcPct val="115000"/>
+              </a:lnSpc>
+            </a:pPr>
+            <a:r>
+              <a:rPr sz="1300" b="0">
+                <a:solidFill>
+                  <a:srgbClr val="14181D"/>
+                </a:solidFill>
+                <a:latin typeface="Yu Gothic UI"/>
+              </a:rPr>
+              <a:t>観測点の座標解決の欠落。199 地震・6,016 点</a:t>
+            </a:r>
+          </a:p>
+        </p:txBody>
+      </p:sp>
+      <p:sp>
+        <p:nvSpPr>
+          <p:cNvPr id="12" name="Rounded Rectangle 11"/>
+          <p:cNvSpPr/>
+          <p:nvPr/>
+        </p:nvSpPr>
+        <p:spPr>
+          <a:xfrm>
+            <a:off x="731520" y="3429000"/>
+            <a:ext cx="5212080" cy="1234440"/>
+          </a:xfrm>
+          <a:prstGeom prst="roundRect">
+            <a:avLst>
+              <a:gd name="adj" fmla="val 6000"/>
+            </a:avLst>
+          </a:prstGeom>
+          <a:solidFill>
+            <a:srgbClr val="F4F5F7"/>
+          </a:solidFill>
+          <a:ln>
+            <a:noFill/>
+          </a:ln>
+          <a:effectLst/>
+        </p:spPr>
+        <p:style>
+          <a:lnRef idx="1">
+            <a:schemeClr val="accent1"/>
+          </a:lnRef>
+          <a:fillRef idx="3">
+            <a:schemeClr val="accent1"/>
+          </a:fillRef>
+          <a:effectRef idx="2">
+            <a:schemeClr val="accent1"/>
+          </a:effectRef>
+          <a:fontRef idx="minor">
+            <a:schemeClr val="lt1"/>
+          </a:fontRef>
+        </p:style>
+        <p:txBody>
+          <a:bodyPr rtlCol="0" anchor="ctr"/>
+          <a:lstStyle/>
+          <a:p>
+            <a:pPr algn="ctr"/>
+          </a:p>
+        </p:txBody>
+      </p:sp>
+      <p:sp>
+        <p:nvSpPr>
+          <p:cNvPr id="13" name="TextBox 12"/>
+          <p:cNvSpPr txBox="1"/>
+          <p:nvPr/>
+        </p:nvSpPr>
+        <p:spPr>
+          <a:xfrm>
+            <a:off x="960120" y="3520440"/>
+            <a:ext cx="1828800" cy="1005840"/>
+          </a:xfrm>
+          <a:prstGeom prst="rect">
+            <a:avLst/>
+          </a:prstGeom>
+          <a:noFill/>
+        </p:spPr>
+        <p:txBody>
+          <a:bodyPr wrap="square" anchor="ctr" lIns="45720" rIns="45720" tIns="18288" bIns="18288">
+            <a:spAutoFit/>
+          </a:bodyPr>
+          <a:lstStyle/>
+          <a:p>
+            <a:pPr algn="l">
+              <a:lnSpc>
+                <a:spcPct val="115000"/>
+              </a:lnSpc>
+            </a:pPr>
+            <a:r>
+              <a:rPr sz="3000" b="1">
+                <a:solidFill>
+                  <a:srgbClr val="A4231C"/>
+                </a:solidFill>
+                <a:latin typeface="Yu Gothic UI"/>
+              </a:rPr>
+              <a:t>98.2%</a:t>
+            </a:r>
+          </a:p>
+        </p:txBody>
+      </p:sp>
+      <p:sp>
+        <p:nvSpPr>
+          <p:cNvPr id="14" name="TextBox 13"/>
+          <p:cNvSpPr txBox="1"/>
+          <p:nvPr/>
+        </p:nvSpPr>
+        <p:spPr>
+          <a:xfrm>
+            <a:off x="2834640" y="3520440"/>
+            <a:ext cx="2926080" cy="1005840"/>
+          </a:xfrm>
+          <a:prstGeom prst="rect">
+            <a:avLst/>
+          </a:prstGeom>
+          <a:noFill/>
+        </p:spPr>
+        <p:txBody>
+          <a:bodyPr wrap="square" anchor="ctr" lIns="45720" rIns="45720" tIns="18288" bIns="18288">
+            <a:spAutoFit/>
+          </a:bodyPr>
+          <a:lstStyle/>
+          <a:p>
+            <a:pPr algn="l">
+              <a:lnSpc>
+                <a:spcPct val="115000"/>
+              </a:lnSpc>
+            </a:pPr>
+            <a:r>
+              <a:rPr sz="1300" b="0">
+                <a:solidFill>
+                  <a:srgbClr val="14181D"/>
+                </a:solidFill>
+                <a:latin typeface="Yu Gothic UI"/>
+              </a:rPr>
+              <a:t>運転系統の対応表の駅被覆。190/215 系統</a:t>
+            </a:r>
+          </a:p>
+        </p:txBody>
+      </p:sp>
+      <p:sp>
+        <p:nvSpPr>
+          <p:cNvPr id="15" name="Rounded Rectangle 14"/>
+          <p:cNvSpPr/>
+          <p:nvPr/>
+        </p:nvSpPr>
+        <p:spPr>
+          <a:xfrm>
+            <a:off x="6217920" y="3429000"/>
+            <a:ext cx="5212080" cy="1234440"/>
+          </a:xfrm>
+          <a:prstGeom prst="roundRect">
+            <a:avLst>
+              <a:gd name="adj" fmla="val 6000"/>
+            </a:avLst>
+          </a:prstGeom>
+          <a:solidFill>
+            <a:srgbClr val="F4F5F7"/>
+          </a:solidFill>
+          <a:ln>
+            <a:noFill/>
+          </a:ln>
+          <a:effectLst/>
+        </p:spPr>
+        <p:style>
+          <a:lnRef idx="1">
+            <a:schemeClr val="accent1"/>
+          </a:lnRef>
+          <a:fillRef idx="3">
+            <a:schemeClr val="accent1"/>
+          </a:fillRef>
+          <a:effectRef idx="2">
+            <a:schemeClr val="accent1"/>
+          </a:effectRef>
+          <a:fontRef idx="minor">
+            <a:schemeClr val="lt1"/>
+          </a:fontRef>
+        </p:style>
+        <p:txBody>
+          <a:bodyPr rtlCol="0" anchor="ctr"/>
+          <a:lstStyle/>
+          <a:p>
+            <a:pPr algn="ctr"/>
+          </a:p>
+        </p:txBody>
+      </p:sp>
+      <p:sp>
+        <p:nvSpPr>
+          <p:cNvPr id="16" name="TextBox 15"/>
+          <p:cNvSpPr txBox="1"/>
+          <p:nvPr/>
+        </p:nvSpPr>
+        <p:spPr>
+          <a:xfrm>
+            <a:off x="6446520" y="3520440"/>
+            <a:ext cx="1828800" cy="1005840"/>
+          </a:xfrm>
+          <a:prstGeom prst="rect">
+            <a:avLst/>
+          </a:prstGeom>
+          <a:noFill/>
+        </p:spPr>
+        <p:txBody>
+          <a:bodyPr wrap="square" anchor="ctr" lIns="45720" rIns="45720" tIns="18288" bIns="18288">
+            <a:spAutoFit/>
+          </a:bodyPr>
+          <a:lstStyle/>
+          <a:p>
+            <a:pPr algn="l">
+              <a:lnSpc>
+                <a:spcPct val="115000"/>
+              </a:lnSpc>
+            </a:pPr>
+            <a:r>
+              <a:rPr sz="3000" b="1">
+                <a:solidFill>
+                  <a:srgbClr val="A4231C"/>
+                </a:solidFill>
+                <a:latin typeface="Yu Gothic UI"/>
+              </a:rPr>
+              <a:t>14 通り</a:t>
+            </a:r>
+          </a:p>
+        </p:txBody>
+      </p:sp>
+      <p:sp>
+        <p:nvSpPr>
+          <p:cNvPr id="17" name="TextBox 16"/>
+          <p:cNvSpPr txBox="1"/>
+          <p:nvPr/>
+        </p:nvSpPr>
+        <p:spPr>
+          <a:xfrm>
+            <a:off x="8321040" y="3520440"/>
+            <a:ext cx="2926080" cy="1005840"/>
+          </a:xfrm>
+          <a:prstGeom prst="rect">
+            <a:avLst/>
+          </a:prstGeom>
+          <a:noFill/>
+        </p:spPr>
+        <p:txBody>
+          <a:bodyPr wrap="square" anchor="ctr" lIns="45720" rIns="45720" tIns="18288" bIns="18288">
+            <a:spAutoFit/>
+          </a:bodyPr>
+          <a:lstStyle/>
+          <a:p>
+            <a:pPr algn="l">
+              <a:lnSpc>
+                <a:spcPct val="115000"/>
+              </a:lnSpc>
+            </a:pPr>
+            <a:r>
+              <a:rPr sz="1300" b="0">
+                <a:solidFill>
+                  <a:srgbClr val="14181D"/>
+                </a:solidFill>
+                <a:latin typeface="Yu Gothic UI"/>
+              </a:rPr>
+              <a:t>速報・震度 4・5 弱・6 強・遠方・期限切れ・深夜・4 言語… のシナリオ確認</a:t>
+            </a:r>
+          </a:p>
+        </p:txBody>
+      </p:sp>
+      <p:sp>
+        <p:nvSpPr>
+          <p:cNvPr id="18" name="TextBox 17"/>
+          <p:cNvSpPr txBox="1"/>
+          <p:nvPr/>
+        </p:nvSpPr>
+        <p:spPr>
+          <a:xfrm>
+            <a:off x="731520" y="5029200"/>
+            <a:ext cx="10698480" cy="1188720"/>
+          </a:xfrm>
+          <a:prstGeom prst="rect">
+            <a:avLst/>
+          </a:prstGeom>
+          <a:noFill/>
+        </p:spPr>
+        <p:txBody>
+          <a:bodyPr wrap="square" anchor="t" lIns="45720" rIns="45720" tIns="18288" bIns="18288">
+            <a:spAutoFit/>
+          </a:bodyPr>
+          <a:lstStyle/>
+          <a:p>
+            <a:pPr algn="l">
+              <a:lnSpc>
+                <a:spcPct val="115000"/>
+              </a:lnSpc>
+            </a:pPr>
+            <a:r>
+              <a:rPr sz="1400" b="0">
+                <a:solidFill>
+                  <a:srgbClr val="14181D"/>
+                </a:solidFill>
+                <a:latin typeface="Yu Gothic UI"/>
+              </a:rPr>
+              <a:t>GitHub Pages の静的配信。ES modules + JSDoc、地図タイル描画も自前。地震・運行情報は常に網から、同梱データはキャッシュ優先。</a:t>
+            </a:r>
+          </a:p>
+          <a:p>
+            <a:pPr algn="l">
+              <a:lnSpc>
+                <a:spcPct val="115000"/>
+              </a:lnSpc>
+              <a:spcBef>
+                <a:spcPts val="600"/>
+              </a:spcBef>
+            </a:pPr>
+            <a:r>
+              <a:rPr sz="1400" b="0">
+                <a:solidFill>
+                  <a:srgbClr val="5C6670"/>
+                </a:solidFill>
+                <a:latin typeface="Yu Gothic UI"/>
+              </a:rPr>
+              <a:t>検証スクリプト同梱: verify:shindo / verify:rail / verify:systems / verify:regulation / verify:traininfo。?scenario= と ?event= で審査中もいつでも判定が見える。</a:t>
+            </a:r>
+          </a:p>
+        </p:txBody>
+      </p:sp>
+    </p:spTree>
+  </p:cSld>
+  <p:clrMapOvr>
+    <a:masterClrMapping/>
+  </p:clrMapOvr>
+</p:sld>
+</file>
+
+<file path=ppt/slides/slide13.xml><?xml version="1.0" encoding="utf-8"?>
+<p:sld xmlns:a="http://schemas.openxmlformats.org/drawingml/2006/main" xmlns:p="http://schemas.openxmlformats.org/presentationml/2006/main" xmlns:r="http://schemas.openxmlformats.org/officeDocument/2006/relationships">
+  <p:cSld>
+    <p:spTree>
+      <p:nvGrpSpPr>
+        <p:cNvPr id="1" name=""/>
+        <p:cNvGrpSpPr/>
+        <p:nvPr/>
+      </p:nvGrpSpPr>
+      <p:grpSpPr/>
+      <p:sp>
+        <p:nvSpPr>
+          <p:cNvPr id="2" name="TextBox 1"/>
+          <p:cNvSpPr txBox="1"/>
+          <p:nvPr/>
+        </p:nvSpPr>
+        <p:spPr>
+          <a:xfrm>
+            <a:off x="731520" y="6400800"/>
+            <a:ext cx="7315200" cy="274320"/>
+          </a:xfrm>
+          <a:prstGeom prst="rect">
+            <a:avLst/>
+          </a:prstGeom>
+          <a:noFill/>
+        </p:spPr>
+        <p:txBody>
+          <a:bodyPr wrap="square" anchor="t" lIns="45720" rIns="45720" tIns="18288" bIns="18288">
+            <a:spAutoFit/>
+          </a:bodyPr>
+          <a:lstStyle/>
+          <a:p>
+            <a:pPr algn="l">
+              <a:lnSpc>
+                <a:spcPct val="115000"/>
+              </a:lnSpc>
+            </a:pPr>
+            <a:r>
+              <a:rPr sz="1000" b="0">
+                <a:solidFill>
+                  <a:srgbClr val="5C6670"/>
+                </a:solidFill>
+                <a:latin typeface="Yu Gothic UI"/>
+              </a:rPr>
+              <a:t>Move or Wait — 動くか、待つか  ·  公共交通オープンデータチャレンジ2026</a:t>
+            </a:r>
+          </a:p>
+        </p:txBody>
+      </p:sp>
+      <p:sp>
+        <p:nvSpPr>
+          <p:cNvPr id="3" name="TextBox 2"/>
+          <p:cNvSpPr txBox="1"/>
+          <p:nvPr/>
+        </p:nvSpPr>
+        <p:spPr>
+          <a:xfrm>
+            <a:off x="10972800" y="6400800"/>
+            <a:ext cx="548640" cy="274320"/>
+          </a:xfrm>
+          <a:prstGeom prst="rect">
+            <a:avLst/>
+          </a:prstGeom>
+          <a:noFill/>
+        </p:spPr>
+        <p:txBody>
+          <a:bodyPr wrap="square" anchor="t" lIns="45720" rIns="45720" tIns="18288" bIns="18288">
+            <a:spAutoFit/>
+          </a:bodyPr>
+          <a:lstStyle/>
+          <a:p>
+            <a:pPr algn="r">
+              <a:lnSpc>
+                <a:spcPct val="115000"/>
+              </a:lnSpc>
+            </a:pPr>
+            <a:r>
+              <a:rPr sz="1000" b="0">
+                <a:solidFill>
+                  <a:srgbClr val="5C6670"/>
+                </a:solidFill>
+                <a:latin typeface="Yu Gothic UI"/>
+              </a:rPr>
+              <a:t>13</a:t>
+            </a:r>
+          </a:p>
+        </p:txBody>
+      </p:sp>
+      <p:sp>
+        <p:nvSpPr>
+          <p:cNvPr id="4" name="TextBox 3"/>
+          <p:cNvSpPr txBox="1"/>
+          <p:nvPr/>
+        </p:nvSpPr>
+        <p:spPr>
+          <a:xfrm>
+            <a:off x="731520" y="502920"/>
+            <a:ext cx="7315200" cy="365760"/>
+          </a:xfrm>
+          <a:prstGeom prst="rect">
+            <a:avLst/>
+          </a:prstGeom>
+          <a:noFill/>
+        </p:spPr>
+        <p:txBody>
+          <a:bodyPr wrap="square" anchor="t" lIns="45720" rIns="45720" tIns="18288" bIns="18288">
+            <a:spAutoFit/>
+          </a:bodyPr>
+          <a:lstStyle/>
+          <a:p>
+            <a:pPr algn="l">
+              <a:lnSpc>
+                <a:spcPct val="115000"/>
+              </a:lnSpc>
+            </a:pPr>
+            <a:r>
+              <a:rPr sz="1300" b="1">
+                <a:solidFill>
+                  <a:srgbClr val="A4231C"/>
+                </a:solidFill>
+                <a:latin typeface="Yu Gothic UI"/>
+              </a:rPr>
+              <a:t>正直な限界と、間違え方の設計</a:t>
+            </a:r>
+          </a:p>
+        </p:txBody>
+      </p:sp>
+      <p:sp>
+        <p:nvSpPr>
+          <p:cNvPr id="5" name="TextBox 4"/>
+          <p:cNvSpPr txBox="1"/>
+          <p:nvPr/>
+        </p:nvSpPr>
+        <p:spPr>
+          <a:xfrm>
+            <a:off x="731520" y="868680"/>
+            <a:ext cx="10515600" cy="1280160"/>
+          </a:xfrm>
+          <a:prstGeom prst="rect">
+            <a:avLst/>
+          </a:prstGeom>
+          <a:noFill/>
+        </p:spPr>
+        <p:txBody>
+          <a:bodyPr wrap="square" anchor="t" lIns="45720" rIns="45720" tIns="18288" bIns="18288">
+            <a:spAutoFit/>
+          </a:bodyPr>
+          <a:lstStyle/>
+          <a:p>
+            <a:pPr algn="l">
+              <a:lnSpc>
+                <a:spcPct val="105000"/>
+              </a:lnSpc>
+            </a:pPr>
+            <a:r>
+              <a:rPr sz="3400" b="1">
+                <a:solidFill>
+                  <a:srgbClr val="14181D"/>
+                </a:solidFill>
+                <a:latin typeface="Yu Gothic UI"/>
+              </a:rPr>
+              <a:t>外すなら、安全側に外れるように作ってある</a:t>
+            </a:r>
+          </a:p>
+        </p:txBody>
+      </p:sp>
+      <p:sp>
+        <p:nvSpPr>
+          <p:cNvPr id="6" name="Rounded Rectangle 5"/>
+          <p:cNvSpPr/>
+          <p:nvPr/>
+        </p:nvSpPr>
+        <p:spPr>
+          <a:xfrm>
+            <a:off x="731520" y="1920240"/>
+            <a:ext cx="5486400" cy="896112"/>
+          </a:xfrm>
+          <a:prstGeom prst="roundRect">
+            <a:avLst>
+              <a:gd name="adj" fmla="val 6000"/>
+            </a:avLst>
+          </a:prstGeom>
+          <a:solidFill>
+            <a:srgbClr val="F4F5F7"/>
+          </a:solidFill>
+          <a:ln>
+            <a:noFill/>
+          </a:ln>
+          <a:effectLst/>
+        </p:spPr>
+        <p:style>
+          <a:lnRef idx="1">
+            <a:schemeClr val="accent1"/>
+          </a:lnRef>
+          <a:fillRef idx="3">
+            <a:schemeClr val="accent1"/>
+          </a:fillRef>
+          <a:effectRef idx="2">
+            <a:schemeClr val="accent1"/>
+          </a:effectRef>
+          <a:fontRef idx="minor">
+            <a:schemeClr val="lt1"/>
+          </a:fontRef>
+        </p:style>
+        <p:txBody>
+          <a:bodyPr rtlCol="0" anchor="ctr"/>
+          <a:lstStyle/>
+          <a:p>
+            <a:pPr algn="ctr"/>
+          </a:p>
+        </p:txBody>
+      </p:sp>
+      <p:sp>
+        <p:nvSpPr>
+          <p:cNvPr id="7" name="TextBox 6"/>
+          <p:cNvSpPr txBox="1"/>
+          <p:nvPr/>
+        </p:nvSpPr>
+        <p:spPr>
+          <a:xfrm>
+            <a:off x="914400" y="1993392"/>
+            <a:ext cx="5120640" cy="777240"/>
+          </a:xfrm>
+          <a:prstGeom prst="rect">
+            <a:avLst/>
+          </a:prstGeom>
+          <a:noFill/>
+        </p:spPr>
+        <p:txBody>
+          <a:bodyPr wrap="square" anchor="t" lIns="45720" rIns="45720" tIns="18288" bIns="18288">
+            <a:spAutoFit/>
+          </a:bodyPr>
+          <a:lstStyle/>
+          <a:p>
+            <a:pPr algn="l">
+              <a:lnSpc>
+                <a:spcPct val="115000"/>
+              </a:lnSpc>
+            </a:pPr>
+            <a:r>
+              <a:rPr sz="1500" b="1">
+                <a:solidFill>
+                  <a:srgbClr val="14181D"/>
+                </a:solidFill>
+                <a:latin typeface="Yu Gothic UI"/>
+              </a:rPr>
+              <a:t>推定は推定</a:t>
+            </a:r>
+          </a:p>
+          <a:p>
+            <a:pPr algn="l">
+              <a:lnSpc>
+                <a:spcPct val="115000"/>
+              </a:lnSpc>
+            </a:pPr>
+            <a:r>
+              <a:rPr sz="1150" b="0">
+                <a:solidFill>
+                  <a:srgbClr val="5C6670"/>
+                </a:solidFill>
+                <a:latin typeface="Yu Gothic UI"/>
+              </a:rPr>
+              <a:t>既往研究の式であり、実際の再開は点検結果次第。だから幅で出し、運行情報で上書きする</a:t>
+            </a:r>
+          </a:p>
+        </p:txBody>
+      </p:sp>
+      <p:sp>
+        <p:nvSpPr>
+          <p:cNvPr id="8" name="Rounded Rectangle 7"/>
+          <p:cNvSpPr/>
+          <p:nvPr/>
+        </p:nvSpPr>
+        <p:spPr>
+          <a:xfrm>
+            <a:off x="731520" y="2944368"/>
+            <a:ext cx="5486400" cy="896112"/>
+          </a:xfrm>
+          <a:prstGeom prst="roundRect">
+            <a:avLst>
+              <a:gd name="adj" fmla="val 6000"/>
+            </a:avLst>
+          </a:prstGeom>
+          <a:solidFill>
+            <a:srgbClr val="F4F5F7"/>
+          </a:solidFill>
+          <a:ln>
+            <a:noFill/>
+          </a:ln>
+          <a:effectLst/>
+        </p:spPr>
+        <p:style>
+          <a:lnRef idx="1">
+            <a:schemeClr val="accent1"/>
+          </a:lnRef>
+          <a:fillRef idx="3">
+            <a:schemeClr val="accent1"/>
+          </a:fillRef>
+          <a:effectRef idx="2">
+            <a:schemeClr val="accent1"/>
+          </a:effectRef>
+          <a:fontRef idx="minor">
+            <a:schemeClr val="lt1"/>
+          </a:fontRef>
+        </p:style>
+        <p:txBody>
+          <a:bodyPr rtlCol="0" anchor="ctr"/>
+          <a:lstStyle/>
+          <a:p>
+            <a:pPr algn="ctr"/>
+          </a:p>
+        </p:txBody>
+      </p:sp>
+      <p:sp>
+        <p:nvSpPr>
+          <p:cNvPr id="9" name="TextBox 8"/>
+          <p:cNvSpPr txBox="1"/>
+          <p:nvPr/>
+        </p:nvSpPr>
+        <p:spPr>
+          <a:xfrm>
+            <a:off x="914400" y="3017520"/>
+            <a:ext cx="5120640" cy="777240"/>
+          </a:xfrm>
+          <a:prstGeom prst="rect">
+            <a:avLst/>
+          </a:prstGeom>
+          <a:noFill/>
+        </p:spPr>
+        <p:txBody>
+          <a:bodyPr wrap="square" anchor="t" lIns="45720" rIns="45720" tIns="18288" bIns="18288">
+            <a:spAutoFit/>
+          </a:bodyPr>
+          <a:lstStyle/>
+          <a:p>
+            <a:pPr algn="l">
+              <a:lnSpc>
+                <a:spcPct val="115000"/>
+              </a:lnSpc>
+            </a:pPr>
+            <a:r>
+              <a:rPr sz="1500" b="1">
+                <a:solidFill>
+                  <a:srgbClr val="14181D"/>
+                </a:solidFill>
+                <a:latin typeface="Yu Gothic UI"/>
+              </a:rPr>
+              <a:t>一時滞在施設は東京都のみ</a:t>
+            </a:r>
+          </a:p>
+          <a:p>
+            <a:pPr algn="l">
+              <a:lnSpc>
+                <a:spcPct val="115000"/>
+              </a:lnSpc>
+            </a:pPr>
+            <a:r>
+              <a:rPr sz="1150" b="0">
+                <a:solidFill>
+                  <a:srgbClr val="5C6670"/>
+                </a:solidFill>
+                <a:latin typeface="Yu Gothic UI"/>
+              </a:rPr>
+              <a:t>機械可読で公開している自治体が少ない。未収録の地域ではその旨を表示し、指定緊急避難場所は全国で出す</a:t>
+            </a:r>
+          </a:p>
+        </p:txBody>
+      </p:sp>
+      <p:sp>
+        <p:nvSpPr>
+          <p:cNvPr id="10" name="Rounded Rectangle 9"/>
+          <p:cNvSpPr/>
+          <p:nvPr/>
+        </p:nvSpPr>
+        <p:spPr>
+          <a:xfrm>
+            <a:off x="731520" y="3968496"/>
+            <a:ext cx="5486400" cy="896112"/>
+          </a:xfrm>
+          <a:prstGeom prst="roundRect">
+            <a:avLst>
+              <a:gd name="adj" fmla="val 6000"/>
+            </a:avLst>
+          </a:prstGeom>
+          <a:solidFill>
+            <a:srgbClr val="F4F5F7"/>
+          </a:solidFill>
+          <a:ln>
+            <a:noFill/>
+          </a:ln>
+          <a:effectLst/>
+        </p:spPr>
+        <p:style>
+          <a:lnRef idx="1">
+            <a:schemeClr val="accent1"/>
+          </a:lnRef>
+          <a:fillRef idx="3">
+            <a:schemeClr val="accent1"/>
+          </a:fillRef>
+          <a:effectRef idx="2">
+            <a:schemeClr val="accent1"/>
+          </a:effectRef>
+          <a:fontRef idx="minor">
+            <a:schemeClr val="lt1"/>
+          </a:fontRef>
+        </p:style>
+        <p:txBody>
+          <a:bodyPr rtlCol="0" anchor="ctr"/>
+          <a:lstStyle/>
+          <a:p>
+            <a:pPr algn="ctr"/>
+          </a:p>
+        </p:txBody>
+      </p:sp>
+      <p:sp>
+        <p:nvSpPr>
+          <p:cNvPr id="11" name="TextBox 10"/>
+          <p:cNvSpPr txBox="1"/>
+          <p:nvPr/>
+        </p:nvSpPr>
+        <p:spPr>
+          <a:xfrm>
+            <a:off x="914400" y="4041648"/>
+            <a:ext cx="5120640" cy="777240"/>
+          </a:xfrm>
+          <a:prstGeom prst="rect">
+            <a:avLst/>
+          </a:prstGeom>
+          <a:noFill/>
+        </p:spPr>
+        <p:txBody>
+          <a:bodyPr wrap="square" anchor="t" lIns="45720" rIns="45720" tIns="18288" bIns="18288">
+            <a:spAutoFit/>
+          </a:bodyPr>
+          <a:lstStyle/>
+          <a:p>
+            <a:pPr algn="l">
+              <a:lnSpc>
+                <a:spcPct val="115000"/>
+              </a:lnSpc>
+            </a:pPr>
+            <a:r>
+              <a:rPr sz="1500" b="1">
+                <a:solidFill>
+                  <a:srgbClr val="14181D"/>
+                </a:solidFill>
+                <a:latin typeface="Yu Gothic UI"/>
+              </a:rPr>
+              <a:t>避難場所が「いま開いているか」は取れない</a:t>
+            </a:r>
+          </a:p>
+          <a:p>
+            <a:pPr algn="l">
+              <a:lnSpc>
+                <a:spcPct val="115000"/>
+              </a:lnSpc>
+            </a:pPr>
+            <a:r>
+              <a:rPr sz="1150" b="0">
+                <a:solidFill>
+                  <a:srgbClr val="5C6670"/>
+                </a:solidFill>
+                <a:latin typeface="Yu Gothic UI"/>
+              </a:rPr>
+              <a:t>L-Alert は非公開。「まず安全な建物にいるなら動くな」を先に言う</a:t>
+            </a:r>
+          </a:p>
+        </p:txBody>
+      </p:sp>
+      <p:sp>
+        <p:nvSpPr>
+          <p:cNvPr id="12" name="Rounded Rectangle 11"/>
+          <p:cNvSpPr/>
+          <p:nvPr/>
+        </p:nvSpPr>
+        <p:spPr>
+          <a:xfrm>
+            <a:off x="731520" y="4992624"/>
+            <a:ext cx="5486400" cy="896112"/>
+          </a:xfrm>
+          <a:prstGeom prst="roundRect">
+            <a:avLst>
+              <a:gd name="adj" fmla="val 6000"/>
+            </a:avLst>
+          </a:prstGeom>
+          <a:solidFill>
+            <a:srgbClr val="F4F5F7"/>
+          </a:solidFill>
+          <a:ln>
+            <a:noFill/>
+          </a:ln>
+          <a:effectLst/>
+        </p:spPr>
+        <p:style>
+          <a:lnRef idx="1">
+            <a:schemeClr val="accent1"/>
+          </a:lnRef>
+          <a:fillRef idx="3">
+            <a:schemeClr val="accent1"/>
+          </a:fillRef>
+          <a:effectRef idx="2">
+            <a:schemeClr val="accent1"/>
+          </a:effectRef>
+          <a:fontRef idx="minor">
+            <a:schemeClr val="lt1"/>
+          </a:fontRef>
+        </p:style>
+        <p:txBody>
+          <a:bodyPr rtlCol="0" anchor="ctr"/>
+          <a:lstStyle/>
+          <a:p>
+            <a:pPr algn="ctr"/>
+          </a:p>
+        </p:txBody>
+      </p:sp>
+      <p:sp>
+        <p:nvSpPr>
+          <p:cNvPr id="13" name="TextBox 12"/>
+          <p:cNvSpPr txBox="1"/>
+          <p:nvPr/>
+        </p:nvSpPr>
+        <p:spPr>
+          <a:xfrm>
+            <a:off x="914400" y="5065776"/>
+            <a:ext cx="5120640" cy="777240"/>
+          </a:xfrm>
+          <a:prstGeom prst="rect">
+            <a:avLst/>
+          </a:prstGeom>
+          <a:noFill/>
+        </p:spPr>
+        <p:txBody>
+          <a:bodyPr wrap="square" anchor="t" lIns="45720" rIns="45720" tIns="18288" bIns="18288">
+            <a:spAutoFit/>
+          </a:bodyPr>
+          <a:lstStyle/>
+          <a:p>
+            <a:pPr algn="l">
+              <a:lnSpc>
+                <a:spcPct val="115000"/>
+              </a:lnSpc>
+            </a:pPr>
+            <a:r>
+              <a:rPr sz="1500" b="1">
+                <a:solidFill>
+                  <a:srgbClr val="14181D"/>
+                </a:solidFill>
+                <a:latin typeface="Yu Gothic UI"/>
+              </a:rPr>
+              <a:t>英語の駅名検索は関東のみ</a:t>
+            </a:r>
+          </a:p>
+          <a:p>
+            <a:pPr algn="l">
+              <a:lnSpc>
+                <a:spcPct val="115000"/>
+              </a:lnSpc>
+            </a:pPr>
+            <a:r>
+              <a:rPr sz="1150" b="0">
+                <a:solidFill>
+                  <a:srgbClr val="5C6670"/>
+                </a:solidFill>
+                <a:latin typeface="Yu Gothic UI"/>
+              </a:rPr>
+              <a:t>ODPT の収録範囲。他地域は日本語で検索できる</a:t>
+            </a:r>
+          </a:p>
+        </p:txBody>
+      </p:sp>
+      <p:sp>
+        <p:nvSpPr>
+          <p:cNvPr id="14" name="Rounded Rectangle 13"/>
+          <p:cNvSpPr/>
+          <p:nvPr/>
+        </p:nvSpPr>
+        <p:spPr>
+          <a:xfrm>
+            <a:off x="6492240" y="1920240"/>
+            <a:ext cx="4937760" cy="896112"/>
+          </a:xfrm>
+          <a:prstGeom prst="roundRect">
+            <a:avLst>
+              <a:gd name="adj" fmla="val 6000"/>
+            </a:avLst>
+          </a:prstGeom>
+          <a:solidFill>
+            <a:srgbClr val="EAF4EE"/>
+          </a:solidFill>
+          <a:ln>
+            <a:noFill/>
+          </a:ln>
+          <a:effectLst/>
+        </p:spPr>
+        <p:style>
+          <a:lnRef idx="1">
+            <a:schemeClr val="accent1"/>
+          </a:lnRef>
+          <a:fillRef idx="3">
+            <a:schemeClr val="accent1"/>
+          </a:fillRef>
+          <a:effectRef idx="2">
+            <a:schemeClr val="accent1"/>
+          </a:effectRef>
+          <a:fontRef idx="minor">
+            <a:schemeClr val="lt1"/>
+          </a:fontRef>
+        </p:style>
+        <p:txBody>
+          <a:bodyPr rtlCol="0" anchor="ctr"/>
+          <a:lstStyle/>
+          <a:p>
+            <a:pPr algn="ctr"/>
+          </a:p>
+        </p:txBody>
+      </p:sp>
+      <p:sp>
+        <p:nvSpPr>
+          <p:cNvPr id="15" name="TextBox 14"/>
+          <p:cNvSpPr txBox="1"/>
+          <p:nvPr/>
+        </p:nvSpPr>
+        <p:spPr>
+          <a:xfrm>
+            <a:off x="6675120" y="1993392"/>
+            <a:ext cx="4572000" cy="777240"/>
+          </a:xfrm>
+          <a:prstGeom prst="rect">
+            <a:avLst/>
+          </a:prstGeom>
+          <a:noFill/>
+        </p:spPr>
+        <p:txBody>
+          <a:bodyPr wrap="square" anchor="t" lIns="45720" rIns="45720" tIns="18288" bIns="18288">
+            <a:spAutoFit/>
+          </a:bodyPr>
+          <a:lstStyle/>
+          <a:p>
+            <a:pPr algn="l">
+              <a:lnSpc>
+                <a:spcPct val="115000"/>
+              </a:lnSpc>
+            </a:pPr>
+            <a:r>
+              <a:rPr sz="1500" b="1">
+                <a:solidFill>
+                  <a:srgbClr val="0B6B3A"/>
+                </a:solidFill>
+                <a:latin typeface="Yu Gothic UI"/>
+              </a:rPr>
+              <a:t>速報段階では判定しない</a:t>
+            </a:r>
+          </a:p>
+          <a:p>
+            <a:pPr algn="l">
+              <a:lnSpc>
+                <a:spcPct val="115000"/>
+              </a:lnSpc>
+            </a:pPr>
+            <a:r>
+              <a:rPr sz="1150" b="0">
+                <a:solidFill>
+                  <a:srgbClr val="5C6670"/>
+                </a:solidFill>
+                <a:latin typeface="Yu Gothic UI"/>
+              </a:rPr>
+              <a:t>区域単位の震度しか無いうちは「詳細を待っています」。「平常どおり」と誤って出さない</a:t>
+            </a:r>
+          </a:p>
+        </p:txBody>
+      </p:sp>
+      <p:sp>
+        <p:nvSpPr>
+          <p:cNvPr id="16" name="Rounded Rectangle 15"/>
+          <p:cNvSpPr/>
+          <p:nvPr/>
+        </p:nvSpPr>
+        <p:spPr>
+          <a:xfrm>
+            <a:off x="6492240" y="2944368"/>
+            <a:ext cx="4937760" cy="896112"/>
+          </a:xfrm>
+          <a:prstGeom prst="roundRect">
+            <a:avLst>
+              <a:gd name="adj" fmla="val 6000"/>
+            </a:avLst>
+          </a:prstGeom>
+          <a:solidFill>
+            <a:srgbClr val="EAF4EE"/>
+          </a:solidFill>
+          <a:ln>
+            <a:noFill/>
+          </a:ln>
+          <a:effectLst/>
+        </p:spPr>
+        <p:style>
+          <a:lnRef idx="1">
+            <a:schemeClr val="accent1"/>
+          </a:lnRef>
+          <a:fillRef idx="3">
+            <a:schemeClr val="accent1"/>
+          </a:fillRef>
+          <a:effectRef idx="2">
+            <a:schemeClr val="accent1"/>
+          </a:effectRef>
+          <a:fontRef idx="minor">
+            <a:schemeClr val="lt1"/>
+          </a:fontRef>
+        </p:style>
+        <p:txBody>
+          <a:bodyPr rtlCol="0" anchor="ctr"/>
+          <a:lstStyle/>
+          <a:p>
+            <a:pPr algn="ctr"/>
+          </a:p>
+        </p:txBody>
+      </p:sp>
+      <p:sp>
+        <p:nvSpPr>
+          <p:cNvPr id="17" name="TextBox 16"/>
+          <p:cNvSpPr txBox="1"/>
+          <p:nvPr/>
+        </p:nvSpPr>
+        <p:spPr>
+          <a:xfrm>
+            <a:off x="6675120" y="3017520"/>
+            <a:ext cx="4572000" cy="777240"/>
+          </a:xfrm>
+          <a:prstGeom prst="rect">
+            <a:avLst/>
+          </a:prstGeom>
+          <a:noFill/>
+        </p:spPr>
+        <p:txBody>
+          <a:bodyPr wrap="square" anchor="t" lIns="45720" rIns="45720" tIns="18288" bIns="18288">
+            <a:spAutoFit/>
+          </a:bodyPr>
+          <a:lstStyle/>
+          <a:p>
+            <a:pPr algn="l">
+              <a:lnSpc>
+                <a:spcPct val="115000"/>
+              </a:lnSpc>
+            </a:pPr>
+            <a:r>
+              <a:rPr sz="1500" b="1">
+                <a:solidFill>
+                  <a:srgbClr val="0B6B3A"/>
+                </a:solidFill>
+                <a:latin typeface="Yu Gothic UI"/>
+              </a:rPr>
+              <a:t>推定の期限切れを言う</a:t>
+            </a:r>
+          </a:p>
+          <a:p>
+            <a:pPr algn="l">
+              <a:lnSpc>
+                <a:spcPct val="115000"/>
+              </a:lnSpc>
+            </a:pPr>
+            <a:r>
+              <a:rPr sz="1150" b="0">
+                <a:solidFill>
+                  <a:srgbClr val="5C6670"/>
+                </a:solidFill>
+                <a:latin typeface="Yu Gothic UI"/>
+              </a:rPr>
+              <a:t>上限を過ぎたら「再開しているかもしれません」。古い判定を出し続けない</a:t>
+            </a:r>
+          </a:p>
+        </p:txBody>
+      </p:sp>
+      <p:sp>
+        <p:nvSpPr>
+          <p:cNvPr id="18" name="Rounded Rectangle 17"/>
+          <p:cNvSpPr/>
+          <p:nvPr/>
+        </p:nvSpPr>
+        <p:spPr>
+          <a:xfrm>
+            <a:off x="6492240" y="3968496"/>
+            <a:ext cx="4937760" cy="896112"/>
+          </a:xfrm>
+          <a:prstGeom prst="roundRect">
+            <a:avLst>
+              <a:gd name="adj" fmla="val 6000"/>
+            </a:avLst>
+          </a:prstGeom>
+          <a:solidFill>
+            <a:srgbClr val="EAF4EE"/>
+          </a:solidFill>
+          <a:ln>
+            <a:noFill/>
+          </a:ln>
+          <a:effectLst/>
+        </p:spPr>
+        <p:style>
+          <a:lnRef idx="1">
+            <a:schemeClr val="accent1"/>
+          </a:lnRef>
+          <a:fillRef idx="3">
+            <a:schemeClr val="accent1"/>
+          </a:fillRef>
+          <a:effectRef idx="2">
+            <a:schemeClr val="accent1"/>
+          </a:effectRef>
+          <a:fontRef idx="minor">
+            <a:schemeClr val="lt1"/>
+          </a:fontRef>
+        </p:style>
+        <p:txBody>
+          <a:bodyPr rtlCol="0" anchor="ctr"/>
+          <a:lstStyle/>
+          <a:p>
+            <a:pPr algn="ctr"/>
+          </a:p>
+        </p:txBody>
+      </p:sp>
+      <p:sp>
+        <p:nvSpPr>
+          <p:cNvPr id="19" name="TextBox 18"/>
+          <p:cNvSpPr txBox="1"/>
+          <p:nvPr/>
+        </p:nvSpPr>
+        <p:spPr>
+          <a:xfrm>
+            <a:off x="6675120" y="4041648"/>
+            <a:ext cx="4572000" cy="777240"/>
+          </a:xfrm>
+          <a:prstGeom prst="rect">
+            <a:avLst/>
+          </a:prstGeom>
+          <a:noFill/>
+        </p:spPr>
+        <p:txBody>
+          <a:bodyPr wrap="square" anchor="t" lIns="45720" rIns="45720" tIns="18288" bIns="18288">
+            <a:spAutoFit/>
+          </a:bodyPr>
+          <a:lstStyle/>
+          <a:p>
+            <a:pPr algn="l">
+              <a:lnSpc>
+                <a:spcPct val="115000"/>
+              </a:lnSpc>
+            </a:pPr>
+            <a:r>
+              <a:rPr sz="1500" b="1">
+                <a:solidFill>
+                  <a:srgbClr val="0B6B3A"/>
+                </a:solidFill>
+                <a:latin typeface="Yu Gothic UI"/>
+              </a:rPr>
+              <a:t>「平常」なら推定を捨てる</a:t>
+            </a:r>
+          </a:p>
+          <a:p>
+            <a:pPr algn="l">
+              <a:lnSpc>
+                <a:spcPct val="115000"/>
+              </a:lnSpc>
+            </a:pPr>
+            <a:r>
+              <a:rPr sz="1150" b="0">
+                <a:solidFill>
+                  <a:srgbClr val="5C6670"/>
+                </a:solidFill>
+                <a:latin typeface="Yu Gothic UI"/>
+              </a:rPr>
+              <a:t>事業者が平常と言えば推定は消える。不要な宿を取らせる方向の失敗を塞ぐ</a:t>
+            </a:r>
+          </a:p>
+        </p:txBody>
+      </p:sp>
+      <p:sp>
+        <p:nvSpPr>
+          <p:cNvPr id="20" name="Rounded Rectangle 19"/>
+          <p:cNvSpPr/>
+          <p:nvPr/>
+        </p:nvSpPr>
+        <p:spPr>
+          <a:xfrm>
+            <a:off x="6492240" y="4992624"/>
+            <a:ext cx="4937760" cy="896112"/>
+          </a:xfrm>
+          <a:prstGeom prst="roundRect">
+            <a:avLst>
+              <a:gd name="adj" fmla="val 6000"/>
+            </a:avLst>
+          </a:prstGeom>
+          <a:solidFill>
+            <a:srgbClr val="EAF4EE"/>
+          </a:solidFill>
+          <a:ln>
+            <a:noFill/>
+          </a:ln>
+          <a:effectLst/>
+        </p:spPr>
+        <p:style>
+          <a:lnRef idx="1">
+            <a:schemeClr val="accent1"/>
+          </a:lnRef>
+          <a:fillRef idx="3">
+            <a:schemeClr val="accent1"/>
+          </a:fillRef>
+          <a:effectRef idx="2">
+            <a:schemeClr val="accent1"/>
+          </a:effectRef>
+          <a:fontRef idx="minor">
+            <a:schemeClr val="lt1"/>
+          </a:fontRef>
+        </p:style>
+        <p:txBody>
+          <a:bodyPr rtlCol="0" anchor="ctr"/>
+          <a:lstStyle/>
+          <a:p>
+            <a:pPr algn="ctr"/>
+          </a:p>
+        </p:txBody>
+      </p:sp>
+      <p:sp>
+        <p:nvSpPr>
+          <p:cNvPr id="21" name="TextBox 20"/>
+          <p:cNvSpPr txBox="1"/>
+          <p:nvPr/>
+        </p:nvSpPr>
+        <p:spPr>
+          <a:xfrm>
+            <a:off x="6675120" y="5065776"/>
+            <a:ext cx="4572000" cy="777240"/>
+          </a:xfrm>
+          <a:prstGeom prst="rect">
+            <a:avLst/>
+          </a:prstGeom>
+          <a:noFill/>
+        </p:spPr>
+        <p:txBody>
+          <a:bodyPr wrap="square" anchor="t" lIns="45720" rIns="45720" tIns="18288" bIns="18288">
+            <a:spAutoFit/>
+          </a:bodyPr>
+          <a:lstStyle/>
+          <a:p>
+            <a:pPr algn="l">
+              <a:lnSpc>
+                <a:spcPct val="115000"/>
+              </a:lnSpc>
+            </a:pPr>
+            <a:r>
+              <a:rPr sz="1500" b="1">
+                <a:solidFill>
+                  <a:srgbClr val="0B6B3A"/>
+                </a:solidFill>
+                <a:latin typeface="Yu Gothic UI"/>
+              </a:rPr>
+              <a:t>文面は現在形の事実だけ読む</a:t>
+            </a:r>
+          </a:p>
+          <a:p>
+            <a:pPr algn="l">
+              <a:lnSpc>
+                <a:spcPct val="115000"/>
+              </a:lnSpc>
+            </a:pPr>
+            <a:r>
+              <a:rPr sz="1150" b="0">
+                <a:solidFill>
+                  <a:srgbClr val="5C6670"/>
+                </a:solidFill>
+                <a:latin typeface="Yu Gothic UI"/>
+              </a:rPr>
+              <a:t>「運休の可能性があります」「遅延はありません」を止まっている・遅れていると読まない</a:t>
+            </a:r>
+          </a:p>
+        </p:txBody>
+      </p:sp>
+    </p:spTree>
+  </p:cSld>
+  <p:clrMapOvr>
+    <a:masterClrMapping/>
+  </p:clrMapOvr>
+</p:sld>
+</file>
+
+<file path=ppt/slides/slide14.xml><?xml version="1.0" encoding="utf-8"?>
+<p:sld xmlns:a="http://schemas.openxmlformats.org/drawingml/2006/main" xmlns:p="http://schemas.openxmlformats.org/presentationml/2006/main" xmlns:r="http://schemas.openxmlformats.org/officeDocument/2006/relationships">
+  <p:cSld>
+    <p:spTree>
+      <p:nvGrpSpPr>
+        <p:cNvPr id="1" name=""/>
+        <p:cNvGrpSpPr/>
+        <p:nvPr/>
+      </p:nvGrpSpPr>
+      <p:grpSpPr/>
+      <p:sp>
+        <p:nvSpPr>
+          <p:cNvPr id="2" name="TextBox 1"/>
+          <p:cNvSpPr txBox="1"/>
+          <p:nvPr/>
+        </p:nvSpPr>
+        <p:spPr>
+          <a:xfrm>
+            <a:off x="731520" y="6400800"/>
+            <a:ext cx="7315200" cy="274320"/>
+          </a:xfrm>
+          <a:prstGeom prst="rect">
+            <a:avLst/>
+          </a:prstGeom>
+          <a:noFill/>
+        </p:spPr>
+        <p:txBody>
+          <a:bodyPr wrap="square" anchor="t" lIns="45720" rIns="45720" tIns="18288" bIns="18288">
+            <a:spAutoFit/>
+          </a:bodyPr>
+          <a:lstStyle/>
+          <a:p>
+            <a:pPr algn="l">
+              <a:lnSpc>
+                <a:spcPct val="115000"/>
+              </a:lnSpc>
+            </a:pPr>
+            <a:r>
+              <a:rPr sz="1000" b="0">
+                <a:solidFill>
+                  <a:srgbClr val="5C6670"/>
+                </a:solidFill>
+                <a:latin typeface="Yu Gothic UI"/>
+              </a:rPr>
+              <a:t>Move or Wait — 動くか、待つか  ·  公共交通オープンデータチャレンジ2026</a:t>
+            </a:r>
+          </a:p>
+        </p:txBody>
+      </p:sp>
+      <p:sp>
+        <p:nvSpPr>
+          <p:cNvPr id="3" name="TextBox 2"/>
+          <p:cNvSpPr txBox="1"/>
+          <p:nvPr/>
+        </p:nvSpPr>
+        <p:spPr>
+          <a:xfrm>
+            <a:off x="10972800" y="6400800"/>
+            <a:ext cx="548640" cy="274320"/>
+          </a:xfrm>
+          <a:prstGeom prst="rect">
+            <a:avLst/>
+          </a:prstGeom>
+          <a:noFill/>
+        </p:spPr>
+        <p:txBody>
+          <a:bodyPr wrap="square" anchor="t" lIns="45720" rIns="45720" tIns="18288" bIns="18288">
+            <a:spAutoFit/>
+          </a:bodyPr>
+          <a:lstStyle/>
+          <a:p>
+            <a:pPr algn="r">
+              <a:lnSpc>
+                <a:spcPct val="115000"/>
+              </a:lnSpc>
+            </a:pPr>
+            <a:r>
+              <a:rPr sz="1000" b="0">
+                <a:solidFill>
+                  <a:srgbClr val="5C6670"/>
+                </a:solidFill>
+                <a:latin typeface="Yu Gothic UI"/>
+              </a:rPr>
+              <a:t>14</a:t>
+            </a:r>
+          </a:p>
+        </p:txBody>
+      </p:sp>
+      <p:sp>
+        <p:nvSpPr>
+          <p:cNvPr id="4" name="Rectangle 3"/>
+          <p:cNvSpPr/>
+          <p:nvPr/>
+        </p:nvSpPr>
+        <p:spPr>
+          <a:xfrm>
+            <a:off x="0" y="0"/>
+            <a:ext cx="12191695" cy="6858000"/>
+          </a:xfrm>
+          <a:prstGeom prst="rect">
+            <a:avLst/>
+          </a:prstGeom>
+          <a:solidFill>
+            <a:srgbClr val="A4231C"/>
+          </a:solidFill>
+          <a:ln>
+            <a:noFill/>
+          </a:ln>
+          <a:effectLst/>
+        </p:spPr>
+        <p:style>
+          <a:lnRef idx="1">
+            <a:schemeClr val="accent1"/>
+          </a:lnRef>
+          <a:fillRef idx="3">
+            <a:schemeClr val="accent1"/>
+          </a:fillRef>
+          <a:effectRef idx="2">
+            <a:schemeClr val="accent1"/>
+          </a:effectRef>
+          <a:fontRef idx="minor">
+            <a:schemeClr val="lt1"/>
+          </a:fontRef>
+        </p:style>
+        <p:txBody>
+          <a:bodyPr rtlCol="0" anchor="ctr"/>
+          <a:lstStyle/>
+          <a:p>
+            <a:pPr algn="ctr"/>
+          </a:p>
+        </p:txBody>
+      </p:sp>
+      <p:sp>
+        <p:nvSpPr>
           <p:cNvPr id="5" name="TextBox 4"/>
           <p:cNvSpPr txBox="1"/>
           <p:nvPr/>
@@ -6047,7 +8258,7 @@
                 </a:solidFill>
                 <a:latin typeface="Yu Gothic UI"/>
               </a:rPr>
-              <a:t>公共交通オープンデータで、線路名称を運転系統に組み替え、運行情報で推定を終わらせる。</a:t>
+              <a:t>数字の根拠は高浜・翠川 (2011) の推定式。公共交通オープンデータで線路名称を運転系統に組み替え、運行情報で推定を終わらせる。</a:t>
             </a:r>
           </a:p>
           <a:p>
@@ -9606,7 +11817,7 @@
                 </a:solidFill>
                 <a:latin typeface="Yu Gothic UI"/>
               </a:rPr>
-              <a:t>震度 4 → 注意運転点検 30 分 / 5 弱 → 徒歩点検 6.0 分/km ± 30 / 6 弱〜 → 当面不通 (高浜・翠川 2011)</a:t>
+              <a:t>高浜・翠川 (2011) 日本地震工学会論文集。震度 4 → 注意運転点検 30 分 / 5 弱 → 徒歩点検 6.0 分/km ± 30 分 / 6 弱〜 → 時間を出さない</a:t>
             </a:r>
           </a:p>
         </p:txBody>
@@ -10067,7 +12278,7 @@
                 </a:solidFill>
                 <a:latin typeface="Yu Gothic UI"/>
               </a:rPr>
-              <a:t>オープンデータの使い方</a:t>
+              <a:t>数字の根拠</a:t>
             </a:r>
           </a:p>
         </p:txBody>
@@ -10106,21 +12317,193 @@
                 </a:solidFill>
                 <a:latin typeface="Yu Gothic UI"/>
               </a:rPr>
-              <a:t>運行情報を「主」ではなく「推定を終わらせる手段」として使う</a:t>
-            </a:r>
-          </a:p>
-        </p:txBody>
-      </p:sp>
-      <p:sp>
-        <p:nvSpPr>
-          <p:cNvPr id="6" name="Rounded Rectangle 5"/>
+              <a:t>再開までの時間は、既往研究の推定式から出している</a:t>
+            </a:r>
+          </a:p>
+        </p:txBody>
+      </p:sp>
+      <p:sp>
+        <p:nvSpPr>
+          <p:cNvPr id="6" name="TextBox 5"/>
+          <p:cNvSpPr txBox="1"/>
+          <p:nvPr/>
+        </p:nvSpPr>
+        <p:spPr>
+          <a:xfrm>
+            <a:off x="731520" y="1874519"/>
+            <a:ext cx="6766560" cy="822960"/>
+          </a:xfrm>
+          <a:prstGeom prst="rect">
+            <a:avLst/>
+          </a:prstGeom>
+          <a:noFill/>
+        </p:spPr>
+        <p:txBody>
+          <a:bodyPr wrap="square" anchor="t" lIns="45720" rIns="45720" tIns="18288" bIns="18288">
+            <a:spAutoFit/>
+          </a:bodyPr>
+          <a:lstStyle/>
+          <a:p>
+            <a:pPr algn="l">
+              <a:lnSpc>
+                <a:spcPct val="115000"/>
+              </a:lnSpc>
+            </a:pPr>
+            <a:r>
+              <a:rPr sz="1600" b="1">
+                <a:solidFill>
+                  <a:srgbClr val="14181D"/>
+                </a:solidFill>
+                <a:latin typeface="Yu Gothic UI"/>
+              </a:rPr>
+              <a:t>高浜勉・翠川三郎「地震時の鉄道運休時間の推定方法」</a:t>
+            </a:r>
+          </a:p>
+          <a:p>
+            <a:pPr algn="l">
+              <a:lnSpc>
+                <a:spcPct val="115000"/>
+              </a:lnSpc>
+            </a:pPr>
+            <a:r>
+              <a:rPr sz="1200" b="0">
+                <a:solidFill>
+                  <a:srgbClr val="5C6670"/>
+                </a:solidFill>
+                <a:latin typeface="Yu Gothic UI"/>
+              </a:rPr>
+              <a:t>日本地震工学会論文集 第 11 巻第 2 号 (2011) 表 1・図 1。首都圏の鉄道事業者 24 社への聞き取り (2005 年千葉県北西部地震) が元</a:t>
+            </a:r>
+          </a:p>
+        </p:txBody>
+      </p:sp>
+      <p:sp>
+        <p:nvSpPr>
+          <p:cNvPr id="7" name="TextBox 6"/>
+          <p:cNvSpPr txBox="1"/>
+          <p:nvPr/>
+        </p:nvSpPr>
+        <p:spPr>
+          <a:xfrm>
+            <a:off x="731520" y="2788920"/>
+            <a:ext cx="1645920" cy="320040"/>
+          </a:xfrm>
+          <a:prstGeom prst="rect">
+            <a:avLst/>
+          </a:prstGeom>
+          <a:noFill/>
+        </p:spPr>
+        <p:txBody>
+          <a:bodyPr wrap="square" anchor="t" lIns="45720" rIns="45720" tIns="18288" bIns="18288">
+            <a:spAutoFit/>
+          </a:bodyPr>
+          <a:lstStyle/>
+          <a:p>
+            <a:pPr algn="l">
+              <a:lnSpc>
+                <a:spcPct val="115000"/>
+              </a:lnSpc>
+            </a:pPr>
+            <a:r>
+              <a:rPr sz="1100" b="1">
+                <a:solidFill>
+                  <a:srgbClr val="5C6670"/>
+                </a:solidFill>
+                <a:latin typeface="Yu Gothic UI"/>
+              </a:rPr>
+              <a:t>基準値</a:t>
+            </a:r>
+          </a:p>
+        </p:txBody>
+      </p:sp>
+      <p:sp>
+        <p:nvSpPr>
+          <p:cNvPr id="8" name="TextBox 7"/>
+          <p:cNvSpPr txBox="1"/>
+          <p:nvPr/>
+        </p:nvSpPr>
+        <p:spPr>
+          <a:xfrm>
+            <a:off x="2377440" y="2788920"/>
+            <a:ext cx="2377440" cy="320040"/>
+          </a:xfrm>
+          <a:prstGeom prst="rect">
+            <a:avLst/>
+          </a:prstGeom>
+          <a:noFill/>
+        </p:spPr>
+        <p:txBody>
+          <a:bodyPr wrap="square" anchor="t" lIns="45720" rIns="45720" tIns="18288" bIns="18288">
+            <a:spAutoFit/>
+          </a:bodyPr>
+          <a:lstStyle/>
+          <a:p>
+            <a:pPr algn="l">
+              <a:lnSpc>
+                <a:spcPct val="115000"/>
+              </a:lnSpc>
+            </a:pPr>
+            <a:r>
+              <a:rPr sz="1100" b="1">
+                <a:solidFill>
+                  <a:srgbClr val="5C6670"/>
+                </a:solidFill>
+                <a:latin typeface="Yu Gothic UI"/>
+              </a:rPr>
+              <a:t>点検</a:t>
+            </a:r>
+          </a:p>
+        </p:txBody>
+      </p:sp>
+      <p:sp>
+        <p:nvSpPr>
+          <p:cNvPr id="9" name="TextBox 8"/>
+          <p:cNvSpPr txBox="1"/>
+          <p:nvPr/>
+        </p:nvSpPr>
+        <p:spPr>
+          <a:xfrm>
+            <a:off x="4754880" y="2788920"/>
+            <a:ext cx="2743200" cy="320040"/>
+          </a:xfrm>
+          <a:prstGeom prst="rect">
+            <a:avLst/>
+          </a:prstGeom>
+          <a:noFill/>
+        </p:spPr>
+        <p:txBody>
+          <a:bodyPr wrap="square" anchor="t" lIns="45720" rIns="45720" tIns="18288" bIns="18288">
+            <a:spAutoFit/>
+          </a:bodyPr>
+          <a:lstStyle/>
+          <a:p>
+            <a:pPr algn="l">
+              <a:lnSpc>
+                <a:spcPct val="115000"/>
+              </a:lnSpc>
+            </a:pPr>
+            <a:r>
+              <a:rPr sz="1100" b="1">
+                <a:solidFill>
+                  <a:srgbClr val="5C6670"/>
+                </a:solidFill>
+                <a:latin typeface="Yu Gothic UI"/>
+              </a:rPr>
+              <a:t>再開まで</a:t>
+            </a:r>
+          </a:p>
+        </p:txBody>
+      </p:sp>
+      <p:sp>
+        <p:nvSpPr>
+          <p:cNvPr id="10" name="Rounded Rectangle 9"/>
           <p:cNvSpPr/>
           <p:nvPr/>
         </p:nvSpPr>
         <p:spPr>
           <a:xfrm>
-            <a:off x="731520" y="1965960"/>
-            <a:ext cx="10698480" cy="548640"/>
+            <a:off x="731520" y="3108960"/>
+            <a:ext cx="6766560" cy="530352"/>
           </a:xfrm>
           <a:prstGeom prst="roundRect">
             <a:avLst>
@@ -10128,7 +12511,7 @@
             </a:avLst>
           </a:prstGeom>
           <a:solidFill>
-            <a:srgbClr val="FBECEA"/>
+            <a:srgbClr val="F4F5F7"/>
           </a:solidFill>
           <a:ln>
             <a:noFill/>
@@ -10159,14 +12542,14 @@
       </p:sp>
       <p:sp>
         <p:nvSpPr>
-          <p:cNvPr id="7" name="TextBox 6"/>
-          <p:cNvSpPr txBox="1"/>
-          <p:nvPr/>
-        </p:nvSpPr>
-        <p:spPr>
-          <a:xfrm>
-            <a:off x="868680" y="2011680"/>
-            <a:ext cx="3931920" cy="457200"/>
+          <p:cNvPr id="11" name="TextBox 10"/>
+          <p:cNvSpPr txBox="1"/>
+          <p:nvPr/>
+        </p:nvSpPr>
+        <p:spPr>
+          <a:xfrm>
+            <a:off x="868680" y="3154680"/>
+            <a:ext cx="1554480" cy="457200"/>
           </a:xfrm>
           <a:prstGeom prst="rect">
             <a:avLst/>
@@ -10185,26 +12568,26 @@
               </a:lnSpc>
             </a:pPr>
             <a:r>
-              <a:rPr sz="1300" b="1">
-                <a:solidFill>
-                  <a:srgbClr val="A4231C"/>
-                </a:solidFill>
-                <a:latin typeface="Yu Gothic UI"/>
-              </a:rPr>
-              <a:t>ODPT  odpt:Railway / odpt:Station</a:t>
-            </a:r>
-          </a:p>
-        </p:txBody>
-      </p:sp>
-      <p:sp>
-        <p:nvSpPr>
-          <p:cNvPr id="8" name="TextBox 7"/>
-          <p:cNvSpPr txBox="1"/>
-          <p:nvPr/>
-        </p:nvSpPr>
-        <p:spPr>
-          <a:xfrm>
-            <a:off x="4846320" y="2011680"/>
+              <a:rPr sz="1400" b="1">
+                <a:solidFill>
+                  <a:srgbClr val="14181D"/>
+                </a:solidFill>
+                <a:latin typeface="Yu Gothic UI"/>
+              </a:rPr>
+              <a:t>震度 4</a:t>
+            </a:r>
+          </a:p>
+        </p:txBody>
+      </p:sp>
+      <p:sp>
+        <p:nvSpPr>
+          <p:cNvPr id="12" name="TextBox 11"/>
+          <p:cNvSpPr txBox="1"/>
+          <p:nvPr/>
+        </p:nvSpPr>
+        <p:spPr>
+          <a:xfrm>
+            <a:off x="2377440" y="3154680"/>
             <a:ext cx="2377440" cy="457200"/>
           </a:xfrm>
           <a:prstGeom prst="rect">
@@ -10224,27 +12607,27 @@
               </a:lnSpc>
             </a:pPr>
             <a:r>
-              <a:rPr sz="1300" b="0">
-                <a:solidFill>
-                  <a:srgbClr val="A4231C"/>
-                </a:solidFill>
-                <a:latin typeface="Yu Gothic UI"/>
-              </a:rPr>
-              <a:t>線路名称 → 運転系統の対応表</a:t>
-            </a:r>
-          </a:p>
-        </p:txBody>
-      </p:sp>
-      <p:sp>
-        <p:nvSpPr>
-          <p:cNvPr id="9" name="TextBox 8"/>
-          <p:cNvSpPr txBox="1"/>
-          <p:nvPr/>
-        </p:nvSpPr>
-        <p:spPr>
-          <a:xfrm>
-            <a:off x="7223760" y="2011680"/>
-            <a:ext cx="4114800" cy="457200"/>
+              <a:rPr sz="1250" b="0">
+                <a:solidFill>
+                  <a:srgbClr val="14181D"/>
+                </a:solidFill>
+                <a:latin typeface="Yu Gothic UI"/>
+              </a:rPr>
+              <a:t>注意運転点検・重要箇所の点検</a:t>
+            </a:r>
+          </a:p>
+        </p:txBody>
+      </p:sp>
+      <p:sp>
+        <p:nvSpPr>
+          <p:cNvPr id="13" name="TextBox 12"/>
+          <p:cNvSpPr txBox="1"/>
+          <p:nvPr/>
+        </p:nvSpPr>
+        <p:spPr>
+          <a:xfrm>
+            <a:off x="4754880" y="3154680"/>
+            <a:ext cx="2743200" cy="457200"/>
           </a:xfrm>
           <a:prstGeom prst="rect">
             <a:avLst/>
@@ -10263,27 +12646,27 @@
               </a:lnSpc>
             </a:pPr>
             <a:r>
-              <a:rPr sz="1150" b="0">
-                <a:solidFill>
-                  <a:srgbClr val="5C6670"/>
-                </a:solidFill>
-                <a:latin typeface="Yu Gothic UI"/>
-              </a:rPr>
-              <a:t>N02 の山手線は 17 駅。運行情報も系統単位で来る</a:t>
-            </a:r>
-          </a:p>
-        </p:txBody>
-      </p:sp>
-      <p:sp>
-        <p:nvSpPr>
-          <p:cNvPr id="10" name="Rounded Rectangle 9"/>
+              <a:rPr sz="1250" b="1">
+                <a:solidFill>
+                  <a:srgbClr val="14181D"/>
+                </a:solidFill>
+                <a:latin typeface="Yu Gothic UI"/>
+              </a:rPr>
+              <a:t>30 分 + 再開まで 5 分</a:t>
+            </a:r>
+          </a:p>
+        </p:txBody>
+      </p:sp>
+      <p:sp>
+        <p:nvSpPr>
+          <p:cNvPr id="14" name="Rounded Rectangle 13"/>
           <p:cNvSpPr/>
           <p:nvPr/>
         </p:nvSpPr>
         <p:spPr>
           <a:xfrm>
-            <a:off x="731520" y="2569464"/>
-            <a:ext cx="10698480" cy="548640"/>
+            <a:off x="731520" y="3694176"/>
+            <a:ext cx="6766560" cy="530352"/>
           </a:xfrm>
           <a:prstGeom prst="roundRect">
             <a:avLst>
@@ -10291,7 +12674,7 @@
             </a:avLst>
           </a:prstGeom>
           <a:solidFill>
-            <a:srgbClr val="FBECEA"/>
+            <a:srgbClr val="F4F5F7"/>
           </a:solidFill>
           <a:ln>
             <a:noFill/>
@@ -10322,14 +12705,14 @@
       </p:sp>
       <p:sp>
         <p:nvSpPr>
-          <p:cNvPr id="11" name="TextBox 10"/>
-          <p:cNvSpPr txBox="1"/>
-          <p:nvPr/>
-        </p:nvSpPr>
-        <p:spPr>
-          <a:xfrm>
-            <a:off x="868680" y="2615184"/>
-            <a:ext cx="3931920" cy="457200"/>
+          <p:cNvPr id="15" name="TextBox 14"/>
+          <p:cNvSpPr txBox="1"/>
+          <p:nvPr/>
+        </p:nvSpPr>
+        <p:spPr>
+          <a:xfrm>
+            <a:off x="868680" y="3739896"/>
+            <a:ext cx="1554480" cy="457200"/>
           </a:xfrm>
           <a:prstGeom prst="rect">
             <a:avLst/>
@@ -10348,26 +12731,26 @@
               </a:lnSpc>
             </a:pPr>
             <a:r>
-              <a:rPr sz="1300" b="1">
+              <a:rPr sz="1400" b="1">
                 <a:solidFill>
                   <a:srgbClr val="A4231C"/>
                 </a:solidFill>
                 <a:latin typeface="Yu Gothic UI"/>
               </a:rPr>
-              <a:t>ODPT  odpt:TrainInformation</a:t>
-            </a:r>
-          </a:p>
-        </p:txBody>
-      </p:sp>
-      <p:sp>
-        <p:nvSpPr>
-          <p:cNvPr id="12" name="TextBox 11"/>
-          <p:cNvSpPr txBox="1"/>
-          <p:nvPr/>
-        </p:nvSpPr>
-        <p:spPr>
-          <a:xfrm>
-            <a:off x="4846320" y="2615184"/>
+              <a:t>震度 5 弱・5 強</a:t>
+            </a:r>
+          </a:p>
+        </p:txBody>
+      </p:sp>
+      <p:sp>
+        <p:nvSpPr>
+          <p:cNvPr id="16" name="TextBox 15"/>
+          <p:cNvSpPr txBox="1"/>
+          <p:nvPr/>
+        </p:nvSpPr>
+        <p:spPr>
+          <a:xfrm>
+            <a:off x="2377440" y="3739896"/>
             <a:ext cx="2377440" cy="457200"/>
           </a:xfrm>
           <a:prstGeom prst="rect">
@@ -10387,66 +12770,66 @@
               </a:lnSpc>
             </a:pPr>
             <a:r>
-              <a:rPr sz="1300" b="0">
+              <a:rPr sz="1250" b="0">
+                <a:solidFill>
+                  <a:srgbClr val="14181D"/>
+                </a:solidFill>
+                <a:latin typeface="Yu Gothic UI"/>
+              </a:rPr>
+              <a:t>徒歩点検</a:t>
+            </a:r>
+          </a:p>
+        </p:txBody>
+      </p:sp>
+      <p:sp>
+        <p:nvSpPr>
+          <p:cNvPr id="17" name="TextBox 16"/>
+          <p:cNvSpPr txBox="1"/>
+          <p:nvPr/>
+        </p:nvSpPr>
+        <p:spPr>
+          <a:xfrm>
+            <a:off x="4754880" y="3739896"/>
+            <a:ext cx="2743200" cy="457200"/>
+          </a:xfrm>
+          <a:prstGeom prst="rect">
+            <a:avLst/>
+          </a:prstGeom>
+          <a:noFill/>
+        </p:spPr>
+        <p:txBody>
+          <a:bodyPr wrap="square" anchor="ctr" lIns="45720" rIns="45720" tIns="18288" bIns="18288">
+            <a:spAutoFit/>
+          </a:bodyPr>
+          <a:lstStyle/>
+          <a:p>
+            <a:pPr algn="l">
+              <a:lnSpc>
+                <a:spcPct val="115000"/>
+              </a:lnSpc>
+            </a:pPr>
+            <a:r>
+              <a:rPr sz="1250" b="1">
                 <a:solidFill>
                   <a:srgbClr val="A4231C"/>
                 </a:solidFill>
                 <a:latin typeface="Yu Gothic UI"/>
               </a:rPr>
-              <a:t>推定を終わらせる</a:t>
-            </a:r>
-          </a:p>
-        </p:txBody>
-      </p:sp>
-      <p:sp>
-        <p:nvSpPr>
-          <p:cNvPr id="13" name="TextBox 12"/>
-          <p:cNvSpPr txBox="1"/>
-          <p:nvPr/>
-        </p:nvSpPr>
-        <p:spPr>
-          <a:xfrm>
-            <a:off x="7223760" y="2615184"/>
-            <a:ext cx="4114800" cy="457200"/>
-          </a:xfrm>
-          <a:prstGeom prst="rect">
-            <a:avLst/>
-          </a:prstGeom>
-          <a:noFill/>
-        </p:spPr>
-        <p:txBody>
-          <a:bodyPr wrap="square" anchor="ctr" lIns="45720" rIns="45720" tIns="18288" bIns="18288">
-            <a:spAutoFit/>
-          </a:bodyPr>
-          <a:lstStyle/>
-          <a:p>
-            <a:pPr algn="l">
-              <a:lnSpc>
-                <a:spcPct val="115000"/>
-              </a:lnSpc>
-            </a:pPr>
-            <a:r>
-              <a:rPr sz="1150" b="0">
-                <a:solidFill>
-                  <a:srgbClr val="5C6670"/>
-                </a:solidFill>
-                <a:latin typeface="Yu Gothic UI"/>
-              </a:rPr>
-              <a:t>推定は上限まで「止まっている」と言い続ける。事業者が平常と言えば捨てる</a:t>
-            </a:r>
-          </a:p>
-        </p:txBody>
-      </p:sp>
-      <p:sp>
-        <p:nvSpPr>
-          <p:cNvPr id="14" name="Rounded Rectangle 13"/>
+              <a:t>max(6.0 × L, 30) 分 ± 30 分 + 5 分</a:t>
+            </a:r>
+          </a:p>
+        </p:txBody>
+      </p:sp>
+      <p:sp>
+        <p:nvSpPr>
+          <p:cNvPr id="18" name="Rounded Rectangle 17"/>
           <p:cNvSpPr/>
           <p:nvPr/>
         </p:nvSpPr>
         <p:spPr>
           <a:xfrm>
-            <a:off x="731520" y="3172968"/>
-            <a:ext cx="10698480" cy="548640"/>
+            <a:off x="731520" y="4279392"/>
+            <a:ext cx="6766560" cy="530352"/>
           </a:xfrm>
           <a:prstGeom prst="roundRect">
             <a:avLst>
@@ -10485,14 +12868,14 @@
       </p:sp>
       <p:sp>
         <p:nvSpPr>
-          <p:cNvPr id="15" name="TextBox 14"/>
-          <p:cNvSpPr txBox="1"/>
-          <p:nvPr/>
-        </p:nvSpPr>
-        <p:spPr>
-          <a:xfrm>
-            <a:off x="868680" y="3218688"/>
-            <a:ext cx="3931920" cy="457200"/>
+          <p:cNvPr id="19" name="TextBox 18"/>
+          <p:cNvSpPr txBox="1"/>
+          <p:nvPr/>
+        </p:nvSpPr>
+        <p:spPr>
+          <a:xfrm>
+            <a:off x="868680" y="4325112"/>
+            <a:ext cx="1554480" cy="457200"/>
           </a:xfrm>
           <a:prstGeom prst="rect">
             <a:avLst/>
@@ -10511,27 +12894,66 @@
               </a:lnSpc>
             </a:pPr>
             <a:r>
-              <a:rPr sz="1300" b="1">
+              <a:rPr sz="1400" b="1">
+                <a:solidFill>
+                  <a:srgbClr val="5A1016"/>
+                </a:solidFill>
+                <a:latin typeface="Yu Gothic UI"/>
+              </a:rPr>
+              <a:t>震度 6 弱以上</a:t>
+            </a:r>
+          </a:p>
+        </p:txBody>
+      </p:sp>
+      <p:sp>
+        <p:nvSpPr>
+          <p:cNvPr id="20" name="TextBox 19"/>
+          <p:cNvSpPr txBox="1"/>
+          <p:nvPr/>
+        </p:nvSpPr>
+        <p:spPr>
+          <a:xfrm>
+            <a:off x="2377440" y="4325112"/>
+            <a:ext cx="2377440" cy="457200"/>
+          </a:xfrm>
+          <a:prstGeom prst="rect">
+            <a:avLst/>
+          </a:prstGeom>
+          <a:noFill/>
+        </p:spPr>
+        <p:txBody>
+          <a:bodyPr wrap="square" anchor="ctr" lIns="45720" rIns="45720" tIns="18288" bIns="18288">
+            <a:spAutoFit/>
+          </a:bodyPr>
+          <a:lstStyle/>
+          <a:p>
+            <a:pPr algn="l">
+              <a:lnSpc>
+                <a:spcPct val="115000"/>
+              </a:lnSpc>
+            </a:pPr>
+            <a:r>
+              <a:rPr sz="1250" b="0">
                 <a:solidFill>
                   <a:srgbClr val="14181D"/>
                 </a:solidFill>
                 <a:latin typeface="Yu Gothic UI"/>
               </a:rPr>
-              <a:t>気象庁 bosai JSON / P2P地震情報</a:t>
-            </a:r>
-          </a:p>
-        </p:txBody>
-      </p:sp>
-      <p:sp>
-        <p:nvSpPr>
-          <p:cNvPr id="16" name="TextBox 15"/>
-          <p:cNvSpPr txBox="1"/>
-          <p:nvPr/>
-        </p:nvSpPr>
-        <p:spPr>
-          <a:xfrm>
-            <a:off x="4846320" y="3218688"/>
-            <a:ext cx="2377440" cy="457200"/>
+              <a:t>被害が出る領域。点検だけでは終わらない</a:t>
+            </a:r>
+          </a:p>
+        </p:txBody>
+      </p:sp>
+      <p:sp>
+        <p:nvSpPr>
+          <p:cNvPr id="21" name="TextBox 20"/>
+          <p:cNvSpPr txBox="1"/>
+          <p:nvPr/>
+        </p:nvSpPr>
+        <p:spPr>
+          <a:xfrm>
+            <a:off x="4754880" y="4325112"/>
+            <a:ext cx="2743200" cy="457200"/>
           </a:xfrm>
           <a:prstGeom prst="rect">
             <a:avLst/>
@@ -10550,43 +12972,81 @@
               </a:lnSpc>
             </a:pPr>
             <a:r>
-              <a:rPr sz="1300" b="0">
+              <a:rPr sz="1250" b="1">
+                <a:solidFill>
+                  <a:srgbClr val="5A1016"/>
+                </a:solidFill>
+                <a:latin typeface="Yu Gothic UI"/>
+              </a:rPr>
+              <a:t>時間を出さない (日単位になりうる)</a:t>
+            </a:r>
+          </a:p>
+        </p:txBody>
+      </p:sp>
+      <p:sp>
+        <p:nvSpPr>
+          <p:cNvPr id="22" name="TextBox 21"/>
+          <p:cNvSpPr txBox="1"/>
+          <p:nvPr/>
+        </p:nvSpPr>
+        <p:spPr>
+          <a:xfrm>
+            <a:off x="731520" y="4956048"/>
+            <a:ext cx="6766560" cy="1280160"/>
+          </a:xfrm>
+          <a:prstGeom prst="rect">
+            <a:avLst/>
+          </a:prstGeom>
+          <a:noFill/>
+        </p:spPr>
+        <p:txBody>
+          <a:bodyPr wrap="square" anchor="t" lIns="45720" rIns="45720" tIns="18288" bIns="18288">
+            <a:spAutoFit/>
+          </a:bodyPr>
+          <a:lstStyle/>
+          <a:p>
+            <a:pPr algn="l">
+              <a:lnSpc>
+                <a:spcPct val="115000"/>
+              </a:lnSpc>
+            </a:pPr>
+            <a:r>
+              <a:rPr sz="1250" b="0">
                 <a:solidFill>
                   <a:srgbClr val="14181D"/>
                 </a:solidFill>
                 <a:latin typeface="Yu Gothic UI"/>
               </a:rPr>
-              <a:t>震度分布</a:t>
-            </a:r>
-          </a:p>
-        </p:txBody>
-      </p:sp>
-      <p:sp>
-        <p:nvSpPr>
-          <p:cNvPr id="17" name="TextBox 16"/>
-          <p:cNvSpPr txBox="1"/>
-          <p:nvPr/>
-        </p:nvSpPr>
-        <p:spPr>
-          <a:xfrm>
-            <a:off x="7223760" y="3218688"/>
-            <a:ext cx="4114800" cy="457200"/>
-          </a:xfrm>
-          <a:prstGeom prst="rect">
-            <a:avLst/>
-          </a:prstGeom>
-          <a:noFill/>
-        </p:spPr>
-        <p:txBody>
-          <a:bodyPr wrap="square" anchor="ctr" lIns="45720" rIns="45720" tIns="18288" bIns="18288">
-            <a:spAutoFit/>
-          </a:bodyPr>
-          <a:lstStyle/>
-          <a:p>
-            <a:pPr algn="l">
-              <a:lnSpc>
-                <a:spcPct val="115000"/>
-              </a:lnSpc>
+              <a:t>L (点検区間) は、震度 5 弱以上が当たった区間だけを 3 km 回廊で数える。営業キロが分かる 7 系統で較正 (1.7 km/セル、±40%)。</a:t>
+            </a:r>
+          </a:p>
+          <a:p>
+            <a:pPr algn="l">
+              <a:lnSpc>
+                <a:spcPct val="115000"/>
+              </a:lnSpc>
+              <a:spcBef>
+                <a:spcPts val="400"/>
+              </a:spcBef>
+            </a:pPr>
+            <a:r>
+              <a:rPr sz="1250" b="0">
+                <a:solidFill>
+                  <a:srgbClr val="14181D"/>
+                </a:solidFill>
+                <a:latin typeface="Yu Gothic UI"/>
+              </a:rPr>
+              <a:t>この ±40% と式の ±30 分を重ねたものが、画面の「51 分〜4 時間 26 分」の幅。精度を装わず、幅で言う。</a:t>
+            </a:r>
+          </a:p>
+          <a:p>
+            <a:pPr algn="l">
+              <a:lnSpc>
+                <a:spcPct val="115000"/>
+              </a:lnSpc>
+              <a:spcBef>
+                <a:spcPts val="400"/>
+              </a:spcBef>
             </a:pPr>
             <a:r>
               <a:rPr sz="1150" b="0">
@@ -10595,21 +13055,21 @@
                 </a:solidFill>
                 <a:latin typeface="Yu Gothic UI"/>
               </a:rPr>
-              <a:t>鍵なし・CORS 開放。英語の震源名も入っている</a:t>
-            </a:r>
-          </a:p>
-        </p:txBody>
-      </p:sp>
-      <p:sp>
-        <p:nvSpPr>
-          <p:cNvPr id="18" name="Rounded Rectangle 17"/>
+              <a:t>国土交通省「首都圏鉄道の運転再開のあり方に関する協議会」報告書 (2012) の実施基準の例 (震度 4 で 55 km/h 以下の注意運転、5 弱で 25 km/h 以下、5 強以上は点検まで運転中止) とも整合。</a:t>
+            </a:r>
+          </a:p>
+        </p:txBody>
+      </p:sp>
+      <p:sp>
+        <p:nvSpPr>
+          <p:cNvPr id="23" name="Rounded Rectangle 22"/>
           <p:cNvSpPr/>
           <p:nvPr/>
         </p:nvSpPr>
         <p:spPr>
           <a:xfrm>
-            <a:off x="731520" y="3776472"/>
-            <a:ext cx="10698480" cy="548640"/>
+            <a:off x="7863840" y="1874519"/>
+            <a:ext cx="3566160" cy="4206240"/>
           </a:xfrm>
           <a:prstGeom prst="roundRect">
             <a:avLst>
@@ -10617,7 +13077,7 @@
             </a:avLst>
           </a:prstGeom>
           <a:solidFill>
-            <a:srgbClr val="F4F5F7"/>
+            <a:srgbClr val="FBECEA"/>
           </a:solidFill>
           <a:ln>
             <a:noFill/>
@@ -10648,30 +13108,49 @@
       </p:sp>
       <p:sp>
         <p:nvSpPr>
-          <p:cNvPr id="19" name="TextBox 18"/>
-          <p:cNvSpPr txBox="1"/>
-          <p:nvPr/>
-        </p:nvSpPr>
-        <p:spPr>
-          <a:xfrm>
-            <a:off x="868680" y="3822192"/>
-            <a:ext cx="3931920" cy="457200"/>
-          </a:xfrm>
-          <a:prstGeom prst="rect">
-            <a:avLst/>
-          </a:prstGeom>
-          <a:noFill/>
-        </p:spPr>
-        <p:txBody>
-          <a:bodyPr wrap="square" anchor="ctr" lIns="45720" rIns="45720" tIns="18288" bIns="18288">
-            <a:spAutoFit/>
-          </a:bodyPr>
-          <a:lstStyle/>
-          <a:p>
-            <a:pPr algn="l">
-              <a:lnSpc>
-                <a:spcPct val="115000"/>
-              </a:lnSpc>
+          <p:cNvPr id="24" name="TextBox 23"/>
+          <p:cNvSpPr txBox="1"/>
+          <p:nvPr/>
+        </p:nvSpPr>
+        <p:spPr>
+          <a:xfrm>
+            <a:off x="8046720" y="2011680"/>
+            <a:ext cx="3200400" cy="3931920"/>
+          </a:xfrm>
+          <a:prstGeom prst="rect">
+            <a:avLst/>
+          </a:prstGeom>
+          <a:noFill/>
+        </p:spPr>
+        <p:txBody>
+          <a:bodyPr wrap="square" anchor="t" lIns="45720" rIns="45720" tIns="18288" bIns="18288">
+            <a:spAutoFit/>
+          </a:bodyPr>
+          <a:lstStyle/>
+          <a:p>
+            <a:pPr algn="l">
+              <a:lnSpc>
+                <a:spcPct val="115000"/>
+              </a:lnSpc>
+            </a:pPr>
+            <a:r>
+              <a:rPr sz="1600" b="1">
+                <a:solidFill>
+                  <a:srgbClr val="A4231C"/>
+                </a:solidFill>
+                <a:latin typeface="Yu Gothic UI"/>
+              </a:rPr>
+              <a:t>この見積もりの限界</a:t>
+            </a:r>
+          </a:p>
+          <a:p>
+            <a:pPr algn="l">
+              <a:lnSpc>
+                <a:spcPct val="115000"/>
+              </a:lnSpc>
+              <a:spcBef>
+                <a:spcPts val="1000"/>
+              </a:spcBef>
             </a:pPr>
             <a:r>
               <a:rPr sz="1300" b="1">
@@ -10680,161 +13159,33 @@
                 </a:solidFill>
                 <a:latin typeface="Yu Gothic UI"/>
               </a:rPr>
-              <a:t>気象庁 震度観測点一覧表</a:t>
-            </a:r>
-          </a:p>
-        </p:txBody>
-      </p:sp>
-      <p:sp>
-        <p:nvSpPr>
-          <p:cNvPr id="20" name="TextBox 19"/>
-          <p:cNvSpPr txBox="1"/>
-          <p:nvPr/>
-        </p:nvSpPr>
-        <p:spPr>
-          <a:xfrm>
-            <a:off x="4846320" y="3822192"/>
-            <a:ext cx="2377440" cy="457200"/>
-          </a:xfrm>
-          <a:prstGeom prst="rect">
-            <a:avLst/>
-          </a:prstGeom>
-          <a:noFill/>
-        </p:spPr>
-        <p:txBody>
-          <a:bodyPr wrap="square" anchor="ctr" lIns="45720" rIns="45720" tIns="18288" bIns="18288">
-            <a:spAutoFit/>
-          </a:bodyPr>
-          <a:lstStyle/>
-          <a:p>
-            <a:pPr algn="l">
-              <a:lnSpc>
-                <a:spcPct val="115000"/>
-              </a:lnSpc>
-            </a:pPr>
-            <a:r>
-              <a:rPr sz="1300" b="0">
+              <a:t>鉄道会社は気象庁の震度で判断していない。</a:t>
+            </a:r>
+          </a:p>
+          <a:p>
+            <a:pPr algn="l">
+              <a:lnSpc>
+                <a:spcPct val="115000"/>
+              </a:lnSpc>
+            </a:pPr>
+            <a:r>
+              <a:rPr sz="1200" b="0">
                 <a:solidFill>
                   <a:srgbClr val="14181D"/>
                 </a:solidFill>
                 <a:latin typeface="Yu Gothic UI"/>
               </a:rPr>
-              <a:t>観測点 → 座標</a:t>
-            </a:r>
-          </a:p>
-        </p:txBody>
-      </p:sp>
-      <p:sp>
-        <p:nvSpPr>
-          <p:cNvPr id="21" name="TextBox 20"/>
-          <p:cNvSpPr txBox="1"/>
-          <p:nvPr/>
-        </p:nvSpPr>
-        <p:spPr>
-          <a:xfrm>
-            <a:off x="7223760" y="3822192"/>
-            <a:ext cx="4114800" cy="457200"/>
-          </a:xfrm>
-          <a:prstGeom prst="rect">
-            <a:avLst/>
-          </a:prstGeom>
-          <a:noFill/>
-        </p:spPr>
-        <p:txBody>
-          <a:bodyPr wrap="square" anchor="ctr" lIns="45720" rIns="45720" tIns="18288" bIns="18288">
-            <a:spAutoFit/>
-          </a:bodyPr>
-          <a:lstStyle/>
-          <a:p>
-            <a:pPr algn="l">
-              <a:lnSpc>
-                <a:spcPct val="115000"/>
-              </a:lnSpc>
-            </a:pPr>
-            <a:r>
-              <a:rPr sz="1150" b="0">
-                <a:solidFill>
-                  <a:srgbClr val="5C6670"/>
-                </a:solidFill>
-                <a:latin typeface="Yu Gothic UI"/>
-              </a:rPr>
-              <a:t>199 地震 6,016 点で欠落ゼロ</a:t>
-            </a:r>
-          </a:p>
-        </p:txBody>
-      </p:sp>
-      <p:sp>
-        <p:nvSpPr>
-          <p:cNvPr id="22" name="Rounded Rectangle 21"/>
-          <p:cNvSpPr/>
-          <p:nvPr/>
-        </p:nvSpPr>
-        <p:spPr>
-          <a:xfrm>
-            <a:off x="731520" y="4379976"/>
-            <a:ext cx="10698480" cy="548640"/>
-          </a:xfrm>
-          <a:prstGeom prst="roundRect">
-            <a:avLst>
-              <a:gd name="adj" fmla="val 6000"/>
-            </a:avLst>
-          </a:prstGeom>
-          <a:solidFill>
-            <a:srgbClr val="F4F5F7"/>
-          </a:solidFill>
-          <a:ln>
-            <a:noFill/>
-          </a:ln>
-          <a:effectLst/>
-        </p:spPr>
-        <p:style>
-          <a:lnRef idx="1">
-            <a:schemeClr val="accent1"/>
-          </a:lnRef>
-          <a:fillRef idx="3">
-            <a:schemeClr val="accent1"/>
-          </a:fillRef>
-          <a:effectRef idx="2">
-            <a:schemeClr val="accent1"/>
-          </a:effectRef>
-          <a:fontRef idx="minor">
-            <a:schemeClr val="lt1"/>
-          </a:fontRef>
-        </p:style>
-        <p:txBody>
-          <a:bodyPr rtlCol="0" anchor="ctr"/>
-          <a:lstStyle/>
-          <a:p>
-            <a:pPr algn="ctr"/>
-          </a:p>
-        </p:txBody>
-      </p:sp>
-      <p:sp>
-        <p:nvSpPr>
-          <p:cNvPr id="23" name="TextBox 22"/>
-          <p:cNvSpPr txBox="1"/>
-          <p:nvPr/>
-        </p:nvSpPr>
-        <p:spPr>
-          <a:xfrm>
-            <a:off x="868680" y="4425696"/>
-            <a:ext cx="3931920" cy="457200"/>
-          </a:xfrm>
-          <a:prstGeom prst="rect">
-            <a:avLst/>
-          </a:prstGeom>
-          <a:noFill/>
-        </p:spPr>
-        <p:txBody>
-          <a:bodyPr wrap="square" anchor="ctr" lIns="45720" rIns="45720" tIns="18288" bIns="18288">
-            <a:spAutoFit/>
-          </a:bodyPr>
-          <a:lstStyle/>
-          <a:p>
-            <a:pPr algn="l">
-              <a:lnSpc>
-                <a:spcPct val="115000"/>
-              </a:lnSpc>
+              <a:t>各社は沿線の自前地震計の加速度 (gal) や SI 値で規制をかける。ここで使う震度は最大 20 km 離れた観測点の値で、代理指標にすぎない。</a:t>
+            </a:r>
+          </a:p>
+          <a:p>
+            <a:pPr algn="l">
+              <a:lnSpc>
+                <a:spcPct val="115000"/>
+              </a:lnSpc>
+              <a:spcBef>
+                <a:spcPts val="1000"/>
+              </a:spcBef>
             </a:pPr>
             <a:r>
               <a:rPr sz="1300" b="1">
@@ -10843,411 +13194,71 @@
                 </a:solidFill>
                 <a:latin typeface="Yu Gothic UI"/>
               </a:rPr>
-              <a:t>国土数値情報 N02-25 (CC BY 4.0)</a:t>
-            </a:r>
-          </a:p>
-        </p:txBody>
-      </p:sp>
-      <p:sp>
-        <p:nvSpPr>
-          <p:cNvPr id="24" name="TextBox 23"/>
-          <p:cNvSpPr txBox="1"/>
-          <p:nvPr/>
-        </p:nvSpPr>
-        <p:spPr>
-          <a:xfrm>
-            <a:off x="4846320" y="4425696"/>
-            <a:ext cx="2377440" cy="457200"/>
-          </a:xfrm>
-          <a:prstGeom prst="rect">
-            <a:avLst/>
-          </a:prstGeom>
-          <a:noFill/>
-        </p:spPr>
-        <p:txBody>
-          <a:bodyPr wrap="square" anchor="ctr" lIns="45720" rIns="45720" tIns="18288" bIns="18288">
-            <a:spAutoFit/>
-          </a:bodyPr>
-          <a:lstStyle/>
-          <a:p>
-            <a:pPr algn="l">
-              <a:lnSpc>
-                <a:spcPct val="115000"/>
-              </a:lnSpc>
-            </a:pPr>
-            <a:r>
-              <a:rPr sz="1300" b="0">
+              <a:t>だから</a:t>
+            </a:r>
+          </a:p>
+          <a:p>
+            <a:pPr algn="l">
+              <a:lnSpc>
+                <a:spcPct val="115000"/>
+              </a:lnSpc>
+            </a:pPr>
+            <a:r>
+              <a:rPr sz="1200" b="0">
                 <a:solidFill>
                   <a:srgbClr val="14181D"/>
                 </a:solidFill>
                 <a:latin typeface="Yu Gothic UI"/>
               </a:rPr>
-              <a:t>駅・線路の形</a:t>
-            </a:r>
-          </a:p>
-        </p:txBody>
-      </p:sp>
-      <p:sp>
-        <p:nvSpPr>
-          <p:cNvPr id="25" name="TextBox 24"/>
-          <p:cNvSpPr txBox="1"/>
-          <p:nvPr/>
-        </p:nvSpPr>
-        <p:spPr>
-          <a:xfrm>
-            <a:off x="7223760" y="4425696"/>
-            <a:ext cx="4114800" cy="457200"/>
-          </a:xfrm>
-          <a:prstGeom prst="rect">
-            <a:avLst/>
-          </a:prstGeom>
-          <a:noFill/>
-        </p:spPr>
-        <p:txBody>
-          <a:bodyPr wrap="square" anchor="ctr" lIns="45720" rIns="45720" tIns="18288" bIns="18288">
-            <a:spAutoFit/>
-          </a:bodyPr>
-          <a:lstStyle/>
-          <a:p>
-            <a:pPr algn="l">
-              <a:lnSpc>
-                <a:spcPct val="115000"/>
-              </a:lnSpc>
-            </a:pPr>
-            <a:r>
-              <a:rPr sz="1150" b="0">
-                <a:solidFill>
-                  <a:srgbClr val="5C6670"/>
-                </a:solidFill>
-                <a:latin typeface="Yu Gothic UI"/>
-              </a:rPr>
-              <a:t>同梱して配れる。空港アクセス路線が揃う</a:t>
-            </a:r>
-          </a:p>
-        </p:txBody>
-      </p:sp>
-      <p:sp>
-        <p:nvSpPr>
-          <p:cNvPr id="26" name="Rounded Rectangle 25"/>
-          <p:cNvSpPr/>
-          <p:nvPr/>
-        </p:nvSpPr>
-        <p:spPr>
-          <a:xfrm>
-            <a:off x="731520" y="4983480"/>
-            <a:ext cx="10698480" cy="548640"/>
-          </a:xfrm>
-          <a:prstGeom prst="roundRect">
-            <a:avLst>
-              <a:gd name="adj" fmla="val 6000"/>
-            </a:avLst>
-          </a:prstGeom>
-          <a:solidFill>
-            <a:srgbClr val="F4F5F7"/>
-          </a:solidFill>
-          <a:ln>
-            <a:noFill/>
-          </a:ln>
-          <a:effectLst/>
-        </p:spPr>
-        <p:style>
-          <a:lnRef idx="1">
-            <a:schemeClr val="accent1"/>
-          </a:lnRef>
-          <a:fillRef idx="3">
-            <a:schemeClr val="accent1"/>
-          </a:fillRef>
-          <a:effectRef idx="2">
-            <a:schemeClr val="accent1"/>
-          </a:effectRef>
-          <a:fontRef idx="minor">
-            <a:schemeClr val="lt1"/>
-          </a:fontRef>
-        </p:style>
-        <p:txBody>
-          <a:bodyPr rtlCol="0" anchor="ctr"/>
-          <a:lstStyle/>
-          <a:p>
-            <a:pPr algn="ctr"/>
-          </a:p>
-        </p:txBody>
-      </p:sp>
-      <p:sp>
-        <p:nvSpPr>
-          <p:cNvPr id="27" name="TextBox 26"/>
-          <p:cNvSpPr txBox="1"/>
-          <p:nvPr/>
-        </p:nvSpPr>
-        <p:spPr>
-          <a:xfrm>
-            <a:off x="868680" y="5029200"/>
-            <a:ext cx="3931920" cy="457200"/>
-          </a:xfrm>
-          <a:prstGeom prst="rect">
-            <a:avLst/>
-          </a:prstGeom>
-          <a:noFill/>
-        </p:spPr>
-        <p:txBody>
-          <a:bodyPr wrap="square" anchor="ctr" lIns="45720" rIns="45720" tIns="18288" bIns="18288">
-            <a:spAutoFit/>
-          </a:bodyPr>
-          <a:lstStyle/>
-          <a:p>
-            <a:pPr algn="l">
-              <a:lnSpc>
-                <a:spcPct val="115000"/>
-              </a:lnSpc>
-            </a:pPr>
-            <a:r>
-              <a:rPr sz="1300" b="1">
+              <a:t>・幅で出し、断定しない</a:t>
+            </a:r>
+          </a:p>
+          <a:p>
+            <a:pPr algn="l">
+              <a:lnSpc>
+                <a:spcPct val="115000"/>
+              </a:lnSpc>
+            </a:pPr>
+            <a:r>
+              <a:rPr sz="1200" b="0">
                 <a:solidFill>
                   <a:srgbClr val="14181D"/>
                 </a:solidFill>
                 <a:latin typeface="Yu Gothic UI"/>
               </a:rPr>
-              <a:t>国土地理院 避難場所・逆ジオコーダ・タイル</a:t>
-            </a:r>
-          </a:p>
-        </p:txBody>
-      </p:sp>
-      <p:sp>
-        <p:nvSpPr>
-          <p:cNvPr id="28" name="TextBox 27"/>
-          <p:cNvSpPr txBox="1"/>
-          <p:nvPr/>
-        </p:nvSpPr>
-        <p:spPr>
-          <a:xfrm>
-            <a:off x="4846320" y="5029200"/>
-            <a:ext cx="2377440" cy="457200"/>
-          </a:xfrm>
-          <a:prstGeom prst="rect">
-            <a:avLst/>
-          </a:prstGeom>
-          <a:noFill/>
-        </p:spPr>
-        <p:txBody>
-          <a:bodyPr wrap="square" anchor="ctr" lIns="45720" rIns="45720" tIns="18288" bIns="18288">
-            <a:spAutoFit/>
-          </a:bodyPr>
-          <a:lstStyle/>
-          <a:p>
-            <a:pPr algn="l">
-              <a:lnSpc>
-                <a:spcPct val="115000"/>
-              </a:lnSpc>
-            </a:pPr>
-            <a:r>
-              <a:rPr sz="1300" b="0">
+              <a:t>・「鉄道会社の判断ではなく推定」と毎回表示</a:t>
+            </a:r>
+          </a:p>
+          <a:p>
+            <a:pPr algn="l">
+              <a:lnSpc>
+                <a:spcPct val="115000"/>
+              </a:lnSpc>
+            </a:pPr>
+            <a:r>
+              <a:rPr sz="1200" b="0">
                 <a:solidFill>
                   <a:srgbClr val="14181D"/>
                 </a:solidFill>
                 <a:latin typeface="Yu Gothic UI"/>
               </a:rPr>
-              <a:t>逃げる先・現在地の住所・地図</a:t>
-            </a:r>
-          </a:p>
-        </p:txBody>
-      </p:sp>
-      <p:sp>
-        <p:nvSpPr>
-          <p:cNvPr id="29" name="TextBox 28"/>
-          <p:cNvSpPr txBox="1"/>
-          <p:nvPr/>
-        </p:nvSpPr>
-        <p:spPr>
-          <a:xfrm>
-            <a:off x="7223760" y="5029200"/>
-            <a:ext cx="4114800" cy="457200"/>
-          </a:xfrm>
-          <a:prstGeom prst="rect">
-            <a:avLst/>
-          </a:prstGeom>
-          <a:noFill/>
-        </p:spPr>
-        <p:txBody>
-          <a:bodyPr wrap="square" anchor="ctr" lIns="45720" rIns="45720" tIns="18288" bIns="18288">
-            <a:spAutoFit/>
-          </a:bodyPr>
-          <a:lstStyle/>
-          <a:p>
-            <a:pPr algn="l">
-              <a:lnSpc>
-                <a:spcPct val="115000"/>
-              </a:lnSpc>
-            </a:pPr>
-            <a:r>
-              <a:rPr sz="1150" b="0">
-                <a:solidFill>
-                  <a:srgbClr val="5C6670"/>
-                </a:solidFill>
-                <a:latin typeface="Yu Gothic UI"/>
-              </a:rPr>
-              <a:t>住所は見せれば伝わる</a:t>
-            </a:r>
-          </a:p>
-        </p:txBody>
-      </p:sp>
-      <p:sp>
-        <p:nvSpPr>
-          <p:cNvPr id="30" name="Rounded Rectangle 29"/>
-          <p:cNvSpPr/>
-          <p:nvPr/>
-        </p:nvSpPr>
-        <p:spPr>
-          <a:xfrm>
-            <a:off x="731520" y="5586984"/>
-            <a:ext cx="10698480" cy="548640"/>
-          </a:xfrm>
-          <a:prstGeom prst="roundRect">
-            <a:avLst>
-              <a:gd name="adj" fmla="val 6000"/>
-            </a:avLst>
-          </a:prstGeom>
-          <a:solidFill>
-            <a:srgbClr val="F4F5F7"/>
-          </a:solidFill>
-          <a:ln>
-            <a:noFill/>
-          </a:ln>
-          <a:effectLst/>
-        </p:spPr>
-        <p:style>
-          <a:lnRef idx="1">
-            <a:schemeClr val="accent1"/>
-          </a:lnRef>
-          <a:fillRef idx="3">
-            <a:schemeClr val="accent1"/>
-          </a:fillRef>
-          <a:effectRef idx="2">
-            <a:schemeClr val="accent1"/>
-          </a:effectRef>
-          <a:fontRef idx="minor">
-            <a:schemeClr val="lt1"/>
-          </a:fontRef>
-        </p:style>
-        <p:txBody>
-          <a:bodyPr rtlCol="0" anchor="ctr"/>
-          <a:lstStyle/>
-          <a:p>
-            <a:pPr algn="ctr"/>
-          </a:p>
-        </p:txBody>
-      </p:sp>
-      <p:sp>
-        <p:nvSpPr>
-          <p:cNvPr id="31" name="TextBox 30"/>
-          <p:cNvSpPr txBox="1"/>
-          <p:nvPr/>
-        </p:nvSpPr>
-        <p:spPr>
-          <a:xfrm>
-            <a:off x="868680" y="5632704"/>
-            <a:ext cx="3931920" cy="457200"/>
-          </a:xfrm>
-          <a:prstGeom prst="rect">
-            <a:avLst/>
-          </a:prstGeom>
-          <a:noFill/>
-        </p:spPr>
-        <p:txBody>
-          <a:bodyPr wrap="square" anchor="ctr" lIns="45720" rIns="45720" tIns="18288" bIns="18288">
-            <a:spAutoFit/>
-          </a:bodyPr>
-          <a:lstStyle/>
-          <a:p>
-            <a:pPr algn="l">
-              <a:lnSpc>
-                <a:spcPct val="115000"/>
-              </a:lnSpc>
-            </a:pPr>
-            <a:r>
-              <a:rPr sz="1300" b="1">
+              <a:t>・実際に止まっているかは ODPT 運行情報で確定</a:t>
+            </a:r>
+          </a:p>
+          <a:p>
+            <a:pPr algn="l">
+              <a:lnSpc>
+                <a:spcPct val="115000"/>
+              </a:lnSpc>
+            </a:pPr>
+            <a:r>
+              <a:rPr sz="1200" b="0">
                 <a:solidFill>
                   <a:srgbClr val="14181D"/>
                 </a:solidFill>
                 <a:latin typeface="Yu Gothic UI"/>
               </a:rPr>
-              <a:t>東京都 一時滞在施設 (CC BY 4.0)</a:t>
-            </a:r>
-          </a:p>
-        </p:txBody>
-      </p:sp>
-      <p:sp>
-        <p:nvSpPr>
-          <p:cNvPr id="32" name="TextBox 31"/>
-          <p:cNvSpPr txBox="1"/>
-          <p:nvPr/>
-        </p:nvSpPr>
-        <p:spPr>
-          <a:xfrm>
-            <a:off x="4846320" y="5632704"/>
-            <a:ext cx="2377440" cy="457200"/>
-          </a:xfrm>
-          <a:prstGeom prst="rect">
-            <a:avLst/>
-          </a:prstGeom>
-          <a:noFill/>
-        </p:spPr>
-        <p:txBody>
-          <a:bodyPr wrap="square" anchor="ctr" lIns="45720" rIns="45720" tIns="18288" bIns="18288">
-            <a:spAutoFit/>
-          </a:bodyPr>
-          <a:lstStyle/>
-          <a:p>
-            <a:pPr algn="l">
-              <a:lnSpc>
-                <a:spcPct val="115000"/>
-              </a:lnSpc>
-            </a:pPr>
-            <a:r>
-              <a:rPr sz="1300" b="0">
-                <a:solidFill>
-                  <a:srgbClr val="14181D"/>
-                </a:solidFill>
-                <a:latin typeface="Yu Gothic UI"/>
-              </a:rPr>
-              <a:t>帰宅困難者が休む場所</a:t>
-            </a:r>
-          </a:p>
-        </p:txBody>
-      </p:sp>
-      <p:sp>
-        <p:nvSpPr>
-          <p:cNvPr id="33" name="TextBox 32"/>
-          <p:cNvSpPr txBox="1"/>
-          <p:nvPr/>
-        </p:nvSpPr>
-        <p:spPr>
-          <a:xfrm>
-            <a:off x="7223760" y="5632704"/>
-            <a:ext cx="4114800" cy="457200"/>
-          </a:xfrm>
-          <a:prstGeom prst="rect">
-            <a:avLst/>
-          </a:prstGeom>
-          <a:noFill/>
-        </p:spPr>
-        <p:txBody>
-          <a:bodyPr wrap="square" anchor="ctr" lIns="45720" rIns="45720" tIns="18288" bIns="18288">
-            <a:spAutoFit/>
-          </a:bodyPr>
-          <a:lstStyle/>
-          <a:p>
-            <a:pPr algn="l">
-              <a:lnSpc>
-                <a:spcPct val="115000"/>
-              </a:lnSpc>
-            </a:pPr>
-            <a:r>
-              <a:rPr sz="1150" b="0">
-                <a:solidFill>
-                  <a:srgbClr val="5C6670"/>
-                </a:solidFill>
-                <a:latin typeface="Yu Gothic UI"/>
-              </a:rPr>
-              <a:t>「逃げる」と「休む」は違う</a:t>
+              <a:t>・6 弱以上は時間を出さない</a:t>
             </a:r>
           </a:p>
         </p:txBody>
@@ -11382,7 +13393,7 @@
                 </a:solidFill>
                 <a:latin typeface="Yu Gothic UI"/>
               </a:rPr>
-              <a:t>実際の地震で</a:t>
+              <a:t>オープンデータの使い方</a:t>
             </a:r>
           </a:p>
         </p:txBody>
@@ -11396,7 +13407,7 @@
         <p:spPr>
           <a:xfrm>
             <a:off x="731520" y="868680"/>
-            <a:ext cx="7498079" cy="1280160"/>
+            <a:ext cx="10515600" cy="1280160"/>
           </a:xfrm>
           <a:prstGeom prst="rect">
             <a:avLst/>
@@ -11415,144 +13426,27 @@
               </a:lnSpc>
             </a:pPr>
             <a:r>
-              <a:rPr sz="3000" b="1">
+              <a:rPr sz="3400" b="1">
                 <a:solidFill>
                   <a:srgbClr val="14181D"/>
                 </a:solidFill>
                 <a:latin typeface="Yu Gothic UI"/>
               </a:rPr>
-              <a:t>2026-08-23 茨城県南部 M5.9 を実データで</a:t>
-            </a:r>
-          </a:p>
-        </p:txBody>
-      </p:sp>
-      <p:sp>
-        <p:nvSpPr>
-          <p:cNvPr id="6" name="TextBox 5"/>
-          <p:cNvSpPr txBox="1"/>
-          <p:nvPr/>
-        </p:nvSpPr>
-        <p:spPr>
-          <a:xfrm>
-            <a:off x="731520" y="2011680"/>
-            <a:ext cx="2743200" cy="365760"/>
-          </a:xfrm>
-          <a:prstGeom prst="rect">
-            <a:avLst/>
-          </a:prstGeom>
-          <a:noFill/>
-        </p:spPr>
-        <p:txBody>
-          <a:bodyPr wrap="square" anchor="t" lIns="45720" rIns="45720" tIns="18288" bIns="18288">
-            <a:spAutoFit/>
-          </a:bodyPr>
-          <a:lstStyle/>
-          <a:p>
-            <a:pPr algn="l">
-              <a:lnSpc>
-                <a:spcPct val="115000"/>
-              </a:lnSpc>
-            </a:pPr>
-            <a:r>
-              <a:rPr sz="1200" b="1">
-                <a:solidFill>
-                  <a:srgbClr val="5C6670"/>
-                </a:solidFill>
-                <a:latin typeface="Yu Gothic UI"/>
-              </a:rPr>
-              <a:t>系統</a:t>
-            </a:r>
-          </a:p>
-        </p:txBody>
-      </p:sp>
-      <p:sp>
-        <p:nvSpPr>
-          <p:cNvPr id="7" name="TextBox 6"/>
-          <p:cNvSpPr txBox="1"/>
-          <p:nvPr/>
-        </p:nvSpPr>
-        <p:spPr>
-          <a:xfrm>
-            <a:off x="3474720" y="2011680"/>
-            <a:ext cx="1097280" cy="365760"/>
-          </a:xfrm>
-          <a:prstGeom prst="rect">
-            <a:avLst/>
-          </a:prstGeom>
-          <a:noFill/>
-        </p:spPr>
-        <p:txBody>
-          <a:bodyPr wrap="square" anchor="t" lIns="45720" rIns="45720" tIns="18288" bIns="18288">
-            <a:spAutoFit/>
-          </a:bodyPr>
-          <a:lstStyle/>
-          <a:p>
-            <a:pPr algn="l">
-              <a:lnSpc>
-                <a:spcPct val="115000"/>
-              </a:lnSpc>
-            </a:pPr>
-            <a:r>
-              <a:rPr sz="1200" b="1">
-                <a:solidFill>
-                  <a:srgbClr val="5C6670"/>
-                </a:solidFill>
-                <a:latin typeface="Yu Gothic UI"/>
-              </a:rPr>
-              <a:t>震度</a:t>
-            </a:r>
-          </a:p>
-        </p:txBody>
-      </p:sp>
-      <p:sp>
-        <p:nvSpPr>
-          <p:cNvPr id="8" name="TextBox 7"/>
-          <p:cNvSpPr txBox="1"/>
-          <p:nvPr/>
-        </p:nvSpPr>
-        <p:spPr>
-          <a:xfrm>
-            <a:off x="4572000" y="2011680"/>
-            <a:ext cx="3200400" cy="365760"/>
-          </a:xfrm>
-          <a:prstGeom prst="rect">
-            <a:avLst/>
-          </a:prstGeom>
-          <a:noFill/>
-        </p:spPr>
-        <p:txBody>
-          <a:bodyPr wrap="square" anchor="t" lIns="45720" rIns="45720" tIns="18288" bIns="18288">
-            <a:spAutoFit/>
-          </a:bodyPr>
-          <a:lstStyle/>
-          <a:p>
-            <a:pPr algn="l">
-              <a:lnSpc>
-                <a:spcPct val="115000"/>
-              </a:lnSpc>
-            </a:pPr>
-            <a:r>
-              <a:rPr sz="1200" b="1">
-                <a:solidFill>
-                  <a:srgbClr val="5C6670"/>
-                </a:solidFill>
-                <a:latin typeface="Yu Gothic UI"/>
-              </a:rPr>
-              <a:t>再開まで (推定)</a:t>
-            </a:r>
-          </a:p>
-        </p:txBody>
-      </p:sp>
-      <p:sp>
-        <p:nvSpPr>
-          <p:cNvPr id="9" name="Rounded Rectangle 8"/>
+              <a:t>運行情報を「主」ではなく「推定を終わらせる手段」として使う</a:t>
+            </a:r>
+          </a:p>
+        </p:txBody>
+      </p:sp>
+      <p:sp>
+        <p:nvSpPr>
+          <p:cNvPr id="6" name="Rounded Rectangle 5"/>
           <p:cNvSpPr/>
           <p:nvPr/>
         </p:nvSpPr>
         <p:spPr>
           <a:xfrm>
-            <a:off x="731520" y="2377440"/>
-            <a:ext cx="7040880" cy="502920"/>
+            <a:off x="731520" y="1965960"/>
+            <a:ext cx="10698480" cy="548640"/>
           </a:xfrm>
           <a:prstGeom prst="roundRect">
             <a:avLst>
@@ -11560,7 +13454,7 @@
             </a:avLst>
           </a:prstGeom>
           <a:solidFill>
-            <a:srgbClr val="F4F5F7"/>
+            <a:srgbClr val="FBECEA"/>
           </a:solidFill>
           <a:ln>
             <a:noFill/>
@@ -11591,14 +13485,14 @@
       </p:sp>
       <p:sp>
         <p:nvSpPr>
-          <p:cNvPr id="10" name="TextBox 9"/>
-          <p:cNvSpPr txBox="1"/>
-          <p:nvPr/>
-        </p:nvSpPr>
-        <p:spPr>
-          <a:xfrm>
-            <a:off x="868680" y="2423160"/>
-            <a:ext cx="2651760" cy="411480"/>
+          <p:cNvPr id="7" name="TextBox 6"/>
+          <p:cNvSpPr txBox="1"/>
+          <p:nvPr/>
+        </p:nvSpPr>
+        <p:spPr>
+          <a:xfrm>
+            <a:off x="868680" y="2011680"/>
+            <a:ext cx="3931920" cy="457200"/>
           </a:xfrm>
           <a:prstGeom prst="rect">
             <a:avLst/>
@@ -11617,27 +13511,27 @@
               </a:lnSpc>
             </a:pPr>
             <a:r>
-              <a:rPr sz="1500" b="1">
-                <a:solidFill>
-                  <a:srgbClr val="14181D"/>
-                </a:solidFill>
-                <a:latin typeface="Yu Gothic UI"/>
-              </a:rPr>
-              <a:t>山手線</a:t>
-            </a:r>
-          </a:p>
-        </p:txBody>
-      </p:sp>
-      <p:sp>
-        <p:nvSpPr>
-          <p:cNvPr id="11" name="TextBox 10"/>
-          <p:cNvSpPr txBox="1"/>
-          <p:nvPr/>
-        </p:nvSpPr>
-        <p:spPr>
-          <a:xfrm>
-            <a:off x="3474720" y="2423160"/>
-            <a:ext cx="1097280" cy="411480"/>
+              <a:rPr sz="1300" b="1">
+                <a:solidFill>
+                  <a:srgbClr val="A4231C"/>
+                </a:solidFill>
+                <a:latin typeface="Yu Gothic UI"/>
+              </a:rPr>
+              <a:t>ODPT  odpt:Railway / odpt:Station</a:t>
+            </a:r>
+          </a:p>
+        </p:txBody>
+      </p:sp>
+      <p:sp>
+        <p:nvSpPr>
+          <p:cNvPr id="8" name="TextBox 7"/>
+          <p:cNvSpPr txBox="1"/>
+          <p:nvPr/>
+        </p:nvSpPr>
+        <p:spPr>
+          <a:xfrm>
+            <a:off x="4846320" y="2011680"/>
+            <a:ext cx="2377440" cy="457200"/>
           </a:xfrm>
           <a:prstGeom prst="rect">
             <a:avLst/>
@@ -11656,27 +13550,27 @@
               </a:lnSpc>
             </a:pPr>
             <a:r>
-              <a:rPr sz="1500" b="0">
-                <a:solidFill>
-                  <a:srgbClr val="14181D"/>
-                </a:solidFill>
-                <a:latin typeface="Yu Gothic UI"/>
-              </a:rPr>
-              <a:t>5 弱</a:t>
-            </a:r>
-          </a:p>
-        </p:txBody>
-      </p:sp>
-      <p:sp>
-        <p:nvSpPr>
-          <p:cNvPr id="12" name="TextBox 11"/>
-          <p:cNvSpPr txBox="1"/>
-          <p:nvPr/>
-        </p:nvSpPr>
-        <p:spPr>
-          <a:xfrm>
-            <a:off x="4572000" y="2423160"/>
-            <a:ext cx="3200400" cy="411480"/>
+              <a:rPr sz="1300" b="0">
+                <a:solidFill>
+                  <a:srgbClr val="A4231C"/>
+                </a:solidFill>
+                <a:latin typeface="Yu Gothic UI"/>
+              </a:rPr>
+              <a:t>線路名称 → 運転系統の対応表</a:t>
+            </a:r>
+          </a:p>
+        </p:txBody>
+      </p:sp>
+      <p:sp>
+        <p:nvSpPr>
+          <p:cNvPr id="9" name="TextBox 8"/>
+          <p:cNvSpPr txBox="1"/>
+          <p:nvPr/>
+        </p:nvSpPr>
+        <p:spPr>
+          <a:xfrm>
+            <a:off x="7223760" y="2011680"/>
+            <a:ext cx="4114800" cy="457200"/>
           </a:xfrm>
           <a:prstGeom prst="rect">
             <a:avLst/>
@@ -11695,27 +13589,27 @@
               </a:lnSpc>
             </a:pPr>
             <a:r>
-              <a:rPr sz="1500" b="1">
-                <a:solidFill>
-                  <a:srgbClr val="A4231C"/>
-                </a:solidFill>
-                <a:latin typeface="Yu Gothic UI"/>
-              </a:rPr>
-              <a:t>1 時間 44 分 〜 5 時間 35 分</a:t>
-            </a:r>
-          </a:p>
-        </p:txBody>
-      </p:sp>
-      <p:sp>
-        <p:nvSpPr>
-          <p:cNvPr id="13" name="Rounded Rectangle 12"/>
+              <a:rPr sz="1150" b="0">
+                <a:solidFill>
+                  <a:srgbClr val="5C6670"/>
+                </a:solidFill>
+                <a:latin typeface="Yu Gothic UI"/>
+              </a:rPr>
+              <a:t>N02 の山手線は 17 駅。運行情報も系統単位で来る</a:t>
+            </a:r>
+          </a:p>
+        </p:txBody>
+      </p:sp>
+      <p:sp>
+        <p:nvSpPr>
+          <p:cNvPr id="10" name="Rounded Rectangle 9"/>
           <p:cNvSpPr/>
           <p:nvPr/>
         </p:nvSpPr>
         <p:spPr>
           <a:xfrm>
-            <a:off x="731520" y="2944368"/>
-            <a:ext cx="7040880" cy="502920"/>
+            <a:off x="731520" y="2569464"/>
+            <a:ext cx="10698480" cy="548640"/>
           </a:xfrm>
           <a:prstGeom prst="roundRect">
             <a:avLst>
@@ -11723,7 +13617,7 @@
             </a:avLst>
           </a:prstGeom>
           <a:solidFill>
-            <a:srgbClr val="F4F5F7"/>
+            <a:srgbClr val="FBECEA"/>
           </a:solidFill>
           <a:ln>
             <a:noFill/>
@@ -11754,14 +13648,14 @@
       </p:sp>
       <p:sp>
         <p:nvSpPr>
-          <p:cNvPr id="14" name="TextBox 13"/>
-          <p:cNvSpPr txBox="1"/>
-          <p:nvPr/>
-        </p:nvSpPr>
-        <p:spPr>
-          <a:xfrm>
-            <a:off x="868680" y="2990088"/>
-            <a:ext cx="2651760" cy="411480"/>
+          <p:cNvPr id="11" name="TextBox 10"/>
+          <p:cNvSpPr txBox="1"/>
+          <p:nvPr/>
+        </p:nvSpPr>
+        <p:spPr>
+          <a:xfrm>
+            <a:off x="868680" y="2615184"/>
+            <a:ext cx="3931920" cy="457200"/>
           </a:xfrm>
           <a:prstGeom prst="rect">
             <a:avLst/>
@@ -11780,27 +13674,27 @@
               </a:lnSpc>
             </a:pPr>
             <a:r>
-              <a:rPr sz="1500" b="1">
-                <a:solidFill>
-                  <a:srgbClr val="14181D"/>
-                </a:solidFill>
-                <a:latin typeface="Yu Gothic UI"/>
-              </a:rPr>
-              <a:t>中央線快速</a:t>
-            </a:r>
-          </a:p>
-        </p:txBody>
-      </p:sp>
-      <p:sp>
-        <p:nvSpPr>
-          <p:cNvPr id="15" name="TextBox 14"/>
-          <p:cNvSpPr txBox="1"/>
-          <p:nvPr/>
-        </p:nvSpPr>
-        <p:spPr>
-          <a:xfrm>
-            <a:off x="3474720" y="2990088"/>
-            <a:ext cx="1097280" cy="411480"/>
+              <a:rPr sz="1300" b="1">
+                <a:solidFill>
+                  <a:srgbClr val="A4231C"/>
+                </a:solidFill>
+                <a:latin typeface="Yu Gothic UI"/>
+              </a:rPr>
+              <a:t>ODPT  odpt:TrainInformation</a:t>
+            </a:r>
+          </a:p>
+        </p:txBody>
+      </p:sp>
+      <p:sp>
+        <p:nvSpPr>
+          <p:cNvPr id="12" name="TextBox 11"/>
+          <p:cNvSpPr txBox="1"/>
+          <p:nvPr/>
+        </p:nvSpPr>
+        <p:spPr>
+          <a:xfrm>
+            <a:off x="4846320" y="2615184"/>
+            <a:ext cx="2377440" cy="457200"/>
           </a:xfrm>
           <a:prstGeom prst="rect">
             <a:avLst/>
@@ -11819,27 +13713,27 @@
               </a:lnSpc>
             </a:pPr>
             <a:r>
-              <a:rPr sz="1500" b="0">
-                <a:solidFill>
-                  <a:srgbClr val="14181D"/>
-                </a:solidFill>
-                <a:latin typeface="Yu Gothic UI"/>
-              </a:rPr>
-              <a:t>5 弱</a:t>
-            </a:r>
-          </a:p>
-        </p:txBody>
-      </p:sp>
-      <p:sp>
-        <p:nvSpPr>
-          <p:cNvPr id="16" name="TextBox 15"/>
-          <p:cNvSpPr txBox="1"/>
-          <p:nvPr/>
-        </p:nvSpPr>
-        <p:spPr>
-          <a:xfrm>
-            <a:off x="4572000" y="2990088"/>
-            <a:ext cx="3200400" cy="411480"/>
+              <a:rPr sz="1300" b="0">
+                <a:solidFill>
+                  <a:srgbClr val="A4231C"/>
+                </a:solidFill>
+                <a:latin typeface="Yu Gothic UI"/>
+              </a:rPr>
+              <a:t>推定を終わらせる</a:t>
+            </a:r>
+          </a:p>
+        </p:txBody>
+      </p:sp>
+      <p:sp>
+        <p:nvSpPr>
+          <p:cNvPr id="13" name="TextBox 12"/>
+          <p:cNvSpPr txBox="1"/>
+          <p:nvPr/>
+        </p:nvSpPr>
+        <p:spPr>
+          <a:xfrm>
+            <a:off x="7223760" y="2615184"/>
+            <a:ext cx="4114800" cy="457200"/>
           </a:xfrm>
           <a:prstGeom prst="rect">
             <a:avLst/>
@@ -11858,27 +13752,27 @@
               </a:lnSpc>
             </a:pPr>
             <a:r>
-              <a:rPr sz="1500" b="1">
-                <a:solidFill>
-                  <a:srgbClr val="A4231C"/>
-                </a:solidFill>
-                <a:latin typeface="Yu Gothic UI"/>
-              </a:rPr>
-              <a:t>1 時間 13 分 〜 4 時間 23 分</a:t>
-            </a:r>
-          </a:p>
-        </p:txBody>
-      </p:sp>
-      <p:sp>
-        <p:nvSpPr>
-          <p:cNvPr id="17" name="Rounded Rectangle 16"/>
+              <a:rPr sz="1150" b="0">
+                <a:solidFill>
+                  <a:srgbClr val="5C6670"/>
+                </a:solidFill>
+                <a:latin typeface="Yu Gothic UI"/>
+              </a:rPr>
+              <a:t>推定は上限まで「止まっている」と言い続ける。事業者が平常と言えば捨てる</a:t>
+            </a:r>
+          </a:p>
+        </p:txBody>
+      </p:sp>
+      <p:sp>
+        <p:nvSpPr>
+          <p:cNvPr id="14" name="Rounded Rectangle 13"/>
           <p:cNvSpPr/>
           <p:nvPr/>
         </p:nvSpPr>
         <p:spPr>
           <a:xfrm>
-            <a:off x="731520" y="3511296"/>
-            <a:ext cx="7040880" cy="502920"/>
+            <a:off x="731520" y="3172968"/>
+            <a:ext cx="10698480" cy="548640"/>
           </a:xfrm>
           <a:prstGeom prst="roundRect">
             <a:avLst>
@@ -11917,14 +13811,14 @@
       </p:sp>
       <p:sp>
         <p:nvSpPr>
-          <p:cNvPr id="18" name="TextBox 17"/>
-          <p:cNvSpPr txBox="1"/>
-          <p:nvPr/>
-        </p:nvSpPr>
-        <p:spPr>
-          <a:xfrm>
-            <a:off x="868680" y="3557016"/>
-            <a:ext cx="2651760" cy="411480"/>
+          <p:cNvPr id="15" name="TextBox 14"/>
+          <p:cNvSpPr txBox="1"/>
+          <p:nvPr/>
+        </p:nvSpPr>
+        <p:spPr>
+          <a:xfrm>
+            <a:off x="868680" y="3218688"/>
+            <a:ext cx="3931920" cy="457200"/>
           </a:xfrm>
           <a:prstGeom prst="rect">
             <a:avLst/>
@@ -11943,27 +13837,27 @@
               </a:lnSpc>
             </a:pPr>
             <a:r>
-              <a:rPr sz="1500" b="1">
+              <a:rPr sz="1300" b="1">
                 <a:solidFill>
                   <a:srgbClr val="14181D"/>
                 </a:solidFill>
                 <a:latin typeface="Yu Gothic UI"/>
               </a:rPr>
-              <a:t>京浜東北線・根岸線</a:t>
-            </a:r>
-          </a:p>
-        </p:txBody>
-      </p:sp>
-      <p:sp>
-        <p:nvSpPr>
-          <p:cNvPr id="19" name="TextBox 18"/>
-          <p:cNvSpPr txBox="1"/>
-          <p:nvPr/>
-        </p:nvSpPr>
-        <p:spPr>
-          <a:xfrm>
-            <a:off x="3474720" y="3557016"/>
-            <a:ext cx="1097280" cy="411480"/>
+              <a:t>気象庁 bosai JSON / P2P地震情報</a:t>
+            </a:r>
+          </a:p>
+        </p:txBody>
+      </p:sp>
+      <p:sp>
+        <p:nvSpPr>
+          <p:cNvPr id="16" name="TextBox 15"/>
+          <p:cNvSpPr txBox="1"/>
+          <p:nvPr/>
+        </p:nvSpPr>
+        <p:spPr>
+          <a:xfrm>
+            <a:off x="4846320" y="3218688"/>
+            <a:ext cx="2377440" cy="457200"/>
           </a:xfrm>
           <a:prstGeom prst="rect">
             <a:avLst/>
@@ -11982,27 +13876,27 @@
               </a:lnSpc>
             </a:pPr>
             <a:r>
-              <a:rPr sz="1500" b="0">
+              <a:rPr sz="1300" b="0">
                 <a:solidFill>
                   <a:srgbClr val="14181D"/>
                 </a:solidFill>
                 <a:latin typeface="Yu Gothic UI"/>
               </a:rPr>
-              <a:t>5 弱</a:t>
-            </a:r>
-          </a:p>
-        </p:txBody>
-      </p:sp>
-      <p:sp>
-        <p:nvSpPr>
-          <p:cNvPr id="20" name="TextBox 19"/>
-          <p:cNvSpPr txBox="1"/>
-          <p:nvPr/>
-        </p:nvSpPr>
-        <p:spPr>
-          <a:xfrm>
-            <a:off x="4572000" y="3557016"/>
-            <a:ext cx="3200400" cy="411480"/>
+              <a:t>震度分布</a:t>
+            </a:r>
+          </a:p>
+        </p:txBody>
+      </p:sp>
+      <p:sp>
+        <p:nvSpPr>
+          <p:cNvPr id="17" name="TextBox 16"/>
+          <p:cNvSpPr txBox="1"/>
+          <p:nvPr/>
+        </p:nvSpPr>
+        <p:spPr>
+          <a:xfrm>
+            <a:off x="7223760" y="3218688"/>
+            <a:ext cx="4114800" cy="457200"/>
           </a:xfrm>
           <a:prstGeom prst="rect">
             <a:avLst/>
@@ -12021,27 +13915,27 @@
               </a:lnSpc>
             </a:pPr>
             <a:r>
-              <a:rPr sz="1500" b="1">
-                <a:solidFill>
-                  <a:srgbClr val="A4231C"/>
-                </a:solidFill>
-                <a:latin typeface="Yu Gothic UI"/>
-              </a:rPr>
-              <a:t>3 時間 15 分 〜 9 時間 9 分</a:t>
-            </a:r>
-          </a:p>
-        </p:txBody>
-      </p:sp>
-      <p:sp>
-        <p:nvSpPr>
-          <p:cNvPr id="21" name="Rounded Rectangle 20"/>
+              <a:rPr sz="1150" b="0">
+                <a:solidFill>
+                  <a:srgbClr val="5C6670"/>
+                </a:solidFill>
+                <a:latin typeface="Yu Gothic UI"/>
+              </a:rPr>
+              <a:t>鍵なし・CORS 開放。英語の震源名も入っている</a:t>
+            </a:r>
+          </a:p>
+        </p:txBody>
+      </p:sp>
+      <p:sp>
+        <p:nvSpPr>
+          <p:cNvPr id="18" name="Rounded Rectangle 17"/>
           <p:cNvSpPr/>
           <p:nvPr/>
         </p:nvSpPr>
         <p:spPr>
           <a:xfrm>
-            <a:off x="731520" y="4078224"/>
-            <a:ext cx="7040880" cy="502920"/>
+            <a:off x="731520" y="3776472"/>
+            <a:ext cx="10698480" cy="548640"/>
           </a:xfrm>
           <a:prstGeom prst="roundRect">
             <a:avLst>
@@ -12080,14 +13974,14 @@
       </p:sp>
       <p:sp>
         <p:nvSpPr>
-          <p:cNvPr id="22" name="TextBox 21"/>
-          <p:cNvSpPr txBox="1"/>
-          <p:nvPr/>
-        </p:nvSpPr>
-        <p:spPr>
-          <a:xfrm>
-            <a:off x="868680" y="4123944"/>
-            <a:ext cx="2651760" cy="411480"/>
+          <p:cNvPr id="19" name="TextBox 18"/>
+          <p:cNvSpPr txBox="1"/>
+          <p:nvPr/>
+        </p:nvSpPr>
+        <p:spPr>
+          <a:xfrm>
+            <a:off x="868680" y="3822192"/>
+            <a:ext cx="3931920" cy="457200"/>
           </a:xfrm>
           <a:prstGeom prst="rect">
             <a:avLst/>
@@ -12106,27 +14000,27 @@
               </a:lnSpc>
             </a:pPr>
             <a:r>
-              <a:rPr sz="1500" b="1">
+              <a:rPr sz="1300" b="1">
                 <a:solidFill>
                   <a:srgbClr val="14181D"/>
                 </a:solidFill>
                 <a:latin typeface="Yu Gothic UI"/>
               </a:rPr>
-              <a:t>京急空港線</a:t>
-            </a:r>
-          </a:p>
-        </p:txBody>
-      </p:sp>
-      <p:sp>
-        <p:nvSpPr>
-          <p:cNvPr id="23" name="TextBox 22"/>
-          <p:cNvSpPr txBox="1"/>
-          <p:nvPr/>
-        </p:nvSpPr>
-        <p:spPr>
-          <a:xfrm>
-            <a:off x="3474720" y="4123944"/>
-            <a:ext cx="1097280" cy="411480"/>
+              <a:t>気象庁 震度観測点一覧表</a:t>
+            </a:r>
+          </a:p>
+        </p:txBody>
+      </p:sp>
+      <p:sp>
+        <p:nvSpPr>
+          <p:cNvPr id="20" name="TextBox 19"/>
+          <p:cNvSpPr txBox="1"/>
+          <p:nvPr/>
+        </p:nvSpPr>
+        <p:spPr>
+          <a:xfrm>
+            <a:off x="4846320" y="3822192"/>
+            <a:ext cx="2377440" cy="457200"/>
           </a:xfrm>
           <a:prstGeom prst="rect">
             <a:avLst/>
@@ -12145,27 +14039,27 @@
               </a:lnSpc>
             </a:pPr>
             <a:r>
-              <a:rPr sz="1500" b="0">
+              <a:rPr sz="1300" b="0">
                 <a:solidFill>
                   <a:srgbClr val="14181D"/>
                 </a:solidFill>
                 <a:latin typeface="Yu Gothic UI"/>
               </a:rPr>
-              <a:t>5 弱</a:t>
-            </a:r>
-          </a:p>
-        </p:txBody>
-      </p:sp>
-      <p:sp>
-        <p:nvSpPr>
-          <p:cNvPr id="24" name="TextBox 23"/>
-          <p:cNvSpPr txBox="1"/>
-          <p:nvPr/>
-        </p:nvSpPr>
-        <p:spPr>
-          <a:xfrm>
-            <a:off x="4572000" y="4123944"/>
-            <a:ext cx="3200400" cy="411480"/>
+              <a:t>観測点 → 座標</a:t>
+            </a:r>
+          </a:p>
+        </p:txBody>
+      </p:sp>
+      <p:sp>
+        <p:nvSpPr>
+          <p:cNvPr id="21" name="TextBox 20"/>
+          <p:cNvSpPr txBox="1"/>
+          <p:nvPr/>
+        </p:nvSpPr>
+        <p:spPr>
+          <a:xfrm>
+            <a:off x="7223760" y="3822192"/>
+            <a:ext cx="4114800" cy="457200"/>
           </a:xfrm>
           <a:prstGeom prst="rect">
             <a:avLst/>
@@ -12184,101 +14078,27 @@
               </a:lnSpc>
             </a:pPr>
             <a:r>
-              <a:rPr sz="1500" b="1">
-                <a:solidFill>
-                  <a:srgbClr val="A4231C"/>
-                </a:solidFill>
-                <a:latin typeface="Yu Gothic UI"/>
-              </a:rPr>
-              <a:t>35 分 〜 2 時間 1 分</a:t>
-            </a:r>
-          </a:p>
-        </p:txBody>
-      </p:sp>
-      <p:sp>
-        <p:nvSpPr>
-          <p:cNvPr id="25" name="TextBox 24"/>
-          <p:cNvSpPr txBox="1"/>
-          <p:nvPr/>
-        </p:nvSpPr>
-        <p:spPr>
-          <a:xfrm>
-            <a:off x="731520" y="4828032"/>
-            <a:ext cx="7040880" cy="1463040"/>
-          </a:xfrm>
-          <a:prstGeom prst="rect">
-            <a:avLst/>
-          </a:prstGeom>
-          <a:noFill/>
-        </p:spPr>
-        <p:txBody>
-          <a:bodyPr wrap="square" anchor="t" lIns="45720" rIns="45720" tIns="18288" bIns="18288">
-            <a:spAutoFit/>
-          </a:bodyPr>
-          <a:lstStyle/>
-          <a:p>
-            <a:pPr algn="l">
-              <a:lnSpc>
-                <a:spcPct val="115000"/>
-              </a:lnSpc>
-            </a:pPr>
-            <a:r>
-              <a:rPr sz="1500" b="1">
-                <a:solidFill>
-                  <a:srgbClr val="14181D"/>
-                </a:solidFill>
-                <a:latin typeface="Yu Gothic UI"/>
-              </a:rPr>
-              <a:t>実際: JR 東日本は始発から見合わせ、発生 4 時間 15 分後の 06:15 でも再開見込みなし。</a:t>
-            </a:r>
-          </a:p>
-          <a:p>
-            <a:pPr algn="l">
-              <a:lnSpc>
-                <a:spcPct val="115000"/>
-              </a:lnSpc>
-            </a:pPr>
-            <a:r>
-              <a:rPr sz="1500" b="0">
-                <a:solidFill>
-                  <a:srgbClr val="14181D"/>
-                </a:solidFill>
-                <a:latin typeface="Yu Gothic UI"/>
-              </a:rPr>
-              <a:t>推定の幅と整合する。</a:t>
-            </a:r>
-          </a:p>
-          <a:p>
-            <a:pPr algn="l">
-              <a:lnSpc>
-                <a:spcPct val="115000"/>
-              </a:lnSpc>
-              <a:spcBef>
-                <a:spcPts val="1000"/>
-              </a:spcBef>
-            </a:pPr>
-            <a:r>
-              <a:rPr sz="1300" b="0">
+              <a:rPr sz="1150" b="0">
                 <a:solidFill>
                   <a:srgbClr val="5C6670"/>
                 </a:solidFill>
                 <a:latin typeface="Yu Gothic UI"/>
               </a:rPr>
-              <a:t>?event=&lt;id&gt; で過去の地震をいつでも再現できる。実地震ごとに幅と実再開時刻を記録し、式を校正していく。</a:t>
-            </a:r>
-          </a:p>
-        </p:txBody>
-      </p:sp>
-      <p:sp>
-        <p:nvSpPr>
-          <p:cNvPr id="26" name="Rounded Rectangle 25"/>
+              <a:t>199 地震 6,016 点で欠落ゼロ</a:t>
+            </a:r>
+          </a:p>
+        </p:txBody>
+      </p:sp>
+      <p:sp>
+        <p:nvSpPr>
+          <p:cNvPr id="22" name="Rounded Rectangle 21"/>
           <p:cNvSpPr/>
           <p:nvPr/>
         </p:nvSpPr>
         <p:spPr>
           <a:xfrm>
-            <a:off x="8522208" y="338328"/>
-            <a:ext cx="2935007" cy="6181344"/>
+            <a:off x="731520" y="4379976"/>
+            <a:ext cx="10698480" cy="548640"/>
           </a:xfrm>
           <a:prstGeom prst="roundRect">
             <a:avLst>
@@ -12286,7 +14106,7 @@
             </a:avLst>
           </a:prstGeom>
           <a:solidFill>
-            <a:srgbClr val="14181D"/>
+            <a:srgbClr val="F4F5F7"/>
           </a:solidFill>
           <a:ln>
             <a:noFill/>
@@ -12315,30 +14135,449 @@
           </a:p>
         </p:txBody>
       </p:sp>
-      <p:pic>
-        <p:nvPicPr>
-          <p:cNvPr id="27" name="Picture 26" descr="09_real_event_ja.png"/>
-          <p:cNvPicPr>
-            <a:picLocks noChangeAspect="1"/>
-          </p:cNvPicPr>
-          <p:nvPr/>
-        </p:nvPicPr>
-        <p:blipFill>
-          <a:blip r:embed="rId2"/>
-          <a:stretch>
-            <a:fillRect/>
-          </a:stretch>
-        </p:blipFill>
-        <p:spPr>
-          <a:xfrm>
-            <a:off x="8595360" y="411480"/>
-            <a:ext cx="2788703" cy="6035040"/>
-          </a:xfrm>
-          <a:prstGeom prst="rect">
-            <a:avLst/>
-          </a:prstGeom>
-        </p:spPr>
-      </p:pic>
+      <p:sp>
+        <p:nvSpPr>
+          <p:cNvPr id="23" name="TextBox 22"/>
+          <p:cNvSpPr txBox="1"/>
+          <p:nvPr/>
+        </p:nvSpPr>
+        <p:spPr>
+          <a:xfrm>
+            <a:off x="868680" y="4425696"/>
+            <a:ext cx="3931920" cy="457200"/>
+          </a:xfrm>
+          <a:prstGeom prst="rect">
+            <a:avLst/>
+          </a:prstGeom>
+          <a:noFill/>
+        </p:spPr>
+        <p:txBody>
+          <a:bodyPr wrap="square" anchor="ctr" lIns="45720" rIns="45720" tIns="18288" bIns="18288">
+            <a:spAutoFit/>
+          </a:bodyPr>
+          <a:lstStyle/>
+          <a:p>
+            <a:pPr algn="l">
+              <a:lnSpc>
+                <a:spcPct val="115000"/>
+              </a:lnSpc>
+            </a:pPr>
+            <a:r>
+              <a:rPr sz="1300" b="1">
+                <a:solidFill>
+                  <a:srgbClr val="14181D"/>
+                </a:solidFill>
+                <a:latin typeface="Yu Gothic UI"/>
+              </a:rPr>
+              <a:t>国土数値情報 N02-25 (CC BY 4.0)</a:t>
+            </a:r>
+          </a:p>
+        </p:txBody>
+      </p:sp>
+      <p:sp>
+        <p:nvSpPr>
+          <p:cNvPr id="24" name="TextBox 23"/>
+          <p:cNvSpPr txBox="1"/>
+          <p:nvPr/>
+        </p:nvSpPr>
+        <p:spPr>
+          <a:xfrm>
+            <a:off x="4846320" y="4425696"/>
+            <a:ext cx="2377440" cy="457200"/>
+          </a:xfrm>
+          <a:prstGeom prst="rect">
+            <a:avLst/>
+          </a:prstGeom>
+          <a:noFill/>
+        </p:spPr>
+        <p:txBody>
+          <a:bodyPr wrap="square" anchor="ctr" lIns="45720" rIns="45720" tIns="18288" bIns="18288">
+            <a:spAutoFit/>
+          </a:bodyPr>
+          <a:lstStyle/>
+          <a:p>
+            <a:pPr algn="l">
+              <a:lnSpc>
+                <a:spcPct val="115000"/>
+              </a:lnSpc>
+            </a:pPr>
+            <a:r>
+              <a:rPr sz="1300" b="0">
+                <a:solidFill>
+                  <a:srgbClr val="14181D"/>
+                </a:solidFill>
+                <a:latin typeface="Yu Gothic UI"/>
+              </a:rPr>
+              <a:t>駅・線路の形</a:t>
+            </a:r>
+          </a:p>
+        </p:txBody>
+      </p:sp>
+      <p:sp>
+        <p:nvSpPr>
+          <p:cNvPr id="25" name="TextBox 24"/>
+          <p:cNvSpPr txBox="1"/>
+          <p:nvPr/>
+        </p:nvSpPr>
+        <p:spPr>
+          <a:xfrm>
+            <a:off x="7223760" y="4425696"/>
+            <a:ext cx="4114800" cy="457200"/>
+          </a:xfrm>
+          <a:prstGeom prst="rect">
+            <a:avLst/>
+          </a:prstGeom>
+          <a:noFill/>
+        </p:spPr>
+        <p:txBody>
+          <a:bodyPr wrap="square" anchor="ctr" lIns="45720" rIns="45720" tIns="18288" bIns="18288">
+            <a:spAutoFit/>
+          </a:bodyPr>
+          <a:lstStyle/>
+          <a:p>
+            <a:pPr algn="l">
+              <a:lnSpc>
+                <a:spcPct val="115000"/>
+              </a:lnSpc>
+            </a:pPr>
+            <a:r>
+              <a:rPr sz="1150" b="0">
+                <a:solidFill>
+                  <a:srgbClr val="5C6670"/>
+                </a:solidFill>
+                <a:latin typeface="Yu Gothic UI"/>
+              </a:rPr>
+              <a:t>同梱して配れる。空港アクセス路線が揃う</a:t>
+            </a:r>
+          </a:p>
+        </p:txBody>
+      </p:sp>
+      <p:sp>
+        <p:nvSpPr>
+          <p:cNvPr id="26" name="Rounded Rectangle 25"/>
+          <p:cNvSpPr/>
+          <p:nvPr/>
+        </p:nvSpPr>
+        <p:spPr>
+          <a:xfrm>
+            <a:off x="731520" y="4983480"/>
+            <a:ext cx="10698480" cy="548640"/>
+          </a:xfrm>
+          <a:prstGeom prst="roundRect">
+            <a:avLst>
+              <a:gd name="adj" fmla="val 6000"/>
+            </a:avLst>
+          </a:prstGeom>
+          <a:solidFill>
+            <a:srgbClr val="F4F5F7"/>
+          </a:solidFill>
+          <a:ln>
+            <a:noFill/>
+          </a:ln>
+          <a:effectLst/>
+        </p:spPr>
+        <p:style>
+          <a:lnRef idx="1">
+            <a:schemeClr val="accent1"/>
+          </a:lnRef>
+          <a:fillRef idx="3">
+            <a:schemeClr val="accent1"/>
+          </a:fillRef>
+          <a:effectRef idx="2">
+            <a:schemeClr val="accent1"/>
+          </a:effectRef>
+          <a:fontRef idx="minor">
+            <a:schemeClr val="lt1"/>
+          </a:fontRef>
+        </p:style>
+        <p:txBody>
+          <a:bodyPr rtlCol="0" anchor="ctr"/>
+          <a:lstStyle/>
+          <a:p>
+            <a:pPr algn="ctr"/>
+          </a:p>
+        </p:txBody>
+      </p:sp>
+      <p:sp>
+        <p:nvSpPr>
+          <p:cNvPr id="27" name="TextBox 26"/>
+          <p:cNvSpPr txBox="1"/>
+          <p:nvPr/>
+        </p:nvSpPr>
+        <p:spPr>
+          <a:xfrm>
+            <a:off x="868680" y="5029200"/>
+            <a:ext cx="3931920" cy="457200"/>
+          </a:xfrm>
+          <a:prstGeom prst="rect">
+            <a:avLst/>
+          </a:prstGeom>
+          <a:noFill/>
+        </p:spPr>
+        <p:txBody>
+          <a:bodyPr wrap="square" anchor="ctr" lIns="45720" rIns="45720" tIns="18288" bIns="18288">
+            <a:spAutoFit/>
+          </a:bodyPr>
+          <a:lstStyle/>
+          <a:p>
+            <a:pPr algn="l">
+              <a:lnSpc>
+                <a:spcPct val="115000"/>
+              </a:lnSpc>
+            </a:pPr>
+            <a:r>
+              <a:rPr sz="1300" b="1">
+                <a:solidFill>
+                  <a:srgbClr val="14181D"/>
+                </a:solidFill>
+                <a:latin typeface="Yu Gothic UI"/>
+              </a:rPr>
+              <a:t>国土地理院 避難場所・逆ジオコーダ・タイル</a:t>
+            </a:r>
+          </a:p>
+        </p:txBody>
+      </p:sp>
+      <p:sp>
+        <p:nvSpPr>
+          <p:cNvPr id="28" name="TextBox 27"/>
+          <p:cNvSpPr txBox="1"/>
+          <p:nvPr/>
+        </p:nvSpPr>
+        <p:spPr>
+          <a:xfrm>
+            <a:off x="4846320" y="5029200"/>
+            <a:ext cx="2377440" cy="457200"/>
+          </a:xfrm>
+          <a:prstGeom prst="rect">
+            <a:avLst/>
+          </a:prstGeom>
+          <a:noFill/>
+        </p:spPr>
+        <p:txBody>
+          <a:bodyPr wrap="square" anchor="ctr" lIns="45720" rIns="45720" tIns="18288" bIns="18288">
+            <a:spAutoFit/>
+          </a:bodyPr>
+          <a:lstStyle/>
+          <a:p>
+            <a:pPr algn="l">
+              <a:lnSpc>
+                <a:spcPct val="115000"/>
+              </a:lnSpc>
+            </a:pPr>
+            <a:r>
+              <a:rPr sz="1300" b="0">
+                <a:solidFill>
+                  <a:srgbClr val="14181D"/>
+                </a:solidFill>
+                <a:latin typeface="Yu Gothic UI"/>
+              </a:rPr>
+              <a:t>逃げる先・現在地の住所・地図</a:t>
+            </a:r>
+          </a:p>
+        </p:txBody>
+      </p:sp>
+      <p:sp>
+        <p:nvSpPr>
+          <p:cNvPr id="29" name="TextBox 28"/>
+          <p:cNvSpPr txBox="1"/>
+          <p:nvPr/>
+        </p:nvSpPr>
+        <p:spPr>
+          <a:xfrm>
+            <a:off x="7223760" y="5029200"/>
+            <a:ext cx="4114800" cy="457200"/>
+          </a:xfrm>
+          <a:prstGeom prst="rect">
+            <a:avLst/>
+          </a:prstGeom>
+          <a:noFill/>
+        </p:spPr>
+        <p:txBody>
+          <a:bodyPr wrap="square" anchor="ctr" lIns="45720" rIns="45720" tIns="18288" bIns="18288">
+            <a:spAutoFit/>
+          </a:bodyPr>
+          <a:lstStyle/>
+          <a:p>
+            <a:pPr algn="l">
+              <a:lnSpc>
+                <a:spcPct val="115000"/>
+              </a:lnSpc>
+            </a:pPr>
+            <a:r>
+              <a:rPr sz="1150" b="0">
+                <a:solidFill>
+                  <a:srgbClr val="5C6670"/>
+                </a:solidFill>
+                <a:latin typeface="Yu Gothic UI"/>
+              </a:rPr>
+              <a:t>住所は見せれば伝わる</a:t>
+            </a:r>
+          </a:p>
+        </p:txBody>
+      </p:sp>
+      <p:sp>
+        <p:nvSpPr>
+          <p:cNvPr id="30" name="Rounded Rectangle 29"/>
+          <p:cNvSpPr/>
+          <p:nvPr/>
+        </p:nvSpPr>
+        <p:spPr>
+          <a:xfrm>
+            <a:off x="731520" y="5586984"/>
+            <a:ext cx="10698480" cy="548640"/>
+          </a:xfrm>
+          <a:prstGeom prst="roundRect">
+            <a:avLst>
+              <a:gd name="adj" fmla="val 6000"/>
+            </a:avLst>
+          </a:prstGeom>
+          <a:solidFill>
+            <a:srgbClr val="F4F5F7"/>
+          </a:solidFill>
+          <a:ln>
+            <a:noFill/>
+          </a:ln>
+          <a:effectLst/>
+        </p:spPr>
+        <p:style>
+          <a:lnRef idx="1">
+            <a:schemeClr val="accent1"/>
+          </a:lnRef>
+          <a:fillRef idx="3">
+            <a:schemeClr val="accent1"/>
+          </a:fillRef>
+          <a:effectRef idx="2">
+            <a:schemeClr val="accent1"/>
+          </a:effectRef>
+          <a:fontRef idx="minor">
+            <a:schemeClr val="lt1"/>
+          </a:fontRef>
+        </p:style>
+        <p:txBody>
+          <a:bodyPr rtlCol="0" anchor="ctr"/>
+          <a:lstStyle/>
+          <a:p>
+            <a:pPr algn="ctr"/>
+          </a:p>
+        </p:txBody>
+      </p:sp>
+      <p:sp>
+        <p:nvSpPr>
+          <p:cNvPr id="31" name="TextBox 30"/>
+          <p:cNvSpPr txBox="1"/>
+          <p:nvPr/>
+        </p:nvSpPr>
+        <p:spPr>
+          <a:xfrm>
+            <a:off x="868680" y="5632704"/>
+            <a:ext cx="3931920" cy="457200"/>
+          </a:xfrm>
+          <a:prstGeom prst="rect">
+            <a:avLst/>
+          </a:prstGeom>
+          <a:noFill/>
+        </p:spPr>
+        <p:txBody>
+          <a:bodyPr wrap="square" anchor="ctr" lIns="45720" rIns="45720" tIns="18288" bIns="18288">
+            <a:spAutoFit/>
+          </a:bodyPr>
+          <a:lstStyle/>
+          <a:p>
+            <a:pPr algn="l">
+              <a:lnSpc>
+                <a:spcPct val="115000"/>
+              </a:lnSpc>
+            </a:pPr>
+            <a:r>
+              <a:rPr sz="1300" b="1">
+                <a:solidFill>
+                  <a:srgbClr val="14181D"/>
+                </a:solidFill>
+                <a:latin typeface="Yu Gothic UI"/>
+              </a:rPr>
+              <a:t>東京都 一時滞在施設 (CC BY 4.0)</a:t>
+            </a:r>
+          </a:p>
+        </p:txBody>
+      </p:sp>
+      <p:sp>
+        <p:nvSpPr>
+          <p:cNvPr id="32" name="TextBox 31"/>
+          <p:cNvSpPr txBox="1"/>
+          <p:nvPr/>
+        </p:nvSpPr>
+        <p:spPr>
+          <a:xfrm>
+            <a:off x="4846320" y="5632704"/>
+            <a:ext cx="2377440" cy="457200"/>
+          </a:xfrm>
+          <a:prstGeom prst="rect">
+            <a:avLst/>
+          </a:prstGeom>
+          <a:noFill/>
+        </p:spPr>
+        <p:txBody>
+          <a:bodyPr wrap="square" anchor="ctr" lIns="45720" rIns="45720" tIns="18288" bIns="18288">
+            <a:spAutoFit/>
+          </a:bodyPr>
+          <a:lstStyle/>
+          <a:p>
+            <a:pPr algn="l">
+              <a:lnSpc>
+                <a:spcPct val="115000"/>
+              </a:lnSpc>
+            </a:pPr>
+            <a:r>
+              <a:rPr sz="1300" b="0">
+                <a:solidFill>
+                  <a:srgbClr val="14181D"/>
+                </a:solidFill>
+                <a:latin typeface="Yu Gothic UI"/>
+              </a:rPr>
+              <a:t>帰宅困難者が休む場所</a:t>
+            </a:r>
+          </a:p>
+        </p:txBody>
+      </p:sp>
+      <p:sp>
+        <p:nvSpPr>
+          <p:cNvPr id="33" name="TextBox 32"/>
+          <p:cNvSpPr txBox="1"/>
+          <p:nvPr/>
+        </p:nvSpPr>
+        <p:spPr>
+          <a:xfrm>
+            <a:off x="7223760" y="5632704"/>
+            <a:ext cx="4114800" cy="457200"/>
+          </a:xfrm>
+          <a:prstGeom prst="rect">
+            <a:avLst/>
+          </a:prstGeom>
+          <a:noFill/>
+        </p:spPr>
+        <p:txBody>
+          <a:bodyPr wrap="square" anchor="ctr" lIns="45720" rIns="45720" tIns="18288" bIns="18288">
+            <a:spAutoFit/>
+          </a:bodyPr>
+          <a:lstStyle/>
+          <a:p>
+            <a:pPr algn="l">
+              <a:lnSpc>
+                <a:spcPct val="115000"/>
+              </a:lnSpc>
+            </a:pPr>
+            <a:r>
+              <a:rPr sz="1150" b="0">
+                <a:solidFill>
+                  <a:srgbClr val="5C6670"/>
+                </a:solidFill>
+                <a:latin typeface="Yu Gothic UI"/>
+              </a:rPr>
+              <a:t>「逃げる」と「休む」は違う</a:t>
+            </a:r>
+          </a:p>
+        </p:txBody>
+      </p:sp>
     </p:spTree>
   </p:cSld>
   <p:clrMapOvr>

--- a/公共交通オープンデータチャレンジ2026/紹介スライド.pptx
+++ b/公共交通オープンデータチャレンジ2026/紹介スライド.pptx
@@ -515,7 +515,7 @@
           <a:lstStyle/>
           <a:p>
             <a:r>
-              <a:t>Move or Wait、動くか待つか。地震のあと、鉄道会社が「再開の見込みは立っていません」としか言えない数時間に、訪日外国人へ、待つか、今夜の寝場所を確保するかを決める数字を出すウェブアプリです。</a:t>
+              <a:t>Move or Wait、動くか待つか。地震のあと、待つか、今夜の寝場所を確保するかを、訪日外国人がいま決められるようにするアプリです。</a:t>
             </a:r>
           </a:p>
         </p:txBody>
@@ -585,7 +585,7 @@
           <a:lstStyle/>
           <a:p>
             <a:r>
-              <a:t>8月23日の茨城県南部の地震を、実データで再現しました。山手線は1時間44分から5時間35分。実際にJR東日本は、発生4時間15分後でも再開見込みを出していませんでした。推定の幅と整合しています。</a:t>
+              <a:t>8月23日の地震を実データで再現しました。山手線は1時間44分から5時間35分。実際にJR東日本は4時間15分後でも再開見込みを出していませんでした。幅と整合します。</a:t>
             </a:r>
           </a:p>
         </p:txBody>
@@ -655,7 +655,7 @@
           <a:lstStyle/>
           <a:p>
             <a:r>
-              <a:t>宿と出国便は地震の前に設定します。設定はURLに入るので、宿や旅行会社が客に設定つきリンクを配れます。4言語に対応し、圏外でも最後の判定を表示します。</a:t>
+              <a:t>宿と出国便は地震の前に設定します。設定はURLに入るので、宿や旅行会社が客にリンクを配れます。4言語対応、圏外でも動きます。</a:t>
             </a:r>
           </a:p>
         </p:txBody>
@@ -725,7 +725,7 @@
           <a:lstStyle/>
           <a:p>
             <a:r>
-              <a:t>技術面では、依存ゼロ、ビルドなし、サーバなしの静的サイトです。地震直後の輻輳でも落ちにくい作りです。596路線への震度の割り当てはブラウザ内で162ミリ秒。14通りのシナリオで確認済みで、審査中もいつでも判定が見えます。</a:t>
+              <a:t>依存ゼロ、ビルドなし、サーバなしの静的サイトで、地震直後でも落ちにくい作りです。震度の割り当てはブラウザ内で162ミリ秒。14通りのシナリオで確認済みです。</a:t>
             </a:r>
           </a:p>
         </p:txBody>
@@ -795,7 +795,7 @@
           <a:lstStyle/>
           <a:p>
             <a:r>
-              <a:t>限界も正直に書きます。推定は推定であり、一時滞在施設は東京都のみ、避難場所がいま開いているかは取れません。その上で、外すなら安全側に外れるように作ってあります。速報段階では判定せず、推定の期限が切れたらそう言い、事業者が平常と言えば推定を捨てる。運行情報の文面は現在形の事実だけを読みます。</a:t>
+              <a:t>限界も正直に書きます。推定は推定で、一時滞在施設は東京都のみです。その上で、外すなら安全側に外れるようにしました。速報段階では判定せず、期限が切れたらそう言い、事業者が平常と言えば推定を捨てます。</a:t>
             </a:r>
           </a:p>
         </p:txBody>
@@ -865,7 +865,7 @@
           <a:lstStyle/>
           <a:p>
             <a:r>
-              <a:t>「あとどれくらい」を出しているのは、ここだけです。待つか、今夜の寝場所を確保するかを、いま決められる。Move or Wait、動くか待つか。ありがとうございました。</a:t>
+              <a:t>「あとどれくらい」を出しているのは、ここだけです。Move or Wait、動くか待つか。ありがとうございました。</a:t>
             </a:r>
           </a:p>
         </p:txBody>
@@ -935,7 +935,7 @@
           <a:lstStyle/>
           <a:p>
             <a:r>
-              <a:t>大きな地震のあと、鉄道会社の案内は全社同じ文になります。「運転再開の見込みは立っていません」。点検の内容で復旧時間が大きく変わるので、数字が出せないのです。8月23日の茨城県南部の地震では、深夜2時の発生から、6時15分になっても再開見込みが出ませんでした。4時間以上、誰も「あとどれくらい」を言っていません。</a:t>
+              <a:t>地震のあと、鉄道会社の案内は全社同じです。「再開の見込みは立っていません」。点検内容で復旧時間が変わり、数字が出せないからです。8月23日の茨城県南部の地震では、発生から4時間以上、誰も「あとどれくらい」を言いませんでした。</a:t>
             </a:r>
           </a:p>
         </p:txBody>
@@ -1005,7 +1005,7 @@
           <a:lstStyle/>
           <a:p>
             <a:r>
-              <a:t>一番困るのが訪日外国人です。日本語の案内が読めず、「点検」が何時間か知らず、駅周辺のホテルが数時間で埋まることも知りません。1時間目に決めるか、4時間目に決めるかで、結果が変わります。</a:t>
+              <a:t>一番困るのは訪日外国人です。案内が読めず、点検が何時間か知らず、ホテルが数時間で埋まることも知りません。1時間目に決めるか4時間目かで、結果が変わります。</a:t>
             </a:r>
           </a:p>
         </p:txBody>
@@ -1075,7 +1075,7 @@
           <a:lstStyle/>
           <a:p>
             <a:r>
-              <a:t>このアプリは、「見込みは立っていません」に数字を与えます。再開まで51分から4時間26分、12時24分から15時59分ごろ。そして「今夜のうちに戻れる見込みです」という決断の形にします。終電と出国便の時刻から逆算しています。この数字を出しているところは、他にありません。</a:t>
+              <a:t>このアプリは、その「あとどれくらい」に数字を与えます。再開まで51分から4時間26分、と幅と時刻で出し、「今夜のうちに戻れる見込み」という決断の形にします。終電と出国便の時刻から逆算しています。</a:t>
             </a:r>
           </a:p>
         </p:txBody>
@@ -1145,7 +1145,7 @@
           <a:lstStyle/>
           <a:p>
             <a:r>
-              <a:t>宿の行をタップすると、周りの路線が1行ずつ並びます。路線を開くと、最も強く揺れた観測点、点検が要る区間の長さ、再開までの幅、鉄道会社の案内が見えます。見込みを出すからこそ、根拠と限界を隠しません。</a:t>
+              <a:t>宿の行を開くと、周りの路線が並びます。路線ごとに、最も揺れた観測点、点検区間の長さ、再開までの幅、鉄道会社の案内が見えます。根拠と限界を隠しません。</a:t>
             </a:r>
           </a:p>
         </p:txBody>
@@ -1215,7 +1215,7 @@
           <a:lstStyle/>
           <a:p>
             <a:r>
-              <a:t>震度6強なら、待たずに宿を取れと言います。見込み時刻は出しません。そして休める場所として、東京都の一時滞在施設と、国土地理院の指定緊急避難場所を同じ地図に出します。現在地は住所で表示します。画面を見せれば、言葉なしで伝わります。</a:t>
+              <a:t>震度6強なら、待たずに宿を取れと言い、時刻は出しません。休める場所として、東京都の一時滞在施設と指定緊急避難場所を同じ地図に。現在地は住所で表示します。</a:t>
             </a:r>
           </a:p>
         </p:txBody>
@@ -1285,7 +1285,7 @@
           <a:lstStyle/>
           <a:p>
             <a:r>
-              <a:t>仕組みです。気象庁の震度を、国土数値情報の全国596路線に重ねます。公共交通オープンデータセンターの路線と駅のデータで、線路名称を旅客が知る運転系統に組み替えます。高浜・翠川の推定式で、路線ごとの再開までの幅を出します。運行情報で「平常」が出た系統は、推定を取り下げます。最後に、決断の形に翻訳します。</a:t>
+              <a:t>仕組みです。気象庁の震度を全国596路線に重ね、公共交通オープンデータセンターの路線と駅のデータで、旅客が知る運転系統に組み替えます。高浜・翠川の推定式で再開までの幅を出し、運行情報で「平常」なら推定を捨て、決断の形に翻訳します。</a:t>
             </a:r>
           </a:p>
         </p:txBody>
@@ -1355,7 +1355,7 @@
           <a:lstStyle/>
           <a:p>
             <a:r>
-              <a:t>数字の根拠です。再開までの時間は、高浜・翠川による「地震時の鉄道運休時間の推定方法」、日本地震工学会論文集2011年の推定式から出しています。震度4なら注意運転点検で30分。震度5弱以上なら徒歩点検で、1キロあたり6分、プラスマイナス30分。震度6弱以上は被害が出る領域なので、時間を出しません。点検区間の長さは、震度5弱以上が当たった区間だけを数え、その誤差と式のばらつきを重ねたものが、画面の幅です。鉄道会社は気象庁の震度ではなく自前の地震計で判断するので、この数字はあくまで推定です。だから幅で出し、断定せず、運行情報で確定させます。</a:t>
+              <a:t>数字の根拠は、高浜・翠川「地震時の鉄道運休時間の推定方法」、日本地震工学会論文集2011年の推定式です。震度4は注意運転点検で30分。震度5弱以上は徒歩点検で1キロあたり6分、プラスマイナス30分。6弱以上は時間を出しません。点検区間の誤差と式のばらつきを重ねたものが、画面の幅です。鉄道会社は自前の地震計で判断するので、これは推定です。だから幅で出し、運行情報で確定させます。</a:t>
             </a:r>
           </a:p>
         </p:txBody>
@@ -1425,7 +1425,7 @@
           <a:lstStyle/>
           <a:p>
             <a:r>
-              <a:t>公共交通オープンデータセンターのデータは、2つの役割で使っています。路線と駅のデータで運転系統の対応表を作ること。運行情報で推定を終わらせること。「止まっている」は他でも見られますが、「あとどれくらい」と「もう再開した」の両端を持つのはここだけです。</a:t>
+              <a:t>公共交通オープンデータは2つの役割です。路線と駅で運転系統の対応表を作ること。運行情報で推定を終わらせること。「あとどれくらい」と「もう再開した」の両端を持つのはここだけです。</a:t>
             </a:r>
           </a:p>
         </p:txBody>

--- a/公共交通オープンデータチャレンジ2026/紹介スライド.pptx
+++ b/公共交通オープンデータチャレンジ2026/紹介スライド.pptx
@@ -9,14 +9,11 @@
     <p:sldId id="257" r:id="rId9"/>
     <p:sldId id="258" r:id="rId10"/>
     <p:sldId id="259" r:id="rId11"/>
-    <p:sldId id="260" r:id="rId12"/>
     <p:sldId id="261" r:id="rId13"/>
     <p:sldId id="262" r:id="rId14"/>
     <p:sldId id="263" r:id="rId15"/>
     <p:sldId id="264" r:id="rId16"/>
     <p:sldId id="265" r:id="rId17"/>
-    <p:sldId id="266" r:id="rId18"/>
-    <p:sldId id="267" r:id="rId19"/>
     <p:sldId id="268" r:id="rId20"/>
     <p:sldId id="269" r:id="rId21"/>
   </p:sldIdLst>
@@ -515,7 +512,7 @@
           <a:lstStyle/>
           <a:p>
             <a:r>
-              <a:t>Move or Wait、動くか待つか。地震のあと、待つか、今夜の寝場所を確保するかを、訪日外国人がいま決められるようにするアプリです。</a:t>
+              <a:t>Move or Wait、動くか待つか。地震のあと、待つか、今夜の寝場所を確保するかを、いま決められるようにします。</a:t>
             </a:r>
           </a:p>
         </p:txBody>
@@ -585,147 +582,7 @@
           <a:lstStyle/>
           <a:p>
             <a:r>
-              <a:t>8月23日の地震を実データで再現しました。山手線は1時間44分から5時間35分。実際にJR東日本は4時間15分後でも再開見込みを出していませんでした。幅と整合します。</a:t>
-            </a:r>
-          </a:p>
-        </p:txBody>
-      </p:sp>
-      <p:sp>
-        <p:nvSpPr>
-          <p:cNvPr id="4" name="Slide Number Placeholder 3"/>
-          <p:cNvSpPr>
-            <a:spLocks noGrp="1"/>
-          </p:cNvSpPr>
-          <p:nvPr>
-            <p:ph type="sldNum" idx="5" sz="quarter"/>
-          </p:nvPr>
-        </p:nvSpPr>
-        <p:spPr/>
-      </p:sp>
-    </p:spTree>
-  </p:cSld>
-  <p:clrMapOvr>
-    <a:masterClrMapping/>
-  </p:clrMapOvr>
-</p:notes>
-</file>
-
-<file path=ppt/notesSlides/notesSlide11.xml><?xml version="1.0" encoding="utf-8"?>
-<p:notes xmlns:a="http://schemas.openxmlformats.org/drawingml/2006/main" xmlns:p="http://schemas.openxmlformats.org/presentationml/2006/main" xmlns:r="http://schemas.openxmlformats.org/officeDocument/2006/relationships">
-  <p:cSld>
-    <p:spTree>
-      <p:nvGrpSpPr>
-        <p:cNvPr id="1" name=""/>
-        <p:cNvGrpSpPr/>
-        <p:nvPr/>
-      </p:nvGrpSpPr>
-      <p:grpSpPr>
-        <a:xfrm>
-          <a:off x="0" y="0"/>
-          <a:ext cx="0" cy="0"/>
-          <a:chOff x="0" y="0"/>
-          <a:chExt cx="0" cy="0"/>
-        </a:xfrm>
-      </p:grpSpPr>
-      <p:sp>
-        <p:nvSpPr>
-          <p:cNvPr id="2" name="Slide Image Placeholder 1"/>
-          <p:cNvSpPr>
-            <a:spLocks noGrp="1"/>
-          </p:cNvSpPr>
-          <p:nvPr>
-            <p:ph type="sldImg" idx="2"/>
-          </p:nvPr>
-        </p:nvSpPr>
-        <p:spPr/>
-      </p:sp>
-      <p:sp>
-        <p:nvSpPr>
-          <p:cNvPr id="3" name="Notes Placeholder 2"/>
-          <p:cNvSpPr>
-            <a:spLocks noGrp="1"/>
-          </p:cNvSpPr>
-          <p:nvPr>
-            <p:ph type="body" idx="3" sz="quarter"/>
-          </p:nvPr>
-        </p:nvSpPr>
-        <p:spPr/>
-        <p:txBody>
-          <a:bodyPr/>
-          <a:lstStyle/>
-          <a:p>
-            <a:r>
-              <a:t>宿と出国便は地震の前に設定します。設定はURLに入るので、宿や旅行会社が客にリンクを配れます。4言語対応、圏外でも動きます。</a:t>
-            </a:r>
-          </a:p>
-        </p:txBody>
-      </p:sp>
-      <p:sp>
-        <p:nvSpPr>
-          <p:cNvPr id="4" name="Slide Number Placeholder 3"/>
-          <p:cNvSpPr>
-            <a:spLocks noGrp="1"/>
-          </p:cNvSpPr>
-          <p:nvPr>
-            <p:ph type="sldNum" idx="5" sz="quarter"/>
-          </p:nvPr>
-        </p:nvSpPr>
-        <p:spPr/>
-      </p:sp>
-    </p:spTree>
-  </p:cSld>
-  <p:clrMapOvr>
-    <a:masterClrMapping/>
-  </p:clrMapOvr>
-</p:notes>
-</file>
-
-<file path=ppt/notesSlides/notesSlide12.xml><?xml version="1.0" encoding="utf-8"?>
-<p:notes xmlns:a="http://schemas.openxmlformats.org/drawingml/2006/main" xmlns:p="http://schemas.openxmlformats.org/presentationml/2006/main" xmlns:r="http://schemas.openxmlformats.org/officeDocument/2006/relationships">
-  <p:cSld>
-    <p:spTree>
-      <p:nvGrpSpPr>
-        <p:cNvPr id="1" name=""/>
-        <p:cNvGrpSpPr/>
-        <p:nvPr/>
-      </p:nvGrpSpPr>
-      <p:grpSpPr>
-        <a:xfrm>
-          <a:off x="0" y="0"/>
-          <a:ext cx="0" cy="0"/>
-          <a:chOff x="0" y="0"/>
-          <a:chExt cx="0" cy="0"/>
-        </a:xfrm>
-      </p:grpSpPr>
-      <p:sp>
-        <p:nvSpPr>
-          <p:cNvPr id="2" name="Slide Image Placeholder 1"/>
-          <p:cNvSpPr>
-            <a:spLocks noGrp="1"/>
-          </p:cNvSpPr>
-          <p:nvPr>
-            <p:ph type="sldImg" idx="2"/>
-          </p:nvPr>
-        </p:nvSpPr>
-        <p:spPr/>
-      </p:sp>
-      <p:sp>
-        <p:nvSpPr>
-          <p:cNvPr id="3" name="Notes Placeholder 2"/>
-          <p:cNvSpPr>
-            <a:spLocks noGrp="1"/>
-          </p:cNvSpPr>
-          <p:nvPr>
-            <p:ph type="body" idx="3" sz="quarter"/>
-          </p:nvPr>
-        </p:nvSpPr>
-        <p:spPr/>
-        <p:txBody>
-          <a:bodyPr/>
-          <a:lstStyle/>
-          <a:p>
-            <a:r>
-              <a:t>依存ゼロ、ビルドなし、サーバなしの静的サイトで、地震直後でも落ちにくい作りです。震度の割り当てはブラウザ内で162ミリ秒。14通りのシナリオで確認済みです。</a:t>
+              <a:t>8月23日の地震を実データで再現すると、山手線は1時間44分から5時間35分。実際にJR東日本は4時間後でも見込みを出しておらず、幅と整合します。</a:t>
             </a:r>
           </a:p>
         </p:txBody>
@@ -795,7 +652,7 @@
           <a:lstStyle/>
           <a:p>
             <a:r>
-              <a:t>限界も正直に書きます。推定は推定で、一時滞在施設は東京都のみです。その上で、外すなら安全側に外れるようにしました。速報段階では判定せず、期限が切れたらそう言い、事業者が平常と言えば推定を捨てます。</a:t>
+              <a:t>推定は推定です。だから速報段階では判定せず、期限が切れたらそう言い、事業者が平常と言えば推定を捨てる。外すなら安全側に外れるようにしました。</a:t>
             </a:r>
           </a:p>
         </p:txBody>
@@ -865,7 +722,7 @@
           <a:lstStyle/>
           <a:p>
             <a:r>
-              <a:t>「あとどれくらい」を出しているのは、ここだけです。Move or Wait、動くか待つか。ありがとうございました。</a:t>
+              <a:t>「あとどれくらい」を出しているのは、ここだけです。Move or Wait、動くか待つか。</a:t>
             </a:r>
           </a:p>
         </p:txBody>
@@ -935,7 +792,7 @@
           <a:lstStyle/>
           <a:p>
             <a:r>
-              <a:t>地震のあと、鉄道会社の案内は全社同じです。「再開の見込みは立っていません」。点検内容で復旧時間が変わり、数字が出せないからです。8月23日の茨城県南部の地震では、発生から4時間以上、誰も「あとどれくらい」を言いませんでした。</a:t>
+              <a:t>地震のあと、鉄道会社は全社「再開の見込みは立っていません」としか言えません。8月23日の地震では、4時間以上、誰も「あとどれくらい」を言いませんでした。</a:t>
             </a:r>
           </a:p>
         </p:txBody>
@@ -1005,7 +862,7 @@
           <a:lstStyle/>
           <a:p>
             <a:r>
-              <a:t>一番困るのは訪日外国人です。案内が読めず、点検が何時間か知らず、ホテルが数時間で埋まることも知りません。1時間目に決めるか4時間目かで、結果が変わります。</a:t>
+              <a:t>一番困るのは訪日外国人です。案内が読めず、点検が何時間か知らず、ホテルが数時間で埋まることも知りません。</a:t>
             </a:r>
           </a:p>
         </p:txBody>
@@ -1075,77 +932,7 @@
           <a:lstStyle/>
           <a:p>
             <a:r>
-              <a:t>このアプリは、その「あとどれくらい」に数字を与えます。再開まで51分から4時間26分、と幅と時刻で出し、「今夜のうちに戻れる見込み」という決断の形にします。終電と出国便の時刻から逆算しています。</a:t>
-            </a:r>
-          </a:p>
-        </p:txBody>
-      </p:sp>
-      <p:sp>
-        <p:nvSpPr>
-          <p:cNvPr id="4" name="Slide Number Placeholder 3"/>
-          <p:cNvSpPr>
-            <a:spLocks noGrp="1"/>
-          </p:cNvSpPr>
-          <p:nvPr>
-            <p:ph type="sldNum" idx="5" sz="quarter"/>
-          </p:nvPr>
-        </p:nvSpPr>
-        <p:spPr/>
-      </p:sp>
-    </p:spTree>
-  </p:cSld>
-  <p:clrMapOvr>
-    <a:masterClrMapping/>
-  </p:clrMapOvr>
-</p:notes>
-</file>
-
-<file path=ppt/notesSlides/notesSlide5.xml><?xml version="1.0" encoding="utf-8"?>
-<p:notes xmlns:a="http://schemas.openxmlformats.org/drawingml/2006/main" xmlns:p="http://schemas.openxmlformats.org/presentationml/2006/main" xmlns:r="http://schemas.openxmlformats.org/officeDocument/2006/relationships">
-  <p:cSld>
-    <p:spTree>
-      <p:nvGrpSpPr>
-        <p:cNvPr id="1" name=""/>
-        <p:cNvGrpSpPr/>
-        <p:nvPr/>
-      </p:nvGrpSpPr>
-      <p:grpSpPr>
-        <a:xfrm>
-          <a:off x="0" y="0"/>
-          <a:ext cx="0" cy="0"/>
-          <a:chOff x="0" y="0"/>
-          <a:chExt cx="0" cy="0"/>
-        </a:xfrm>
-      </p:grpSpPr>
-      <p:sp>
-        <p:nvSpPr>
-          <p:cNvPr id="2" name="Slide Image Placeholder 1"/>
-          <p:cNvSpPr>
-            <a:spLocks noGrp="1"/>
-          </p:cNvSpPr>
-          <p:nvPr>
-            <p:ph type="sldImg" idx="2"/>
-          </p:nvPr>
-        </p:nvSpPr>
-        <p:spPr/>
-      </p:sp>
-      <p:sp>
-        <p:nvSpPr>
-          <p:cNvPr id="3" name="Notes Placeholder 2"/>
-          <p:cNvSpPr>
-            <a:spLocks noGrp="1"/>
-          </p:cNvSpPr>
-          <p:nvPr>
-            <p:ph type="body" idx="3" sz="quarter"/>
-          </p:nvPr>
-        </p:nvSpPr>
-        <p:spPr/>
-        <p:txBody>
-          <a:bodyPr/>
-          <a:lstStyle/>
-          <a:p>
-            <a:r>
-              <a:t>宿の行を開くと、周りの路線が並びます。路線ごとに、最も揺れた観測点、点検区間の長さ、再開までの幅、鉄道会社の案内が見えます。根拠と限界を隠しません。</a:t>
+              <a:t>このアプリは、その「あとどれくらい」に数字を与えます。再開まで51分から4時間26分、と幅で出し、「今夜のうちに戻れる見込み」という決断の形にします。</a:t>
             </a:r>
           </a:p>
         </p:txBody>
@@ -1215,7 +1002,7 @@
           <a:lstStyle/>
           <a:p>
             <a:r>
-              <a:t>震度6強なら、待たずに宿を取れと言い、時刻は出しません。休める場所として、東京都の一時滞在施設と指定緊急避難場所を同じ地図に。現在地は住所で表示します。</a:t>
+              <a:t>震度6強なら、待たずに宿を取れと言います。休める場所として、一時滞在施設と指定緊急避難場所を同じ地図に出します。</a:t>
             </a:r>
           </a:p>
         </p:txBody>
@@ -1285,7 +1072,7 @@
           <a:lstStyle/>
           <a:p>
             <a:r>
-              <a:t>仕組みです。気象庁の震度を全国596路線に重ね、公共交通オープンデータセンターの路線と駅のデータで、旅客が知る運転系統に組み替えます。高浜・翠川の推定式で再開までの幅を出し、運行情報で「平常」なら推定を捨て、決断の形に翻訳します。</a:t>
+              <a:t>気象庁の震度を全国596路線に重ね、公共交通オープンデータセンターの路線と駅のデータで運転系統に組み替え、推定式で幅を出し、運行情報が「平常」なら推定を捨てます。</a:t>
             </a:r>
           </a:p>
         </p:txBody>
@@ -1355,7 +1142,7 @@
           <a:lstStyle/>
           <a:p>
             <a:r>
-              <a:t>数字の根拠は、高浜・翠川「地震時の鉄道運休時間の推定方法」、日本地震工学会論文集2011年の推定式です。震度4は注意運転点検で30分。震度5弱以上は徒歩点検で1キロあたり6分、プラスマイナス30分。6弱以上は時間を出しません。点検区間の誤差と式のばらつきを重ねたものが、画面の幅です。鉄道会社は自前の地震計で判断するので、これは推定です。だから幅で出し、運行情報で確定させます。</a:t>
+              <a:t>根拠は、高浜・翠川「地震時の鉄道運休時間の推定方法」、日本地震工学会論文集2011年の推定式です。震度4は注意運転点検で30分、5弱以上は徒歩点検で1キロ6分、プラスマイナス30分。6弱以上は時間を出しません。鉄道会社は自前の地震計で判断するので、幅で出し、運行情報で確定させます。</a:t>
             </a:r>
           </a:p>
         </p:txBody>
@@ -1425,7 +1212,7 @@
           <a:lstStyle/>
           <a:p>
             <a:r>
-              <a:t>公共交通オープンデータは2つの役割です。路線と駅で運転系統の対応表を作ること。運行情報で推定を終わらせること。「あとどれくらい」と「もう再開した」の両端を持つのはここだけです。</a:t>
+              <a:t>公共交通オープンデータは、運転系統の対応表を作ることと、運行情報で推定を終わらせること、2つの役割です。</a:t>
             </a:r>
           </a:p>
         </p:txBody>
@@ -4715,8 +4502,8 @@
         </p:nvSpPr>
         <p:spPr>
           <a:xfrm>
-            <a:off x="10972800" y="6400800"/>
-            <a:ext cx="548640" cy="274320"/>
+            <a:off x="731520" y="502920"/>
+            <a:ext cx="7315200" cy="365760"/>
           </a:xfrm>
           <a:prstGeom prst="rect">
             <a:avLst/>
@@ -4729,19 +4516,19 @@
           </a:bodyPr>
           <a:lstStyle/>
           <a:p>
-            <a:pPr algn="r">
-              <a:lnSpc>
-                <a:spcPct val="115000"/>
-              </a:lnSpc>
-            </a:pPr>
-            <a:r>
-              <a:rPr sz="1000" b="0">
-                <a:solidFill>
-                  <a:srgbClr val="5C6670"/>
-                </a:solidFill>
-                <a:latin typeface="Yu Gothic UI"/>
-              </a:rPr>
-              <a:t>10</a:t>
+            <a:pPr algn="l">
+              <a:lnSpc>
+                <a:spcPct val="115000"/>
+              </a:lnSpc>
+            </a:pPr>
+            <a:r>
+              <a:rPr sz="1300" b="1">
+                <a:solidFill>
+                  <a:srgbClr val="A4231C"/>
+                </a:solidFill>
+                <a:latin typeface="Yu Gothic UI"/>
+              </a:rPr>
+              <a:t>実際の地震で</a:t>
             </a:r>
           </a:p>
         </p:txBody>
@@ -4754,8 +4541,8 @@
         </p:nvSpPr>
         <p:spPr>
           <a:xfrm>
-            <a:off x="731520" y="502920"/>
-            <a:ext cx="7315200" cy="365760"/>
+            <a:off x="731520" y="868680"/>
+            <a:ext cx="7498079" cy="1280160"/>
           </a:xfrm>
           <a:prstGeom prst="rect">
             <a:avLst/>
@@ -4770,17 +4557,17 @@
           <a:p>
             <a:pPr algn="l">
               <a:lnSpc>
-                <a:spcPct val="115000"/>
-              </a:lnSpc>
-            </a:pPr>
-            <a:r>
-              <a:rPr sz="1300" b="1">
-                <a:solidFill>
-                  <a:srgbClr val="A4231C"/>
-                </a:solidFill>
-                <a:latin typeface="Yu Gothic UI"/>
-              </a:rPr>
-              <a:t>実際の地震で</a:t>
+                <a:spcPct val="105000"/>
+              </a:lnSpc>
+            </a:pPr>
+            <a:r>
+              <a:rPr sz="3000" b="1">
+                <a:solidFill>
+                  <a:srgbClr val="14181D"/>
+                </a:solidFill>
+                <a:latin typeface="Yu Gothic UI"/>
+              </a:rPr>
+              <a:t>2026-08-23 茨城県南部 M5.9 を実データで</a:t>
             </a:r>
           </a:p>
         </p:txBody>
@@ -4793,8 +4580,8 @@
         </p:nvSpPr>
         <p:spPr>
           <a:xfrm>
-            <a:off x="731520" y="868680"/>
-            <a:ext cx="7498079" cy="1280160"/>
+            <a:off x="731520" y="2011680"/>
+            <a:ext cx="2743200" cy="365760"/>
           </a:xfrm>
           <a:prstGeom prst="rect">
             <a:avLst/>
@@ -4809,17 +4596,17 @@
           <a:p>
             <a:pPr algn="l">
               <a:lnSpc>
-                <a:spcPct val="105000"/>
-              </a:lnSpc>
-            </a:pPr>
-            <a:r>
-              <a:rPr sz="3000" b="1">
-                <a:solidFill>
-                  <a:srgbClr val="14181D"/>
-                </a:solidFill>
-                <a:latin typeface="Yu Gothic UI"/>
-              </a:rPr>
-              <a:t>2026-08-23 茨城県南部 M5.9 を実データで</a:t>
+                <a:spcPct val="115000"/>
+              </a:lnSpc>
+            </a:pPr>
+            <a:r>
+              <a:rPr sz="1200" b="1">
+                <a:solidFill>
+                  <a:srgbClr val="5C6670"/>
+                </a:solidFill>
+                <a:latin typeface="Yu Gothic UI"/>
+              </a:rPr>
+              <a:t>系統</a:t>
             </a:r>
           </a:p>
         </p:txBody>
@@ -4832,8 +4619,8 @@
         </p:nvSpPr>
         <p:spPr>
           <a:xfrm>
-            <a:off x="731520" y="2011680"/>
-            <a:ext cx="2743200" cy="365760"/>
+            <a:off x="3474720" y="2011680"/>
+            <a:ext cx="1097280" cy="365760"/>
           </a:xfrm>
           <a:prstGeom prst="rect">
             <a:avLst/>
@@ -4858,7 +4645,7 @@
                 </a:solidFill>
                 <a:latin typeface="Yu Gothic UI"/>
               </a:rPr>
-              <a:t>系統</a:t>
+              <a:t>震度</a:t>
             </a:r>
           </a:p>
         </p:txBody>
@@ -4871,8 +4658,8 @@
         </p:nvSpPr>
         <p:spPr>
           <a:xfrm>
-            <a:off x="3474720" y="2011680"/>
-            <a:ext cx="1097280" cy="365760"/>
+            <a:off x="4572000" y="2011680"/>
+            <a:ext cx="3200400" cy="365760"/>
           </a:xfrm>
           <a:prstGeom prst="rect">
             <a:avLst/>
@@ -4897,45 +4684,6 @@
                 </a:solidFill>
                 <a:latin typeface="Yu Gothic UI"/>
               </a:rPr>
-              <a:t>震度</a:t>
-            </a:r>
-          </a:p>
-        </p:txBody>
-      </p:sp>
-      <p:sp>
-        <p:nvSpPr>
-          <p:cNvPr id="8" name="TextBox 7"/>
-          <p:cNvSpPr txBox="1"/>
-          <p:nvPr/>
-        </p:nvSpPr>
-        <p:spPr>
-          <a:xfrm>
-            <a:off x="4572000" y="2011680"/>
-            <a:ext cx="3200400" cy="365760"/>
-          </a:xfrm>
-          <a:prstGeom prst="rect">
-            <a:avLst/>
-          </a:prstGeom>
-          <a:noFill/>
-        </p:spPr>
-        <p:txBody>
-          <a:bodyPr wrap="square" anchor="t" lIns="45720" rIns="45720" tIns="18288" bIns="18288">
-            <a:spAutoFit/>
-          </a:bodyPr>
-          <a:lstStyle/>
-          <a:p>
-            <a:pPr algn="l">
-              <a:lnSpc>
-                <a:spcPct val="115000"/>
-              </a:lnSpc>
-            </a:pPr>
-            <a:r>
-              <a:rPr sz="1200" b="1">
-                <a:solidFill>
-                  <a:srgbClr val="5C6670"/>
-                </a:solidFill>
-                <a:latin typeface="Yu Gothic UI"/>
-              </a:rPr>
               <a:t>再開まで (推定)</a:t>
             </a:r>
           </a:p>
@@ -4943,7 +4691,7 @@
       </p:sp>
       <p:sp>
         <p:nvSpPr>
-          <p:cNvPr id="9" name="Rounded Rectangle 8"/>
+          <p:cNvPr id="8" name="Rounded Rectangle 7"/>
           <p:cNvSpPr/>
           <p:nvPr/>
         </p:nvSpPr>
@@ -4989,14 +4737,53 @@
       </p:sp>
       <p:sp>
         <p:nvSpPr>
+          <p:cNvPr id="9" name="TextBox 8"/>
+          <p:cNvSpPr txBox="1"/>
+          <p:nvPr/>
+        </p:nvSpPr>
+        <p:spPr>
+          <a:xfrm>
+            <a:off x="868680" y="2423160"/>
+            <a:ext cx="2651760" cy="411480"/>
+          </a:xfrm>
+          <a:prstGeom prst="rect">
+            <a:avLst/>
+          </a:prstGeom>
+          <a:noFill/>
+        </p:spPr>
+        <p:txBody>
+          <a:bodyPr wrap="square" anchor="ctr" lIns="45720" rIns="45720" tIns="18288" bIns="18288">
+            <a:spAutoFit/>
+          </a:bodyPr>
+          <a:lstStyle/>
+          <a:p>
+            <a:pPr algn="l">
+              <a:lnSpc>
+                <a:spcPct val="115000"/>
+              </a:lnSpc>
+            </a:pPr>
+            <a:r>
+              <a:rPr sz="1500" b="1">
+                <a:solidFill>
+                  <a:srgbClr val="14181D"/>
+                </a:solidFill>
+                <a:latin typeface="Yu Gothic UI"/>
+              </a:rPr>
+              <a:t>山手線</a:t>
+            </a:r>
+          </a:p>
+        </p:txBody>
+      </p:sp>
+      <p:sp>
+        <p:nvSpPr>
           <p:cNvPr id="10" name="TextBox 9"/>
           <p:cNvSpPr txBox="1"/>
           <p:nvPr/>
         </p:nvSpPr>
         <p:spPr>
           <a:xfrm>
-            <a:off x="868680" y="2423160"/>
-            <a:ext cx="2651760" cy="411480"/>
+            <a:off x="3474720" y="2423160"/>
+            <a:ext cx="1097280" cy="411480"/>
           </a:xfrm>
           <a:prstGeom prst="rect">
             <a:avLst/>
@@ -5015,13 +4802,13 @@
               </a:lnSpc>
             </a:pPr>
             <a:r>
-              <a:rPr sz="1500" b="1">
+              <a:rPr sz="1500" b="0">
                 <a:solidFill>
                   <a:srgbClr val="14181D"/>
                 </a:solidFill>
                 <a:latin typeface="Yu Gothic UI"/>
               </a:rPr>
-              <a:t>山手線</a:t>
+              <a:t>5 弱</a:t>
             </a:r>
           </a:p>
         </p:txBody>
@@ -5034,8 +4821,8 @@
         </p:nvSpPr>
         <p:spPr>
           <a:xfrm>
-            <a:off x="3474720" y="2423160"/>
-            <a:ext cx="1097280" cy="411480"/>
+            <a:off x="4572000" y="2423160"/>
+            <a:ext cx="3200400" cy="411480"/>
           </a:xfrm>
           <a:prstGeom prst="rect">
             <a:avLst/>
@@ -5054,45 +4841,6 @@
               </a:lnSpc>
             </a:pPr>
             <a:r>
-              <a:rPr sz="1500" b="0">
-                <a:solidFill>
-                  <a:srgbClr val="14181D"/>
-                </a:solidFill>
-                <a:latin typeface="Yu Gothic UI"/>
-              </a:rPr>
-              <a:t>5 弱</a:t>
-            </a:r>
-          </a:p>
-        </p:txBody>
-      </p:sp>
-      <p:sp>
-        <p:nvSpPr>
-          <p:cNvPr id="12" name="TextBox 11"/>
-          <p:cNvSpPr txBox="1"/>
-          <p:nvPr/>
-        </p:nvSpPr>
-        <p:spPr>
-          <a:xfrm>
-            <a:off x="4572000" y="2423160"/>
-            <a:ext cx="3200400" cy="411480"/>
-          </a:xfrm>
-          <a:prstGeom prst="rect">
-            <a:avLst/>
-          </a:prstGeom>
-          <a:noFill/>
-        </p:spPr>
-        <p:txBody>
-          <a:bodyPr wrap="square" anchor="ctr" lIns="45720" rIns="45720" tIns="18288" bIns="18288">
-            <a:spAutoFit/>
-          </a:bodyPr>
-          <a:lstStyle/>
-          <a:p>
-            <a:pPr algn="l">
-              <a:lnSpc>
-                <a:spcPct val="115000"/>
-              </a:lnSpc>
-            </a:pPr>
-            <a:r>
               <a:rPr sz="1500" b="1">
                 <a:solidFill>
                   <a:srgbClr val="A4231C"/>
@@ -5106,7 +4854,7 @@
       </p:sp>
       <p:sp>
         <p:nvSpPr>
-          <p:cNvPr id="13" name="Rounded Rectangle 12"/>
+          <p:cNvPr id="12" name="Rounded Rectangle 11"/>
           <p:cNvSpPr/>
           <p:nvPr/>
         </p:nvSpPr>
@@ -5152,14 +4900,53 @@
       </p:sp>
       <p:sp>
         <p:nvSpPr>
+          <p:cNvPr id="13" name="TextBox 12"/>
+          <p:cNvSpPr txBox="1"/>
+          <p:nvPr/>
+        </p:nvSpPr>
+        <p:spPr>
+          <a:xfrm>
+            <a:off x="868680" y="2990088"/>
+            <a:ext cx="2651760" cy="411480"/>
+          </a:xfrm>
+          <a:prstGeom prst="rect">
+            <a:avLst/>
+          </a:prstGeom>
+          <a:noFill/>
+        </p:spPr>
+        <p:txBody>
+          <a:bodyPr wrap="square" anchor="ctr" lIns="45720" rIns="45720" tIns="18288" bIns="18288">
+            <a:spAutoFit/>
+          </a:bodyPr>
+          <a:lstStyle/>
+          <a:p>
+            <a:pPr algn="l">
+              <a:lnSpc>
+                <a:spcPct val="115000"/>
+              </a:lnSpc>
+            </a:pPr>
+            <a:r>
+              <a:rPr sz="1500" b="1">
+                <a:solidFill>
+                  <a:srgbClr val="14181D"/>
+                </a:solidFill>
+                <a:latin typeface="Yu Gothic UI"/>
+              </a:rPr>
+              <a:t>中央線快速</a:t>
+            </a:r>
+          </a:p>
+        </p:txBody>
+      </p:sp>
+      <p:sp>
+        <p:nvSpPr>
           <p:cNvPr id="14" name="TextBox 13"/>
           <p:cNvSpPr txBox="1"/>
           <p:nvPr/>
         </p:nvSpPr>
         <p:spPr>
           <a:xfrm>
-            <a:off x="868680" y="2990088"/>
-            <a:ext cx="2651760" cy="411480"/>
+            <a:off x="3474720" y="2990088"/>
+            <a:ext cx="1097280" cy="411480"/>
           </a:xfrm>
           <a:prstGeom prst="rect">
             <a:avLst/>
@@ -5178,13 +4965,13 @@
               </a:lnSpc>
             </a:pPr>
             <a:r>
-              <a:rPr sz="1500" b="1">
+              <a:rPr sz="1500" b="0">
                 <a:solidFill>
                   <a:srgbClr val="14181D"/>
                 </a:solidFill>
                 <a:latin typeface="Yu Gothic UI"/>
               </a:rPr>
-              <a:t>中央線快速</a:t>
+              <a:t>5 弱</a:t>
             </a:r>
           </a:p>
         </p:txBody>
@@ -5197,8 +4984,8 @@
         </p:nvSpPr>
         <p:spPr>
           <a:xfrm>
-            <a:off x="3474720" y="2990088"/>
-            <a:ext cx="1097280" cy="411480"/>
+            <a:off x="4572000" y="2990088"/>
+            <a:ext cx="3200400" cy="411480"/>
           </a:xfrm>
           <a:prstGeom prst="rect">
             <a:avLst/>
@@ -5217,45 +5004,6 @@
               </a:lnSpc>
             </a:pPr>
             <a:r>
-              <a:rPr sz="1500" b="0">
-                <a:solidFill>
-                  <a:srgbClr val="14181D"/>
-                </a:solidFill>
-                <a:latin typeface="Yu Gothic UI"/>
-              </a:rPr>
-              <a:t>5 弱</a:t>
-            </a:r>
-          </a:p>
-        </p:txBody>
-      </p:sp>
-      <p:sp>
-        <p:nvSpPr>
-          <p:cNvPr id="16" name="TextBox 15"/>
-          <p:cNvSpPr txBox="1"/>
-          <p:nvPr/>
-        </p:nvSpPr>
-        <p:spPr>
-          <a:xfrm>
-            <a:off x="4572000" y="2990088"/>
-            <a:ext cx="3200400" cy="411480"/>
-          </a:xfrm>
-          <a:prstGeom prst="rect">
-            <a:avLst/>
-          </a:prstGeom>
-          <a:noFill/>
-        </p:spPr>
-        <p:txBody>
-          <a:bodyPr wrap="square" anchor="ctr" lIns="45720" rIns="45720" tIns="18288" bIns="18288">
-            <a:spAutoFit/>
-          </a:bodyPr>
-          <a:lstStyle/>
-          <a:p>
-            <a:pPr algn="l">
-              <a:lnSpc>
-                <a:spcPct val="115000"/>
-              </a:lnSpc>
-            </a:pPr>
-            <a:r>
               <a:rPr sz="1500" b="1">
                 <a:solidFill>
                   <a:srgbClr val="A4231C"/>
@@ -5269,7 +5017,7 @@
       </p:sp>
       <p:sp>
         <p:nvSpPr>
-          <p:cNvPr id="17" name="Rounded Rectangle 16"/>
+          <p:cNvPr id="16" name="Rounded Rectangle 15"/>
           <p:cNvSpPr/>
           <p:nvPr/>
         </p:nvSpPr>
@@ -5315,14 +5063,53 @@
       </p:sp>
       <p:sp>
         <p:nvSpPr>
+          <p:cNvPr id="17" name="TextBox 16"/>
+          <p:cNvSpPr txBox="1"/>
+          <p:nvPr/>
+        </p:nvSpPr>
+        <p:spPr>
+          <a:xfrm>
+            <a:off x="868680" y="3557016"/>
+            <a:ext cx="2651760" cy="411480"/>
+          </a:xfrm>
+          <a:prstGeom prst="rect">
+            <a:avLst/>
+          </a:prstGeom>
+          <a:noFill/>
+        </p:spPr>
+        <p:txBody>
+          <a:bodyPr wrap="square" anchor="ctr" lIns="45720" rIns="45720" tIns="18288" bIns="18288">
+            <a:spAutoFit/>
+          </a:bodyPr>
+          <a:lstStyle/>
+          <a:p>
+            <a:pPr algn="l">
+              <a:lnSpc>
+                <a:spcPct val="115000"/>
+              </a:lnSpc>
+            </a:pPr>
+            <a:r>
+              <a:rPr sz="1500" b="1">
+                <a:solidFill>
+                  <a:srgbClr val="14181D"/>
+                </a:solidFill>
+                <a:latin typeface="Yu Gothic UI"/>
+              </a:rPr>
+              <a:t>京浜東北線・根岸線</a:t>
+            </a:r>
+          </a:p>
+        </p:txBody>
+      </p:sp>
+      <p:sp>
+        <p:nvSpPr>
           <p:cNvPr id="18" name="TextBox 17"/>
           <p:cNvSpPr txBox="1"/>
           <p:nvPr/>
         </p:nvSpPr>
         <p:spPr>
           <a:xfrm>
-            <a:off x="868680" y="3557016"/>
-            <a:ext cx="2651760" cy="411480"/>
+            <a:off x="3474720" y="3557016"/>
+            <a:ext cx="1097280" cy="411480"/>
           </a:xfrm>
           <a:prstGeom prst="rect">
             <a:avLst/>
@@ -5341,13 +5128,13 @@
               </a:lnSpc>
             </a:pPr>
             <a:r>
-              <a:rPr sz="1500" b="1">
+              <a:rPr sz="1500" b="0">
                 <a:solidFill>
                   <a:srgbClr val="14181D"/>
                 </a:solidFill>
                 <a:latin typeface="Yu Gothic UI"/>
               </a:rPr>
-              <a:t>京浜東北線・根岸線</a:t>
+              <a:t>5 弱</a:t>
             </a:r>
           </a:p>
         </p:txBody>
@@ -5360,8 +5147,8 @@
         </p:nvSpPr>
         <p:spPr>
           <a:xfrm>
-            <a:off x="3474720" y="3557016"/>
-            <a:ext cx="1097280" cy="411480"/>
+            <a:off x="4572000" y="3557016"/>
+            <a:ext cx="3200400" cy="411480"/>
           </a:xfrm>
           <a:prstGeom prst="rect">
             <a:avLst/>
@@ -5380,45 +5167,6 @@
               </a:lnSpc>
             </a:pPr>
             <a:r>
-              <a:rPr sz="1500" b="0">
-                <a:solidFill>
-                  <a:srgbClr val="14181D"/>
-                </a:solidFill>
-                <a:latin typeface="Yu Gothic UI"/>
-              </a:rPr>
-              <a:t>5 弱</a:t>
-            </a:r>
-          </a:p>
-        </p:txBody>
-      </p:sp>
-      <p:sp>
-        <p:nvSpPr>
-          <p:cNvPr id="20" name="TextBox 19"/>
-          <p:cNvSpPr txBox="1"/>
-          <p:nvPr/>
-        </p:nvSpPr>
-        <p:spPr>
-          <a:xfrm>
-            <a:off x="4572000" y="3557016"/>
-            <a:ext cx="3200400" cy="411480"/>
-          </a:xfrm>
-          <a:prstGeom prst="rect">
-            <a:avLst/>
-          </a:prstGeom>
-          <a:noFill/>
-        </p:spPr>
-        <p:txBody>
-          <a:bodyPr wrap="square" anchor="ctr" lIns="45720" rIns="45720" tIns="18288" bIns="18288">
-            <a:spAutoFit/>
-          </a:bodyPr>
-          <a:lstStyle/>
-          <a:p>
-            <a:pPr algn="l">
-              <a:lnSpc>
-                <a:spcPct val="115000"/>
-              </a:lnSpc>
-            </a:pPr>
-            <a:r>
               <a:rPr sz="1500" b="1">
                 <a:solidFill>
                   <a:srgbClr val="A4231C"/>
@@ -5432,7 +5180,7 @@
       </p:sp>
       <p:sp>
         <p:nvSpPr>
-          <p:cNvPr id="21" name="Rounded Rectangle 20"/>
+          <p:cNvPr id="20" name="Rounded Rectangle 19"/>
           <p:cNvSpPr/>
           <p:nvPr/>
         </p:nvSpPr>
@@ -5478,14 +5226,53 @@
       </p:sp>
       <p:sp>
         <p:nvSpPr>
+          <p:cNvPr id="21" name="TextBox 20"/>
+          <p:cNvSpPr txBox="1"/>
+          <p:nvPr/>
+        </p:nvSpPr>
+        <p:spPr>
+          <a:xfrm>
+            <a:off x="868680" y="4123944"/>
+            <a:ext cx="2651760" cy="411480"/>
+          </a:xfrm>
+          <a:prstGeom prst="rect">
+            <a:avLst/>
+          </a:prstGeom>
+          <a:noFill/>
+        </p:spPr>
+        <p:txBody>
+          <a:bodyPr wrap="square" anchor="ctr" lIns="45720" rIns="45720" tIns="18288" bIns="18288">
+            <a:spAutoFit/>
+          </a:bodyPr>
+          <a:lstStyle/>
+          <a:p>
+            <a:pPr algn="l">
+              <a:lnSpc>
+                <a:spcPct val="115000"/>
+              </a:lnSpc>
+            </a:pPr>
+            <a:r>
+              <a:rPr sz="1500" b="1">
+                <a:solidFill>
+                  <a:srgbClr val="14181D"/>
+                </a:solidFill>
+                <a:latin typeface="Yu Gothic UI"/>
+              </a:rPr>
+              <a:t>京急空港線</a:t>
+            </a:r>
+          </a:p>
+        </p:txBody>
+      </p:sp>
+      <p:sp>
+        <p:nvSpPr>
           <p:cNvPr id="22" name="TextBox 21"/>
           <p:cNvSpPr txBox="1"/>
           <p:nvPr/>
         </p:nvSpPr>
         <p:spPr>
           <a:xfrm>
-            <a:off x="868680" y="4123944"/>
-            <a:ext cx="2651760" cy="411480"/>
+            <a:off x="3474720" y="4123944"/>
+            <a:ext cx="1097280" cy="411480"/>
           </a:xfrm>
           <a:prstGeom prst="rect">
             <a:avLst/>
@@ -5504,13 +5291,13 @@
               </a:lnSpc>
             </a:pPr>
             <a:r>
-              <a:rPr sz="1500" b="1">
+              <a:rPr sz="1500" b="0">
                 <a:solidFill>
                   <a:srgbClr val="14181D"/>
                 </a:solidFill>
                 <a:latin typeface="Yu Gothic UI"/>
               </a:rPr>
-              <a:t>京急空港線</a:t>
+              <a:t>5 弱</a:t>
             </a:r>
           </a:p>
         </p:txBody>
@@ -5523,8 +5310,8 @@
         </p:nvSpPr>
         <p:spPr>
           <a:xfrm>
-            <a:off x="3474720" y="4123944"/>
-            <a:ext cx="1097280" cy="411480"/>
+            <a:off x="4572000" y="4123944"/>
+            <a:ext cx="3200400" cy="411480"/>
           </a:xfrm>
           <a:prstGeom prst="rect">
             <a:avLst/>
@@ -5543,13 +5330,13 @@
               </a:lnSpc>
             </a:pPr>
             <a:r>
-              <a:rPr sz="1500" b="0">
-                <a:solidFill>
-                  <a:srgbClr val="14181D"/>
-                </a:solidFill>
-                <a:latin typeface="Yu Gothic UI"/>
-              </a:rPr>
-              <a:t>5 弱</a:t>
+              <a:rPr sz="1500" b="1">
+                <a:solidFill>
+                  <a:srgbClr val="A4231C"/>
+                </a:solidFill>
+                <a:latin typeface="Yu Gothic UI"/>
+              </a:rPr>
+              <a:t>35 分 〜 2 時間 1 分</a:t>
             </a:r>
           </a:p>
         </p:txBody>
@@ -5557,45 +5344,6 @@
       <p:sp>
         <p:nvSpPr>
           <p:cNvPr id="24" name="TextBox 23"/>
-          <p:cNvSpPr txBox="1"/>
-          <p:nvPr/>
-        </p:nvSpPr>
-        <p:spPr>
-          <a:xfrm>
-            <a:off x="4572000" y="4123944"/>
-            <a:ext cx="3200400" cy="411480"/>
-          </a:xfrm>
-          <a:prstGeom prst="rect">
-            <a:avLst/>
-          </a:prstGeom>
-          <a:noFill/>
-        </p:spPr>
-        <p:txBody>
-          <a:bodyPr wrap="square" anchor="ctr" lIns="45720" rIns="45720" tIns="18288" bIns="18288">
-            <a:spAutoFit/>
-          </a:bodyPr>
-          <a:lstStyle/>
-          <a:p>
-            <a:pPr algn="l">
-              <a:lnSpc>
-                <a:spcPct val="115000"/>
-              </a:lnSpc>
-            </a:pPr>
-            <a:r>
-              <a:rPr sz="1500" b="1">
-                <a:solidFill>
-                  <a:srgbClr val="A4231C"/>
-                </a:solidFill>
-                <a:latin typeface="Yu Gothic UI"/>
-              </a:rPr>
-              <a:t>35 分 〜 2 時間 1 分</a:t>
-            </a:r>
-          </a:p>
-        </p:txBody>
-      </p:sp>
-      <p:sp>
-        <p:nvSpPr>
-          <p:cNvPr id="25" name="TextBox 24"/>
           <p:cNvSpPr txBox="1"/>
           <p:nvPr/>
         </p:nvSpPr>
@@ -5669,7 +5417,7 @@
       </p:sp>
       <p:sp>
         <p:nvSpPr>
-          <p:cNvPr id="26" name="Rounded Rectangle 25"/>
+          <p:cNvPr id="25" name="Rounded Rectangle 24"/>
           <p:cNvSpPr/>
           <p:nvPr/>
         </p:nvSpPr>
@@ -5715,7 +5463,7 @@
       </p:sp>
       <p:pic>
         <p:nvPicPr>
-          <p:cNvPr id="27" name="Picture 26" descr="09_real_event_ja.png"/>
+          <p:cNvPr id="26" name="Picture 25" descr="09_real_event_ja.png"/>
           <p:cNvPicPr>
             <a:picLocks noChangeAspect="1"/>
           </p:cNvPicPr>
@@ -5737,1313 +5485,6 @@
           </a:prstGeom>
         </p:spPr>
       </p:pic>
-    </p:spTree>
-  </p:cSld>
-  <p:clrMapOvr>
-    <a:masterClrMapping/>
-  </p:clrMapOvr>
-</p:sld>
-</file>
-
-<file path=ppt/slides/slide11.xml><?xml version="1.0" encoding="utf-8"?>
-<p:sld xmlns:a="http://schemas.openxmlformats.org/drawingml/2006/main" xmlns:p="http://schemas.openxmlformats.org/presentationml/2006/main" xmlns:r="http://schemas.openxmlformats.org/officeDocument/2006/relationships">
-  <p:cSld>
-    <p:spTree>
-      <p:nvGrpSpPr>
-        <p:cNvPr id="1" name=""/>
-        <p:cNvGrpSpPr/>
-        <p:nvPr/>
-      </p:nvGrpSpPr>
-      <p:grpSpPr/>
-      <p:sp>
-        <p:nvSpPr>
-          <p:cNvPr id="2" name="TextBox 1"/>
-          <p:cNvSpPr txBox="1"/>
-          <p:nvPr/>
-        </p:nvSpPr>
-        <p:spPr>
-          <a:xfrm>
-            <a:off x="731520" y="6400800"/>
-            <a:ext cx="7315200" cy="274320"/>
-          </a:xfrm>
-          <a:prstGeom prst="rect">
-            <a:avLst/>
-          </a:prstGeom>
-          <a:noFill/>
-        </p:spPr>
-        <p:txBody>
-          <a:bodyPr wrap="square" anchor="t" lIns="45720" rIns="45720" tIns="18288" bIns="18288">
-            <a:spAutoFit/>
-          </a:bodyPr>
-          <a:lstStyle/>
-          <a:p>
-            <a:pPr algn="l">
-              <a:lnSpc>
-                <a:spcPct val="115000"/>
-              </a:lnSpc>
-            </a:pPr>
-            <a:r>
-              <a:rPr sz="1000" b="0">
-                <a:solidFill>
-                  <a:srgbClr val="5C6670"/>
-                </a:solidFill>
-                <a:latin typeface="Yu Gothic UI"/>
-              </a:rPr>
-              <a:t>Move or Wait — 動くか、待つか  ·  公共交通オープンデータチャレンジ2026</a:t>
-            </a:r>
-          </a:p>
-        </p:txBody>
-      </p:sp>
-      <p:sp>
-        <p:nvSpPr>
-          <p:cNvPr id="3" name="TextBox 2"/>
-          <p:cNvSpPr txBox="1"/>
-          <p:nvPr/>
-        </p:nvSpPr>
-        <p:spPr>
-          <a:xfrm>
-            <a:off x="10972800" y="6400800"/>
-            <a:ext cx="548640" cy="274320"/>
-          </a:xfrm>
-          <a:prstGeom prst="rect">
-            <a:avLst/>
-          </a:prstGeom>
-          <a:noFill/>
-        </p:spPr>
-        <p:txBody>
-          <a:bodyPr wrap="square" anchor="t" lIns="45720" rIns="45720" tIns="18288" bIns="18288">
-            <a:spAutoFit/>
-          </a:bodyPr>
-          <a:lstStyle/>
-          <a:p>
-            <a:pPr algn="r">
-              <a:lnSpc>
-                <a:spcPct val="115000"/>
-              </a:lnSpc>
-            </a:pPr>
-            <a:r>
-              <a:rPr sz="1000" b="0">
-                <a:solidFill>
-                  <a:srgbClr val="5C6670"/>
-                </a:solidFill>
-                <a:latin typeface="Yu Gothic UI"/>
-              </a:rPr>
-              <a:t>11</a:t>
-            </a:r>
-          </a:p>
-        </p:txBody>
-      </p:sp>
-      <p:sp>
-        <p:nvSpPr>
-          <p:cNvPr id="4" name="TextBox 3"/>
-          <p:cNvSpPr txBox="1"/>
-          <p:nvPr/>
-        </p:nvSpPr>
-        <p:spPr>
-          <a:xfrm>
-            <a:off x="731520" y="502920"/>
-            <a:ext cx="7315200" cy="365760"/>
-          </a:xfrm>
-          <a:prstGeom prst="rect">
-            <a:avLst/>
-          </a:prstGeom>
-          <a:noFill/>
-        </p:spPr>
-        <p:txBody>
-          <a:bodyPr wrap="square" anchor="t" lIns="45720" rIns="45720" tIns="18288" bIns="18288">
-            <a:spAutoFit/>
-          </a:bodyPr>
-          <a:lstStyle/>
-          <a:p>
-            <a:pPr algn="l">
-              <a:lnSpc>
-                <a:spcPct val="115000"/>
-              </a:lnSpc>
-            </a:pPr>
-            <a:r>
-              <a:rPr sz="1300" b="1">
-                <a:solidFill>
-                  <a:srgbClr val="A4231C"/>
-                </a:solidFill>
-                <a:latin typeface="Yu Gothic UI"/>
-              </a:rPr>
-              <a:t>地震の前に済ませる</a:t>
-            </a:r>
-          </a:p>
-        </p:txBody>
-      </p:sp>
-      <p:sp>
-        <p:nvSpPr>
-          <p:cNvPr id="5" name="TextBox 4"/>
-          <p:cNvSpPr txBox="1"/>
-          <p:nvPr/>
-        </p:nvSpPr>
-        <p:spPr>
-          <a:xfrm>
-            <a:off x="731520" y="868680"/>
-            <a:ext cx="4206240" cy="1280160"/>
-          </a:xfrm>
-          <a:prstGeom prst="rect">
-            <a:avLst/>
-          </a:prstGeom>
-          <a:noFill/>
-        </p:spPr>
-        <p:txBody>
-          <a:bodyPr wrap="square" anchor="t" lIns="45720" rIns="45720" tIns="18288" bIns="18288">
-            <a:spAutoFit/>
-          </a:bodyPr>
-          <a:lstStyle/>
-          <a:p>
-            <a:pPr algn="l">
-              <a:lnSpc>
-                <a:spcPct val="105000"/>
-              </a:lnSpc>
-            </a:pPr>
-            <a:r>
-              <a:rPr sz="2600" b="1">
-                <a:solidFill>
-                  <a:srgbClr val="14181D"/>
-                </a:solidFill>
-                <a:latin typeface="Yu Gothic UI"/>
-              </a:rPr>
-              <a:t>宿と出国便は事前に。</a:t>
-            </a:r>
-          </a:p>
-          <a:p>
-            <a:pPr algn="l">
-              <a:lnSpc>
-                <a:spcPct val="105000"/>
-              </a:lnSpc>
-            </a:pPr>
-            <a:r>
-              <a:rPr sz="2600" b="1">
-                <a:solidFill>
-                  <a:srgbClr val="14181D"/>
-                </a:solidFill>
-                <a:latin typeface="Yu Gothic UI"/>
-              </a:rPr>
-              <a:t>リンクで配れる。4 言語。</a:t>
-            </a:r>
-          </a:p>
-        </p:txBody>
-      </p:sp>
-      <p:sp>
-        <p:nvSpPr>
-          <p:cNvPr id="6" name="TextBox 5"/>
-          <p:cNvSpPr txBox="1"/>
-          <p:nvPr/>
-        </p:nvSpPr>
-        <p:spPr>
-          <a:xfrm>
-            <a:off x="731520" y="2286000"/>
-            <a:ext cx="4023360" cy="3931920"/>
-          </a:xfrm>
-          <a:prstGeom prst="rect">
-            <a:avLst/>
-          </a:prstGeom>
-          <a:noFill/>
-        </p:spPr>
-        <p:txBody>
-          <a:bodyPr wrap="square" anchor="t" lIns="45720" rIns="45720" tIns="18288" bIns="18288">
-            <a:spAutoFit/>
-          </a:bodyPr>
-          <a:lstStyle/>
-          <a:p>
-            <a:pPr algn="l">
-              <a:lnSpc>
-                <a:spcPct val="115000"/>
-              </a:lnSpc>
-            </a:pPr>
-            <a:r>
-              <a:rPr sz="1700" b="1">
-                <a:solidFill>
-                  <a:srgbClr val="A4231C"/>
-                </a:solidFill>
-                <a:latin typeface="Yu Gothic UI"/>
-              </a:rPr>
-              <a:t>設定は URL に入る</a:t>
-            </a:r>
-          </a:p>
-          <a:p>
-            <a:pPr algn="l">
-              <a:lnSpc>
-                <a:spcPct val="115000"/>
-              </a:lnSpc>
-            </a:pPr>
-            <a:r>
-              <a:rPr sz="1200" b="0">
-                <a:solidFill>
-                  <a:srgbClr val="5C6670"/>
-                </a:solidFill>
-                <a:latin typeface="Yu Gothic UI"/>
-              </a:rPr>
-              <a:t>?lang=en&amp;home=…&amp;flight=NRT&amp;dep=…</a:t>
-            </a:r>
-          </a:p>
-          <a:p>
-            <a:pPr algn="l">
-              <a:lnSpc>
-                <a:spcPct val="115000"/>
-              </a:lnSpc>
-              <a:spcBef>
-                <a:spcPts val="400"/>
-              </a:spcBef>
-            </a:pPr>
-            <a:r>
-              <a:rPr sz="1400" b="0">
-                <a:solidFill>
-                  <a:srgbClr val="14181D"/>
-                </a:solidFill>
-                <a:latin typeface="Yu Gothic UI"/>
-              </a:rPr>
-              <a:t>宿・旅行会社・空港が、客に設定つきリンクを配れる。地震のあとに設定させない。</a:t>
-            </a:r>
-          </a:p>
-          <a:p>
-            <a:pPr algn="l">
-              <a:lnSpc>
-                <a:spcPct val="115000"/>
-              </a:lnSpc>
-              <a:spcBef>
-                <a:spcPts val="1600"/>
-              </a:spcBef>
-            </a:pPr>
-            <a:r>
-              <a:rPr sz="1700" b="1">
-                <a:solidFill>
-                  <a:srgbClr val="A4231C"/>
-                </a:solidFill>
-                <a:latin typeface="Yu Gothic UI"/>
-              </a:rPr>
-              <a:t>駅名検索は英語でも日本語でも</a:t>
-            </a:r>
-          </a:p>
-          <a:p>
-            <a:pPr algn="l">
-              <a:lnSpc>
-                <a:spcPct val="115000"/>
-              </a:lnSpc>
-            </a:pPr>
-            <a:r>
-              <a:rPr sz="1400" b="0">
-                <a:solidFill>
-                  <a:srgbClr val="14181D"/>
-                </a:solidFill>
-                <a:latin typeface="Yu Gothic UI"/>
-              </a:rPr>
-              <a:t>ODPT の駅名 (英語) と N02 の全駅 (日本語)</a:t>
-            </a:r>
-          </a:p>
-          <a:p>
-            <a:pPr algn="l">
-              <a:lnSpc>
-                <a:spcPct val="115000"/>
-              </a:lnSpc>
-              <a:spcBef>
-                <a:spcPts val="1600"/>
-              </a:spcBef>
-            </a:pPr>
-            <a:r>
-              <a:rPr sz="1700" b="1">
-                <a:solidFill>
-                  <a:srgbClr val="A4231C"/>
-                </a:solidFill>
-                <a:latin typeface="Yu Gothic UI"/>
-              </a:rPr>
-              <a:t>日本語・英語・中文・한국어</a:t>
-            </a:r>
-          </a:p>
-          <a:p>
-            <a:pPr algn="l">
-              <a:lnSpc>
-                <a:spcPct val="115000"/>
-              </a:lnSpc>
-            </a:pPr>
-            <a:r>
-              <a:rPr sz="1400" b="0">
-                <a:solidFill>
-                  <a:srgbClr val="14181D"/>
-                </a:solidFill>
-                <a:latin typeface="Yu Gothic UI"/>
-              </a:rPr>
-              <a:t>震源名は気象庁の英語名。時刻は 24 時間表記に固定</a:t>
-            </a:r>
-          </a:p>
-          <a:p>
-            <a:pPr algn="l">
-              <a:lnSpc>
-                <a:spcPct val="115000"/>
-              </a:lnSpc>
-              <a:spcBef>
-                <a:spcPts val="1600"/>
-              </a:spcBef>
-            </a:pPr>
-            <a:r>
-              <a:rPr sz="1700" b="1">
-                <a:solidFill>
-                  <a:srgbClr val="A4231C"/>
-                </a:solidFill>
-                <a:latin typeface="Yu Gothic UI"/>
-              </a:rPr>
-              <a:t>圏外でも最後の判定を表示</a:t>
-            </a:r>
-          </a:p>
-          <a:p>
-            <a:pPr algn="l">
-              <a:lnSpc>
-                <a:spcPct val="115000"/>
-              </a:lnSpc>
-            </a:pPr>
-            <a:r>
-              <a:rPr sz="1400" b="0">
-                <a:solidFill>
-                  <a:srgbClr val="14181D"/>
-                </a:solidFill>
-                <a:latin typeface="Yu Gothic UI"/>
-              </a:rPr>
-              <a:t>Service Worker。地震直後の輻輳に備える</a:t>
-            </a:r>
-          </a:p>
-        </p:txBody>
-      </p:sp>
-      <p:sp>
-        <p:nvSpPr>
-          <p:cNvPr id="7" name="Rounded Rectangle 6"/>
-          <p:cNvSpPr/>
-          <p:nvPr/>
-        </p:nvSpPr>
-        <p:spPr>
-          <a:xfrm>
-            <a:off x="5047488" y="1024128"/>
-            <a:ext cx="2258958" cy="4718304"/>
-          </a:xfrm>
-          <a:prstGeom prst="roundRect">
-            <a:avLst>
-              <a:gd name="adj" fmla="val 6000"/>
-            </a:avLst>
-          </a:prstGeom>
-          <a:solidFill>
-            <a:srgbClr val="14181D"/>
-          </a:solidFill>
-          <a:ln>
-            <a:noFill/>
-          </a:ln>
-          <a:effectLst/>
-        </p:spPr>
-        <p:style>
-          <a:lnRef idx="1">
-            <a:schemeClr val="accent1"/>
-          </a:lnRef>
-          <a:fillRef idx="3">
-            <a:schemeClr val="accent1"/>
-          </a:fillRef>
-          <a:effectRef idx="2">
-            <a:schemeClr val="accent1"/>
-          </a:effectRef>
-          <a:fontRef idx="minor">
-            <a:schemeClr val="lt1"/>
-          </a:fontRef>
-        </p:style>
-        <p:txBody>
-          <a:bodyPr rtlCol="0" anchor="ctr"/>
-          <a:lstStyle/>
-          <a:p>
-            <a:pPr algn="ctr"/>
-          </a:p>
-        </p:txBody>
-      </p:sp>
-      <p:pic>
-        <p:nvPicPr>
-          <p:cNvPr id="8" name="Picture 7" descr="06_settings_en.png"/>
-          <p:cNvPicPr>
-            <a:picLocks noChangeAspect="1"/>
-          </p:cNvPicPr>
-          <p:nvPr/>
-        </p:nvPicPr>
-        <p:blipFill>
-          <a:blip r:embed="rId2"/>
-          <a:stretch>
-            <a:fillRect/>
-          </a:stretch>
-        </p:blipFill>
-        <p:spPr>
-          <a:xfrm>
-            <a:off x="5120640" y="1097280"/>
-            <a:ext cx="2112654" cy="4572000"/>
-          </a:xfrm>
-          <a:prstGeom prst="rect">
-            <a:avLst/>
-          </a:prstGeom>
-        </p:spPr>
-      </p:pic>
-      <p:sp>
-        <p:nvSpPr>
-          <p:cNvPr id="9" name="Rounded Rectangle 8"/>
-          <p:cNvSpPr/>
-          <p:nvPr/>
-        </p:nvSpPr>
-        <p:spPr>
-          <a:xfrm>
-            <a:off x="7434462" y="1024128"/>
-            <a:ext cx="2258958" cy="4718304"/>
-          </a:xfrm>
-          <a:prstGeom prst="roundRect">
-            <a:avLst>
-              <a:gd name="adj" fmla="val 6000"/>
-            </a:avLst>
-          </a:prstGeom>
-          <a:solidFill>
-            <a:srgbClr val="14181D"/>
-          </a:solidFill>
-          <a:ln>
-            <a:noFill/>
-          </a:ln>
-          <a:effectLst/>
-        </p:spPr>
-        <p:style>
-          <a:lnRef idx="1">
-            <a:schemeClr val="accent1"/>
-          </a:lnRef>
-          <a:fillRef idx="3">
-            <a:schemeClr val="accent1"/>
-          </a:fillRef>
-          <a:effectRef idx="2">
-            <a:schemeClr val="accent1"/>
-          </a:effectRef>
-          <a:fontRef idx="minor">
-            <a:schemeClr val="lt1"/>
-          </a:fontRef>
-        </p:style>
-        <p:txBody>
-          <a:bodyPr rtlCol="0" anchor="ctr"/>
-          <a:lstStyle/>
-          <a:p>
-            <a:pPr algn="ctr"/>
-          </a:p>
-        </p:txBody>
-      </p:sp>
-      <p:pic>
-        <p:nvPicPr>
-          <p:cNvPr id="10" name="Picture 9" descr="07_verdict_ja.png"/>
-          <p:cNvPicPr>
-            <a:picLocks noChangeAspect="1"/>
-          </p:cNvPicPr>
-          <p:nvPr/>
-        </p:nvPicPr>
-        <p:blipFill>
-          <a:blip r:embed="rId3"/>
-          <a:stretch>
-            <a:fillRect/>
-          </a:stretch>
-        </p:blipFill>
-        <p:spPr>
-          <a:xfrm>
-            <a:off x="7507614" y="1097280"/>
-            <a:ext cx="2112654" cy="4572000"/>
-          </a:xfrm>
-          <a:prstGeom prst="rect">
-            <a:avLst/>
-          </a:prstGeom>
-        </p:spPr>
-      </p:pic>
-      <p:sp>
-        <p:nvSpPr>
-          <p:cNvPr id="11" name="Rounded Rectangle 10"/>
-          <p:cNvSpPr/>
-          <p:nvPr/>
-        </p:nvSpPr>
-        <p:spPr>
-          <a:xfrm>
-            <a:off x="9821436" y="1024128"/>
-            <a:ext cx="2258958" cy="4718304"/>
-          </a:xfrm>
-          <a:prstGeom prst="roundRect">
-            <a:avLst>
-              <a:gd name="adj" fmla="val 6000"/>
-            </a:avLst>
-          </a:prstGeom>
-          <a:solidFill>
-            <a:srgbClr val="14181D"/>
-          </a:solidFill>
-          <a:ln>
-            <a:noFill/>
-          </a:ln>
-          <a:effectLst/>
-        </p:spPr>
-        <p:style>
-          <a:lnRef idx="1">
-            <a:schemeClr val="accent1"/>
-          </a:lnRef>
-          <a:fillRef idx="3">
-            <a:schemeClr val="accent1"/>
-          </a:fillRef>
-          <a:effectRef idx="2">
-            <a:schemeClr val="accent1"/>
-          </a:effectRef>
-          <a:fontRef idx="minor">
-            <a:schemeClr val="lt1"/>
-          </a:fontRef>
-        </p:style>
-        <p:txBody>
-          <a:bodyPr rtlCol="0" anchor="ctr"/>
-          <a:lstStyle/>
-          <a:p>
-            <a:pPr algn="ctr"/>
-          </a:p>
-        </p:txBody>
-      </p:sp>
-      <p:pic>
-        <p:nvPicPr>
-          <p:cNvPr id="12" name="Picture 11" descr="08_verdict_ko.png"/>
-          <p:cNvPicPr>
-            <a:picLocks noChangeAspect="1"/>
-          </p:cNvPicPr>
-          <p:nvPr/>
-        </p:nvPicPr>
-        <p:blipFill>
-          <a:blip r:embed="rId4"/>
-          <a:stretch>
-            <a:fillRect/>
-          </a:stretch>
-        </p:blipFill>
-        <p:spPr>
-          <a:xfrm>
-            <a:off x="9894588" y="1097280"/>
-            <a:ext cx="2112654" cy="4572000"/>
-          </a:xfrm>
-          <a:prstGeom prst="rect">
-            <a:avLst/>
-          </a:prstGeom>
-        </p:spPr>
-      </p:pic>
-    </p:spTree>
-  </p:cSld>
-  <p:clrMapOvr>
-    <a:masterClrMapping/>
-  </p:clrMapOvr>
-</p:sld>
-</file>
-
-<file path=ppt/slides/slide12.xml><?xml version="1.0" encoding="utf-8"?>
-<p:sld xmlns:a="http://schemas.openxmlformats.org/drawingml/2006/main" xmlns:p="http://schemas.openxmlformats.org/presentationml/2006/main" xmlns:r="http://schemas.openxmlformats.org/officeDocument/2006/relationships">
-  <p:cSld>
-    <p:spTree>
-      <p:nvGrpSpPr>
-        <p:cNvPr id="1" name=""/>
-        <p:cNvGrpSpPr/>
-        <p:nvPr/>
-      </p:nvGrpSpPr>
-      <p:grpSpPr/>
-      <p:sp>
-        <p:nvSpPr>
-          <p:cNvPr id="2" name="TextBox 1"/>
-          <p:cNvSpPr txBox="1"/>
-          <p:nvPr/>
-        </p:nvSpPr>
-        <p:spPr>
-          <a:xfrm>
-            <a:off x="731520" y="6400800"/>
-            <a:ext cx="7315200" cy="274320"/>
-          </a:xfrm>
-          <a:prstGeom prst="rect">
-            <a:avLst/>
-          </a:prstGeom>
-          <a:noFill/>
-        </p:spPr>
-        <p:txBody>
-          <a:bodyPr wrap="square" anchor="t" lIns="45720" rIns="45720" tIns="18288" bIns="18288">
-            <a:spAutoFit/>
-          </a:bodyPr>
-          <a:lstStyle/>
-          <a:p>
-            <a:pPr algn="l">
-              <a:lnSpc>
-                <a:spcPct val="115000"/>
-              </a:lnSpc>
-            </a:pPr>
-            <a:r>
-              <a:rPr sz="1000" b="0">
-                <a:solidFill>
-                  <a:srgbClr val="5C6670"/>
-                </a:solidFill>
-                <a:latin typeface="Yu Gothic UI"/>
-              </a:rPr>
-              <a:t>Move or Wait — 動くか、待つか  ·  公共交通オープンデータチャレンジ2026</a:t>
-            </a:r>
-          </a:p>
-        </p:txBody>
-      </p:sp>
-      <p:sp>
-        <p:nvSpPr>
-          <p:cNvPr id="3" name="TextBox 2"/>
-          <p:cNvSpPr txBox="1"/>
-          <p:nvPr/>
-        </p:nvSpPr>
-        <p:spPr>
-          <a:xfrm>
-            <a:off x="10972800" y="6400800"/>
-            <a:ext cx="548640" cy="274320"/>
-          </a:xfrm>
-          <a:prstGeom prst="rect">
-            <a:avLst/>
-          </a:prstGeom>
-          <a:noFill/>
-        </p:spPr>
-        <p:txBody>
-          <a:bodyPr wrap="square" anchor="t" lIns="45720" rIns="45720" tIns="18288" bIns="18288">
-            <a:spAutoFit/>
-          </a:bodyPr>
-          <a:lstStyle/>
-          <a:p>
-            <a:pPr algn="r">
-              <a:lnSpc>
-                <a:spcPct val="115000"/>
-              </a:lnSpc>
-            </a:pPr>
-            <a:r>
-              <a:rPr sz="1000" b="0">
-                <a:solidFill>
-                  <a:srgbClr val="5C6670"/>
-                </a:solidFill>
-                <a:latin typeface="Yu Gothic UI"/>
-              </a:rPr>
-              <a:t>12</a:t>
-            </a:r>
-          </a:p>
-        </p:txBody>
-      </p:sp>
-      <p:sp>
-        <p:nvSpPr>
-          <p:cNvPr id="4" name="TextBox 3"/>
-          <p:cNvSpPr txBox="1"/>
-          <p:nvPr/>
-        </p:nvSpPr>
-        <p:spPr>
-          <a:xfrm>
-            <a:off x="731520" y="502920"/>
-            <a:ext cx="7315200" cy="365760"/>
-          </a:xfrm>
-          <a:prstGeom prst="rect">
-            <a:avLst/>
-          </a:prstGeom>
-          <a:noFill/>
-        </p:spPr>
-        <p:txBody>
-          <a:bodyPr wrap="square" anchor="t" lIns="45720" rIns="45720" tIns="18288" bIns="18288">
-            <a:spAutoFit/>
-          </a:bodyPr>
-          <a:lstStyle/>
-          <a:p>
-            <a:pPr algn="l">
-              <a:lnSpc>
-                <a:spcPct val="115000"/>
-              </a:lnSpc>
-            </a:pPr>
-            <a:r>
-              <a:rPr sz="1300" b="1">
-                <a:solidFill>
-                  <a:srgbClr val="A4231C"/>
-                </a:solidFill>
-                <a:latin typeface="Yu Gothic UI"/>
-              </a:rPr>
-              <a:t>技術</a:t>
-            </a:r>
-          </a:p>
-        </p:txBody>
-      </p:sp>
-      <p:sp>
-        <p:nvSpPr>
-          <p:cNvPr id="5" name="TextBox 4"/>
-          <p:cNvSpPr txBox="1"/>
-          <p:nvPr/>
-        </p:nvSpPr>
-        <p:spPr>
-          <a:xfrm>
-            <a:off x="731520" y="868680"/>
-            <a:ext cx="10515600" cy="1280160"/>
-          </a:xfrm>
-          <a:prstGeom prst="rect">
-            <a:avLst/>
-          </a:prstGeom>
-          <a:noFill/>
-        </p:spPr>
-        <p:txBody>
-          <a:bodyPr wrap="square" anchor="t" lIns="45720" rIns="45720" tIns="18288" bIns="18288">
-            <a:spAutoFit/>
-          </a:bodyPr>
-          <a:lstStyle/>
-          <a:p>
-            <a:pPr algn="l">
-              <a:lnSpc>
-                <a:spcPct val="105000"/>
-              </a:lnSpc>
-            </a:pPr>
-            <a:r>
-              <a:rPr sz="3400" b="1">
-                <a:solidFill>
-                  <a:srgbClr val="14181D"/>
-                </a:solidFill>
-                <a:latin typeface="Yu Gothic UI"/>
-              </a:rPr>
-              <a:t>依存ゼロ・ビルドなし・サーバなし。地震直後に落ちない作り</a:t>
-            </a:r>
-          </a:p>
-        </p:txBody>
-      </p:sp>
-      <p:sp>
-        <p:nvSpPr>
-          <p:cNvPr id="6" name="Rounded Rectangle 5"/>
-          <p:cNvSpPr/>
-          <p:nvPr/>
-        </p:nvSpPr>
-        <p:spPr>
-          <a:xfrm>
-            <a:off x="731520" y="2011680"/>
-            <a:ext cx="5212080" cy="1234440"/>
-          </a:xfrm>
-          <a:prstGeom prst="roundRect">
-            <a:avLst>
-              <a:gd name="adj" fmla="val 6000"/>
-            </a:avLst>
-          </a:prstGeom>
-          <a:solidFill>
-            <a:srgbClr val="F4F5F7"/>
-          </a:solidFill>
-          <a:ln>
-            <a:noFill/>
-          </a:ln>
-          <a:effectLst/>
-        </p:spPr>
-        <p:style>
-          <a:lnRef idx="1">
-            <a:schemeClr val="accent1"/>
-          </a:lnRef>
-          <a:fillRef idx="3">
-            <a:schemeClr val="accent1"/>
-          </a:fillRef>
-          <a:effectRef idx="2">
-            <a:schemeClr val="accent1"/>
-          </a:effectRef>
-          <a:fontRef idx="minor">
-            <a:schemeClr val="lt1"/>
-          </a:fontRef>
-        </p:style>
-        <p:txBody>
-          <a:bodyPr rtlCol="0" anchor="ctr"/>
-          <a:lstStyle/>
-          <a:p>
-            <a:pPr algn="ctr"/>
-          </a:p>
-        </p:txBody>
-      </p:sp>
-      <p:sp>
-        <p:nvSpPr>
-          <p:cNvPr id="7" name="TextBox 6"/>
-          <p:cNvSpPr txBox="1"/>
-          <p:nvPr/>
-        </p:nvSpPr>
-        <p:spPr>
-          <a:xfrm>
-            <a:off x="960120" y="2103120"/>
-            <a:ext cx="1828800" cy="1005840"/>
-          </a:xfrm>
-          <a:prstGeom prst="rect">
-            <a:avLst/>
-          </a:prstGeom>
-          <a:noFill/>
-        </p:spPr>
-        <p:txBody>
-          <a:bodyPr wrap="square" anchor="ctr" lIns="45720" rIns="45720" tIns="18288" bIns="18288">
-            <a:spAutoFit/>
-          </a:bodyPr>
-          <a:lstStyle/>
-          <a:p>
-            <a:pPr algn="l">
-              <a:lnSpc>
-                <a:spcPct val="115000"/>
-              </a:lnSpc>
-            </a:pPr>
-            <a:r>
-              <a:rPr sz="3000" b="1">
-                <a:solidFill>
-                  <a:srgbClr val="A4231C"/>
-                </a:solidFill>
-                <a:latin typeface="Yu Gothic UI"/>
-              </a:rPr>
-              <a:t>162 ms</a:t>
-            </a:r>
-          </a:p>
-        </p:txBody>
-      </p:sp>
-      <p:sp>
-        <p:nvSpPr>
-          <p:cNvPr id="8" name="TextBox 7"/>
-          <p:cNvSpPr txBox="1"/>
-          <p:nvPr/>
-        </p:nvSpPr>
-        <p:spPr>
-          <a:xfrm>
-            <a:off x="2834640" y="2103120"/>
-            <a:ext cx="2926080" cy="1005840"/>
-          </a:xfrm>
-          <a:prstGeom prst="rect">
-            <a:avLst/>
-          </a:prstGeom>
-          <a:noFill/>
-        </p:spPr>
-        <p:txBody>
-          <a:bodyPr wrap="square" anchor="ctr" lIns="45720" rIns="45720" tIns="18288" bIns="18288">
-            <a:spAutoFit/>
-          </a:bodyPr>
-          <a:lstStyle/>
-          <a:p>
-            <a:pPr algn="l">
-              <a:lnSpc>
-                <a:spcPct val="115000"/>
-              </a:lnSpc>
-            </a:pPr>
-            <a:r>
-              <a:rPr sz="1300" b="0">
-                <a:solidFill>
-                  <a:srgbClr val="14181D"/>
-                </a:solidFill>
-                <a:latin typeface="Yu Gothic UI"/>
-              </a:rPr>
-              <a:t>全国 596 路線・27,343 標本点への震度割り当て (ブラウザ内)</a:t>
-            </a:r>
-          </a:p>
-        </p:txBody>
-      </p:sp>
-      <p:sp>
-        <p:nvSpPr>
-          <p:cNvPr id="9" name="Rounded Rectangle 8"/>
-          <p:cNvSpPr/>
-          <p:nvPr/>
-        </p:nvSpPr>
-        <p:spPr>
-          <a:xfrm>
-            <a:off x="6217920" y="2011680"/>
-            <a:ext cx="5212080" cy="1234440"/>
-          </a:xfrm>
-          <a:prstGeom prst="roundRect">
-            <a:avLst>
-              <a:gd name="adj" fmla="val 6000"/>
-            </a:avLst>
-          </a:prstGeom>
-          <a:solidFill>
-            <a:srgbClr val="F4F5F7"/>
-          </a:solidFill>
-          <a:ln>
-            <a:noFill/>
-          </a:ln>
-          <a:effectLst/>
-        </p:spPr>
-        <p:style>
-          <a:lnRef idx="1">
-            <a:schemeClr val="accent1"/>
-          </a:lnRef>
-          <a:fillRef idx="3">
-            <a:schemeClr val="accent1"/>
-          </a:fillRef>
-          <a:effectRef idx="2">
-            <a:schemeClr val="accent1"/>
-          </a:effectRef>
-          <a:fontRef idx="minor">
-            <a:schemeClr val="lt1"/>
-          </a:fontRef>
-        </p:style>
-        <p:txBody>
-          <a:bodyPr rtlCol="0" anchor="ctr"/>
-          <a:lstStyle/>
-          <a:p>
-            <a:pPr algn="ctr"/>
-          </a:p>
-        </p:txBody>
-      </p:sp>
-      <p:sp>
-        <p:nvSpPr>
-          <p:cNvPr id="10" name="TextBox 9"/>
-          <p:cNvSpPr txBox="1"/>
-          <p:nvPr/>
-        </p:nvSpPr>
-        <p:spPr>
-          <a:xfrm>
-            <a:off x="6446520" y="2103120"/>
-            <a:ext cx="1828800" cy="1005840"/>
-          </a:xfrm>
-          <a:prstGeom prst="rect">
-            <a:avLst/>
-          </a:prstGeom>
-          <a:noFill/>
-        </p:spPr>
-        <p:txBody>
-          <a:bodyPr wrap="square" anchor="ctr" lIns="45720" rIns="45720" tIns="18288" bIns="18288">
-            <a:spAutoFit/>
-          </a:bodyPr>
-          <a:lstStyle/>
-          <a:p>
-            <a:pPr algn="l">
-              <a:lnSpc>
-                <a:spcPct val="115000"/>
-              </a:lnSpc>
-            </a:pPr>
-            <a:r>
-              <a:rPr sz="3000" b="1">
-                <a:solidFill>
-                  <a:srgbClr val="A4231C"/>
-                </a:solidFill>
-                <a:latin typeface="Yu Gothic UI"/>
-              </a:rPr>
-              <a:t>0 件</a:t>
-            </a:r>
-          </a:p>
-        </p:txBody>
-      </p:sp>
-      <p:sp>
-        <p:nvSpPr>
-          <p:cNvPr id="11" name="TextBox 10"/>
-          <p:cNvSpPr txBox="1"/>
-          <p:nvPr/>
-        </p:nvSpPr>
-        <p:spPr>
-          <a:xfrm>
-            <a:off x="8321040" y="2103120"/>
-            <a:ext cx="2926080" cy="1005840"/>
-          </a:xfrm>
-          <a:prstGeom prst="rect">
-            <a:avLst/>
-          </a:prstGeom>
-          <a:noFill/>
-        </p:spPr>
-        <p:txBody>
-          <a:bodyPr wrap="square" anchor="ctr" lIns="45720" rIns="45720" tIns="18288" bIns="18288">
-            <a:spAutoFit/>
-          </a:bodyPr>
-          <a:lstStyle/>
-          <a:p>
-            <a:pPr algn="l">
-              <a:lnSpc>
-                <a:spcPct val="115000"/>
-              </a:lnSpc>
-            </a:pPr>
-            <a:r>
-              <a:rPr sz="1300" b="0">
-                <a:solidFill>
-                  <a:srgbClr val="14181D"/>
-                </a:solidFill>
-                <a:latin typeface="Yu Gothic UI"/>
-              </a:rPr>
-              <a:t>観測点の座標解決の欠落。199 地震・6,016 点</a:t>
-            </a:r>
-          </a:p>
-        </p:txBody>
-      </p:sp>
-      <p:sp>
-        <p:nvSpPr>
-          <p:cNvPr id="12" name="Rounded Rectangle 11"/>
-          <p:cNvSpPr/>
-          <p:nvPr/>
-        </p:nvSpPr>
-        <p:spPr>
-          <a:xfrm>
-            <a:off x="731520" y="3429000"/>
-            <a:ext cx="5212080" cy="1234440"/>
-          </a:xfrm>
-          <a:prstGeom prst="roundRect">
-            <a:avLst>
-              <a:gd name="adj" fmla="val 6000"/>
-            </a:avLst>
-          </a:prstGeom>
-          <a:solidFill>
-            <a:srgbClr val="F4F5F7"/>
-          </a:solidFill>
-          <a:ln>
-            <a:noFill/>
-          </a:ln>
-          <a:effectLst/>
-        </p:spPr>
-        <p:style>
-          <a:lnRef idx="1">
-            <a:schemeClr val="accent1"/>
-          </a:lnRef>
-          <a:fillRef idx="3">
-            <a:schemeClr val="accent1"/>
-          </a:fillRef>
-          <a:effectRef idx="2">
-            <a:schemeClr val="accent1"/>
-          </a:effectRef>
-          <a:fontRef idx="minor">
-            <a:schemeClr val="lt1"/>
-          </a:fontRef>
-        </p:style>
-        <p:txBody>
-          <a:bodyPr rtlCol="0" anchor="ctr"/>
-          <a:lstStyle/>
-          <a:p>
-            <a:pPr algn="ctr"/>
-          </a:p>
-        </p:txBody>
-      </p:sp>
-      <p:sp>
-        <p:nvSpPr>
-          <p:cNvPr id="13" name="TextBox 12"/>
-          <p:cNvSpPr txBox="1"/>
-          <p:nvPr/>
-        </p:nvSpPr>
-        <p:spPr>
-          <a:xfrm>
-            <a:off x="960120" y="3520440"/>
-            <a:ext cx="1828800" cy="1005840"/>
-          </a:xfrm>
-          <a:prstGeom prst="rect">
-            <a:avLst/>
-          </a:prstGeom>
-          <a:noFill/>
-        </p:spPr>
-        <p:txBody>
-          <a:bodyPr wrap="square" anchor="ctr" lIns="45720" rIns="45720" tIns="18288" bIns="18288">
-            <a:spAutoFit/>
-          </a:bodyPr>
-          <a:lstStyle/>
-          <a:p>
-            <a:pPr algn="l">
-              <a:lnSpc>
-                <a:spcPct val="115000"/>
-              </a:lnSpc>
-            </a:pPr>
-            <a:r>
-              <a:rPr sz="3000" b="1">
-                <a:solidFill>
-                  <a:srgbClr val="A4231C"/>
-                </a:solidFill>
-                <a:latin typeface="Yu Gothic UI"/>
-              </a:rPr>
-              <a:t>98.2%</a:t>
-            </a:r>
-          </a:p>
-        </p:txBody>
-      </p:sp>
-      <p:sp>
-        <p:nvSpPr>
-          <p:cNvPr id="14" name="TextBox 13"/>
-          <p:cNvSpPr txBox="1"/>
-          <p:nvPr/>
-        </p:nvSpPr>
-        <p:spPr>
-          <a:xfrm>
-            <a:off x="2834640" y="3520440"/>
-            <a:ext cx="2926080" cy="1005840"/>
-          </a:xfrm>
-          <a:prstGeom prst="rect">
-            <a:avLst/>
-          </a:prstGeom>
-          <a:noFill/>
-        </p:spPr>
-        <p:txBody>
-          <a:bodyPr wrap="square" anchor="ctr" lIns="45720" rIns="45720" tIns="18288" bIns="18288">
-            <a:spAutoFit/>
-          </a:bodyPr>
-          <a:lstStyle/>
-          <a:p>
-            <a:pPr algn="l">
-              <a:lnSpc>
-                <a:spcPct val="115000"/>
-              </a:lnSpc>
-            </a:pPr>
-            <a:r>
-              <a:rPr sz="1300" b="0">
-                <a:solidFill>
-                  <a:srgbClr val="14181D"/>
-                </a:solidFill>
-                <a:latin typeface="Yu Gothic UI"/>
-              </a:rPr>
-              <a:t>運転系統の対応表の駅被覆。190/215 系統</a:t>
-            </a:r>
-          </a:p>
-        </p:txBody>
-      </p:sp>
-      <p:sp>
-        <p:nvSpPr>
-          <p:cNvPr id="15" name="Rounded Rectangle 14"/>
-          <p:cNvSpPr/>
-          <p:nvPr/>
-        </p:nvSpPr>
-        <p:spPr>
-          <a:xfrm>
-            <a:off x="6217920" y="3429000"/>
-            <a:ext cx="5212080" cy="1234440"/>
-          </a:xfrm>
-          <a:prstGeom prst="roundRect">
-            <a:avLst>
-              <a:gd name="adj" fmla="val 6000"/>
-            </a:avLst>
-          </a:prstGeom>
-          <a:solidFill>
-            <a:srgbClr val="F4F5F7"/>
-          </a:solidFill>
-          <a:ln>
-            <a:noFill/>
-          </a:ln>
-          <a:effectLst/>
-        </p:spPr>
-        <p:style>
-          <a:lnRef idx="1">
-            <a:schemeClr val="accent1"/>
-          </a:lnRef>
-          <a:fillRef idx="3">
-            <a:schemeClr val="accent1"/>
-          </a:fillRef>
-          <a:effectRef idx="2">
-            <a:schemeClr val="accent1"/>
-          </a:effectRef>
-          <a:fontRef idx="minor">
-            <a:schemeClr val="lt1"/>
-          </a:fontRef>
-        </p:style>
-        <p:txBody>
-          <a:bodyPr rtlCol="0" anchor="ctr"/>
-          <a:lstStyle/>
-          <a:p>
-            <a:pPr algn="ctr"/>
-          </a:p>
-        </p:txBody>
-      </p:sp>
-      <p:sp>
-        <p:nvSpPr>
-          <p:cNvPr id="16" name="TextBox 15"/>
-          <p:cNvSpPr txBox="1"/>
-          <p:nvPr/>
-        </p:nvSpPr>
-        <p:spPr>
-          <a:xfrm>
-            <a:off x="6446520" y="3520440"/>
-            <a:ext cx="1828800" cy="1005840"/>
-          </a:xfrm>
-          <a:prstGeom prst="rect">
-            <a:avLst/>
-          </a:prstGeom>
-          <a:noFill/>
-        </p:spPr>
-        <p:txBody>
-          <a:bodyPr wrap="square" anchor="ctr" lIns="45720" rIns="45720" tIns="18288" bIns="18288">
-            <a:spAutoFit/>
-          </a:bodyPr>
-          <a:lstStyle/>
-          <a:p>
-            <a:pPr algn="l">
-              <a:lnSpc>
-                <a:spcPct val="115000"/>
-              </a:lnSpc>
-            </a:pPr>
-            <a:r>
-              <a:rPr sz="3000" b="1">
-                <a:solidFill>
-                  <a:srgbClr val="A4231C"/>
-                </a:solidFill>
-                <a:latin typeface="Yu Gothic UI"/>
-              </a:rPr>
-              <a:t>14 通り</a:t>
-            </a:r>
-          </a:p>
-        </p:txBody>
-      </p:sp>
-      <p:sp>
-        <p:nvSpPr>
-          <p:cNvPr id="17" name="TextBox 16"/>
-          <p:cNvSpPr txBox="1"/>
-          <p:nvPr/>
-        </p:nvSpPr>
-        <p:spPr>
-          <a:xfrm>
-            <a:off x="8321040" y="3520440"/>
-            <a:ext cx="2926080" cy="1005840"/>
-          </a:xfrm>
-          <a:prstGeom prst="rect">
-            <a:avLst/>
-          </a:prstGeom>
-          <a:noFill/>
-        </p:spPr>
-        <p:txBody>
-          <a:bodyPr wrap="square" anchor="ctr" lIns="45720" rIns="45720" tIns="18288" bIns="18288">
-            <a:spAutoFit/>
-          </a:bodyPr>
-          <a:lstStyle/>
-          <a:p>
-            <a:pPr algn="l">
-              <a:lnSpc>
-                <a:spcPct val="115000"/>
-              </a:lnSpc>
-            </a:pPr>
-            <a:r>
-              <a:rPr sz="1300" b="0">
-                <a:solidFill>
-                  <a:srgbClr val="14181D"/>
-                </a:solidFill>
-                <a:latin typeface="Yu Gothic UI"/>
-              </a:rPr>
-              <a:t>速報・震度 4・5 弱・6 強・遠方・期限切れ・深夜・4 言語… のシナリオ確認</a:t>
-            </a:r>
-          </a:p>
-        </p:txBody>
-      </p:sp>
-      <p:sp>
-        <p:nvSpPr>
-          <p:cNvPr id="18" name="TextBox 17"/>
-          <p:cNvSpPr txBox="1"/>
-          <p:nvPr/>
-        </p:nvSpPr>
-        <p:spPr>
-          <a:xfrm>
-            <a:off x="731520" y="5029200"/>
-            <a:ext cx="10698480" cy="1188720"/>
-          </a:xfrm>
-          <a:prstGeom prst="rect">
-            <a:avLst/>
-          </a:prstGeom>
-          <a:noFill/>
-        </p:spPr>
-        <p:txBody>
-          <a:bodyPr wrap="square" anchor="t" lIns="45720" rIns="45720" tIns="18288" bIns="18288">
-            <a:spAutoFit/>
-          </a:bodyPr>
-          <a:lstStyle/>
-          <a:p>
-            <a:pPr algn="l">
-              <a:lnSpc>
-                <a:spcPct val="115000"/>
-              </a:lnSpc>
-            </a:pPr>
-            <a:r>
-              <a:rPr sz="1400" b="0">
-                <a:solidFill>
-                  <a:srgbClr val="14181D"/>
-                </a:solidFill>
-                <a:latin typeface="Yu Gothic UI"/>
-              </a:rPr>
-              <a:t>GitHub Pages の静的配信。ES modules + JSDoc、地図タイル描画も自前。地震・運行情報は常に網から、同梱データはキャッシュ優先。</a:t>
-            </a:r>
-          </a:p>
-          <a:p>
-            <a:pPr algn="l">
-              <a:lnSpc>
-                <a:spcPct val="115000"/>
-              </a:lnSpc>
-              <a:spcBef>
-                <a:spcPts val="600"/>
-              </a:spcBef>
-            </a:pPr>
-            <a:r>
-              <a:rPr sz="1400" b="0">
-                <a:solidFill>
-                  <a:srgbClr val="5C6670"/>
-                </a:solidFill>
-                <a:latin typeface="Yu Gothic UI"/>
-              </a:rPr>
-              <a:t>検証スクリプト同梱: verify:shindo / verify:rail / verify:systems / verify:regulation / verify:traininfo。?scenario= と ?event= で審査中もいつでも判定が見える。</a:t>
-            </a:r>
-          </a:p>
-        </p:txBody>
-      </p:sp>
     </p:spTree>
   </p:cSld>
   <p:clrMapOvr>
@@ -7109,8 +5550,8 @@
         </p:nvSpPr>
         <p:spPr>
           <a:xfrm>
-            <a:off x="10972800" y="6400800"/>
-            <a:ext cx="548640" cy="274320"/>
+            <a:off x="731520" y="502920"/>
+            <a:ext cx="7315200" cy="365760"/>
           </a:xfrm>
           <a:prstGeom prst="rect">
             <a:avLst/>
@@ -7123,19 +5564,19 @@
           </a:bodyPr>
           <a:lstStyle/>
           <a:p>
-            <a:pPr algn="r">
-              <a:lnSpc>
-                <a:spcPct val="115000"/>
-              </a:lnSpc>
-            </a:pPr>
-            <a:r>
-              <a:rPr sz="1000" b="0">
-                <a:solidFill>
-                  <a:srgbClr val="5C6670"/>
-                </a:solidFill>
-                <a:latin typeface="Yu Gothic UI"/>
-              </a:rPr>
-              <a:t>13</a:t>
+            <a:pPr algn="l">
+              <a:lnSpc>
+                <a:spcPct val="115000"/>
+              </a:lnSpc>
+            </a:pPr>
+            <a:r>
+              <a:rPr sz="1300" b="1">
+                <a:solidFill>
+                  <a:srgbClr val="A4231C"/>
+                </a:solidFill>
+                <a:latin typeface="Yu Gothic UI"/>
+              </a:rPr>
+              <a:t>正直な限界と、間違え方の設計</a:t>
             </a:r>
           </a:p>
         </p:txBody>
@@ -7148,8 +5589,8 @@
         </p:nvSpPr>
         <p:spPr>
           <a:xfrm>
-            <a:off x="731520" y="502920"/>
-            <a:ext cx="7315200" cy="365760"/>
+            <a:off x="731520" y="868680"/>
+            <a:ext cx="10515600" cy="1280160"/>
           </a:xfrm>
           <a:prstGeom prst="rect">
             <a:avLst/>
@@ -7164,45 +5605,6 @@
           <a:p>
             <a:pPr algn="l">
               <a:lnSpc>
-                <a:spcPct val="115000"/>
-              </a:lnSpc>
-            </a:pPr>
-            <a:r>
-              <a:rPr sz="1300" b="1">
-                <a:solidFill>
-                  <a:srgbClr val="A4231C"/>
-                </a:solidFill>
-                <a:latin typeface="Yu Gothic UI"/>
-              </a:rPr>
-              <a:t>正直な限界と、間違え方の設計</a:t>
-            </a:r>
-          </a:p>
-        </p:txBody>
-      </p:sp>
-      <p:sp>
-        <p:nvSpPr>
-          <p:cNvPr id="5" name="TextBox 4"/>
-          <p:cNvSpPr txBox="1"/>
-          <p:nvPr/>
-        </p:nvSpPr>
-        <p:spPr>
-          <a:xfrm>
-            <a:off x="731520" y="868680"/>
-            <a:ext cx="10515600" cy="1280160"/>
-          </a:xfrm>
-          <a:prstGeom prst="rect">
-            <a:avLst/>
-          </a:prstGeom>
-          <a:noFill/>
-        </p:spPr>
-        <p:txBody>
-          <a:bodyPr wrap="square" anchor="t" lIns="45720" rIns="45720" tIns="18288" bIns="18288">
-            <a:spAutoFit/>
-          </a:bodyPr>
-          <a:lstStyle/>
-          <a:p>
-            <a:pPr algn="l">
-              <a:lnSpc>
                 <a:spcPct val="105000"/>
               </a:lnSpc>
             </a:pPr>
@@ -7220,7 +5622,7 @@
       </p:sp>
       <p:sp>
         <p:nvSpPr>
-          <p:cNvPr id="6" name="Rounded Rectangle 5"/>
+          <p:cNvPr id="5" name="Rounded Rectangle 4"/>
           <p:cNvSpPr/>
           <p:nvPr/>
         </p:nvSpPr>
@@ -7266,7 +5668,7 @@
       </p:sp>
       <p:sp>
         <p:nvSpPr>
-          <p:cNvPr id="7" name="TextBox 6"/>
+          <p:cNvPr id="6" name="TextBox 5"/>
           <p:cNvSpPr txBox="1"/>
           <p:nvPr/>
         </p:nvSpPr>
@@ -7321,7 +5723,7 @@
       </p:sp>
       <p:sp>
         <p:nvSpPr>
-          <p:cNvPr id="8" name="Rounded Rectangle 7"/>
+          <p:cNvPr id="7" name="Rounded Rectangle 6"/>
           <p:cNvSpPr/>
           <p:nvPr/>
         </p:nvSpPr>
@@ -7367,7 +5769,7 @@
       </p:sp>
       <p:sp>
         <p:nvSpPr>
-          <p:cNvPr id="9" name="TextBox 8"/>
+          <p:cNvPr id="8" name="TextBox 7"/>
           <p:cNvSpPr txBox="1"/>
           <p:nvPr/>
         </p:nvSpPr>
@@ -7422,7 +5824,7 @@
       </p:sp>
       <p:sp>
         <p:nvSpPr>
-          <p:cNvPr id="10" name="Rounded Rectangle 9"/>
+          <p:cNvPr id="9" name="Rounded Rectangle 8"/>
           <p:cNvSpPr/>
           <p:nvPr/>
         </p:nvSpPr>
@@ -7468,7 +5870,7 @@
       </p:sp>
       <p:sp>
         <p:nvSpPr>
-          <p:cNvPr id="11" name="TextBox 10"/>
+          <p:cNvPr id="10" name="TextBox 9"/>
           <p:cNvSpPr txBox="1"/>
           <p:nvPr/>
         </p:nvSpPr>
@@ -7523,7 +5925,7 @@
       </p:sp>
       <p:sp>
         <p:nvSpPr>
-          <p:cNvPr id="12" name="Rounded Rectangle 11"/>
+          <p:cNvPr id="11" name="Rounded Rectangle 10"/>
           <p:cNvSpPr/>
           <p:nvPr/>
         </p:nvSpPr>
@@ -7569,7 +5971,7 @@
       </p:sp>
       <p:sp>
         <p:nvSpPr>
-          <p:cNvPr id="13" name="TextBox 12"/>
+          <p:cNvPr id="12" name="TextBox 11"/>
           <p:cNvSpPr txBox="1"/>
           <p:nvPr/>
         </p:nvSpPr>
@@ -7624,7 +6026,7 @@
       </p:sp>
       <p:sp>
         <p:nvSpPr>
-          <p:cNvPr id="14" name="Rounded Rectangle 13"/>
+          <p:cNvPr id="13" name="Rounded Rectangle 12"/>
           <p:cNvSpPr/>
           <p:nvPr/>
         </p:nvSpPr>
@@ -7670,7 +6072,7 @@
       </p:sp>
       <p:sp>
         <p:nvSpPr>
-          <p:cNvPr id="15" name="TextBox 14"/>
+          <p:cNvPr id="14" name="TextBox 13"/>
           <p:cNvSpPr txBox="1"/>
           <p:nvPr/>
         </p:nvSpPr>
@@ -7725,7 +6127,7 @@
       </p:sp>
       <p:sp>
         <p:nvSpPr>
-          <p:cNvPr id="16" name="Rounded Rectangle 15"/>
+          <p:cNvPr id="15" name="Rounded Rectangle 14"/>
           <p:cNvSpPr/>
           <p:nvPr/>
         </p:nvSpPr>
@@ -7771,7 +6173,7 @@
       </p:sp>
       <p:sp>
         <p:nvSpPr>
-          <p:cNvPr id="17" name="TextBox 16"/>
+          <p:cNvPr id="16" name="TextBox 15"/>
           <p:cNvSpPr txBox="1"/>
           <p:nvPr/>
         </p:nvSpPr>
@@ -7826,7 +6228,7 @@
       </p:sp>
       <p:sp>
         <p:nvSpPr>
-          <p:cNvPr id="18" name="Rounded Rectangle 17"/>
+          <p:cNvPr id="17" name="Rounded Rectangle 16"/>
           <p:cNvSpPr/>
           <p:nvPr/>
         </p:nvSpPr>
@@ -7872,7 +6274,7 @@
       </p:sp>
       <p:sp>
         <p:nvSpPr>
-          <p:cNvPr id="19" name="TextBox 18"/>
+          <p:cNvPr id="18" name="TextBox 17"/>
           <p:cNvSpPr txBox="1"/>
           <p:nvPr/>
         </p:nvSpPr>
@@ -7927,7 +6329,7 @@
       </p:sp>
       <p:sp>
         <p:nvSpPr>
-          <p:cNvPr id="20" name="Rounded Rectangle 19"/>
+          <p:cNvPr id="19" name="Rounded Rectangle 18"/>
           <p:cNvSpPr/>
           <p:nvPr/>
         </p:nvSpPr>
@@ -7973,7 +6375,7 @@
       </p:sp>
       <p:sp>
         <p:nvSpPr>
-          <p:cNvPr id="21" name="TextBox 20"/>
+          <p:cNvPr id="20" name="TextBox 19"/>
           <p:cNvSpPr txBox="1"/>
           <p:nvPr/>
         </p:nvSpPr>
@@ -8085,46 +6487,7 @@
       </p:sp>
       <p:sp>
         <p:nvSpPr>
-          <p:cNvPr id="3" name="TextBox 2"/>
-          <p:cNvSpPr txBox="1"/>
-          <p:nvPr/>
-        </p:nvSpPr>
-        <p:spPr>
-          <a:xfrm>
-            <a:off x="10972800" y="6400800"/>
-            <a:ext cx="548640" cy="274320"/>
-          </a:xfrm>
-          <a:prstGeom prst="rect">
-            <a:avLst/>
-          </a:prstGeom>
-          <a:noFill/>
-        </p:spPr>
-        <p:txBody>
-          <a:bodyPr wrap="square" anchor="t" lIns="45720" rIns="45720" tIns="18288" bIns="18288">
-            <a:spAutoFit/>
-          </a:bodyPr>
-          <a:lstStyle/>
-          <a:p>
-            <a:pPr algn="r">
-              <a:lnSpc>
-                <a:spcPct val="115000"/>
-              </a:lnSpc>
-            </a:pPr>
-            <a:r>
-              <a:rPr sz="1000" b="0">
-                <a:solidFill>
-                  <a:srgbClr val="5C6670"/>
-                </a:solidFill>
-                <a:latin typeface="Yu Gothic UI"/>
-              </a:rPr>
-              <a:t>14</a:t>
-            </a:r>
-          </a:p>
-        </p:txBody>
-      </p:sp>
-      <p:sp>
-        <p:nvSpPr>
-          <p:cNvPr id="4" name="Rectangle 3"/>
+          <p:cNvPr id="3" name="Rectangle 2"/>
           <p:cNvSpPr/>
           <p:nvPr/>
         </p:nvSpPr>
@@ -8168,7 +6531,7 @@
       </p:sp>
       <p:sp>
         <p:nvSpPr>
-          <p:cNvPr id="5" name="TextBox 4"/>
+          <p:cNvPr id="4" name="TextBox 3"/>
           <p:cNvSpPr txBox="1"/>
           <p:nvPr/>
         </p:nvSpPr>
@@ -8226,7 +6589,7 @@
       </p:sp>
       <p:sp>
         <p:nvSpPr>
-          <p:cNvPr id="6" name="TextBox 5"/>
+          <p:cNvPr id="5" name="TextBox 4"/>
           <p:cNvSpPr txBox="1"/>
           <p:nvPr/>
         </p:nvSpPr>
@@ -8284,7 +6647,7 @@
       </p:sp>
       <p:sp>
         <p:nvSpPr>
-          <p:cNvPr id="7" name="TextBox 6"/>
+          <p:cNvPr id="6" name="TextBox 5"/>
           <p:cNvSpPr txBox="1"/>
           <p:nvPr/>
         </p:nvSpPr>
@@ -8402,8 +6765,8 @@
         </p:nvSpPr>
         <p:spPr>
           <a:xfrm>
-            <a:off x="10972800" y="6400800"/>
-            <a:ext cx="548640" cy="274320"/>
+            <a:off x="731520" y="502920"/>
+            <a:ext cx="7315200" cy="365760"/>
           </a:xfrm>
           <a:prstGeom prst="rect">
             <a:avLst/>
@@ -8416,19 +6779,19 @@
           </a:bodyPr>
           <a:lstStyle/>
           <a:p>
-            <a:pPr algn="r">
-              <a:lnSpc>
-                <a:spcPct val="115000"/>
-              </a:lnSpc>
-            </a:pPr>
-            <a:r>
-              <a:rPr sz="1000" b="0">
-                <a:solidFill>
-                  <a:srgbClr val="5C6670"/>
-                </a:solidFill>
-                <a:latin typeface="Yu Gothic UI"/>
-              </a:rPr>
-              <a:t>2</a:t>
+            <a:pPr algn="l">
+              <a:lnSpc>
+                <a:spcPct val="115000"/>
+              </a:lnSpc>
+            </a:pPr>
+            <a:r>
+              <a:rPr sz="1300" b="1">
+                <a:solidFill>
+                  <a:srgbClr val="A4231C"/>
+                </a:solidFill>
+                <a:latin typeface="Yu Gothic UI"/>
+              </a:rPr>
+              <a:t>課題</a:t>
             </a:r>
           </a:p>
         </p:txBody>
@@ -8441,8 +6804,8 @@
         </p:nvSpPr>
         <p:spPr>
           <a:xfrm>
-            <a:off x="731520" y="502920"/>
-            <a:ext cx="7315200" cy="365760"/>
+            <a:off x="731520" y="868680"/>
+            <a:ext cx="10515600" cy="1280160"/>
           </a:xfrm>
           <a:prstGeom prst="rect">
             <a:avLst/>
@@ -8457,45 +6820,6 @@
           <a:p>
             <a:pPr algn="l">
               <a:lnSpc>
-                <a:spcPct val="115000"/>
-              </a:lnSpc>
-            </a:pPr>
-            <a:r>
-              <a:rPr sz="1300" b="1">
-                <a:solidFill>
-                  <a:srgbClr val="A4231C"/>
-                </a:solidFill>
-                <a:latin typeface="Yu Gothic UI"/>
-              </a:rPr>
-              <a:t>課題</a:t>
-            </a:r>
-          </a:p>
-        </p:txBody>
-      </p:sp>
-      <p:sp>
-        <p:nvSpPr>
-          <p:cNvPr id="5" name="TextBox 4"/>
-          <p:cNvSpPr txBox="1"/>
-          <p:nvPr/>
-        </p:nvSpPr>
-        <p:spPr>
-          <a:xfrm>
-            <a:off x="731520" y="868680"/>
-            <a:ext cx="10515600" cy="1280160"/>
-          </a:xfrm>
-          <a:prstGeom prst="rect">
-            <a:avLst/>
-          </a:prstGeom>
-          <a:noFill/>
-        </p:spPr>
-        <p:txBody>
-          <a:bodyPr wrap="square" anchor="t" lIns="45720" rIns="45720" tIns="18288" bIns="18288">
-            <a:spAutoFit/>
-          </a:bodyPr>
-          <a:lstStyle/>
-          <a:p>
-            <a:pPr algn="l">
-              <a:lnSpc>
                 <a:spcPct val="105000"/>
               </a:lnSpc>
             </a:pPr>
@@ -8513,7 +6837,7 @@
       </p:sp>
       <p:sp>
         <p:nvSpPr>
-          <p:cNvPr id="6" name="Rounded Rectangle 5"/>
+          <p:cNvPr id="5" name="Rounded Rectangle 4"/>
           <p:cNvSpPr/>
           <p:nvPr/>
         </p:nvSpPr>
@@ -8559,7 +6883,7 @@
       </p:sp>
       <p:sp>
         <p:nvSpPr>
-          <p:cNvPr id="7" name="TextBox 6"/>
+          <p:cNvPr id="6" name="TextBox 5"/>
           <p:cNvSpPr txBox="1"/>
           <p:nvPr/>
         </p:nvSpPr>
@@ -8633,7 +6957,7 @@
       </p:sp>
       <p:sp>
         <p:nvSpPr>
-          <p:cNvPr id="8" name="TextBox 7"/>
+          <p:cNvPr id="7" name="TextBox 6"/>
           <p:cNvSpPr txBox="1"/>
           <p:nvPr/>
         </p:nvSpPr>
@@ -8723,7 +7047,7 @@
       </p:sp>
       <p:sp>
         <p:nvSpPr>
-          <p:cNvPr id="9" name="Rounded Rectangle 8"/>
+          <p:cNvPr id="8" name="Rounded Rectangle 7"/>
           <p:cNvSpPr/>
           <p:nvPr/>
         </p:nvSpPr>
@@ -8769,14 +7093,53 @@
       </p:sp>
       <p:sp>
         <p:nvSpPr>
+          <p:cNvPr id="9" name="TextBox 8"/>
+          <p:cNvSpPr txBox="1"/>
+          <p:nvPr/>
+        </p:nvSpPr>
+        <p:spPr>
+          <a:xfrm>
+            <a:off x="8229600" y="2377440"/>
+            <a:ext cx="1005840" cy="548640"/>
+          </a:xfrm>
+          <a:prstGeom prst="rect">
+            <a:avLst/>
+          </a:prstGeom>
+          <a:noFill/>
+        </p:spPr>
+        <p:txBody>
+          <a:bodyPr wrap="square" anchor="t" lIns="45720" rIns="45720" tIns="18288" bIns="18288">
+            <a:spAutoFit/>
+          </a:bodyPr>
+          <a:lstStyle/>
+          <a:p>
+            <a:pPr algn="l">
+              <a:lnSpc>
+                <a:spcPct val="115000"/>
+              </a:lnSpc>
+            </a:pPr>
+            <a:r>
+              <a:rPr sz="2200" b="1">
+                <a:solidFill>
+                  <a:srgbClr val="14181D"/>
+                </a:solidFill>
+                <a:latin typeface="Yu Gothic UI"/>
+              </a:rPr>
+              <a:t>02:00</a:t>
+            </a:r>
+          </a:p>
+        </p:txBody>
+      </p:sp>
+      <p:sp>
+        <p:nvSpPr>
           <p:cNvPr id="10" name="TextBox 9"/>
           <p:cNvSpPr txBox="1"/>
           <p:nvPr/>
         </p:nvSpPr>
         <p:spPr>
           <a:xfrm>
-            <a:off x="8229600" y="2377440"/>
-            <a:ext cx="1005840" cy="548640"/>
+            <a:off x="9326880" y="2450592"/>
+            <a:ext cx="1920240" cy="548640"/>
           </a:xfrm>
           <a:prstGeom prst="rect">
             <a:avLst/>
@@ -8795,13 +7158,13 @@
               </a:lnSpc>
             </a:pPr>
             <a:r>
-              <a:rPr sz="2200" b="1">
+              <a:rPr sz="1500" b="0">
                 <a:solidFill>
                   <a:srgbClr val="14181D"/>
                 </a:solidFill>
                 <a:latin typeface="Yu Gothic UI"/>
               </a:rPr>
-              <a:t>02:00</a:t>
+              <a:t>地震発生</a:t>
             </a:r>
           </a:p>
         </p:txBody>
@@ -8814,8 +7177,8 @@
         </p:nvSpPr>
         <p:spPr>
           <a:xfrm>
-            <a:off x="9326880" y="2450592"/>
-            <a:ext cx="1920240" cy="548640"/>
+            <a:off x="8229600" y="3246120"/>
+            <a:ext cx="1005840" cy="548640"/>
           </a:xfrm>
           <a:prstGeom prst="rect">
             <a:avLst/>
@@ -8834,13 +7197,13 @@
               </a:lnSpc>
             </a:pPr>
             <a:r>
-              <a:rPr sz="1500" b="0">
-                <a:solidFill>
-                  <a:srgbClr val="14181D"/>
-                </a:solidFill>
-                <a:latin typeface="Yu Gothic UI"/>
-              </a:rPr>
-              <a:t>地震発生</a:t>
+              <a:rPr sz="2200" b="1">
+                <a:solidFill>
+                  <a:srgbClr val="9A5B06"/>
+                </a:solidFill>
+                <a:latin typeface="Yu Gothic UI"/>
+              </a:rPr>
+              <a:t>05:00</a:t>
             </a:r>
           </a:p>
         </p:txBody>
@@ -8853,8 +7216,8 @@
         </p:nvSpPr>
         <p:spPr>
           <a:xfrm>
-            <a:off x="8229600" y="3246120"/>
-            <a:ext cx="1005840" cy="548640"/>
+            <a:off x="9326880" y="3319272"/>
+            <a:ext cx="1920240" cy="548640"/>
           </a:xfrm>
           <a:prstGeom prst="rect">
             <a:avLst/>
@@ -8873,13 +7236,13 @@
               </a:lnSpc>
             </a:pPr>
             <a:r>
-              <a:rPr sz="2200" b="1">
+              <a:rPr sz="1500" b="0">
                 <a:solidFill>
                   <a:srgbClr val="9A5B06"/>
                 </a:solidFill>
                 <a:latin typeface="Yu Gothic UI"/>
               </a:rPr>
-              <a:t>05:00</a:t>
+              <a:t>始発から見合わせ</a:t>
             </a:r>
           </a:p>
         </p:txBody>
@@ -8892,8 +7255,8 @@
         </p:nvSpPr>
         <p:spPr>
           <a:xfrm>
-            <a:off x="9326880" y="3319272"/>
-            <a:ext cx="1920240" cy="548640"/>
+            <a:off x="8229600" y="4114800"/>
+            <a:ext cx="1005840" cy="548640"/>
           </a:xfrm>
           <a:prstGeom prst="rect">
             <a:avLst/>
@@ -8912,13 +7275,13 @@
               </a:lnSpc>
             </a:pPr>
             <a:r>
-              <a:rPr sz="1500" b="0">
-                <a:solidFill>
-                  <a:srgbClr val="9A5B06"/>
-                </a:solidFill>
-                <a:latin typeface="Yu Gothic UI"/>
-              </a:rPr>
-              <a:t>始発から見合わせ</a:t>
+              <a:rPr sz="2200" b="1">
+                <a:solidFill>
+                  <a:srgbClr val="A4231C"/>
+                </a:solidFill>
+                <a:latin typeface="Yu Gothic UI"/>
+              </a:rPr>
+              <a:t>06:15</a:t>
             </a:r>
           </a:p>
         </p:txBody>
@@ -8931,8 +7294,8 @@
         </p:nvSpPr>
         <p:spPr>
           <a:xfrm>
-            <a:off x="8229600" y="4114800"/>
-            <a:ext cx="1005840" cy="548640"/>
+            <a:off x="9326880" y="4187952"/>
+            <a:ext cx="1920240" cy="548640"/>
           </a:xfrm>
           <a:prstGeom prst="rect">
             <a:avLst/>
@@ -8951,13 +7314,13 @@
               </a:lnSpc>
             </a:pPr>
             <a:r>
-              <a:rPr sz="2200" b="1">
+              <a:rPr sz="1500" b="0">
                 <a:solidFill>
                   <a:srgbClr val="A4231C"/>
                 </a:solidFill>
                 <a:latin typeface="Yu Gothic UI"/>
               </a:rPr>
-              <a:t>06:15</a:t>
+              <a:t>再開見込みなし</a:t>
             </a:r>
           </a:p>
         </p:txBody>
@@ -8970,8 +7333,8 @@
         </p:nvSpPr>
         <p:spPr>
           <a:xfrm>
-            <a:off x="9326880" y="4187952"/>
-            <a:ext cx="1920240" cy="548640"/>
+            <a:off x="8229600" y="4983479"/>
+            <a:ext cx="1005840" cy="548640"/>
           </a:xfrm>
           <a:prstGeom prst="rect">
             <a:avLst/>
@@ -8990,13 +7353,13 @@
               </a:lnSpc>
             </a:pPr>
             <a:r>
-              <a:rPr sz="1500" b="0">
+              <a:rPr sz="2200" b="1">
                 <a:solidFill>
                   <a:srgbClr val="A4231C"/>
                 </a:solidFill>
                 <a:latin typeface="Yu Gothic UI"/>
               </a:rPr>
-              <a:t>再開見込みなし</a:t>
+              <a:t>?</a:t>
             </a:r>
           </a:p>
         </p:txBody>
@@ -9004,45 +7367,6 @@
       <p:sp>
         <p:nvSpPr>
           <p:cNvPr id="16" name="TextBox 15"/>
-          <p:cNvSpPr txBox="1"/>
-          <p:nvPr/>
-        </p:nvSpPr>
-        <p:spPr>
-          <a:xfrm>
-            <a:off x="8229600" y="4983479"/>
-            <a:ext cx="1005840" cy="548640"/>
-          </a:xfrm>
-          <a:prstGeom prst="rect">
-            <a:avLst/>
-          </a:prstGeom>
-          <a:noFill/>
-        </p:spPr>
-        <p:txBody>
-          <a:bodyPr wrap="square" anchor="t" lIns="45720" rIns="45720" tIns="18288" bIns="18288">
-            <a:spAutoFit/>
-          </a:bodyPr>
-          <a:lstStyle/>
-          <a:p>
-            <a:pPr algn="l">
-              <a:lnSpc>
-                <a:spcPct val="115000"/>
-              </a:lnSpc>
-            </a:pPr>
-            <a:r>
-              <a:rPr sz="2200" b="1">
-                <a:solidFill>
-                  <a:srgbClr val="A4231C"/>
-                </a:solidFill>
-                <a:latin typeface="Yu Gothic UI"/>
-              </a:rPr>
-              <a:t>?</a:t>
-            </a:r>
-          </a:p>
-        </p:txBody>
-      </p:sp>
-      <p:sp>
-        <p:nvSpPr>
-          <p:cNvPr id="17" name="TextBox 16"/>
           <p:cNvSpPr txBox="1"/>
           <p:nvPr/>
         </p:nvSpPr>
@@ -9144,8 +7468,8 @@
         </p:nvSpPr>
         <p:spPr>
           <a:xfrm>
-            <a:off x="10972800" y="6400800"/>
-            <a:ext cx="548640" cy="274320"/>
+            <a:off x="731520" y="502920"/>
+            <a:ext cx="7315200" cy="365760"/>
           </a:xfrm>
           <a:prstGeom prst="rect">
             <a:avLst/>
@@ -9158,19 +7482,19 @@
           </a:bodyPr>
           <a:lstStyle/>
           <a:p>
-            <a:pPr algn="r">
-              <a:lnSpc>
-                <a:spcPct val="115000"/>
-              </a:lnSpc>
-            </a:pPr>
-            <a:r>
-              <a:rPr sz="1000" b="0">
-                <a:solidFill>
-                  <a:srgbClr val="5C6670"/>
-                </a:solidFill>
-                <a:latin typeface="Yu Gothic UI"/>
-              </a:rPr>
-              <a:t>3</a:t>
+            <a:pPr algn="l">
+              <a:lnSpc>
+                <a:spcPct val="115000"/>
+              </a:lnSpc>
+            </a:pPr>
+            <a:r>
+              <a:rPr sz="1300" b="1">
+                <a:solidFill>
+                  <a:srgbClr val="A4231C"/>
+                </a:solidFill>
+                <a:latin typeface="Yu Gothic UI"/>
+              </a:rPr>
+              <a:t>誰が一番困るか</a:t>
             </a:r>
           </a:p>
         </p:txBody>
@@ -9183,8 +7507,8 @@
         </p:nvSpPr>
         <p:spPr>
           <a:xfrm>
-            <a:off x="731520" y="502920"/>
-            <a:ext cx="7315200" cy="365760"/>
+            <a:off x="731520" y="868680"/>
+            <a:ext cx="10515600" cy="1280160"/>
           </a:xfrm>
           <a:prstGeom prst="rect">
             <a:avLst/>
@@ -9199,45 +7523,6 @@
           <a:p>
             <a:pPr algn="l">
               <a:lnSpc>
-                <a:spcPct val="115000"/>
-              </a:lnSpc>
-            </a:pPr>
-            <a:r>
-              <a:rPr sz="1300" b="1">
-                <a:solidFill>
-                  <a:srgbClr val="A4231C"/>
-                </a:solidFill>
-                <a:latin typeface="Yu Gothic UI"/>
-              </a:rPr>
-              <a:t>誰が一番困るか</a:t>
-            </a:r>
-          </a:p>
-        </p:txBody>
-      </p:sp>
-      <p:sp>
-        <p:nvSpPr>
-          <p:cNvPr id="5" name="TextBox 4"/>
-          <p:cNvSpPr txBox="1"/>
-          <p:nvPr/>
-        </p:nvSpPr>
-        <p:spPr>
-          <a:xfrm>
-            <a:off x="731520" y="868680"/>
-            <a:ext cx="10515600" cy="1280160"/>
-          </a:xfrm>
-          <a:prstGeom prst="rect">
-            <a:avLst/>
-          </a:prstGeom>
-          <a:noFill/>
-        </p:spPr>
-        <p:txBody>
-          <a:bodyPr wrap="square" anchor="t" lIns="45720" rIns="45720" tIns="18288" bIns="18288">
-            <a:spAutoFit/>
-          </a:bodyPr>
-          <a:lstStyle/>
-          <a:p>
-            <a:pPr algn="l">
-              <a:lnSpc>
                 <a:spcPct val="105000"/>
               </a:lnSpc>
             </a:pPr>
@@ -9255,7 +7540,7 @@
       </p:sp>
       <p:sp>
         <p:nvSpPr>
-          <p:cNvPr id="6" name="Rounded Rectangle 5"/>
+          <p:cNvPr id="5" name="Rounded Rectangle 4"/>
           <p:cNvSpPr/>
           <p:nvPr/>
         </p:nvSpPr>
@@ -9301,7 +7586,7 @@
       </p:sp>
       <p:sp>
         <p:nvSpPr>
-          <p:cNvPr id="7" name="TextBox 6"/>
+          <p:cNvPr id="6" name="TextBox 5"/>
           <p:cNvSpPr txBox="1"/>
           <p:nvPr/>
         </p:nvSpPr>
@@ -9356,7 +7641,7 @@
       </p:sp>
       <p:sp>
         <p:nvSpPr>
-          <p:cNvPr id="8" name="Rounded Rectangle 7"/>
+          <p:cNvPr id="7" name="Rounded Rectangle 6"/>
           <p:cNvSpPr/>
           <p:nvPr/>
         </p:nvSpPr>
@@ -9402,7 +7687,7 @@
       </p:sp>
       <p:sp>
         <p:nvSpPr>
-          <p:cNvPr id="9" name="TextBox 8"/>
+          <p:cNvPr id="8" name="TextBox 7"/>
           <p:cNvSpPr txBox="1"/>
           <p:nvPr/>
         </p:nvSpPr>
@@ -9457,7 +7742,7 @@
       </p:sp>
       <p:sp>
         <p:nvSpPr>
-          <p:cNvPr id="10" name="Rounded Rectangle 9"/>
+          <p:cNvPr id="9" name="Rounded Rectangle 8"/>
           <p:cNvSpPr/>
           <p:nvPr/>
         </p:nvSpPr>
@@ -9503,7 +7788,7 @@
       </p:sp>
       <p:sp>
         <p:nvSpPr>
-          <p:cNvPr id="11" name="TextBox 10"/>
+          <p:cNvPr id="10" name="TextBox 9"/>
           <p:cNvSpPr txBox="1"/>
           <p:nvPr/>
         </p:nvSpPr>
@@ -9558,7 +7843,7 @@
       </p:sp>
       <p:sp>
         <p:nvSpPr>
-          <p:cNvPr id="12" name="Rounded Rectangle 11"/>
+          <p:cNvPr id="11" name="Rounded Rectangle 10"/>
           <p:cNvSpPr/>
           <p:nvPr/>
         </p:nvSpPr>
@@ -9604,7 +7889,7 @@
       </p:sp>
       <p:sp>
         <p:nvSpPr>
-          <p:cNvPr id="13" name="TextBox 12"/>
+          <p:cNvPr id="12" name="TextBox 11"/>
           <p:cNvSpPr txBox="1"/>
           <p:nvPr/>
         </p:nvSpPr>
@@ -9757,8 +8042,8 @@
         </p:nvSpPr>
         <p:spPr>
           <a:xfrm>
-            <a:off x="10972800" y="6400800"/>
-            <a:ext cx="548640" cy="274320"/>
+            <a:off x="731520" y="502920"/>
+            <a:ext cx="7315200" cy="365760"/>
           </a:xfrm>
           <a:prstGeom prst="rect">
             <a:avLst/>
@@ -9771,19 +8056,19 @@
           </a:bodyPr>
           <a:lstStyle/>
           <a:p>
-            <a:pPr algn="r">
-              <a:lnSpc>
-                <a:spcPct val="115000"/>
-              </a:lnSpc>
-            </a:pPr>
-            <a:r>
-              <a:rPr sz="1000" b="0">
-                <a:solidFill>
-                  <a:srgbClr val="5C6670"/>
-                </a:solidFill>
-                <a:latin typeface="Yu Gothic UI"/>
-              </a:rPr>
-              <a:t>4</a:t>
+            <a:pPr algn="l">
+              <a:lnSpc>
+                <a:spcPct val="115000"/>
+              </a:lnSpc>
+            </a:pPr>
+            <a:r>
+              <a:rPr sz="1300" b="1">
+                <a:solidFill>
+                  <a:srgbClr val="A4231C"/>
+                </a:solidFill>
+                <a:latin typeface="Yu Gothic UI"/>
+              </a:rPr>
+              <a:t>解決</a:t>
             </a:r>
           </a:p>
         </p:txBody>
@@ -9796,8 +8081,8 @@
         </p:nvSpPr>
         <p:spPr>
           <a:xfrm>
-            <a:off x="731520" y="502920"/>
-            <a:ext cx="7315200" cy="365760"/>
+            <a:off x="731520" y="868680"/>
+            <a:ext cx="7315200" cy="1280160"/>
           </a:xfrm>
           <a:prstGeom prst="rect">
             <a:avLst/>
@@ -9812,17 +8097,17 @@
           <a:p>
             <a:pPr algn="l">
               <a:lnSpc>
-                <a:spcPct val="115000"/>
-              </a:lnSpc>
-            </a:pPr>
-            <a:r>
-              <a:rPr sz="1300" b="1">
-                <a:solidFill>
-                  <a:srgbClr val="A4231C"/>
-                </a:solidFill>
-                <a:latin typeface="Yu Gothic UI"/>
-              </a:rPr>
-              <a:t>解決</a:t>
+                <a:spcPct val="105000"/>
+              </a:lnSpc>
+            </a:pPr>
+            <a:r>
+              <a:rPr sz="3400" b="1">
+                <a:solidFill>
+                  <a:srgbClr val="14181D"/>
+                </a:solidFill>
+                <a:latin typeface="Yu Gothic UI"/>
+              </a:rPr>
+              <a:t>「あとどれくらい」に数字を与える</a:t>
             </a:r>
           </a:p>
         </p:txBody>
@@ -9830,45 +8115,6 @@
       <p:sp>
         <p:nvSpPr>
           <p:cNvPr id="5" name="TextBox 4"/>
-          <p:cNvSpPr txBox="1"/>
-          <p:nvPr/>
-        </p:nvSpPr>
-        <p:spPr>
-          <a:xfrm>
-            <a:off x="731520" y="868680"/>
-            <a:ext cx="7315200" cy="1280160"/>
-          </a:xfrm>
-          <a:prstGeom prst="rect">
-            <a:avLst/>
-          </a:prstGeom>
-          <a:noFill/>
-        </p:spPr>
-        <p:txBody>
-          <a:bodyPr wrap="square" anchor="t" lIns="45720" rIns="45720" tIns="18288" bIns="18288">
-            <a:spAutoFit/>
-          </a:bodyPr>
-          <a:lstStyle/>
-          <a:p>
-            <a:pPr algn="l">
-              <a:lnSpc>
-                <a:spcPct val="105000"/>
-              </a:lnSpc>
-            </a:pPr>
-            <a:r>
-              <a:rPr sz="3400" b="1">
-                <a:solidFill>
-                  <a:srgbClr val="14181D"/>
-                </a:solidFill>
-                <a:latin typeface="Yu Gothic UI"/>
-              </a:rPr>
-              <a:t>「あとどれくらい」に数字を与える</a:t>
-            </a:r>
-          </a:p>
-        </p:txBody>
-      </p:sp>
-      <p:sp>
-        <p:nvSpPr>
-          <p:cNvPr id="6" name="TextBox 5"/>
           <p:cNvSpPr txBox="1"/>
           <p:nvPr/>
         </p:nvSpPr>
@@ -10031,7 +8277,7 @@
       </p:sp>
       <p:sp>
         <p:nvSpPr>
-          <p:cNvPr id="7" name="Rounded Rectangle 6"/>
+          <p:cNvPr id="6" name="Rounded Rectangle 5"/>
           <p:cNvSpPr/>
           <p:nvPr/>
         </p:nvSpPr>
@@ -10077,427 +8323,7 @@
       </p:sp>
       <p:pic>
         <p:nvPicPr>
-          <p:cNvPr id="8" name="Picture 7" descr="01_verdict_en.png"/>
-          <p:cNvPicPr>
-            <a:picLocks noChangeAspect="1"/>
-          </p:cNvPicPr>
-          <p:nvPr/>
-        </p:nvPicPr>
-        <p:blipFill>
-          <a:blip r:embed="rId2"/>
-          <a:stretch>
-            <a:fillRect/>
-          </a:stretch>
-        </p:blipFill>
-        <p:spPr>
-          <a:xfrm>
-            <a:off x="8595360" y="411480"/>
-            <a:ext cx="2788703" cy="6035040"/>
-          </a:xfrm>
-          <a:prstGeom prst="rect">
-            <a:avLst/>
-          </a:prstGeom>
-        </p:spPr>
-      </p:pic>
-    </p:spTree>
-  </p:cSld>
-  <p:clrMapOvr>
-    <a:masterClrMapping/>
-  </p:clrMapOvr>
-</p:sld>
-</file>
-
-<file path=ppt/slides/slide5.xml><?xml version="1.0" encoding="utf-8"?>
-<p:sld xmlns:a="http://schemas.openxmlformats.org/drawingml/2006/main" xmlns:p="http://schemas.openxmlformats.org/presentationml/2006/main" xmlns:r="http://schemas.openxmlformats.org/officeDocument/2006/relationships">
-  <p:cSld>
-    <p:spTree>
-      <p:nvGrpSpPr>
-        <p:cNvPr id="1" name=""/>
-        <p:cNvGrpSpPr/>
-        <p:nvPr/>
-      </p:nvGrpSpPr>
-      <p:grpSpPr/>
-      <p:sp>
-        <p:nvSpPr>
-          <p:cNvPr id="2" name="TextBox 1"/>
-          <p:cNvSpPr txBox="1"/>
-          <p:nvPr/>
-        </p:nvSpPr>
-        <p:spPr>
-          <a:xfrm>
-            <a:off x="731520" y="6400800"/>
-            <a:ext cx="7315200" cy="274320"/>
-          </a:xfrm>
-          <a:prstGeom prst="rect">
-            <a:avLst/>
-          </a:prstGeom>
-          <a:noFill/>
-        </p:spPr>
-        <p:txBody>
-          <a:bodyPr wrap="square" anchor="t" lIns="45720" rIns="45720" tIns="18288" bIns="18288">
-            <a:spAutoFit/>
-          </a:bodyPr>
-          <a:lstStyle/>
-          <a:p>
-            <a:pPr algn="l">
-              <a:lnSpc>
-                <a:spcPct val="115000"/>
-              </a:lnSpc>
-            </a:pPr>
-            <a:r>
-              <a:rPr sz="1000" b="0">
-                <a:solidFill>
-                  <a:srgbClr val="5C6670"/>
-                </a:solidFill>
-                <a:latin typeface="Yu Gothic UI"/>
-              </a:rPr>
-              <a:t>Move or Wait — 動くか、待つか  ·  公共交通オープンデータチャレンジ2026</a:t>
-            </a:r>
-          </a:p>
-        </p:txBody>
-      </p:sp>
-      <p:sp>
-        <p:nvSpPr>
-          <p:cNvPr id="3" name="TextBox 2"/>
-          <p:cNvSpPr txBox="1"/>
-          <p:nvPr/>
-        </p:nvSpPr>
-        <p:spPr>
-          <a:xfrm>
-            <a:off x="10972800" y="6400800"/>
-            <a:ext cx="548640" cy="274320"/>
-          </a:xfrm>
-          <a:prstGeom prst="rect">
-            <a:avLst/>
-          </a:prstGeom>
-          <a:noFill/>
-        </p:spPr>
-        <p:txBody>
-          <a:bodyPr wrap="square" anchor="t" lIns="45720" rIns="45720" tIns="18288" bIns="18288">
-            <a:spAutoFit/>
-          </a:bodyPr>
-          <a:lstStyle/>
-          <a:p>
-            <a:pPr algn="r">
-              <a:lnSpc>
-                <a:spcPct val="115000"/>
-              </a:lnSpc>
-            </a:pPr>
-            <a:r>
-              <a:rPr sz="1000" b="0">
-                <a:solidFill>
-                  <a:srgbClr val="5C6670"/>
-                </a:solidFill>
-                <a:latin typeface="Yu Gothic UI"/>
-              </a:rPr>
-              <a:t>5</a:t>
-            </a:r>
-          </a:p>
-        </p:txBody>
-      </p:sp>
-      <p:sp>
-        <p:nvSpPr>
-          <p:cNvPr id="4" name="TextBox 3"/>
-          <p:cNvSpPr txBox="1"/>
-          <p:nvPr/>
-        </p:nvSpPr>
-        <p:spPr>
-          <a:xfrm>
-            <a:off x="731520" y="502920"/>
-            <a:ext cx="7315200" cy="365760"/>
-          </a:xfrm>
-          <a:prstGeom prst="rect">
-            <a:avLst/>
-          </a:prstGeom>
-          <a:noFill/>
-        </p:spPr>
-        <p:txBody>
-          <a:bodyPr wrap="square" anchor="t" lIns="45720" rIns="45720" tIns="18288" bIns="18288">
-            <a:spAutoFit/>
-          </a:bodyPr>
-          <a:lstStyle/>
-          <a:p>
-            <a:pPr algn="l">
-              <a:lnSpc>
-                <a:spcPct val="115000"/>
-              </a:lnSpc>
-            </a:pPr>
-            <a:r>
-              <a:rPr sz="1300" b="1">
-                <a:solidFill>
-                  <a:srgbClr val="A4231C"/>
-                </a:solidFill>
-                <a:latin typeface="Yu Gothic UI"/>
-              </a:rPr>
-              <a:t>根拠を開ける</a:t>
-            </a:r>
-          </a:p>
-        </p:txBody>
-      </p:sp>
-      <p:sp>
-        <p:nvSpPr>
-          <p:cNvPr id="5" name="TextBox 4"/>
-          <p:cNvSpPr txBox="1"/>
-          <p:nvPr/>
-        </p:nvSpPr>
-        <p:spPr>
-          <a:xfrm>
-            <a:off x="731520" y="868680"/>
-            <a:ext cx="7315200" cy="1280160"/>
-          </a:xfrm>
-          <a:prstGeom prst="rect">
-            <a:avLst/>
-          </a:prstGeom>
-          <a:noFill/>
-        </p:spPr>
-        <p:txBody>
-          <a:bodyPr wrap="square" anchor="t" lIns="45720" rIns="45720" tIns="18288" bIns="18288">
-            <a:spAutoFit/>
-          </a:bodyPr>
-          <a:lstStyle/>
-          <a:p>
-            <a:pPr algn="l">
-              <a:lnSpc>
-                <a:spcPct val="105000"/>
-              </a:lnSpc>
-            </a:pPr>
-            <a:r>
-              <a:rPr sz="3400" b="1">
-                <a:solidFill>
-                  <a:srgbClr val="14181D"/>
-                </a:solidFill>
-                <a:latin typeface="Yu Gothic UI"/>
-              </a:rPr>
-              <a:t>路線ごとに、なぜその幅なのかを見せる</a:t>
-            </a:r>
-          </a:p>
-        </p:txBody>
-      </p:sp>
-      <p:sp>
-        <p:nvSpPr>
-          <p:cNvPr id="6" name="TextBox 5"/>
-          <p:cNvSpPr txBox="1"/>
-          <p:nvPr/>
-        </p:nvSpPr>
-        <p:spPr>
-          <a:xfrm>
-            <a:off x="731520" y="1920240"/>
-            <a:ext cx="6949440" cy="4206240"/>
-          </a:xfrm>
-          <a:prstGeom prst="rect">
-            <a:avLst/>
-          </a:prstGeom>
-          <a:noFill/>
-        </p:spPr>
-        <p:txBody>
-          <a:bodyPr wrap="square" anchor="t" lIns="45720" rIns="45720" tIns="18288" bIns="18288">
-            <a:spAutoFit/>
-          </a:bodyPr>
-          <a:lstStyle/>
-          <a:p>
-            <a:pPr algn="l">
-              <a:lnSpc>
-                <a:spcPct val="115000"/>
-              </a:lnSpc>
-            </a:pPr>
-            <a:r>
-              <a:rPr sz="1700" b="0">
-                <a:solidFill>
-                  <a:srgbClr val="14181D"/>
-                </a:solidFill>
-                <a:latin typeface="Yu Gothic UI"/>
-              </a:rPr>
-              <a:t>宿の行をタップすると、その周りの路線が 1 行ずつ。</a:t>
-            </a:r>
-          </a:p>
-          <a:p>
-            <a:pPr algn="l">
-              <a:lnSpc>
-                <a:spcPct val="115000"/>
-              </a:lnSpc>
-              <a:spcBef>
-                <a:spcPts val="400"/>
-              </a:spcBef>
-            </a:pPr>
-            <a:r>
-              <a:rPr sz="1700" b="0">
-                <a:solidFill>
-                  <a:srgbClr val="14181D"/>
-                </a:solidFill>
-                <a:latin typeface="Yu Gothic UI"/>
-              </a:rPr>
-              <a:t>路線の「+」で内訳が開く。</a:t>
-            </a:r>
-          </a:p>
-          <a:p>
-            <a:pPr algn="l">
-              <a:lnSpc>
-                <a:spcPct val="115000"/>
-              </a:lnSpc>
-              <a:spcBef>
-                <a:spcPts val="1400"/>
-              </a:spcBef>
-            </a:pPr>
-            <a:r>
-              <a:rPr sz="1500" b="0">
-                <a:solidFill>
-                  <a:srgbClr val="14181D"/>
-                </a:solidFill>
-                <a:latin typeface="Yu Gothic UI"/>
-              </a:rPr>
-              <a:t>・線路上で最も強く揺れた観測点と震度</a:t>
-            </a:r>
-          </a:p>
-          <a:p>
-            <a:pPr algn="l">
-              <a:lnSpc>
-                <a:spcPct val="115000"/>
-              </a:lnSpc>
-            </a:pPr>
-            <a:r>
-              <a:rPr sz="1500" b="0">
-                <a:solidFill>
-                  <a:srgbClr val="14181D"/>
-                </a:solidFill>
-                <a:latin typeface="Yu Gothic UI"/>
-              </a:rPr>
-              <a:t>・点検が要る区間の長さ (km)</a:t>
-            </a:r>
-          </a:p>
-          <a:p>
-            <a:pPr algn="l">
-              <a:lnSpc>
-                <a:spcPct val="115000"/>
-              </a:lnSpc>
-            </a:pPr>
-            <a:r>
-              <a:rPr sz="1500" b="0">
-                <a:solidFill>
-                  <a:srgbClr val="14181D"/>
-                </a:solidFill>
-                <a:latin typeface="Yu Gothic UI"/>
-              </a:rPr>
-              <a:t>・再開までの幅と時刻</a:t>
-            </a:r>
-          </a:p>
-          <a:p>
-            <a:pPr algn="l">
-              <a:lnSpc>
-                <a:spcPct val="115000"/>
-              </a:lnSpc>
-            </a:pPr>
-            <a:r>
-              <a:rPr sz="1500" b="0">
-                <a:solidFill>
-                  <a:srgbClr val="14181D"/>
-                </a:solidFill>
-                <a:latin typeface="Yu Gothic UI"/>
-              </a:rPr>
-              <a:t>・対応する線路 (国土数値情報の線路名称)</a:t>
-            </a:r>
-          </a:p>
-          <a:p>
-            <a:pPr algn="l">
-              <a:lnSpc>
-                <a:spcPct val="115000"/>
-              </a:lnSpc>
-            </a:pPr>
-            <a:r>
-              <a:rPr sz="1500" b="0">
-                <a:solidFill>
-                  <a:srgbClr val="14181D"/>
-                </a:solidFill>
-                <a:latin typeface="Yu Gothic UI"/>
-              </a:rPr>
-              <a:t>・鉄道会社の案内 (ODPT 運行情報) と、その時点</a:t>
-            </a:r>
-          </a:p>
-          <a:p>
-            <a:pPr algn="l">
-              <a:lnSpc>
-                <a:spcPct val="115000"/>
-              </a:lnSpc>
-              <a:spcBef>
-                <a:spcPts val="1400"/>
-              </a:spcBef>
-            </a:pPr>
-            <a:r>
-              <a:rPr sz="1500" b="0">
-                <a:solidFill>
-                  <a:srgbClr val="5C6670"/>
-                </a:solidFill>
-                <a:latin typeface="Yu Gothic UI"/>
-              </a:rPr>
-              <a:t>「鉄道会社の判断ではなく推定である」ことを毎回書く。</a:t>
-            </a:r>
-          </a:p>
-          <a:p>
-            <a:pPr algn="l">
-              <a:lnSpc>
-                <a:spcPct val="115000"/>
-              </a:lnSpc>
-            </a:pPr>
-            <a:r>
-              <a:rPr sz="1500" b="0">
-                <a:solidFill>
-                  <a:srgbClr val="5C6670"/>
-                </a:solidFill>
-                <a:latin typeface="Yu Gothic UI"/>
-              </a:rPr>
-              <a:t>見込みを出すからこそ、根拠と限界を隠さない。</a:t>
-            </a:r>
-          </a:p>
-        </p:txBody>
-      </p:sp>
-      <p:sp>
-        <p:nvSpPr>
-          <p:cNvPr id="7" name="Rounded Rectangle 6"/>
-          <p:cNvSpPr/>
-          <p:nvPr/>
-        </p:nvSpPr>
-        <p:spPr>
-          <a:xfrm>
-            <a:off x="8522208" y="338328"/>
-            <a:ext cx="2935007" cy="6181344"/>
-          </a:xfrm>
-          <a:prstGeom prst="roundRect">
-            <a:avLst>
-              <a:gd name="adj" fmla="val 6000"/>
-            </a:avLst>
-          </a:prstGeom>
-          <a:solidFill>
-            <a:srgbClr val="14181D"/>
-          </a:solidFill>
-          <a:ln>
-            <a:noFill/>
-          </a:ln>
-          <a:effectLst/>
-        </p:spPr>
-        <p:style>
-          <a:lnRef idx="1">
-            <a:schemeClr val="accent1"/>
-          </a:lnRef>
-          <a:fillRef idx="3">
-            <a:schemeClr val="accent1"/>
-          </a:fillRef>
-          <a:effectRef idx="2">
-            <a:schemeClr val="accent1"/>
-          </a:effectRef>
-          <a:fontRef idx="minor">
-            <a:schemeClr val="lt1"/>
-          </a:fontRef>
-        </p:style>
-        <p:txBody>
-          <a:bodyPr rtlCol="0" anchor="ctr"/>
-          <a:lstStyle/>
-          <a:p>
-            <a:pPr algn="ctr"/>
-          </a:p>
-        </p:txBody>
-      </p:sp>
-      <p:pic>
-        <p:nvPicPr>
-          <p:cNvPr id="8" name="Picture 7" descr="02_lines_en.png"/>
+          <p:cNvPr id="7" name="Picture 6" descr="01_verdict_en.png"/>
           <p:cNvPicPr>
             <a:picLocks noChangeAspect="1"/>
           </p:cNvPicPr>
@@ -10584,8 +8410,8 @@
         </p:nvSpPr>
         <p:spPr>
           <a:xfrm>
-            <a:off x="10972800" y="6400800"/>
-            <a:ext cx="548640" cy="274320"/>
+            <a:off x="731520" y="502920"/>
+            <a:ext cx="7315200" cy="365760"/>
           </a:xfrm>
           <a:prstGeom prst="rect">
             <a:avLst/>
@@ -10598,19 +8424,19 @@
           </a:bodyPr>
           <a:lstStyle/>
           <a:p>
-            <a:pPr algn="r">
-              <a:lnSpc>
-                <a:spcPct val="115000"/>
-              </a:lnSpc>
-            </a:pPr>
-            <a:r>
-              <a:rPr sz="1000" b="0">
-                <a:solidFill>
-                  <a:srgbClr val="5C6670"/>
-                </a:solidFill>
-                <a:latin typeface="Yu Gothic UI"/>
-              </a:rPr>
-              <a:t>6</a:t>
+            <a:pPr algn="l">
+              <a:lnSpc>
+                <a:spcPct val="115000"/>
+              </a:lnSpc>
+            </a:pPr>
+            <a:r>
+              <a:rPr sz="1300" b="1">
+                <a:solidFill>
+                  <a:srgbClr val="A4231C"/>
+                </a:solidFill>
+                <a:latin typeface="Yu Gothic UI"/>
+              </a:rPr>
+              <a:t>待たない判断</a:t>
             </a:r>
           </a:p>
         </p:txBody>
@@ -10623,8 +8449,8 @@
         </p:nvSpPr>
         <p:spPr>
           <a:xfrm>
-            <a:off x="731520" y="502920"/>
-            <a:ext cx="7315200" cy="365760"/>
+            <a:off x="731520" y="868680"/>
+            <a:ext cx="5120640" cy="1280160"/>
           </a:xfrm>
           <a:prstGeom prst="rect">
             <a:avLst/>
@@ -10639,17 +8465,17 @@
           <a:p>
             <a:pPr algn="l">
               <a:lnSpc>
-                <a:spcPct val="115000"/>
-              </a:lnSpc>
-            </a:pPr>
-            <a:r>
-              <a:rPr sz="1300" b="1">
-                <a:solidFill>
-                  <a:srgbClr val="A4231C"/>
-                </a:solidFill>
-                <a:latin typeface="Yu Gothic UI"/>
-              </a:rPr>
-              <a:t>待たない判断</a:t>
+                <a:spcPct val="105000"/>
+              </a:lnSpc>
+            </a:pPr>
+            <a:r>
+              <a:rPr sz="2600" b="1">
+                <a:solidFill>
+                  <a:srgbClr val="14181D"/>
+                </a:solidFill>
+                <a:latin typeface="Yu Gothic UI"/>
+              </a:rPr>
+              <a:t>震度 6 強なら、待たずに宿を取れ</a:t>
             </a:r>
           </a:p>
         </p:txBody>
@@ -10657,45 +8483,6 @@
       <p:sp>
         <p:nvSpPr>
           <p:cNvPr id="5" name="TextBox 4"/>
-          <p:cNvSpPr txBox="1"/>
-          <p:nvPr/>
-        </p:nvSpPr>
-        <p:spPr>
-          <a:xfrm>
-            <a:off x="731520" y="868680"/>
-            <a:ext cx="5120640" cy="1280160"/>
-          </a:xfrm>
-          <a:prstGeom prst="rect">
-            <a:avLst/>
-          </a:prstGeom>
-          <a:noFill/>
-        </p:spPr>
-        <p:txBody>
-          <a:bodyPr wrap="square" anchor="t" lIns="45720" rIns="45720" tIns="18288" bIns="18288">
-            <a:spAutoFit/>
-          </a:bodyPr>
-          <a:lstStyle/>
-          <a:p>
-            <a:pPr algn="l">
-              <a:lnSpc>
-                <a:spcPct val="105000"/>
-              </a:lnSpc>
-            </a:pPr>
-            <a:r>
-              <a:rPr sz="2600" b="1">
-                <a:solidFill>
-                  <a:srgbClr val="14181D"/>
-                </a:solidFill>
-                <a:latin typeface="Yu Gothic UI"/>
-              </a:rPr>
-              <a:t>震度 6 強なら、待たずに宿を取れ</a:t>
-            </a:r>
-          </a:p>
-        </p:txBody>
-      </p:sp>
-      <p:sp>
-        <p:nvSpPr>
-          <p:cNvPr id="6" name="TextBox 5"/>
           <p:cNvSpPr txBox="1"/>
           <p:nvPr/>
         </p:nvSpPr>
@@ -10858,7 +8645,7 @@
       </p:sp>
       <p:sp>
         <p:nvSpPr>
-          <p:cNvPr id="7" name="Rounded Rectangle 6"/>
+          <p:cNvPr id="6" name="Rounded Rectangle 5"/>
           <p:cNvSpPr/>
           <p:nvPr/>
         </p:nvSpPr>
@@ -10904,7 +8691,7 @@
       </p:sp>
       <p:pic>
         <p:nvPicPr>
-          <p:cNvPr id="8" name="Picture 7" descr="03_avoid_en.png"/>
+          <p:cNvPr id="7" name="Picture 6" descr="03_avoid_en.png"/>
           <p:cNvPicPr>
             <a:picLocks noChangeAspect="1"/>
           </p:cNvPicPr>
@@ -10928,7 +8715,7 @@
       </p:pic>
       <p:sp>
         <p:nvSpPr>
-          <p:cNvPr id="9" name="Rounded Rectangle 8"/>
+          <p:cNvPr id="8" name="Rounded Rectangle 7"/>
           <p:cNvSpPr/>
           <p:nvPr/>
         </p:nvSpPr>
@@ -10974,7 +8761,7 @@
       </p:sp>
       <p:pic>
         <p:nvPicPr>
-          <p:cNvPr id="10" name="Picture 9" descr="04_shelter_en.png"/>
+          <p:cNvPr id="9" name="Picture 8" descr="04_shelter_en.png"/>
           <p:cNvPicPr>
             <a:picLocks noChangeAspect="1"/>
           </p:cNvPicPr>
@@ -11061,8 +8848,8 @@
         </p:nvSpPr>
         <p:spPr>
           <a:xfrm>
-            <a:off x="10972800" y="6400800"/>
-            <a:ext cx="548640" cy="274320"/>
+            <a:off x="731520" y="502920"/>
+            <a:ext cx="7315200" cy="365760"/>
           </a:xfrm>
           <a:prstGeom prst="rect">
             <a:avLst/>
@@ -11075,19 +8862,19 @@
           </a:bodyPr>
           <a:lstStyle/>
           <a:p>
-            <a:pPr algn="r">
-              <a:lnSpc>
-                <a:spcPct val="115000"/>
-              </a:lnSpc>
-            </a:pPr>
-            <a:r>
-              <a:rPr sz="1000" b="0">
-                <a:solidFill>
-                  <a:srgbClr val="5C6670"/>
-                </a:solidFill>
-                <a:latin typeface="Yu Gothic UI"/>
-              </a:rPr>
-              <a:t>7</a:t>
+            <a:pPr algn="l">
+              <a:lnSpc>
+                <a:spcPct val="115000"/>
+              </a:lnSpc>
+            </a:pPr>
+            <a:r>
+              <a:rPr sz="1300" b="1">
+                <a:solidFill>
+                  <a:srgbClr val="A4231C"/>
+                </a:solidFill>
+                <a:latin typeface="Yu Gothic UI"/>
+              </a:rPr>
+              <a:t>仕組み</a:t>
             </a:r>
           </a:p>
         </p:txBody>
@@ -11100,8 +8887,8 @@
         </p:nvSpPr>
         <p:spPr>
           <a:xfrm>
-            <a:off x="731520" y="502920"/>
-            <a:ext cx="7315200" cy="365760"/>
+            <a:off x="731520" y="868680"/>
+            <a:ext cx="10515600" cy="1280160"/>
           </a:xfrm>
           <a:prstGeom prst="rect">
             <a:avLst/>
@@ -11116,45 +8903,6 @@
           <a:p>
             <a:pPr algn="l">
               <a:lnSpc>
-                <a:spcPct val="115000"/>
-              </a:lnSpc>
-            </a:pPr>
-            <a:r>
-              <a:rPr sz="1300" b="1">
-                <a:solidFill>
-                  <a:srgbClr val="A4231C"/>
-                </a:solidFill>
-                <a:latin typeface="Yu Gothic UI"/>
-              </a:rPr>
-              <a:t>仕組み</a:t>
-            </a:r>
-          </a:p>
-        </p:txBody>
-      </p:sp>
-      <p:sp>
-        <p:nvSpPr>
-          <p:cNvPr id="5" name="TextBox 4"/>
-          <p:cNvSpPr txBox="1"/>
-          <p:nvPr/>
-        </p:nvSpPr>
-        <p:spPr>
-          <a:xfrm>
-            <a:off x="731520" y="868680"/>
-            <a:ext cx="10515600" cy="1280160"/>
-          </a:xfrm>
-          <a:prstGeom prst="rect">
-            <a:avLst/>
-          </a:prstGeom>
-          <a:noFill/>
-        </p:spPr>
-        <p:txBody>
-          <a:bodyPr wrap="square" anchor="t" lIns="45720" rIns="45720" tIns="18288" bIns="18288">
-            <a:spAutoFit/>
-          </a:bodyPr>
-          <a:lstStyle/>
-          <a:p>
-            <a:pPr algn="l">
-              <a:lnSpc>
                 <a:spcPct val="105000"/>
               </a:lnSpc>
             </a:pPr>
@@ -11172,7 +8920,7 @@
       </p:sp>
       <p:sp>
         <p:nvSpPr>
-          <p:cNvPr id="6" name="Rounded Rectangle 5"/>
+          <p:cNvPr id="5" name="Rounded Rectangle 4"/>
           <p:cNvSpPr/>
           <p:nvPr/>
         </p:nvSpPr>
@@ -11218,14 +8966,53 @@
       </p:sp>
       <p:sp>
         <p:nvSpPr>
+          <p:cNvPr id="6" name="TextBox 5"/>
+          <p:cNvSpPr txBox="1"/>
+          <p:nvPr/>
+        </p:nvSpPr>
+        <p:spPr>
+          <a:xfrm>
+            <a:off x="731520" y="1965960"/>
+            <a:ext cx="502920" cy="502920"/>
+          </a:xfrm>
+          <a:prstGeom prst="rect">
+            <a:avLst/>
+          </a:prstGeom>
+          <a:noFill/>
+        </p:spPr>
+        <p:txBody>
+          <a:bodyPr wrap="square" anchor="ctr" lIns="45720" rIns="45720" tIns="18288" bIns="18288">
+            <a:spAutoFit/>
+          </a:bodyPr>
+          <a:lstStyle/>
+          <a:p>
+            <a:pPr algn="ctr">
+              <a:lnSpc>
+                <a:spcPct val="115000"/>
+              </a:lnSpc>
+            </a:pPr>
+            <a:r>
+              <a:rPr sz="1600" b="1">
+                <a:solidFill>
+                  <a:srgbClr val="FFFFFF"/>
+                </a:solidFill>
+                <a:latin typeface="Yu Gothic UI"/>
+              </a:rPr>
+              <a:t>1</a:t>
+            </a:r>
+          </a:p>
+        </p:txBody>
+      </p:sp>
+      <p:sp>
+        <p:nvSpPr>
           <p:cNvPr id="7" name="TextBox 6"/>
           <p:cNvSpPr txBox="1"/>
           <p:nvPr/>
         </p:nvSpPr>
         <p:spPr>
           <a:xfrm>
-            <a:off x="731520" y="1965960"/>
-            <a:ext cx="502920" cy="502920"/>
+            <a:off x="1371600" y="1920240"/>
+            <a:ext cx="2926080" cy="548640"/>
           </a:xfrm>
           <a:prstGeom prst="rect">
             <a:avLst/>
@@ -11238,19 +9025,19 @@
           </a:bodyPr>
           <a:lstStyle/>
           <a:p>
-            <a:pPr algn="ctr">
-              <a:lnSpc>
-                <a:spcPct val="115000"/>
-              </a:lnSpc>
-            </a:pPr>
-            <a:r>
-              <a:rPr sz="1600" b="1">
-                <a:solidFill>
-                  <a:srgbClr val="FFFFFF"/>
-                </a:solidFill>
-                <a:latin typeface="Yu Gothic UI"/>
-              </a:rPr>
-              <a:t>1</a:t>
+            <a:pPr algn="l">
+              <a:lnSpc>
+                <a:spcPct val="115000"/>
+              </a:lnSpc>
+            </a:pPr>
+            <a:r>
+              <a:rPr sz="1700" b="1">
+                <a:solidFill>
+                  <a:srgbClr val="14181D"/>
+                </a:solidFill>
+                <a:latin typeface="Yu Gothic UI"/>
+              </a:rPr>
+              <a:t>気象庁の震度</a:t>
             </a:r>
           </a:p>
         </p:txBody>
@@ -11263,8 +9050,8 @@
         </p:nvSpPr>
         <p:spPr>
           <a:xfrm>
-            <a:off x="1371600" y="1920240"/>
-            <a:ext cx="2926080" cy="548640"/>
+            <a:off x="4297680" y="1920240"/>
+            <a:ext cx="7315200" cy="594360"/>
           </a:xfrm>
           <a:prstGeom prst="rect">
             <a:avLst/>
@@ -11283,51 +9070,12 @@
               </a:lnSpc>
             </a:pPr>
             <a:r>
-              <a:rPr sz="1700" b="1">
+              <a:rPr sz="1300" b="0">
                 <a:solidFill>
                   <a:srgbClr val="14181D"/>
                 </a:solidFill>
                 <a:latin typeface="Yu Gothic UI"/>
               </a:rPr>
-              <a:t>気象庁の震度</a:t>
-            </a:r>
-          </a:p>
-        </p:txBody>
-      </p:sp>
-      <p:sp>
-        <p:nvSpPr>
-          <p:cNvPr id="9" name="TextBox 8"/>
-          <p:cNvSpPr txBox="1"/>
-          <p:nvPr/>
-        </p:nvSpPr>
-        <p:spPr>
-          <a:xfrm>
-            <a:off x="4297680" y="1920240"/>
-            <a:ext cx="7315200" cy="594360"/>
-          </a:xfrm>
-          <a:prstGeom prst="rect">
-            <a:avLst/>
-          </a:prstGeom>
-          <a:noFill/>
-        </p:spPr>
-        <p:txBody>
-          <a:bodyPr wrap="square" anchor="ctr" lIns="45720" rIns="45720" tIns="18288" bIns="18288">
-            <a:spAutoFit/>
-          </a:bodyPr>
-          <a:lstStyle/>
-          <a:p>
-            <a:pPr algn="l">
-              <a:lnSpc>
-                <a:spcPct val="115000"/>
-              </a:lnSpc>
-            </a:pPr>
-            <a:r>
-              <a:rPr sz="1300" b="0">
-                <a:solidFill>
-                  <a:srgbClr val="14181D"/>
-                </a:solidFill>
-                <a:latin typeface="Yu Gothic UI"/>
-              </a:rPr>
               <a:t>観測点 4,360 点。P2P地震情報と気象庁 bosai JSON から</a:t>
             </a:r>
           </a:p>
@@ -11335,7 +9083,7 @@
       </p:sp>
       <p:sp>
         <p:nvSpPr>
-          <p:cNvPr id="10" name="Rounded Rectangle 9"/>
+          <p:cNvPr id="9" name="Rounded Rectangle 8"/>
           <p:cNvSpPr/>
           <p:nvPr/>
         </p:nvSpPr>
@@ -11381,14 +9129,53 @@
       </p:sp>
       <p:sp>
         <p:nvSpPr>
+          <p:cNvPr id="10" name="TextBox 9"/>
+          <p:cNvSpPr txBox="1"/>
+          <p:nvPr/>
+        </p:nvSpPr>
+        <p:spPr>
+          <a:xfrm>
+            <a:off x="731520" y="2679191"/>
+            <a:ext cx="502920" cy="502920"/>
+          </a:xfrm>
+          <a:prstGeom prst="rect">
+            <a:avLst/>
+          </a:prstGeom>
+          <a:noFill/>
+        </p:spPr>
+        <p:txBody>
+          <a:bodyPr wrap="square" anchor="ctr" lIns="45720" rIns="45720" tIns="18288" bIns="18288">
+            <a:spAutoFit/>
+          </a:bodyPr>
+          <a:lstStyle/>
+          <a:p>
+            <a:pPr algn="ctr">
+              <a:lnSpc>
+                <a:spcPct val="115000"/>
+              </a:lnSpc>
+            </a:pPr>
+            <a:r>
+              <a:rPr sz="1600" b="1">
+                <a:solidFill>
+                  <a:srgbClr val="FFFFFF"/>
+                </a:solidFill>
+                <a:latin typeface="Yu Gothic UI"/>
+              </a:rPr>
+              <a:t>2</a:t>
+            </a:r>
+          </a:p>
+        </p:txBody>
+      </p:sp>
+      <p:sp>
+        <p:nvSpPr>
           <p:cNvPr id="11" name="TextBox 10"/>
           <p:cNvSpPr txBox="1"/>
           <p:nvPr/>
         </p:nvSpPr>
         <p:spPr>
           <a:xfrm>
-            <a:off x="731520" y="2679191"/>
-            <a:ext cx="502920" cy="502920"/>
+            <a:off x="1371600" y="2633471"/>
+            <a:ext cx="2926080" cy="548640"/>
           </a:xfrm>
           <a:prstGeom prst="rect">
             <a:avLst/>
@@ -11401,19 +9188,19 @@
           </a:bodyPr>
           <a:lstStyle/>
           <a:p>
-            <a:pPr algn="ctr">
-              <a:lnSpc>
-                <a:spcPct val="115000"/>
-              </a:lnSpc>
-            </a:pPr>
-            <a:r>
-              <a:rPr sz="1600" b="1">
-                <a:solidFill>
-                  <a:srgbClr val="FFFFFF"/>
-                </a:solidFill>
-                <a:latin typeface="Yu Gothic UI"/>
-              </a:rPr>
-              <a:t>2</a:t>
+            <a:pPr algn="l">
+              <a:lnSpc>
+                <a:spcPct val="115000"/>
+              </a:lnSpc>
+            </a:pPr>
+            <a:r>
+              <a:rPr sz="1700" b="1">
+                <a:solidFill>
+                  <a:srgbClr val="14181D"/>
+                </a:solidFill>
+                <a:latin typeface="Yu Gothic UI"/>
+              </a:rPr>
+              <a:t>路線に重ねる</a:t>
             </a:r>
           </a:p>
         </p:txBody>
@@ -11426,8 +9213,8 @@
         </p:nvSpPr>
         <p:spPr>
           <a:xfrm>
-            <a:off x="1371600" y="2633471"/>
-            <a:ext cx="2926080" cy="548640"/>
+            <a:off x="4297680" y="2633471"/>
+            <a:ext cx="7315200" cy="594360"/>
           </a:xfrm>
           <a:prstGeom prst="rect">
             <a:avLst/>
@@ -11446,51 +9233,12 @@
               </a:lnSpc>
             </a:pPr>
             <a:r>
-              <a:rPr sz="1700" b="1">
+              <a:rPr sz="1300" b="0">
                 <a:solidFill>
                   <a:srgbClr val="14181D"/>
                 </a:solidFill>
                 <a:latin typeface="Yu Gothic UI"/>
               </a:rPr>
-              <a:t>路線に重ねる</a:t>
-            </a:r>
-          </a:p>
-        </p:txBody>
-      </p:sp>
-      <p:sp>
-        <p:nvSpPr>
-          <p:cNvPr id="13" name="TextBox 12"/>
-          <p:cNvSpPr txBox="1"/>
-          <p:nvPr/>
-        </p:nvSpPr>
-        <p:spPr>
-          <a:xfrm>
-            <a:off x="4297680" y="2633471"/>
-            <a:ext cx="7315200" cy="594360"/>
-          </a:xfrm>
-          <a:prstGeom prst="rect">
-            <a:avLst/>
-          </a:prstGeom>
-          <a:noFill/>
-        </p:spPr>
-        <p:txBody>
-          <a:bodyPr wrap="square" anchor="ctr" lIns="45720" rIns="45720" tIns="18288" bIns="18288">
-            <a:spAutoFit/>
-          </a:bodyPr>
-          <a:lstStyle/>
-          <a:p>
-            <a:pPr algn="l">
-              <a:lnSpc>
-                <a:spcPct val="115000"/>
-              </a:lnSpc>
-            </a:pPr>
-            <a:r>
-              <a:rPr sz="1300" b="0">
-                <a:solidFill>
-                  <a:srgbClr val="14181D"/>
-                </a:solidFill>
-                <a:latin typeface="Yu Gothic UI"/>
-              </a:rPr>
               <a:t>国土数値情報 N02 の 596 路線・27,343 標本点に最大震度を割り当て。162 ms</a:t>
             </a:r>
           </a:p>
@@ -11498,7 +9246,7 @@
       </p:sp>
       <p:sp>
         <p:nvSpPr>
-          <p:cNvPr id="14" name="Rounded Rectangle 13"/>
+          <p:cNvPr id="13" name="Rounded Rectangle 12"/>
           <p:cNvSpPr/>
           <p:nvPr/>
         </p:nvSpPr>
@@ -11544,14 +9292,53 @@
       </p:sp>
       <p:sp>
         <p:nvSpPr>
+          <p:cNvPr id="14" name="TextBox 13"/>
+          <p:cNvSpPr txBox="1"/>
+          <p:nvPr/>
+        </p:nvSpPr>
+        <p:spPr>
+          <a:xfrm>
+            <a:off x="731520" y="3392424"/>
+            <a:ext cx="502920" cy="502920"/>
+          </a:xfrm>
+          <a:prstGeom prst="rect">
+            <a:avLst/>
+          </a:prstGeom>
+          <a:noFill/>
+        </p:spPr>
+        <p:txBody>
+          <a:bodyPr wrap="square" anchor="ctr" lIns="45720" rIns="45720" tIns="18288" bIns="18288">
+            <a:spAutoFit/>
+          </a:bodyPr>
+          <a:lstStyle/>
+          <a:p>
+            <a:pPr algn="ctr">
+              <a:lnSpc>
+                <a:spcPct val="115000"/>
+              </a:lnSpc>
+            </a:pPr>
+            <a:r>
+              <a:rPr sz="1600" b="1">
+                <a:solidFill>
+                  <a:srgbClr val="FFFFFF"/>
+                </a:solidFill>
+                <a:latin typeface="Yu Gothic UI"/>
+              </a:rPr>
+              <a:t>3</a:t>
+            </a:r>
+          </a:p>
+        </p:txBody>
+      </p:sp>
+      <p:sp>
+        <p:nvSpPr>
           <p:cNvPr id="15" name="TextBox 14"/>
           <p:cNvSpPr txBox="1"/>
           <p:nvPr/>
         </p:nvSpPr>
         <p:spPr>
           <a:xfrm>
-            <a:off x="731520" y="3392424"/>
-            <a:ext cx="502920" cy="502920"/>
+            <a:off x="1371600" y="3346704"/>
+            <a:ext cx="2926080" cy="548640"/>
           </a:xfrm>
           <a:prstGeom prst="rect">
             <a:avLst/>
@@ -11564,19 +9351,19 @@
           </a:bodyPr>
           <a:lstStyle/>
           <a:p>
-            <a:pPr algn="ctr">
-              <a:lnSpc>
-                <a:spcPct val="115000"/>
-              </a:lnSpc>
-            </a:pPr>
-            <a:r>
-              <a:rPr sz="1600" b="1">
-                <a:solidFill>
-                  <a:srgbClr val="FFFFFF"/>
-                </a:solidFill>
-                <a:latin typeface="Yu Gothic UI"/>
-              </a:rPr>
-              <a:t>3</a:t>
+            <a:pPr algn="l">
+              <a:lnSpc>
+                <a:spcPct val="115000"/>
+              </a:lnSpc>
+            </a:pPr>
+            <a:r>
+              <a:rPr sz="1700" b="1">
+                <a:solidFill>
+                  <a:srgbClr val="A4231C"/>
+                </a:solidFill>
+                <a:latin typeface="Yu Gothic UI"/>
+              </a:rPr>
+              <a:t>運転系統に組み替え</a:t>
             </a:r>
           </a:p>
         </p:txBody>
@@ -11589,8 +9376,8 @@
         </p:nvSpPr>
         <p:spPr>
           <a:xfrm>
-            <a:off x="1371600" y="3346704"/>
-            <a:ext cx="2926080" cy="548640"/>
+            <a:off x="4297680" y="3346704"/>
+            <a:ext cx="7315200" cy="594360"/>
           </a:xfrm>
           <a:prstGeom prst="rect">
             <a:avLst/>
@@ -11609,51 +9396,12 @@
               </a:lnSpc>
             </a:pPr>
             <a:r>
-              <a:rPr sz="1700" b="1">
+              <a:rPr sz="1300" b="0">
                 <a:solidFill>
                   <a:srgbClr val="A4231C"/>
                 </a:solidFill>
                 <a:latin typeface="Yu Gothic UI"/>
               </a:rPr>
-              <a:t>運転系統に組み替え</a:t>
-            </a:r>
-          </a:p>
-        </p:txBody>
-      </p:sp>
-      <p:sp>
-        <p:nvSpPr>
-          <p:cNvPr id="17" name="TextBox 16"/>
-          <p:cNvSpPr txBox="1"/>
-          <p:nvPr/>
-        </p:nvSpPr>
-        <p:spPr>
-          <a:xfrm>
-            <a:off x="4297680" y="3346704"/>
-            <a:ext cx="7315200" cy="594360"/>
-          </a:xfrm>
-          <a:prstGeom prst="rect">
-            <a:avLst/>
-          </a:prstGeom>
-          <a:noFill/>
-        </p:spPr>
-        <p:txBody>
-          <a:bodyPr wrap="square" anchor="ctr" lIns="45720" rIns="45720" tIns="18288" bIns="18288">
-            <a:spAutoFit/>
-          </a:bodyPr>
-          <a:lstStyle/>
-          <a:p>
-            <a:pPr algn="l">
-              <a:lnSpc>
-                <a:spcPct val="115000"/>
-              </a:lnSpc>
-            </a:pPr>
-            <a:r>
-              <a:rPr sz="1300" b="0">
-                <a:solidFill>
-                  <a:srgbClr val="A4231C"/>
-                </a:solidFill>
-                <a:latin typeface="Yu Gothic UI"/>
-              </a:rPr>
               <a:t>ODPT odpt:Railway / odpt:Station。「山手線」を旅客が知る一周に。190 系統</a:t>
             </a:r>
           </a:p>
@@ -11661,7 +9409,7 @@
       </p:sp>
       <p:sp>
         <p:nvSpPr>
-          <p:cNvPr id="18" name="Rounded Rectangle 17"/>
+          <p:cNvPr id="17" name="Rounded Rectangle 16"/>
           <p:cNvSpPr/>
           <p:nvPr/>
         </p:nvSpPr>
@@ -11707,14 +9455,53 @@
       </p:sp>
       <p:sp>
         <p:nvSpPr>
+          <p:cNvPr id="18" name="TextBox 17"/>
+          <p:cNvSpPr txBox="1"/>
+          <p:nvPr/>
+        </p:nvSpPr>
+        <p:spPr>
+          <a:xfrm>
+            <a:off x="731520" y="4105656"/>
+            <a:ext cx="502920" cy="502920"/>
+          </a:xfrm>
+          <a:prstGeom prst="rect">
+            <a:avLst/>
+          </a:prstGeom>
+          <a:noFill/>
+        </p:spPr>
+        <p:txBody>
+          <a:bodyPr wrap="square" anchor="ctr" lIns="45720" rIns="45720" tIns="18288" bIns="18288">
+            <a:spAutoFit/>
+          </a:bodyPr>
+          <a:lstStyle/>
+          <a:p>
+            <a:pPr algn="ctr">
+              <a:lnSpc>
+                <a:spcPct val="115000"/>
+              </a:lnSpc>
+            </a:pPr>
+            <a:r>
+              <a:rPr sz="1600" b="1">
+                <a:solidFill>
+                  <a:srgbClr val="FFFFFF"/>
+                </a:solidFill>
+                <a:latin typeface="Yu Gothic UI"/>
+              </a:rPr>
+              <a:t>4</a:t>
+            </a:r>
+          </a:p>
+        </p:txBody>
+      </p:sp>
+      <p:sp>
+        <p:nvSpPr>
           <p:cNvPr id="19" name="TextBox 18"/>
           <p:cNvSpPr txBox="1"/>
           <p:nvPr/>
         </p:nvSpPr>
         <p:spPr>
           <a:xfrm>
-            <a:off x="731520" y="4105656"/>
-            <a:ext cx="502920" cy="502920"/>
+            <a:off x="1371600" y="4059936"/>
+            <a:ext cx="2926080" cy="548640"/>
           </a:xfrm>
           <a:prstGeom prst="rect">
             <a:avLst/>
@@ -11727,19 +9514,19 @@
           </a:bodyPr>
           <a:lstStyle/>
           <a:p>
-            <a:pPr algn="ctr">
-              <a:lnSpc>
-                <a:spcPct val="115000"/>
-              </a:lnSpc>
-            </a:pPr>
-            <a:r>
-              <a:rPr sz="1600" b="1">
-                <a:solidFill>
-                  <a:srgbClr val="FFFFFF"/>
-                </a:solidFill>
-                <a:latin typeface="Yu Gothic UI"/>
-              </a:rPr>
-              <a:t>4</a:t>
+            <a:pPr algn="l">
+              <a:lnSpc>
+                <a:spcPct val="115000"/>
+              </a:lnSpc>
+            </a:pPr>
+            <a:r>
+              <a:rPr sz="1700" b="1">
+                <a:solidFill>
+                  <a:srgbClr val="14181D"/>
+                </a:solidFill>
+                <a:latin typeface="Yu Gothic UI"/>
+              </a:rPr>
+              <a:t>推定式</a:t>
             </a:r>
           </a:p>
         </p:txBody>
@@ -11752,8 +9539,8 @@
         </p:nvSpPr>
         <p:spPr>
           <a:xfrm>
-            <a:off x="1371600" y="4059936"/>
-            <a:ext cx="2926080" cy="548640"/>
+            <a:off x="4297680" y="4059936"/>
+            <a:ext cx="7315200" cy="594360"/>
           </a:xfrm>
           <a:prstGeom prst="rect">
             <a:avLst/>
@@ -11772,51 +9559,12 @@
               </a:lnSpc>
             </a:pPr>
             <a:r>
-              <a:rPr sz="1700" b="1">
+              <a:rPr sz="1300" b="0">
                 <a:solidFill>
                   <a:srgbClr val="14181D"/>
                 </a:solidFill>
                 <a:latin typeface="Yu Gothic UI"/>
               </a:rPr>
-              <a:t>推定式</a:t>
-            </a:r>
-          </a:p>
-        </p:txBody>
-      </p:sp>
-      <p:sp>
-        <p:nvSpPr>
-          <p:cNvPr id="21" name="TextBox 20"/>
-          <p:cNvSpPr txBox="1"/>
-          <p:nvPr/>
-        </p:nvSpPr>
-        <p:spPr>
-          <a:xfrm>
-            <a:off x="4297680" y="4059936"/>
-            <a:ext cx="7315200" cy="594360"/>
-          </a:xfrm>
-          <a:prstGeom prst="rect">
-            <a:avLst/>
-          </a:prstGeom>
-          <a:noFill/>
-        </p:spPr>
-        <p:txBody>
-          <a:bodyPr wrap="square" anchor="ctr" lIns="45720" rIns="45720" tIns="18288" bIns="18288">
-            <a:spAutoFit/>
-          </a:bodyPr>
-          <a:lstStyle/>
-          <a:p>
-            <a:pPr algn="l">
-              <a:lnSpc>
-                <a:spcPct val="115000"/>
-              </a:lnSpc>
-            </a:pPr>
-            <a:r>
-              <a:rPr sz="1300" b="0">
-                <a:solidFill>
-                  <a:srgbClr val="14181D"/>
-                </a:solidFill>
-                <a:latin typeface="Yu Gothic UI"/>
-              </a:rPr>
               <a:t>高浜・翠川 (2011) 日本地震工学会論文集。震度 4 → 注意運転点検 30 分 / 5 弱 → 徒歩点検 6.0 分/km ± 30 分 / 6 弱〜 → 時間を出さない</a:t>
             </a:r>
           </a:p>
@@ -11824,7 +9572,7 @@
       </p:sp>
       <p:sp>
         <p:nvSpPr>
-          <p:cNvPr id="22" name="Rounded Rectangle 21"/>
+          <p:cNvPr id="21" name="Rounded Rectangle 20"/>
           <p:cNvSpPr/>
           <p:nvPr/>
         </p:nvSpPr>
@@ -11870,14 +9618,53 @@
       </p:sp>
       <p:sp>
         <p:nvSpPr>
+          <p:cNvPr id="22" name="TextBox 21"/>
+          <p:cNvSpPr txBox="1"/>
+          <p:nvPr/>
+        </p:nvSpPr>
+        <p:spPr>
+          <a:xfrm>
+            <a:off x="731520" y="4818888"/>
+            <a:ext cx="502920" cy="502920"/>
+          </a:xfrm>
+          <a:prstGeom prst="rect">
+            <a:avLst/>
+          </a:prstGeom>
+          <a:noFill/>
+        </p:spPr>
+        <p:txBody>
+          <a:bodyPr wrap="square" anchor="ctr" lIns="45720" rIns="45720" tIns="18288" bIns="18288">
+            <a:spAutoFit/>
+          </a:bodyPr>
+          <a:lstStyle/>
+          <a:p>
+            <a:pPr algn="ctr">
+              <a:lnSpc>
+                <a:spcPct val="115000"/>
+              </a:lnSpc>
+            </a:pPr>
+            <a:r>
+              <a:rPr sz="1600" b="1">
+                <a:solidFill>
+                  <a:srgbClr val="FFFFFF"/>
+                </a:solidFill>
+                <a:latin typeface="Yu Gothic UI"/>
+              </a:rPr>
+              <a:t>5</a:t>
+            </a:r>
+          </a:p>
+        </p:txBody>
+      </p:sp>
+      <p:sp>
+        <p:nvSpPr>
           <p:cNvPr id="23" name="TextBox 22"/>
           <p:cNvSpPr txBox="1"/>
           <p:nvPr/>
         </p:nvSpPr>
         <p:spPr>
           <a:xfrm>
-            <a:off x="731520" y="4818888"/>
-            <a:ext cx="502920" cy="502920"/>
+            <a:off x="1371600" y="4773168"/>
+            <a:ext cx="2926080" cy="548640"/>
           </a:xfrm>
           <a:prstGeom prst="rect">
             <a:avLst/>
@@ -11890,19 +9677,19 @@
           </a:bodyPr>
           <a:lstStyle/>
           <a:p>
-            <a:pPr algn="ctr">
-              <a:lnSpc>
-                <a:spcPct val="115000"/>
-              </a:lnSpc>
-            </a:pPr>
-            <a:r>
-              <a:rPr sz="1600" b="1">
-                <a:solidFill>
-                  <a:srgbClr val="FFFFFF"/>
-                </a:solidFill>
-                <a:latin typeface="Yu Gothic UI"/>
-              </a:rPr>
-              <a:t>5</a:t>
+            <a:pPr algn="l">
+              <a:lnSpc>
+                <a:spcPct val="115000"/>
+              </a:lnSpc>
+            </a:pPr>
+            <a:r>
+              <a:rPr sz="1700" b="1">
+                <a:solidFill>
+                  <a:srgbClr val="A4231C"/>
+                </a:solidFill>
+                <a:latin typeface="Yu Gothic UI"/>
+              </a:rPr>
+              <a:t>運行情報で終わらせる</a:t>
             </a:r>
           </a:p>
         </p:txBody>
@@ -11915,8 +9702,8 @@
         </p:nvSpPr>
         <p:spPr>
           <a:xfrm>
-            <a:off x="1371600" y="4773168"/>
-            <a:ext cx="2926080" cy="548640"/>
+            <a:off x="4297680" y="4773168"/>
+            <a:ext cx="7315200" cy="594360"/>
           </a:xfrm>
           <a:prstGeom prst="rect">
             <a:avLst/>
@@ -11935,51 +9722,12 @@
               </a:lnSpc>
             </a:pPr>
             <a:r>
-              <a:rPr sz="1700" b="1">
+              <a:rPr sz="1300" b="0">
                 <a:solidFill>
                   <a:srgbClr val="A4231C"/>
                 </a:solidFill>
                 <a:latin typeface="Yu Gothic UI"/>
               </a:rPr>
-              <a:t>運行情報で終わらせる</a:t>
-            </a:r>
-          </a:p>
-        </p:txBody>
-      </p:sp>
-      <p:sp>
-        <p:nvSpPr>
-          <p:cNvPr id="25" name="TextBox 24"/>
-          <p:cNvSpPr txBox="1"/>
-          <p:nvPr/>
-        </p:nvSpPr>
-        <p:spPr>
-          <a:xfrm>
-            <a:off x="4297680" y="4773168"/>
-            <a:ext cx="7315200" cy="594360"/>
-          </a:xfrm>
-          <a:prstGeom prst="rect">
-            <a:avLst/>
-          </a:prstGeom>
-          <a:noFill/>
-        </p:spPr>
-        <p:txBody>
-          <a:bodyPr wrap="square" anchor="ctr" lIns="45720" rIns="45720" tIns="18288" bIns="18288">
-            <a:spAutoFit/>
-          </a:bodyPr>
-          <a:lstStyle/>
-          <a:p>
-            <a:pPr algn="l">
-              <a:lnSpc>
-                <a:spcPct val="115000"/>
-              </a:lnSpc>
-            </a:pPr>
-            <a:r>
-              <a:rPr sz="1300" b="0">
-                <a:solidFill>
-                  <a:srgbClr val="A4231C"/>
-                </a:solidFill>
-                <a:latin typeface="Yu Gothic UI"/>
-              </a:rPr>
               <a:t>ODPT odpt:TrainInformation が「平常」なら推定を捨てる。「見合わせ」なら裏付け</a:t>
             </a:r>
           </a:p>
@@ -11987,7 +9735,7 @@
       </p:sp>
       <p:sp>
         <p:nvSpPr>
-          <p:cNvPr id="26" name="Rounded Rectangle 25"/>
+          <p:cNvPr id="25" name="Rounded Rectangle 24"/>
           <p:cNvSpPr/>
           <p:nvPr/>
         </p:nvSpPr>
@@ -12033,14 +9781,53 @@
       </p:sp>
       <p:sp>
         <p:nvSpPr>
+          <p:cNvPr id="26" name="TextBox 25"/>
+          <p:cNvSpPr txBox="1"/>
+          <p:nvPr/>
+        </p:nvSpPr>
+        <p:spPr>
+          <a:xfrm>
+            <a:off x="731520" y="5532120"/>
+            <a:ext cx="502920" cy="502920"/>
+          </a:xfrm>
+          <a:prstGeom prst="rect">
+            <a:avLst/>
+          </a:prstGeom>
+          <a:noFill/>
+        </p:spPr>
+        <p:txBody>
+          <a:bodyPr wrap="square" anchor="ctr" lIns="45720" rIns="45720" tIns="18288" bIns="18288">
+            <a:spAutoFit/>
+          </a:bodyPr>
+          <a:lstStyle/>
+          <a:p>
+            <a:pPr algn="ctr">
+              <a:lnSpc>
+                <a:spcPct val="115000"/>
+              </a:lnSpc>
+            </a:pPr>
+            <a:r>
+              <a:rPr sz="1600" b="1">
+                <a:solidFill>
+                  <a:srgbClr val="FFFFFF"/>
+                </a:solidFill>
+                <a:latin typeface="Yu Gothic UI"/>
+              </a:rPr>
+              <a:t>6</a:t>
+            </a:r>
+          </a:p>
+        </p:txBody>
+      </p:sp>
+      <p:sp>
+        <p:nvSpPr>
           <p:cNvPr id="27" name="TextBox 26"/>
           <p:cNvSpPr txBox="1"/>
           <p:nvPr/>
         </p:nvSpPr>
         <p:spPr>
           <a:xfrm>
-            <a:off x="731520" y="5532120"/>
-            <a:ext cx="502920" cy="502920"/>
+            <a:off x="1371600" y="5486400"/>
+            <a:ext cx="2926080" cy="548640"/>
           </a:xfrm>
           <a:prstGeom prst="rect">
             <a:avLst/>
@@ -12053,19 +9840,19 @@
           </a:bodyPr>
           <a:lstStyle/>
           <a:p>
-            <a:pPr algn="ctr">
-              <a:lnSpc>
-                <a:spcPct val="115000"/>
-              </a:lnSpc>
-            </a:pPr>
-            <a:r>
-              <a:rPr sz="1600" b="1">
-                <a:solidFill>
-                  <a:srgbClr val="FFFFFF"/>
-                </a:solidFill>
-                <a:latin typeface="Yu Gothic UI"/>
-              </a:rPr>
-              <a:t>6</a:t>
+            <a:pPr algn="l">
+              <a:lnSpc>
+                <a:spcPct val="115000"/>
+              </a:lnSpc>
+            </a:pPr>
+            <a:r>
+              <a:rPr sz="1700" b="1">
+                <a:solidFill>
+                  <a:srgbClr val="14181D"/>
+                </a:solidFill>
+                <a:latin typeface="Yu Gothic UI"/>
+              </a:rPr>
+              <a:t>決断に翻訳</a:t>
             </a:r>
           </a:p>
         </p:txBody>
@@ -12073,45 +9860,6 @@
       <p:sp>
         <p:nvSpPr>
           <p:cNvPr id="28" name="TextBox 27"/>
-          <p:cNvSpPr txBox="1"/>
-          <p:nvPr/>
-        </p:nvSpPr>
-        <p:spPr>
-          <a:xfrm>
-            <a:off x="1371600" y="5486400"/>
-            <a:ext cx="2926080" cy="548640"/>
-          </a:xfrm>
-          <a:prstGeom prst="rect">
-            <a:avLst/>
-          </a:prstGeom>
-          <a:noFill/>
-        </p:spPr>
-        <p:txBody>
-          <a:bodyPr wrap="square" anchor="ctr" lIns="45720" rIns="45720" tIns="18288" bIns="18288">
-            <a:spAutoFit/>
-          </a:bodyPr>
-          <a:lstStyle/>
-          <a:p>
-            <a:pPr algn="l">
-              <a:lnSpc>
-                <a:spcPct val="115000"/>
-              </a:lnSpc>
-            </a:pPr>
-            <a:r>
-              <a:rPr sz="1700" b="1">
-                <a:solidFill>
-                  <a:srgbClr val="14181D"/>
-                </a:solidFill>
-                <a:latin typeface="Yu Gothic UI"/>
-              </a:rPr>
-              <a:t>決断に翻訳</a:t>
-            </a:r>
-          </a:p>
-        </p:txBody>
-      </p:sp>
-      <p:sp>
-        <p:nvSpPr>
-          <p:cNvPr id="29" name="TextBox 28"/>
           <p:cNvSpPr txBox="1"/>
           <p:nvPr/>
         </p:nvSpPr>
@@ -12213,8 +9961,8 @@
         </p:nvSpPr>
         <p:spPr>
           <a:xfrm>
-            <a:off x="10972800" y="6400800"/>
-            <a:ext cx="548640" cy="274320"/>
+            <a:off x="731520" y="502920"/>
+            <a:ext cx="7315200" cy="365760"/>
           </a:xfrm>
           <a:prstGeom prst="rect">
             <a:avLst/>
@@ -12227,19 +9975,19 @@
           </a:bodyPr>
           <a:lstStyle/>
           <a:p>
-            <a:pPr algn="r">
-              <a:lnSpc>
-                <a:spcPct val="115000"/>
-              </a:lnSpc>
-            </a:pPr>
-            <a:r>
-              <a:rPr sz="1000" b="0">
-                <a:solidFill>
-                  <a:srgbClr val="5C6670"/>
-                </a:solidFill>
-                <a:latin typeface="Yu Gothic UI"/>
-              </a:rPr>
-              <a:t>8</a:t>
+            <a:pPr algn="l">
+              <a:lnSpc>
+                <a:spcPct val="115000"/>
+              </a:lnSpc>
+            </a:pPr>
+            <a:r>
+              <a:rPr sz="1300" b="1">
+                <a:solidFill>
+                  <a:srgbClr val="A4231C"/>
+                </a:solidFill>
+                <a:latin typeface="Yu Gothic UI"/>
+              </a:rPr>
+              <a:t>数字の根拠</a:t>
             </a:r>
           </a:p>
         </p:txBody>
@@ -12252,8 +10000,8 @@
         </p:nvSpPr>
         <p:spPr>
           <a:xfrm>
-            <a:off x="731520" y="502920"/>
-            <a:ext cx="7315200" cy="365760"/>
+            <a:off x="731520" y="868680"/>
+            <a:ext cx="10515600" cy="1280160"/>
           </a:xfrm>
           <a:prstGeom prst="rect">
             <a:avLst/>
@@ -12268,17 +10016,17 @@
           <a:p>
             <a:pPr algn="l">
               <a:lnSpc>
-                <a:spcPct val="115000"/>
-              </a:lnSpc>
-            </a:pPr>
-            <a:r>
-              <a:rPr sz="1300" b="1">
-                <a:solidFill>
-                  <a:srgbClr val="A4231C"/>
-                </a:solidFill>
-                <a:latin typeface="Yu Gothic UI"/>
-              </a:rPr>
-              <a:t>数字の根拠</a:t>
+                <a:spcPct val="105000"/>
+              </a:lnSpc>
+            </a:pPr>
+            <a:r>
+              <a:rPr sz="3400" b="1">
+                <a:solidFill>
+                  <a:srgbClr val="14181D"/>
+                </a:solidFill>
+                <a:latin typeface="Yu Gothic UI"/>
+              </a:rPr>
+              <a:t>再開までの時間は、既往研究の推定式から出している</a:t>
             </a:r>
           </a:p>
         </p:txBody>
@@ -12291,8 +10039,8 @@
         </p:nvSpPr>
         <p:spPr>
           <a:xfrm>
-            <a:off x="731520" y="868680"/>
-            <a:ext cx="10515600" cy="1280160"/>
+            <a:off x="731520" y="1874519"/>
+            <a:ext cx="6766560" cy="822960"/>
           </a:xfrm>
           <a:prstGeom prst="rect">
             <a:avLst/>
@@ -12307,17 +10055,33 @@
           <a:p>
             <a:pPr algn="l">
               <a:lnSpc>
-                <a:spcPct val="105000"/>
-              </a:lnSpc>
-            </a:pPr>
-            <a:r>
-              <a:rPr sz="3400" b="1">
+                <a:spcPct val="115000"/>
+              </a:lnSpc>
+            </a:pPr>
+            <a:r>
+              <a:rPr sz="1600" b="1">
                 <a:solidFill>
                   <a:srgbClr val="14181D"/>
                 </a:solidFill>
                 <a:latin typeface="Yu Gothic UI"/>
               </a:rPr>
-              <a:t>再開までの時間は、既往研究の推定式から出している</a:t>
+              <a:t>高浜勉・翠川三郎「地震時の鉄道運休時間の推定方法」</a:t>
+            </a:r>
+          </a:p>
+          <a:p>
+            <a:pPr algn="l">
+              <a:lnSpc>
+                <a:spcPct val="115000"/>
+              </a:lnSpc>
+            </a:pPr>
+            <a:r>
+              <a:rPr sz="1200" b="0">
+                <a:solidFill>
+                  <a:srgbClr val="5C6670"/>
+                </a:solidFill>
+                <a:latin typeface="Yu Gothic UI"/>
+              </a:rPr>
+              <a:t>日本地震工学会論文集 第 11 巻第 2 号 (2011) 表 1・図 1。首都圏の鉄道事業者 24 社への聞き取り (2005 年千葉県北西部地震) が元</a:t>
             </a:r>
           </a:p>
         </p:txBody>
@@ -12330,8 +10094,8 @@
         </p:nvSpPr>
         <p:spPr>
           <a:xfrm>
-            <a:off x="731520" y="1874519"/>
-            <a:ext cx="6766560" cy="822960"/>
+            <a:off x="731520" y="2788920"/>
+            <a:ext cx="1645920" cy="320040"/>
           </a:xfrm>
           <a:prstGeom prst="rect">
             <a:avLst/>
@@ -12350,29 +10114,13 @@
               </a:lnSpc>
             </a:pPr>
             <a:r>
-              <a:rPr sz="1600" b="1">
-                <a:solidFill>
-                  <a:srgbClr val="14181D"/>
-                </a:solidFill>
-                <a:latin typeface="Yu Gothic UI"/>
-              </a:rPr>
-              <a:t>高浜勉・翠川三郎「地震時の鉄道運休時間の推定方法」</a:t>
-            </a:r>
-          </a:p>
-          <a:p>
-            <a:pPr algn="l">
-              <a:lnSpc>
-                <a:spcPct val="115000"/>
-              </a:lnSpc>
-            </a:pPr>
-            <a:r>
-              <a:rPr sz="1200" b="0">
+              <a:rPr sz="1100" b="1">
                 <a:solidFill>
                   <a:srgbClr val="5C6670"/>
                 </a:solidFill>
                 <a:latin typeface="Yu Gothic UI"/>
               </a:rPr>
-              <a:t>日本地震工学会論文集 第 11 巻第 2 号 (2011) 表 1・図 1。首都圏の鉄道事業者 24 社への聞き取り (2005 年千葉県北西部地震) が元</a:t>
+              <a:t>基準値</a:t>
             </a:r>
           </a:p>
         </p:txBody>
@@ -12385,8 +10133,8 @@
         </p:nvSpPr>
         <p:spPr>
           <a:xfrm>
-            <a:off x="731520" y="2788920"/>
-            <a:ext cx="1645920" cy="320040"/>
+            <a:off x="2377440" y="2788920"/>
+            <a:ext cx="2377440" cy="320040"/>
           </a:xfrm>
           <a:prstGeom prst="rect">
             <a:avLst/>
@@ -12411,7 +10159,7 @@
                 </a:solidFill>
                 <a:latin typeface="Yu Gothic UI"/>
               </a:rPr>
-              <a:t>基準値</a:t>
+              <a:t>点検</a:t>
             </a:r>
           </a:p>
         </p:txBody>
@@ -12424,8 +10172,8 @@
         </p:nvSpPr>
         <p:spPr>
           <a:xfrm>
-            <a:off x="2377440" y="2788920"/>
-            <a:ext cx="2377440" cy="320040"/>
+            <a:off x="4754880" y="2788920"/>
+            <a:ext cx="2743200" cy="320040"/>
           </a:xfrm>
           <a:prstGeom prst="rect">
             <a:avLst/>
@@ -12450,45 +10198,6 @@
                 </a:solidFill>
                 <a:latin typeface="Yu Gothic UI"/>
               </a:rPr>
-              <a:t>点検</a:t>
-            </a:r>
-          </a:p>
-        </p:txBody>
-      </p:sp>
-      <p:sp>
-        <p:nvSpPr>
-          <p:cNvPr id="9" name="TextBox 8"/>
-          <p:cNvSpPr txBox="1"/>
-          <p:nvPr/>
-        </p:nvSpPr>
-        <p:spPr>
-          <a:xfrm>
-            <a:off x="4754880" y="2788920"/>
-            <a:ext cx="2743200" cy="320040"/>
-          </a:xfrm>
-          <a:prstGeom prst="rect">
-            <a:avLst/>
-          </a:prstGeom>
-          <a:noFill/>
-        </p:spPr>
-        <p:txBody>
-          <a:bodyPr wrap="square" anchor="t" lIns="45720" rIns="45720" tIns="18288" bIns="18288">
-            <a:spAutoFit/>
-          </a:bodyPr>
-          <a:lstStyle/>
-          <a:p>
-            <a:pPr algn="l">
-              <a:lnSpc>
-                <a:spcPct val="115000"/>
-              </a:lnSpc>
-            </a:pPr>
-            <a:r>
-              <a:rPr sz="1100" b="1">
-                <a:solidFill>
-                  <a:srgbClr val="5C6670"/>
-                </a:solidFill>
-                <a:latin typeface="Yu Gothic UI"/>
-              </a:rPr>
               <a:t>再開まで</a:t>
             </a:r>
           </a:p>
@@ -12496,7 +10205,7 @@
       </p:sp>
       <p:sp>
         <p:nvSpPr>
-          <p:cNvPr id="10" name="Rounded Rectangle 9"/>
+          <p:cNvPr id="9" name="Rounded Rectangle 8"/>
           <p:cNvSpPr/>
           <p:nvPr/>
         </p:nvSpPr>
@@ -12542,14 +10251,53 @@
       </p:sp>
       <p:sp>
         <p:nvSpPr>
+          <p:cNvPr id="10" name="TextBox 9"/>
+          <p:cNvSpPr txBox="1"/>
+          <p:nvPr/>
+        </p:nvSpPr>
+        <p:spPr>
+          <a:xfrm>
+            <a:off x="868680" y="3154680"/>
+            <a:ext cx="1554480" cy="457200"/>
+          </a:xfrm>
+          <a:prstGeom prst="rect">
+            <a:avLst/>
+          </a:prstGeom>
+          <a:noFill/>
+        </p:spPr>
+        <p:txBody>
+          <a:bodyPr wrap="square" anchor="ctr" lIns="45720" rIns="45720" tIns="18288" bIns="18288">
+            <a:spAutoFit/>
+          </a:bodyPr>
+          <a:lstStyle/>
+          <a:p>
+            <a:pPr algn="l">
+              <a:lnSpc>
+                <a:spcPct val="115000"/>
+              </a:lnSpc>
+            </a:pPr>
+            <a:r>
+              <a:rPr sz="1400" b="1">
+                <a:solidFill>
+                  <a:srgbClr val="14181D"/>
+                </a:solidFill>
+                <a:latin typeface="Yu Gothic UI"/>
+              </a:rPr>
+              <a:t>震度 4</a:t>
+            </a:r>
+          </a:p>
+        </p:txBody>
+      </p:sp>
+      <p:sp>
+        <p:nvSpPr>
           <p:cNvPr id="11" name="TextBox 10"/>
           <p:cNvSpPr txBox="1"/>
           <p:nvPr/>
         </p:nvSpPr>
         <p:spPr>
           <a:xfrm>
-            <a:off x="868680" y="3154680"/>
-            <a:ext cx="1554480" cy="457200"/>
+            <a:off x="2377440" y="3154680"/>
+            <a:ext cx="2377440" cy="457200"/>
           </a:xfrm>
           <a:prstGeom prst="rect">
             <a:avLst/>
@@ -12568,13 +10316,13 @@
               </a:lnSpc>
             </a:pPr>
             <a:r>
-              <a:rPr sz="1400" b="1">
+              <a:rPr sz="1250" b="0">
                 <a:solidFill>
                   <a:srgbClr val="14181D"/>
                 </a:solidFill>
                 <a:latin typeface="Yu Gothic UI"/>
               </a:rPr>
-              <a:t>震度 4</a:t>
+              <a:t>注意運転点検・重要箇所の点検</a:t>
             </a:r>
           </a:p>
         </p:txBody>
@@ -12587,8 +10335,8 @@
         </p:nvSpPr>
         <p:spPr>
           <a:xfrm>
-            <a:off x="2377440" y="3154680"/>
-            <a:ext cx="2377440" cy="457200"/>
+            <a:off x="4754880" y="3154680"/>
+            <a:ext cx="2743200" cy="457200"/>
           </a:xfrm>
           <a:prstGeom prst="rect">
             <a:avLst/>
@@ -12607,51 +10355,12 @@
               </a:lnSpc>
             </a:pPr>
             <a:r>
-              <a:rPr sz="1250" b="0">
+              <a:rPr sz="1250" b="1">
                 <a:solidFill>
                   <a:srgbClr val="14181D"/>
                 </a:solidFill>
                 <a:latin typeface="Yu Gothic UI"/>
               </a:rPr>
-              <a:t>注意運転点検・重要箇所の点検</a:t>
-            </a:r>
-          </a:p>
-        </p:txBody>
-      </p:sp>
-      <p:sp>
-        <p:nvSpPr>
-          <p:cNvPr id="13" name="TextBox 12"/>
-          <p:cNvSpPr txBox="1"/>
-          <p:nvPr/>
-        </p:nvSpPr>
-        <p:spPr>
-          <a:xfrm>
-            <a:off x="4754880" y="3154680"/>
-            <a:ext cx="2743200" cy="457200"/>
-          </a:xfrm>
-          <a:prstGeom prst="rect">
-            <a:avLst/>
-          </a:prstGeom>
-          <a:noFill/>
-        </p:spPr>
-        <p:txBody>
-          <a:bodyPr wrap="square" anchor="ctr" lIns="45720" rIns="45720" tIns="18288" bIns="18288">
-            <a:spAutoFit/>
-          </a:bodyPr>
-          <a:lstStyle/>
-          <a:p>
-            <a:pPr algn="l">
-              <a:lnSpc>
-                <a:spcPct val="115000"/>
-              </a:lnSpc>
-            </a:pPr>
-            <a:r>
-              <a:rPr sz="1250" b="1">
-                <a:solidFill>
-                  <a:srgbClr val="14181D"/>
-                </a:solidFill>
-                <a:latin typeface="Yu Gothic UI"/>
-              </a:rPr>
               <a:t>30 分 + 再開まで 5 分</a:t>
             </a:r>
           </a:p>
@@ -12659,7 +10368,7 @@
       </p:sp>
       <p:sp>
         <p:nvSpPr>
-          <p:cNvPr id="14" name="Rounded Rectangle 13"/>
+          <p:cNvPr id="13" name="Rounded Rectangle 12"/>
           <p:cNvSpPr/>
           <p:nvPr/>
         </p:nvSpPr>
@@ -12705,14 +10414,53 @@
       </p:sp>
       <p:sp>
         <p:nvSpPr>
+          <p:cNvPr id="14" name="TextBox 13"/>
+          <p:cNvSpPr txBox="1"/>
+          <p:nvPr/>
+        </p:nvSpPr>
+        <p:spPr>
+          <a:xfrm>
+            <a:off x="868680" y="3739896"/>
+            <a:ext cx="1554480" cy="457200"/>
+          </a:xfrm>
+          <a:prstGeom prst="rect">
+            <a:avLst/>
+          </a:prstGeom>
+          <a:noFill/>
+        </p:spPr>
+        <p:txBody>
+          <a:bodyPr wrap="square" anchor="ctr" lIns="45720" rIns="45720" tIns="18288" bIns="18288">
+            <a:spAutoFit/>
+          </a:bodyPr>
+          <a:lstStyle/>
+          <a:p>
+            <a:pPr algn="l">
+              <a:lnSpc>
+                <a:spcPct val="115000"/>
+              </a:lnSpc>
+            </a:pPr>
+            <a:r>
+              <a:rPr sz="1400" b="1">
+                <a:solidFill>
+                  <a:srgbClr val="A4231C"/>
+                </a:solidFill>
+                <a:latin typeface="Yu Gothic UI"/>
+              </a:rPr>
+              <a:t>震度 5 弱・5 強</a:t>
+            </a:r>
+          </a:p>
+        </p:txBody>
+      </p:sp>
+      <p:sp>
+        <p:nvSpPr>
           <p:cNvPr id="15" name="TextBox 14"/>
           <p:cNvSpPr txBox="1"/>
           <p:nvPr/>
         </p:nvSpPr>
         <p:spPr>
           <a:xfrm>
-            <a:off x="868680" y="3739896"/>
-            <a:ext cx="1554480" cy="457200"/>
+            <a:off x="2377440" y="3739896"/>
+            <a:ext cx="2377440" cy="457200"/>
           </a:xfrm>
           <a:prstGeom prst="rect">
             <a:avLst/>
@@ -12731,13 +10479,13 @@
               </a:lnSpc>
             </a:pPr>
             <a:r>
-              <a:rPr sz="1400" b="1">
-                <a:solidFill>
-                  <a:srgbClr val="A4231C"/>
-                </a:solidFill>
-                <a:latin typeface="Yu Gothic UI"/>
-              </a:rPr>
-              <a:t>震度 5 弱・5 強</a:t>
+              <a:rPr sz="1250" b="0">
+                <a:solidFill>
+                  <a:srgbClr val="14181D"/>
+                </a:solidFill>
+                <a:latin typeface="Yu Gothic UI"/>
+              </a:rPr>
+              <a:t>徒歩点検</a:t>
             </a:r>
           </a:p>
         </p:txBody>
@@ -12750,8 +10498,8 @@
         </p:nvSpPr>
         <p:spPr>
           <a:xfrm>
-            <a:off x="2377440" y="3739896"/>
-            <a:ext cx="2377440" cy="457200"/>
+            <a:off x="4754880" y="3739896"/>
+            <a:ext cx="2743200" cy="457200"/>
           </a:xfrm>
           <a:prstGeom prst="rect">
             <a:avLst/>
@@ -12770,45 +10518,6 @@
               </a:lnSpc>
             </a:pPr>
             <a:r>
-              <a:rPr sz="1250" b="0">
-                <a:solidFill>
-                  <a:srgbClr val="14181D"/>
-                </a:solidFill>
-                <a:latin typeface="Yu Gothic UI"/>
-              </a:rPr>
-              <a:t>徒歩点検</a:t>
-            </a:r>
-          </a:p>
-        </p:txBody>
-      </p:sp>
-      <p:sp>
-        <p:nvSpPr>
-          <p:cNvPr id="17" name="TextBox 16"/>
-          <p:cNvSpPr txBox="1"/>
-          <p:nvPr/>
-        </p:nvSpPr>
-        <p:spPr>
-          <a:xfrm>
-            <a:off x="4754880" y="3739896"/>
-            <a:ext cx="2743200" cy="457200"/>
-          </a:xfrm>
-          <a:prstGeom prst="rect">
-            <a:avLst/>
-          </a:prstGeom>
-          <a:noFill/>
-        </p:spPr>
-        <p:txBody>
-          <a:bodyPr wrap="square" anchor="ctr" lIns="45720" rIns="45720" tIns="18288" bIns="18288">
-            <a:spAutoFit/>
-          </a:bodyPr>
-          <a:lstStyle/>
-          <a:p>
-            <a:pPr algn="l">
-              <a:lnSpc>
-                <a:spcPct val="115000"/>
-              </a:lnSpc>
-            </a:pPr>
-            <a:r>
               <a:rPr sz="1250" b="1">
                 <a:solidFill>
                   <a:srgbClr val="A4231C"/>
@@ -12822,7 +10531,7 @@
       </p:sp>
       <p:sp>
         <p:nvSpPr>
-          <p:cNvPr id="18" name="Rounded Rectangle 17"/>
+          <p:cNvPr id="17" name="Rounded Rectangle 16"/>
           <p:cNvSpPr/>
           <p:nvPr/>
         </p:nvSpPr>
@@ -12868,14 +10577,53 @@
       </p:sp>
       <p:sp>
         <p:nvSpPr>
+          <p:cNvPr id="18" name="TextBox 17"/>
+          <p:cNvSpPr txBox="1"/>
+          <p:nvPr/>
+        </p:nvSpPr>
+        <p:spPr>
+          <a:xfrm>
+            <a:off x="868680" y="4325112"/>
+            <a:ext cx="1554480" cy="457200"/>
+          </a:xfrm>
+          <a:prstGeom prst="rect">
+            <a:avLst/>
+          </a:prstGeom>
+          <a:noFill/>
+        </p:spPr>
+        <p:txBody>
+          <a:bodyPr wrap="square" anchor="ctr" lIns="45720" rIns="45720" tIns="18288" bIns="18288">
+            <a:spAutoFit/>
+          </a:bodyPr>
+          <a:lstStyle/>
+          <a:p>
+            <a:pPr algn="l">
+              <a:lnSpc>
+                <a:spcPct val="115000"/>
+              </a:lnSpc>
+            </a:pPr>
+            <a:r>
+              <a:rPr sz="1400" b="1">
+                <a:solidFill>
+                  <a:srgbClr val="5A1016"/>
+                </a:solidFill>
+                <a:latin typeface="Yu Gothic UI"/>
+              </a:rPr>
+              <a:t>震度 6 弱以上</a:t>
+            </a:r>
+          </a:p>
+        </p:txBody>
+      </p:sp>
+      <p:sp>
+        <p:nvSpPr>
           <p:cNvPr id="19" name="TextBox 18"/>
           <p:cNvSpPr txBox="1"/>
           <p:nvPr/>
         </p:nvSpPr>
         <p:spPr>
           <a:xfrm>
-            <a:off x="868680" y="4325112"/>
-            <a:ext cx="1554480" cy="457200"/>
+            <a:off x="2377440" y="4325112"/>
+            <a:ext cx="2377440" cy="457200"/>
           </a:xfrm>
           <a:prstGeom prst="rect">
             <a:avLst/>
@@ -12894,13 +10642,13 @@
               </a:lnSpc>
             </a:pPr>
             <a:r>
-              <a:rPr sz="1400" b="1">
-                <a:solidFill>
-                  <a:srgbClr val="5A1016"/>
-                </a:solidFill>
-                <a:latin typeface="Yu Gothic UI"/>
-              </a:rPr>
-              <a:t>震度 6 弱以上</a:t>
+              <a:rPr sz="1250" b="0">
+                <a:solidFill>
+                  <a:srgbClr val="14181D"/>
+                </a:solidFill>
+                <a:latin typeface="Yu Gothic UI"/>
+              </a:rPr>
+              <a:t>被害が出る領域。点検だけでは終わらない</a:t>
             </a:r>
           </a:p>
         </p:txBody>
@@ -12913,8 +10661,8 @@
         </p:nvSpPr>
         <p:spPr>
           <a:xfrm>
-            <a:off x="2377440" y="4325112"/>
-            <a:ext cx="2377440" cy="457200"/>
+            <a:off x="4754880" y="4325112"/>
+            <a:ext cx="2743200" cy="457200"/>
           </a:xfrm>
           <a:prstGeom prst="rect">
             <a:avLst/>
@@ -12933,13 +10681,13 @@
               </a:lnSpc>
             </a:pPr>
             <a:r>
-              <a:rPr sz="1250" b="0">
-                <a:solidFill>
-                  <a:srgbClr val="14181D"/>
-                </a:solidFill>
-                <a:latin typeface="Yu Gothic UI"/>
-              </a:rPr>
-              <a:t>被害が出る領域。点検だけでは終わらない</a:t>
+              <a:rPr sz="1250" b="1">
+                <a:solidFill>
+                  <a:srgbClr val="5A1016"/>
+                </a:solidFill>
+                <a:latin typeface="Yu Gothic UI"/>
+              </a:rPr>
+              <a:t>時間を出さない (日単位になりうる)</a:t>
             </a:r>
           </a:p>
         </p:txBody>
@@ -12947,45 +10695,6 @@
       <p:sp>
         <p:nvSpPr>
           <p:cNvPr id="21" name="TextBox 20"/>
-          <p:cNvSpPr txBox="1"/>
-          <p:nvPr/>
-        </p:nvSpPr>
-        <p:spPr>
-          <a:xfrm>
-            <a:off x="4754880" y="4325112"/>
-            <a:ext cx="2743200" cy="457200"/>
-          </a:xfrm>
-          <a:prstGeom prst="rect">
-            <a:avLst/>
-          </a:prstGeom>
-          <a:noFill/>
-        </p:spPr>
-        <p:txBody>
-          <a:bodyPr wrap="square" anchor="ctr" lIns="45720" rIns="45720" tIns="18288" bIns="18288">
-            <a:spAutoFit/>
-          </a:bodyPr>
-          <a:lstStyle/>
-          <a:p>
-            <a:pPr algn="l">
-              <a:lnSpc>
-                <a:spcPct val="115000"/>
-              </a:lnSpc>
-            </a:pPr>
-            <a:r>
-              <a:rPr sz="1250" b="1">
-                <a:solidFill>
-                  <a:srgbClr val="5A1016"/>
-                </a:solidFill>
-                <a:latin typeface="Yu Gothic UI"/>
-              </a:rPr>
-              <a:t>時間を出さない (日単位になりうる)</a:t>
-            </a:r>
-          </a:p>
-        </p:txBody>
-      </p:sp>
-      <p:sp>
-        <p:nvSpPr>
-          <p:cNvPr id="22" name="TextBox 21"/>
           <p:cNvSpPr txBox="1"/>
           <p:nvPr/>
         </p:nvSpPr>
@@ -13062,7 +10771,7 @@
       </p:sp>
       <p:sp>
         <p:nvSpPr>
-          <p:cNvPr id="23" name="Rounded Rectangle 22"/>
+          <p:cNvPr id="22" name="Rounded Rectangle 21"/>
           <p:cNvSpPr/>
           <p:nvPr/>
         </p:nvSpPr>
@@ -13108,7 +10817,7 @@
       </p:sp>
       <p:sp>
         <p:nvSpPr>
-          <p:cNvPr id="24" name="TextBox 23"/>
+          <p:cNvPr id="23" name="TextBox 22"/>
           <p:cNvSpPr txBox="1"/>
           <p:nvPr/>
         </p:nvSpPr>
@@ -13328,8 +11037,8 @@
         </p:nvSpPr>
         <p:spPr>
           <a:xfrm>
-            <a:off x="10972800" y="6400800"/>
-            <a:ext cx="548640" cy="274320"/>
+            <a:off x="731520" y="502920"/>
+            <a:ext cx="7315200" cy="365760"/>
           </a:xfrm>
           <a:prstGeom prst="rect">
             <a:avLst/>
@@ -13342,19 +11051,19 @@
           </a:bodyPr>
           <a:lstStyle/>
           <a:p>
-            <a:pPr algn="r">
-              <a:lnSpc>
-                <a:spcPct val="115000"/>
-              </a:lnSpc>
-            </a:pPr>
-            <a:r>
-              <a:rPr sz="1000" b="0">
-                <a:solidFill>
-                  <a:srgbClr val="5C6670"/>
-                </a:solidFill>
-                <a:latin typeface="Yu Gothic UI"/>
-              </a:rPr>
-              <a:t>9</a:t>
+            <a:pPr algn="l">
+              <a:lnSpc>
+                <a:spcPct val="115000"/>
+              </a:lnSpc>
+            </a:pPr>
+            <a:r>
+              <a:rPr sz="1300" b="1">
+                <a:solidFill>
+                  <a:srgbClr val="A4231C"/>
+                </a:solidFill>
+                <a:latin typeface="Yu Gothic UI"/>
+              </a:rPr>
+              <a:t>オープンデータの使い方</a:t>
             </a:r>
           </a:p>
         </p:txBody>
@@ -13367,8 +11076,8 @@
         </p:nvSpPr>
         <p:spPr>
           <a:xfrm>
-            <a:off x="731520" y="502920"/>
-            <a:ext cx="7315200" cy="365760"/>
+            <a:off x="731520" y="868680"/>
+            <a:ext cx="10515600" cy="1280160"/>
           </a:xfrm>
           <a:prstGeom prst="rect">
             <a:avLst/>
@@ -13383,45 +11092,6 @@
           <a:p>
             <a:pPr algn="l">
               <a:lnSpc>
-                <a:spcPct val="115000"/>
-              </a:lnSpc>
-            </a:pPr>
-            <a:r>
-              <a:rPr sz="1300" b="1">
-                <a:solidFill>
-                  <a:srgbClr val="A4231C"/>
-                </a:solidFill>
-                <a:latin typeface="Yu Gothic UI"/>
-              </a:rPr>
-              <a:t>オープンデータの使い方</a:t>
-            </a:r>
-          </a:p>
-        </p:txBody>
-      </p:sp>
-      <p:sp>
-        <p:nvSpPr>
-          <p:cNvPr id="5" name="TextBox 4"/>
-          <p:cNvSpPr txBox="1"/>
-          <p:nvPr/>
-        </p:nvSpPr>
-        <p:spPr>
-          <a:xfrm>
-            <a:off x="731520" y="868680"/>
-            <a:ext cx="10515600" cy="1280160"/>
-          </a:xfrm>
-          <a:prstGeom prst="rect">
-            <a:avLst/>
-          </a:prstGeom>
-          <a:noFill/>
-        </p:spPr>
-        <p:txBody>
-          <a:bodyPr wrap="square" anchor="t" lIns="45720" rIns="45720" tIns="18288" bIns="18288">
-            <a:spAutoFit/>
-          </a:bodyPr>
-          <a:lstStyle/>
-          <a:p>
-            <a:pPr algn="l">
-              <a:lnSpc>
                 <a:spcPct val="105000"/>
               </a:lnSpc>
             </a:pPr>
@@ -13439,7 +11109,7 @@
       </p:sp>
       <p:sp>
         <p:nvSpPr>
-          <p:cNvPr id="6" name="Rounded Rectangle 5"/>
+          <p:cNvPr id="5" name="Rounded Rectangle 4"/>
           <p:cNvSpPr/>
           <p:nvPr/>
         </p:nvSpPr>
@@ -13485,14 +11155,53 @@
       </p:sp>
       <p:sp>
         <p:nvSpPr>
+          <p:cNvPr id="6" name="TextBox 5"/>
+          <p:cNvSpPr txBox="1"/>
+          <p:nvPr/>
+        </p:nvSpPr>
+        <p:spPr>
+          <a:xfrm>
+            <a:off x="868680" y="2011680"/>
+            <a:ext cx="3931920" cy="457200"/>
+          </a:xfrm>
+          <a:prstGeom prst="rect">
+            <a:avLst/>
+          </a:prstGeom>
+          <a:noFill/>
+        </p:spPr>
+        <p:txBody>
+          <a:bodyPr wrap="square" anchor="ctr" lIns="45720" rIns="45720" tIns="18288" bIns="18288">
+            <a:spAutoFit/>
+          </a:bodyPr>
+          <a:lstStyle/>
+          <a:p>
+            <a:pPr algn="l">
+              <a:lnSpc>
+                <a:spcPct val="115000"/>
+              </a:lnSpc>
+            </a:pPr>
+            <a:r>
+              <a:rPr sz="1300" b="1">
+                <a:solidFill>
+                  <a:srgbClr val="A4231C"/>
+                </a:solidFill>
+                <a:latin typeface="Yu Gothic UI"/>
+              </a:rPr>
+              <a:t>ODPT  odpt:Railway / odpt:Station</a:t>
+            </a:r>
+          </a:p>
+        </p:txBody>
+      </p:sp>
+      <p:sp>
+        <p:nvSpPr>
           <p:cNvPr id="7" name="TextBox 6"/>
           <p:cNvSpPr txBox="1"/>
           <p:nvPr/>
         </p:nvSpPr>
         <p:spPr>
           <a:xfrm>
-            <a:off x="868680" y="2011680"/>
-            <a:ext cx="3931920" cy="457200"/>
+            <a:off x="4846320" y="2011680"/>
+            <a:ext cx="2377440" cy="457200"/>
           </a:xfrm>
           <a:prstGeom prst="rect">
             <a:avLst/>
@@ -13511,13 +11220,13 @@
               </a:lnSpc>
             </a:pPr>
             <a:r>
-              <a:rPr sz="1300" b="1">
+              <a:rPr sz="1300" b="0">
                 <a:solidFill>
                   <a:srgbClr val="A4231C"/>
                 </a:solidFill>
                 <a:latin typeface="Yu Gothic UI"/>
               </a:rPr>
-              <a:t>ODPT  odpt:Railway / odpt:Station</a:t>
+              <a:t>線路名称 → 運転系統の対応表</a:t>
             </a:r>
           </a:p>
         </p:txBody>
@@ -13530,8 +11239,8 @@
         </p:nvSpPr>
         <p:spPr>
           <a:xfrm>
-            <a:off x="4846320" y="2011680"/>
-            <a:ext cx="2377440" cy="457200"/>
+            <a:off x="7223760" y="2011680"/>
+            <a:ext cx="4114800" cy="457200"/>
           </a:xfrm>
           <a:prstGeom prst="rect">
             <a:avLst/>
@@ -13550,45 +11259,6 @@
               </a:lnSpc>
             </a:pPr>
             <a:r>
-              <a:rPr sz="1300" b="0">
-                <a:solidFill>
-                  <a:srgbClr val="A4231C"/>
-                </a:solidFill>
-                <a:latin typeface="Yu Gothic UI"/>
-              </a:rPr>
-              <a:t>線路名称 → 運転系統の対応表</a:t>
-            </a:r>
-          </a:p>
-        </p:txBody>
-      </p:sp>
-      <p:sp>
-        <p:nvSpPr>
-          <p:cNvPr id="9" name="TextBox 8"/>
-          <p:cNvSpPr txBox="1"/>
-          <p:nvPr/>
-        </p:nvSpPr>
-        <p:spPr>
-          <a:xfrm>
-            <a:off x="7223760" y="2011680"/>
-            <a:ext cx="4114800" cy="457200"/>
-          </a:xfrm>
-          <a:prstGeom prst="rect">
-            <a:avLst/>
-          </a:prstGeom>
-          <a:noFill/>
-        </p:spPr>
-        <p:txBody>
-          <a:bodyPr wrap="square" anchor="ctr" lIns="45720" rIns="45720" tIns="18288" bIns="18288">
-            <a:spAutoFit/>
-          </a:bodyPr>
-          <a:lstStyle/>
-          <a:p>
-            <a:pPr algn="l">
-              <a:lnSpc>
-                <a:spcPct val="115000"/>
-              </a:lnSpc>
-            </a:pPr>
-            <a:r>
               <a:rPr sz="1150" b="0">
                 <a:solidFill>
                   <a:srgbClr val="5C6670"/>
@@ -13602,7 +11272,7 @@
       </p:sp>
       <p:sp>
         <p:nvSpPr>
-          <p:cNvPr id="10" name="Rounded Rectangle 9"/>
+          <p:cNvPr id="9" name="Rounded Rectangle 8"/>
           <p:cNvSpPr/>
           <p:nvPr/>
         </p:nvSpPr>
@@ -13648,14 +11318,53 @@
       </p:sp>
       <p:sp>
         <p:nvSpPr>
+          <p:cNvPr id="10" name="TextBox 9"/>
+          <p:cNvSpPr txBox="1"/>
+          <p:nvPr/>
+        </p:nvSpPr>
+        <p:spPr>
+          <a:xfrm>
+            <a:off x="868680" y="2615184"/>
+            <a:ext cx="3931920" cy="457200"/>
+          </a:xfrm>
+          <a:prstGeom prst="rect">
+            <a:avLst/>
+          </a:prstGeom>
+          <a:noFill/>
+        </p:spPr>
+        <p:txBody>
+          <a:bodyPr wrap="square" anchor="ctr" lIns="45720" rIns="45720" tIns="18288" bIns="18288">
+            <a:spAutoFit/>
+          </a:bodyPr>
+          <a:lstStyle/>
+          <a:p>
+            <a:pPr algn="l">
+              <a:lnSpc>
+                <a:spcPct val="115000"/>
+              </a:lnSpc>
+            </a:pPr>
+            <a:r>
+              <a:rPr sz="1300" b="1">
+                <a:solidFill>
+                  <a:srgbClr val="A4231C"/>
+                </a:solidFill>
+                <a:latin typeface="Yu Gothic UI"/>
+              </a:rPr>
+              <a:t>ODPT  odpt:TrainInformation</a:t>
+            </a:r>
+          </a:p>
+        </p:txBody>
+      </p:sp>
+      <p:sp>
+        <p:nvSpPr>
           <p:cNvPr id="11" name="TextBox 10"/>
           <p:cNvSpPr txBox="1"/>
           <p:nvPr/>
         </p:nvSpPr>
         <p:spPr>
           <a:xfrm>
-            <a:off x="868680" y="2615184"/>
-            <a:ext cx="3931920" cy="457200"/>
+            <a:off x="4846320" y="2615184"/>
+            <a:ext cx="2377440" cy="457200"/>
           </a:xfrm>
           <a:prstGeom prst="rect">
             <a:avLst/>
@@ -13674,13 +11383,13 @@
               </a:lnSpc>
             </a:pPr>
             <a:r>
-              <a:rPr sz="1300" b="1">
+              <a:rPr sz="1300" b="0">
                 <a:solidFill>
                   <a:srgbClr val="A4231C"/>
                 </a:solidFill>
                 <a:latin typeface="Yu Gothic UI"/>
               </a:rPr>
-              <a:t>ODPT  odpt:TrainInformation</a:t>
+              <a:t>推定を終わらせる</a:t>
             </a:r>
           </a:p>
         </p:txBody>
@@ -13693,8 +11402,8 @@
         </p:nvSpPr>
         <p:spPr>
           <a:xfrm>
-            <a:off x="4846320" y="2615184"/>
-            <a:ext cx="2377440" cy="457200"/>
+            <a:off x="7223760" y="2615184"/>
+            <a:ext cx="4114800" cy="457200"/>
           </a:xfrm>
           <a:prstGeom prst="rect">
             <a:avLst/>
@@ -13713,45 +11422,6 @@
               </a:lnSpc>
             </a:pPr>
             <a:r>
-              <a:rPr sz="1300" b="0">
-                <a:solidFill>
-                  <a:srgbClr val="A4231C"/>
-                </a:solidFill>
-                <a:latin typeface="Yu Gothic UI"/>
-              </a:rPr>
-              <a:t>推定を終わらせる</a:t>
-            </a:r>
-          </a:p>
-        </p:txBody>
-      </p:sp>
-      <p:sp>
-        <p:nvSpPr>
-          <p:cNvPr id="13" name="TextBox 12"/>
-          <p:cNvSpPr txBox="1"/>
-          <p:nvPr/>
-        </p:nvSpPr>
-        <p:spPr>
-          <a:xfrm>
-            <a:off x="7223760" y="2615184"/>
-            <a:ext cx="4114800" cy="457200"/>
-          </a:xfrm>
-          <a:prstGeom prst="rect">
-            <a:avLst/>
-          </a:prstGeom>
-          <a:noFill/>
-        </p:spPr>
-        <p:txBody>
-          <a:bodyPr wrap="square" anchor="ctr" lIns="45720" rIns="45720" tIns="18288" bIns="18288">
-            <a:spAutoFit/>
-          </a:bodyPr>
-          <a:lstStyle/>
-          <a:p>
-            <a:pPr algn="l">
-              <a:lnSpc>
-                <a:spcPct val="115000"/>
-              </a:lnSpc>
-            </a:pPr>
-            <a:r>
               <a:rPr sz="1150" b="0">
                 <a:solidFill>
                   <a:srgbClr val="5C6670"/>
@@ -13765,7 +11435,7 @@
       </p:sp>
       <p:sp>
         <p:nvSpPr>
-          <p:cNvPr id="14" name="Rounded Rectangle 13"/>
+          <p:cNvPr id="13" name="Rounded Rectangle 12"/>
           <p:cNvSpPr/>
           <p:nvPr/>
         </p:nvSpPr>
@@ -13811,14 +11481,53 @@
       </p:sp>
       <p:sp>
         <p:nvSpPr>
+          <p:cNvPr id="14" name="TextBox 13"/>
+          <p:cNvSpPr txBox="1"/>
+          <p:nvPr/>
+        </p:nvSpPr>
+        <p:spPr>
+          <a:xfrm>
+            <a:off x="868680" y="3218688"/>
+            <a:ext cx="3931920" cy="457200"/>
+          </a:xfrm>
+          <a:prstGeom prst="rect">
+            <a:avLst/>
+          </a:prstGeom>
+          <a:noFill/>
+        </p:spPr>
+        <p:txBody>
+          <a:bodyPr wrap="square" anchor="ctr" lIns="45720" rIns="45720" tIns="18288" bIns="18288">
+            <a:spAutoFit/>
+          </a:bodyPr>
+          <a:lstStyle/>
+          <a:p>
+            <a:pPr algn="l">
+              <a:lnSpc>
+                <a:spcPct val="115000"/>
+              </a:lnSpc>
+            </a:pPr>
+            <a:r>
+              <a:rPr sz="1300" b="1">
+                <a:solidFill>
+                  <a:srgbClr val="14181D"/>
+                </a:solidFill>
+                <a:latin typeface="Yu Gothic UI"/>
+              </a:rPr>
+              <a:t>気象庁 bosai JSON / P2P地震情報</a:t>
+            </a:r>
+          </a:p>
+        </p:txBody>
+      </p:sp>
+      <p:sp>
+        <p:nvSpPr>
           <p:cNvPr id="15" name="TextBox 14"/>
           <p:cNvSpPr txBox="1"/>
           <p:nvPr/>
         </p:nvSpPr>
         <p:spPr>
           <a:xfrm>
-            <a:off x="868680" y="3218688"/>
-            <a:ext cx="3931920" cy="457200"/>
+            <a:off x="4846320" y="3218688"/>
+            <a:ext cx="2377440" cy="457200"/>
           </a:xfrm>
           <a:prstGeom prst="rect">
             <a:avLst/>
@@ -13837,13 +11546,13 @@
               </a:lnSpc>
             </a:pPr>
             <a:r>
-              <a:rPr sz="1300" b="1">
+              <a:rPr sz="1300" b="0">
                 <a:solidFill>
                   <a:srgbClr val="14181D"/>
                 </a:solidFill>
                 <a:latin typeface="Yu Gothic UI"/>
               </a:rPr>
-              <a:t>気象庁 bosai JSON / P2P地震情報</a:t>
+              <a:t>震度分布</a:t>
             </a:r>
           </a:p>
         </p:txBody>
@@ -13856,8 +11565,8 @@
         </p:nvSpPr>
         <p:spPr>
           <a:xfrm>
-            <a:off x="4846320" y="3218688"/>
-            <a:ext cx="2377440" cy="457200"/>
+            <a:off x="7223760" y="3218688"/>
+            <a:ext cx="4114800" cy="457200"/>
           </a:xfrm>
           <a:prstGeom prst="rect">
             <a:avLst/>
@@ -13876,45 +11585,6 @@
               </a:lnSpc>
             </a:pPr>
             <a:r>
-              <a:rPr sz="1300" b="0">
-                <a:solidFill>
-                  <a:srgbClr val="14181D"/>
-                </a:solidFill>
-                <a:latin typeface="Yu Gothic UI"/>
-              </a:rPr>
-              <a:t>震度分布</a:t>
-            </a:r>
-          </a:p>
-        </p:txBody>
-      </p:sp>
-      <p:sp>
-        <p:nvSpPr>
-          <p:cNvPr id="17" name="TextBox 16"/>
-          <p:cNvSpPr txBox="1"/>
-          <p:nvPr/>
-        </p:nvSpPr>
-        <p:spPr>
-          <a:xfrm>
-            <a:off x="7223760" y="3218688"/>
-            <a:ext cx="4114800" cy="457200"/>
-          </a:xfrm>
-          <a:prstGeom prst="rect">
-            <a:avLst/>
-          </a:prstGeom>
-          <a:noFill/>
-        </p:spPr>
-        <p:txBody>
-          <a:bodyPr wrap="square" anchor="ctr" lIns="45720" rIns="45720" tIns="18288" bIns="18288">
-            <a:spAutoFit/>
-          </a:bodyPr>
-          <a:lstStyle/>
-          <a:p>
-            <a:pPr algn="l">
-              <a:lnSpc>
-                <a:spcPct val="115000"/>
-              </a:lnSpc>
-            </a:pPr>
-            <a:r>
               <a:rPr sz="1150" b="0">
                 <a:solidFill>
                   <a:srgbClr val="5C6670"/>
@@ -13928,7 +11598,7 @@
       </p:sp>
       <p:sp>
         <p:nvSpPr>
-          <p:cNvPr id="18" name="Rounded Rectangle 17"/>
+          <p:cNvPr id="17" name="Rounded Rectangle 16"/>
           <p:cNvSpPr/>
           <p:nvPr/>
         </p:nvSpPr>
@@ -13974,14 +11644,53 @@
       </p:sp>
       <p:sp>
         <p:nvSpPr>
+          <p:cNvPr id="18" name="TextBox 17"/>
+          <p:cNvSpPr txBox="1"/>
+          <p:nvPr/>
+        </p:nvSpPr>
+        <p:spPr>
+          <a:xfrm>
+            <a:off x="868680" y="3822192"/>
+            <a:ext cx="3931920" cy="457200"/>
+          </a:xfrm>
+          <a:prstGeom prst="rect">
+            <a:avLst/>
+          </a:prstGeom>
+          <a:noFill/>
+        </p:spPr>
+        <p:txBody>
+          <a:bodyPr wrap="square" anchor="ctr" lIns="45720" rIns="45720" tIns="18288" bIns="18288">
+            <a:spAutoFit/>
+          </a:bodyPr>
+          <a:lstStyle/>
+          <a:p>
+            <a:pPr algn="l">
+              <a:lnSpc>
+                <a:spcPct val="115000"/>
+              </a:lnSpc>
+            </a:pPr>
+            <a:r>
+              <a:rPr sz="1300" b="1">
+                <a:solidFill>
+                  <a:srgbClr val="14181D"/>
+                </a:solidFill>
+                <a:latin typeface="Yu Gothic UI"/>
+              </a:rPr>
+              <a:t>気象庁 震度観測点一覧表</a:t>
+            </a:r>
+          </a:p>
+        </p:txBody>
+      </p:sp>
+      <p:sp>
+        <p:nvSpPr>
           <p:cNvPr id="19" name="TextBox 18"/>
           <p:cNvSpPr txBox="1"/>
           <p:nvPr/>
         </p:nvSpPr>
         <p:spPr>
           <a:xfrm>
-            <a:off x="868680" y="3822192"/>
-            <a:ext cx="3931920" cy="457200"/>
+            <a:off x="4846320" y="3822192"/>
+            <a:ext cx="2377440" cy="457200"/>
           </a:xfrm>
           <a:prstGeom prst="rect">
             <a:avLst/>
@@ -14000,13 +11709,13 @@
               </a:lnSpc>
             </a:pPr>
             <a:r>
-              <a:rPr sz="1300" b="1">
+              <a:rPr sz="1300" b="0">
                 <a:solidFill>
                   <a:srgbClr val="14181D"/>
                 </a:solidFill>
                 <a:latin typeface="Yu Gothic UI"/>
               </a:rPr>
-              <a:t>気象庁 震度観測点一覧表</a:t>
+              <a:t>観測点 → 座標</a:t>
             </a:r>
           </a:p>
         </p:txBody>
@@ -14019,8 +11728,8 @@
         </p:nvSpPr>
         <p:spPr>
           <a:xfrm>
-            <a:off x="4846320" y="3822192"/>
-            <a:ext cx="2377440" cy="457200"/>
+            <a:off x="7223760" y="3822192"/>
+            <a:ext cx="4114800" cy="457200"/>
           </a:xfrm>
           <a:prstGeom prst="rect">
             <a:avLst/>
@@ -14039,45 +11748,6 @@
               </a:lnSpc>
             </a:pPr>
             <a:r>
-              <a:rPr sz="1300" b="0">
-                <a:solidFill>
-                  <a:srgbClr val="14181D"/>
-                </a:solidFill>
-                <a:latin typeface="Yu Gothic UI"/>
-              </a:rPr>
-              <a:t>観測点 → 座標</a:t>
-            </a:r>
-          </a:p>
-        </p:txBody>
-      </p:sp>
-      <p:sp>
-        <p:nvSpPr>
-          <p:cNvPr id="21" name="TextBox 20"/>
-          <p:cNvSpPr txBox="1"/>
-          <p:nvPr/>
-        </p:nvSpPr>
-        <p:spPr>
-          <a:xfrm>
-            <a:off x="7223760" y="3822192"/>
-            <a:ext cx="4114800" cy="457200"/>
-          </a:xfrm>
-          <a:prstGeom prst="rect">
-            <a:avLst/>
-          </a:prstGeom>
-          <a:noFill/>
-        </p:spPr>
-        <p:txBody>
-          <a:bodyPr wrap="square" anchor="ctr" lIns="45720" rIns="45720" tIns="18288" bIns="18288">
-            <a:spAutoFit/>
-          </a:bodyPr>
-          <a:lstStyle/>
-          <a:p>
-            <a:pPr algn="l">
-              <a:lnSpc>
-                <a:spcPct val="115000"/>
-              </a:lnSpc>
-            </a:pPr>
-            <a:r>
               <a:rPr sz="1150" b="0">
                 <a:solidFill>
                   <a:srgbClr val="5C6670"/>
@@ -14091,7 +11761,7 @@
       </p:sp>
       <p:sp>
         <p:nvSpPr>
-          <p:cNvPr id="22" name="Rounded Rectangle 21"/>
+          <p:cNvPr id="21" name="Rounded Rectangle 20"/>
           <p:cNvSpPr/>
           <p:nvPr/>
         </p:nvSpPr>
@@ -14137,14 +11807,53 @@
       </p:sp>
       <p:sp>
         <p:nvSpPr>
+          <p:cNvPr id="22" name="TextBox 21"/>
+          <p:cNvSpPr txBox="1"/>
+          <p:nvPr/>
+        </p:nvSpPr>
+        <p:spPr>
+          <a:xfrm>
+            <a:off x="868680" y="4425696"/>
+            <a:ext cx="3931920" cy="457200"/>
+          </a:xfrm>
+          <a:prstGeom prst="rect">
+            <a:avLst/>
+          </a:prstGeom>
+          <a:noFill/>
+        </p:spPr>
+        <p:txBody>
+          <a:bodyPr wrap="square" anchor="ctr" lIns="45720" rIns="45720" tIns="18288" bIns="18288">
+            <a:spAutoFit/>
+          </a:bodyPr>
+          <a:lstStyle/>
+          <a:p>
+            <a:pPr algn="l">
+              <a:lnSpc>
+                <a:spcPct val="115000"/>
+              </a:lnSpc>
+            </a:pPr>
+            <a:r>
+              <a:rPr sz="1300" b="1">
+                <a:solidFill>
+                  <a:srgbClr val="14181D"/>
+                </a:solidFill>
+                <a:latin typeface="Yu Gothic UI"/>
+              </a:rPr>
+              <a:t>国土数値情報 N02-25 (CC BY 4.0)</a:t>
+            </a:r>
+          </a:p>
+        </p:txBody>
+      </p:sp>
+      <p:sp>
+        <p:nvSpPr>
           <p:cNvPr id="23" name="TextBox 22"/>
           <p:cNvSpPr txBox="1"/>
           <p:nvPr/>
         </p:nvSpPr>
         <p:spPr>
           <a:xfrm>
-            <a:off x="868680" y="4425696"/>
-            <a:ext cx="3931920" cy="457200"/>
+            <a:off x="4846320" y="4425696"/>
+            <a:ext cx="2377440" cy="457200"/>
           </a:xfrm>
           <a:prstGeom prst="rect">
             <a:avLst/>
@@ -14163,13 +11872,13 @@
               </a:lnSpc>
             </a:pPr>
             <a:r>
-              <a:rPr sz="1300" b="1">
+              <a:rPr sz="1300" b="0">
                 <a:solidFill>
                   <a:srgbClr val="14181D"/>
                 </a:solidFill>
                 <a:latin typeface="Yu Gothic UI"/>
               </a:rPr>
-              <a:t>国土数値情報 N02-25 (CC BY 4.0)</a:t>
+              <a:t>駅・線路の形</a:t>
             </a:r>
           </a:p>
         </p:txBody>
@@ -14182,8 +11891,8 @@
         </p:nvSpPr>
         <p:spPr>
           <a:xfrm>
-            <a:off x="4846320" y="4425696"/>
-            <a:ext cx="2377440" cy="457200"/>
+            <a:off x="7223760" y="4425696"/>
+            <a:ext cx="4114800" cy="457200"/>
           </a:xfrm>
           <a:prstGeom prst="rect">
             <a:avLst/>
@@ -14202,45 +11911,6 @@
               </a:lnSpc>
             </a:pPr>
             <a:r>
-              <a:rPr sz="1300" b="0">
-                <a:solidFill>
-                  <a:srgbClr val="14181D"/>
-                </a:solidFill>
-                <a:latin typeface="Yu Gothic UI"/>
-              </a:rPr>
-              <a:t>駅・線路の形</a:t>
-            </a:r>
-          </a:p>
-        </p:txBody>
-      </p:sp>
-      <p:sp>
-        <p:nvSpPr>
-          <p:cNvPr id="25" name="TextBox 24"/>
-          <p:cNvSpPr txBox="1"/>
-          <p:nvPr/>
-        </p:nvSpPr>
-        <p:spPr>
-          <a:xfrm>
-            <a:off x="7223760" y="4425696"/>
-            <a:ext cx="4114800" cy="457200"/>
-          </a:xfrm>
-          <a:prstGeom prst="rect">
-            <a:avLst/>
-          </a:prstGeom>
-          <a:noFill/>
-        </p:spPr>
-        <p:txBody>
-          <a:bodyPr wrap="square" anchor="ctr" lIns="45720" rIns="45720" tIns="18288" bIns="18288">
-            <a:spAutoFit/>
-          </a:bodyPr>
-          <a:lstStyle/>
-          <a:p>
-            <a:pPr algn="l">
-              <a:lnSpc>
-                <a:spcPct val="115000"/>
-              </a:lnSpc>
-            </a:pPr>
-            <a:r>
               <a:rPr sz="1150" b="0">
                 <a:solidFill>
                   <a:srgbClr val="5C6670"/>
@@ -14254,7 +11924,7 @@
       </p:sp>
       <p:sp>
         <p:nvSpPr>
-          <p:cNvPr id="26" name="Rounded Rectangle 25"/>
+          <p:cNvPr id="25" name="Rounded Rectangle 24"/>
           <p:cNvSpPr/>
           <p:nvPr/>
         </p:nvSpPr>
@@ -14300,14 +11970,53 @@
       </p:sp>
       <p:sp>
         <p:nvSpPr>
+          <p:cNvPr id="26" name="TextBox 25"/>
+          <p:cNvSpPr txBox="1"/>
+          <p:nvPr/>
+        </p:nvSpPr>
+        <p:spPr>
+          <a:xfrm>
+            <a:off x="868680" y="5029200"/>
+            <a:ext cx="3931920" cy="457200"/>
+          </a:xfrm>
+          <a:prstGeom prst="rect">
+            <a:avLst/>
+          </a:prstGeom>
+          <a:noFill/>
+        </p:spPr>
+        <p:txBody>
+          <a:bodyPr wrap="square" anchor="ctr" lIns="45720" rIns="45720" tIns="18288" bIns="18288">
+            <a:spAutoFit/>
+          </a:bodyPr>
+          <a:lstStyle/>
+          <a:p>
+            <a:pPr algn="l">
+              <a:lnSpc>
+                <a:spcPct val="115000"/>
+              </a:lnSpc>
+            </a:pPr>
+            <a:r>
+              <a:rPr sz="1300" b="1">
+                <a:solidFill>
+                  <a:srgbClr val="14181D"/>
+                </a:solidFill>
+                <a:latin typeface="Yu Gothic UI"/>
+              </a:rPr>
+              <a:t>国土地理院 避難場所・逆ジオコーダ・タイル</a:t>
+            </a:r>
+          </a:p>
+        </p:txBody>
+      </p:sp>
+      <p:sp>
+        <p:nvSpPr>
           <p:cNvPr id="27" name="TextBox 26"/>
           <p:cNvSpPr txBox="1"/>
           <p:nvPr/>
         </p:nvSpPr>
         <p:spPr>
           <a:xfrm>
-            <a:off x="868680" y="5029200"/>
-            <a:ext cx="3931920" cy="457200"/>
+            <a:off x="4846320" y="5029200"/>
+            <a:ext cx="2377440" cy="457200"/>
           </a:xfrm>
           <a:prstGeom prst="rect">
             <a:avLst/>
@@ -14326,13 +12035,13 @@
               </a:lnSpc>
             </a:pPr>
             <a:r>
-              <a:rPr sz="1300" b="1">
+              <a:rPr sz="1300" b="0">
                 <a:solidFill>
                   <a:srgbClr val="14181D"/>
                 </a:solidFill>
                 <a:latin typeface="Yu Gothic UI"/>
               </a:rPr>
-              <a:t>国土地理院 避難場所・逆ジオコーダ・タイル</a:t>
+              <a:t>逃げる先・現在地の住所・地図</a:t>
             </a:r>
           </a:p>
         </p:txBody>
@@ -14345,8 +12054,8 @@
         </p:nvSpPr>
         <p:spPr>
           <a:xfrm>
-            <a:off x="4846320" y="5029200"/>
-            <a:ext cx="2377440" cy="457200"/>
+            <a:off x="7223760" y="5029200"/>
+            <a:ext cx="4114800" cy="457200"/>
           </a:xfrm>
           <a:prstGeom prst="rect">
             <a:avLst/>
@@ -14365,45 +12074,6 @@
               </a:lnSpc>
             </a:pPr>
             <a:r>
-              <a:rPr sz="1300" b="0">
-                <a:solidFill>
-                  <a:srgbClr val="14181D"/>
-                </a:solidFill>
-                <a:latin typeface="Yu Gothic UI"/>
-              </a:rPr>
-              <a:t>逃げる先・現在地の住所・地図</a:t>
-            </a:r>
-          </a:p>
-        </p:txBody>
-      </p:sp>
-      <p:sp>
-        <p:nvSpPr>
-          <p:cNvPr id="29" name="TextBox 28"/>
-          <p:cNvSpPr txBox="1"/>
-          <p:nvPr/>
-        </p:nvSpPr>
-        <p:spPr>
-          <a:xfrm>
-            <a:off x="7223760" y="5029200"/>
-            <a:ext cx="4114800" cy="457200"/>
-          </a:xfrm>
-          <a:prstGeom prst="rect">
-            <a:avLst/>
-          </a:prstGeom>
-          <a:noFill/>
-        </p:spPr>
-        <p:txBody>
-          <a:bodyPr wrap="square" anchor="ctr" lIns="45720" rIns="45720" tIns="18288" bIns="18288">
-            <a:spAutoFit/>
-          </a:bodyPr>
-          <a:lstStyle/>
-          <a:p>
-            <a:pPr algn="l">
-              <a:lnSpc>
-                <a:spcPct val="115000"/>
-              </a:lnSpc>
-            </a:pPr>
-            <a:r>
               <a:rPr sz="1150" b="0">
                 <a:solidFill>
                   <a:srgbClr val="5C6670"/>
@@ -14417,7 +12087,7 @@
       </p:sp>
       <p:sp>
         <p:nvSpPr>
-          <p:cNvPr id="30" name="Rounded Rectangle 29"/>
+          <p:cNvPr id="29" name="Rounded Rectangle 28"/>
           <p:cNvSpPr/>
           <p:nvPr/>
         </p:nvSpPr>
@@ -14463,14 +12133,53 @@
       </p:sp>
       <p:sp>
         <p:nvSpPr>
+          <p:cNvPr id="30" name="TextBox 29"/>
+          <p:cNvSpPr txBox="1"/>
+          <p:nvPr/>
+        </p:nvSpPr>
+        <p:spPr>
+          <a:xfrm>
+            <a:off x="868680" y="5632704"/>
+            <a:ext cx="3931920" cy="457200"/>
+          </a:xfrm>
+          <a:prstGeom prst="rect">
+            <a:avLst/>
+          </a:prstGeom>
+          <a:noFill/>
+        </p:spPr>
+        <p:txBody>
+          <a:bodyPr wrap="square" anchor="ctr" lIns="45720" rIns="45720" tIns="18288" bIns="18288">
+            <a:spAutoFit/>
+          </a:bodyPr>
+          <a:lstStyle/>
+          <a:p>
+            <a:pPr algn="l">
+              <a:lnSpc>
+                <a:spcPct val="115000"/>
+              </a:lnSpc>
+            </a:pPr>
+            <a:r>
+              <a:rPr sz="1300" b="1">
+                <a:solidFill>
+                  <a:srgbClr val="14181D"/>
+                </a:solidFill>
+                <a:latin typeface="Yu Gothic UI"/>
+              </a:rPr>
+              <a:t>東京都 一時滞在施設 (CC BY 4.0)</a:t>
+            </a:r>
+          </a:p>
+        </p:txBody>
+      </p:sp>
+      <p:sp>
+        <p:nvSpPr>
           <p:cNvPr id="31" name="TextBox 30"/>
           <p:cNvSpPr txBox="1"/>
           <p:nvPr/>
         </p:nvSpPr>
         <p:spPr>
           <a:xfrm>
-            <a:off x="868680" y="5632704"/>
-            <a:ext cx="3931920" cy="457200"/>
+            <a:off x="4846320" y="5632704"/>
+            <a:ext cx="2377440" cy="457200"/>
           </a:xfrm>
           <a:prstGeom prst="rect">
             <a:avLst/>
@@ -14489,13 +12198,13 @@
               </a:lnSpc>
             </a:pPr>
             <a:r>
-              <a:rPr sz="1300" b="1">
+              <a:rPr sz="1300" b="0">
                 <a:solidFill>
                   <a:srgbClr val="14181D"/>
                 </a:solidFill>
                 <a:latin typeface="Yu Gothic UI"/>
               </a:rPr>
-              <a:t>東京都 一時滞在施設 (CC BY 4.0)</a:t>
+              <a:t>帰宅困難者が休む場所</a:t>
             </a:r>
           </a:p>
         </p:txBody>
@@ -14503,45 +12212,6 @@
       <p:sp>
         <p:nvSpPr>
           <p:cNvPr id="32" name="TextBox 31"/>
-          <p:cNvSpPr txBox="1"/>
-          <p:nvPr/>
-        </p:nvSpPr>
-        <p:spPr>
-          <a:xfrm>
-            <a:off x="4846320" y="5632704"/>
-            <a:ext cx="2377440" cy="457200"/>
-          </a:xfrm>
-          <a:prstGeom prst="rect">
-            <a:avLst/>
-          </a:prstGeom>
-          <a:noFill/>
-        </p:spPr>
-        <p:txBody>
-          <a:bodyPr wrap="square" anchor="ctr" lIns="45720" rIns="45720" tIns="18288" bIns="18288">
-            <a:spAutoFit/>
-          </a:bodyPr>
-          <a:lstStyle/>
-          <a:p>
-            <a:pPr algn="l">
-              <a:lnSpc>
-                <a:spcPct val="115000"/>
-              </a:lnSpc>
-            </a:pPr>
-            <a:r>
-              <a:rPr sz="1300" b="0">
-                <a:solidFill>
-                  <a:srgbClr val="14181D"/>
-                </a:solidFill>
-                <a:latin typeface="Yu Gothic UI"/>
-              </a:rPr>
-              <a:t>帰宅困難者が休む場所</a:t>
-            </a:r>
-          </a:p>
-        </p:txBody>
-      </p:sp>
-      <p:sp>
-        <p:nvSpPr>
-          <p:cNvPr id="33" name="TextBox 32"/>
           <p:cNvSpPr txBox="1"/>
           <p:nvPr/>
         </p:nvSpPr>
